--- a/Contents/Docker/slide/Docker演示.pptx
+++ b/Contents/Docker/slide/Docker演示.pptx
@@ -4,6 +4,9 @@
   <p:sldMasterIdLst>
     <p:sldMasterId id="2147483736" r:id="rId1"/>
   </p:sldMasterIdLst>
+  <p:notesMasterIdLst>
+    <p:notesMasterId r:id="rId24"/>
+  </p:notesMasterIdLst>
   <p:sldIdLst>
     <p:sldId id="256" r:id="rId2"/>
     <p:sldId id="258" r:id="rId3"/>
@@ -14,17 +17,19 @@
     <p:sldId id="262" r:id="rId8"/>
     <p:sldId id="263" r:id="rId9"/>
     <p:sldId id="264" r:id="rId10"/>
-    <p:sldId id="265" r:id="rId11"/>
-    <p:sldId id="266" r:id="rId12"/>
-    <p:sldId id="267" r:id="rId13"/>
-    <p:sldId id="268" r:id="rId14"/>
-    <p:sldId id="269" r:id="rId15"/>
-    <p:sldId id="270" r:id="rId16"/>
-    <p:sldId id="271" r:id="rId17"/>
-    <p:sldId id="272" r:id="rId18"/>
-    <p:sldId id="274" r:id="rId19"/>
-    <p:sldId id="275" r:id="rId20"/>
-    <p:sldId id="276" r:id="rId21"/>
+    <p:sldId id="277" r:id="rId11"/>
+    <p:sldId id="278" r:id="rId12"/>
+    <p:sldId id="265" r:id="rId13"/>
+    <p:sldId id="266" r:id="rId14"/>
+    <p:sldId id="267" r:id="rId15"/>
+    <p:sldId id="268" r:id="rId16"/>
+    <p:sldId id="269" r:id="rId17"/>
+    <p:sldId id="270" r:id="rId18"/>
+    <p:sldId id="271" r:id="rId19"/>
+    <p:sldId id="272" r:id="rId20"/>
+    <p:sldId id="274" r:id="rId21"/>
+    <p:sldId id="275" r:id="rId22"/>
+    <p:sldId id="276" r:id="rId23"/>
   </p:sldIdLst>
   <p:sldSz cx="12192000" cy="6858000"/>
   <p:notesSz cx="6858000" cy="9144000"/>
@@ -137,6 +142,8 @@
             <p14:sldId id="262"/>
             <p14:sldId id="263"/>
             <p14:sldId id="264"/>
+            <p14:sldId id="277"/>
+            <p14:sldId id="278"/>
             <p14:sldId id="265"/>
             <p14:sldId id="266"/>
             <p14:sldId id="267"/>
@@ -160,7 +167,7 @@
 </file>
 
 <file path=ppt/diagrams/colors1.xml><?xml version="1.0" encoding="utf-8"?>
-<dgm:colorsDef xmlns:dgm="http://schemas.openxmlformats.org/drawingml/2006/diagram" xmlns:a="http://schemas.openxmlformats.org/drawingml/2006/main" uniqueId="urn:microsoft.com/office/officeart/2018/5/colors/Iconchunking_coloredtext_accent0_3">
+<dgm:colorsDef xmlns:dgm="http://schemas.openxmlformats.org/drawingml/2006/diagram" xmlns:a="http://schemas.openxmlformats.org/drawingml/2006/main" uniqueId="urn:microsoft.com/office/officeart/2005/8/colors/accent0_3">
   <dgm:title val=""/>
   <dgm:desc val=""/>
   <dgm:catLst>
@@ -192,18 +199,14 @@
   </dgm:styleLbl>
   <dgm:styleLbl name="node1">
     <dgm:fillClrLst meth="repeat">
-      <a:schemeClr val="bg1"/>
+      <a:schemeClr val="dk2"/>
     </dgm:fillClrLst>
     <dgm:linClrLst meth="repeat">
-      <a:schemeClr val="lt2">
-        <a:alpha val="0"/>
-      </a:schemeClr>
+      <a:schemeClr val="lt2"/>
     </dgm:linClrLst>
     <dgm:effectClrLst/>
     <dgm:txLinClrLst/>
-    <dgm:txFillClrLst meth="repeat">
-      <a:schemeClr val="dk1"/>
-    </dgm:txFillClrLst>
+    <dgm:txFillClrLst/>
     <dgm:txEffectClrLst/>
   </dgm:styleLbl>
   <dgm:styleLbl name="lnNode1">
@@ -633,7 +636,7 @@
   <dgm:styleLbl name="trAlignAcc1">
     <dgm:fillClrLst meth="repeat">
       <a:schemeClr val="lt2">
-        <a:alpha val="0"/>
+        <a:alpha val="40000"/>
       </a:schemeClr>
     </dgm:fillClrLst>
     <dgm:linClrLst meth="repeat">
@@ -830,755 +833,6 @@
   </dgm:styleLbl>
   <dgm:styleLbl name="bgShp">
     <dgm:fillClrLst meth="repeat">
-      <a:schemeClr val="dk2"/>
-    </dgm:fillClrLst>
-    <dgm:linClrLst meth="repeat">
-      <a:schemeClr val="lt2">
-        <a:alpha val="0"/>
-      </a:schemeClr>
-    </dgm:linClrLst>
-    <dgm:effectClrLst/>
-    <dgm:txLinClrLst/>
-    <dgm:txFillClrLst/>
-    <dgm:txEffectClrLst/>
-  </dgm:styleLbl>
-  <dgm:styleLbl name="dkBgShp">
-    <dgm:fillClrLst meth="repeat">
-      <a:schemeClr val="dk2">
-        <a:shade val="80000"/>
-      </a:schemeClr>
-    </dgm:fillClrLst>
-    <dgm:linClrLst meth="repeat">
-      <a:schemeClr val="dk2"/>
-    </dgm:linClrLst>
-    <dgm:effectClrLst/>
-    <dgm:txLinClrLst/>
-    <dgm:txFillClrLst meth="repeat">
-      <a:schemeClr val="lt1"/>
-    </dgm:txFillClrLst>
-    <dgm:txEffectClrLst/>
-  </dgm:styleLbl>
-  <dgm:styleLbl name="trBgShp">
-    <dgm:fillClrLst meth="repeat">
-      <a:schemeClr val="dk2">
-        <a:tint val="50000"/>
-        <a:alpha val="40000"/>
-      </a:schemeClr>
-    </dgm:fillClrLst>
-    <dgm:linClrLst meth="repeat">
-      <a:schemeClr val="dk2"/>
-    </dgm:linClrLst>
-    <dgm:effectClrLst/>
-    <dgm:txLinClrLst/>
-    <dgm:txFillClrLst meth="repeat">
-      <a:schemeClr val="lt1"/>
-    </dgm:txFillClrLst>
-    <dgm:txEffectClrLst/>
-  </dgm:styleLbl>
-  <dgm:styleLbl name="fgShp">
-    <dgm:fillClrLst meth="repeat">
-      <a:schemeClr val="dk2">
-        <a:tint val="60000"/>
-      </a:schemeClr>
-    </dgm:fillClrLst>
-    <dgm:linClrLst meth="repeat">
-      <a:schemeClr val="lt2"/>
-    </dgm:linClrLst>
-    <dgm:effectClrLst/>
-    <dgm:txLinClrLst/>
-    <dgm:txFillClrLst meth="repeat">
-      <a:schemeClr val="dk1"/>
-    </dgm:txFillClrLst>
-    <dgm:txEffectClrLst/>
-  </dgm:styleLbl>
-  <dgm:styleLbl name="revTx">
-    <dgm:fillClrLst meth="repeat">
-      <a:schemeClr val="dk2">
-        <a:alpha val="0"/>
-      </a:schemeClr>
-    </dgm:fillClrLst>
-    <dgm:linClrLst meth="repeat">
-      <a:schemeClr val="dk2">
-        <a:alpha val="0"/>
-      </a:schemeClr>
-    </dgm:linClrLst>
-    <dgm:effectClrLst/>
-    <dgm:txLinClrLst/>
-    <dgm:txFillClrLst meth="repeat">
-      <a:schemeClr val="dk2"/>
-    </dgm:txFillClrLst>
-    <dgm:txEffectClrLst/>
-  </dgm:styleLbl>
-</dgm:colorsDef>
-</file>
-
-<file path=ppt/diagrams/colors2.xml><?xml version="1.0" encoding="utf-8"?>
-<dgm:colorsDef xmlns:dgm="http://schemas.openxmlformats.org/drawingml/2006/diagram" xmlns:a="http://schemas.openxmlformats.org/drawingml/2006/main" uniqueId="urn:microsoft.com/office/officeart/2005/8/colors/accent0_3">
-  <dgm:title val=""/>
-  <dgm:desc val=""/>
-  <dgm:catLst>
-    <dgm:cat type="mainScheme" pri="10300"/>
-  </dgm:catLst>
-  <dgm:styleLbl name="node0">
-    <dgm:fillClrLst meth="repeat">
-      <a:schemeClr val="dk2"/>
-    </dgm:fillClrLst>
-    <dgm:linClrLst meth="repeat">
-      <a:schemeClr val="lt2"/>
-    </dgm:linClrLst>
-    <dgm:effectClrLst/>
-    <dgm:txLinClrLst/>
-    <dgm:txFillClrLst/>
-    <dgm:txEffectClrLst/>
-  </dgm:styleLbl>
-  <dgm:styleLbl name="alignNode1">
-    <dgm:fillClrLst meth="repeat">
-      <a:schemeClr val="dk2"/>
-    </dgm:fillClrLst>
-    <dgm:linClrLst meth="repeat">
-      <a:schemeClr val="dk2"/>
-    </dgm:linClrLst>
-    <dgm:effectClrLst/>
-    <dgm:txLinClrLst/>
-    <dgm:txFillClrLst/>
-    <dgm:txEffectClrLst/>
-  </dgm:styleLbl>
-  <dgm:styleLbl name="node1">
-    <dgm:fillClrLst meth="repeat">
-      <a:schemeClr val="dk2"/>
-    </dgm:fillClrLst>
-    <dgm:linClrLst meth="repeat">
-      <a:schemeClr val="lt2"/>
-    </dgm:linClrLst>
-    <dgm:effectClrLst/>
-    <dgm:txLinClrLst/>
-    <dgm:txFillClrLst/>
-    <dgm:txEffectClrLst/>
-  </dgm:styleLbl>
-  <dgm:styleLbl name="lnNode1">
-    <dgm:fillClrLst meth="repeat">
-      <a:schemeClr val="dk2"/>
-    </dgm:fillClrLst>
-    <dgm:linClrLst meth="repeat">
-      <a:schemeClr val="lt2"/>
-    </dgm:linClrLst>
-    <dgm:effectClrLst/>
-    <dgm:txLinClrLst/>
-    <dgm:txFillClrLst/>
-    <dgm:txEffectClrLst/>
-  </dgm:styleLbl>
-  <dgm:styleLbl name="vennNode1">
-    <dgm:fillClrLst meth="repeat">
-      <a:schemeClr val="dk2">
-        <a:alpha val="50000"/>
-      </a:schemeClr>
-    </dgm:fillClrLst>
-    <dgm:linClrLst meth="repeat">
-      <a:schemeClr val="lt2"/>
-    </dgm:linClrLst>
-    <dgm:effectClrLst/>
-    <dgm:txLinClrLst/>
-    <dgm:txFillClrLst/>
-    <dgm:txEffectClrLst/>
-  </dgm:styleLbl>
-  <dgm:styleLbl name="node2">
-    <dgm:fillClrLst meth="repeat">
-      <a:schemeClr val="dk2"/>
-    </dgm:fillClrLst>
-    <dgm:linClrLst meth="repeat">
-      <a:schemeClr val="lt2"/>
-    </dgm:linClrLst>
-    <dgm:effectClrLst/>
-    <dgm:txLinClrLst/>
-    <dgm:txFillClrLst/>
-    <dgm:txEffectClrLst/>
-  </dgm:styleLbl>
-  <dgm:styleLbl name="node3">
-    <dgm:fillClrLst meth="repeat">
-      <a:schemeClr val="dk2"/>
-    </dgm:fillClrLst>
-    <dgm:linClrLst meth="repeat">
-      <a:schemeClr val="lt2"/>
-    </dgm:linClrLst>
-    <dgm:effectClrLst/>
-    <dgm:txLinClrLst/>
-    <dgm:txFillClrLst/>
-    <dgm:txEffectClrLst/>
-  </dgm:styleLbl>
-  <dgm:styleLbl name="node4">
-    <dgm:fillClrLst meth="repeat">
-      <a:schemeClr val="dk2"/>
-    </dgm:fillClrLst>
-    <dgm:linClrLst meth="repeat">
-      <a:schemeClr val="lt2"/>
-    </dgm:linClrLst>
-    <dgm:effectClrLst/>
-    <dgm:txLinClrLst/>
-    <dgm:txFillClrLst/>
-    <dgm:txEffectClrLst/>
-  </dgm:styleLbl>
-  <dgm:styleLbl name="fgImgPlace1">
-    <dgm:fillClrLst meth="repeat">
-      <a:schemeClr val="dk2">
-        <a:tint val="50000"/>
-      </a:schemeClr>
-    </dgm:fillClrLst>
-    <dgm:linClrLst meth="repeat">
-      <a:schemeClr val="lt2"/>
-    </dgm:linClrLst>
-    <dgm:effectClrLst/>
-    <dgm:txLinClrLst/>
-    <dgm:txFillClrLst meth="repeat">
-      <a:schemeClr val="lt2"/>
-    </dgm:txFillClrLst>
-    <dgm:txEffectClrLst/>
-  </dgm:styleLbl>
-  <dgm:styleLbl name="alignImgPlace1">
-    <dgm:fillClrLst meth="repeat">
-      <a:schemeClr val="dk2">
-        <a:tint val="50000"/>
-      </a:schemeClr>
-    </dgm:fillClrLst>
-    <dgm:linClrLst meth="repeat">
-      <a:schemeClr val="dk2">
-        <a:shade val="80000"/>
-      </a:schemeClr>
-    </dgm:linClrLst>
-    <dgm:effectClrLst/>
-    <dgm:txLinClrLst/>
-    <dgm:txFillClrLst meth="repeat">
-      <a:schemeClr val="lt2"/>
-    </dgm:txFillClrLst>
-    <dgm:txEffectClrLst/>
-  </dgm:styleLbl>
-  <dgm:styleLbl name="bgImgPlace1">
-    <dgm:fillClrLst meth="repeat">
-      <a:schemeClr val="dk2">
-        <a:tint val="50000"/>
-      </a:schemeClr>
-    </dgm:fillClrLst>
-    <dgm:linClrLst meth="repeat">
-      <a:schemeClr val="dk2">
-        <a:shade val="80000"/>
-      </a:schemeClr>
-    </dgm:linClrLst>
-    <dgm:effectClrLst/>
-    <dgm:txLinClrLst/>
-    <dgm:txFillClrLst meth="repeat">
-      <a:schemeClr val="lt2"/>
-    </dgm:txFillClrLst>
-    <dgm:txEffectClrLst/>
-  </dgm:styleLbl>
-  <dgm:styleLbl name="sibTrans2D1">
-    <dgm:fillClrLst meth="repeat">
-      <a:schemeClr val="dk2">
-        <a:tint val="60000"/>
-      </a:schemeClr>
-    </dgm:fillClrLst>
-    <dgm:linClrLst meth="repeat">
-      <a:schemeClr val="dk2">
-        <a:tint val="60000"/>
-      </a:schemeClr>
-    </dgm:linClrLst>
-    <dgm:effectClrLst/>
-    <dgm:txLinClrLst/>
-    <dgm:txFillClrLst/>
-    <dgm:txEffectClrLst/>
-  </dgm:styleLbl>
-  <dgm:styleLbl name="fgSibTrans2D1">
-    <dgm:fillClrLst meth="repeat">
-      <a:schemeClr val="dk2">
-        <a:tint val="60000"/>
-      </a:schemeClr>
-    </dgm:fillClrLst>
-    <dgm:linClrLst meth="repeat">
-      <a:schemeClr val="dk2">
-        <a:tint val="60000"/>
-      </a:schemeClr>
-    </dgm:linClrLst>
-    <dgm:effectClrLst/>
-    <dgm:txLinClrLst/>
-    <dgm:txFillClrLst/>
-    <dgm:txEffectClrLst/>
-  </dgm:styleLbl>
-  <dgm:styleLbl name="bgSibTrans2D1">
-    <dgm:fillClrLst meth="repeat">
-      <a:schemeClr val="dk2">
-        <a:tint val="60000"/>
-      </a:schemeClr>
-    </dgm:fillClrLst>
-    <dgm:linClrLst meth="repeat">
-      <a:schemeClr val="dk2">
-        <a:tint val="60000"/>
-      </a:schemeClr>
-    </dgm:linClrLst>
-    <dgm:effectClrLst/>
-    <dgm:txLinClrLst/>
-    <dgm:txFillClrLst/>
-    <dgm:txEffectClrLst/>
-  </dgm:styleLbl>
-  <dgm:styleLbl name="sibTrans1D1">
-    <dgm:fillClrLst meth="repeat">
-      <a:schemeClr val="dk2"/>
-    </dgm:fillClrLst>
-    <dgm:linClrLst meth="repeat">
-      <a:schemeClr val="dk2"/>
-    </dgm:linClrLst>
-    <dgm:effectClrLst/>
-    <dgm:txLinClrLst/>
-    <dgm:txFillClrLst meth="repeat">
-      <a:schemeClr val="lt2"/>
-    </dgm:txFillClrLst>
-    <dgm:txEffectClrLst/>
-  </dgm:styleLbl>
-  <dgm:styleLbl name="callout">
-    <dgm:fillClrLst meth="repeat">
-      <a:schemeClr val="dk2"/>
-    </dgm:fillClrLst>
-    <dgm:linClrLst meth="repeat">
-      <a:schemeClr val="dk2">
-        <a:tint val="50000"/>
-      </a:schemeClr>
-    </dgm:linClrLst>
-    <dgm:effectClrLst/>
-    <dgm:txLinClrLst/>
-    <dgm:txFillClrLst meth="repeat">
-      <a:schemeClr val="lt2"/>
-    </dgm:txFillClrLst>
-    <dgm:txEffectClrLst/>
-  </dgm:styleLbl>
-  <dgm:styleLbl name="asst0">
-    <dgm:fillClrLst meth="repeat">
-      <a:schemeClr val="dk2"/>
-    </dgm:fillClrLst>
-    <dgm:linClrLst meth="repeat">
-      <a:schemeClr val="lt2"/>
-    </dgm:linClrLst>
-    <dgm:effectClrLst/>
-    <dgm:txLinClrLst/>
-    <dgm:txFillClrLst/>
-    <dgm:txEffectClrLst/>
-  </dgm:styleLbl>
-  <dgm:styleLbl name="asst1">
-    <dgm:fillClrLst meth="repeat">
-      <a:schemeClr val="dk2"/>
-    </dgm:fillClrLst>
-    <dgm:linClrLst meth="repeat">
-      <a:schemeClr val="lt2"/>
-    </dgm:linClrLst>
-    <dgm:effectClrLst/>
-    <dgm:txLinClrLst/>
-    <dgm:txFillClrLst/>
-    <dgm:txEffectClrLst/>
-  </dgm:styleLbl>
-  <dgm:styleLbl name="asst2">
-    <dgm:fillClrLst meth="repeat">
-      <a:schemeClr val="dk2"/>
-    </dgm:fillClrLst>
-    <dgm:linClrLst meth="repeat">
-      <a:schemeClr val="lt2"/>
-    </dgm:linClrLst>
-    <dgm:effectClrLst/>
-    <dgm:txLinClrLst/>
-    <dgm:txFillClrLst/>
-    <dgm:txEffectClrLst/>
-  </dgm:styleLbl>
-  <dgm:styleLbl name="asst3">
-    <dgm:fillClrLst meth="repeat">
-      <a:schemeClr val="dk2"/>
-    </dgm:fillClrLst>
-    <dgm:linClrLst meth="repeat">
-      <a:schemeClr val="lt2"/>
-    </dgm:linClrLst>
-    <dgm:effectClrLst/>
-    <dgm:txLinClrLst/>
-    <dgm:txFillClrLst/>
-    <dgm:txEffectClrLst/>
-  </dgm:styleLbl>
-  <dgm:styleLbl name="asst4">
-    <dgm:fillClrLst meth="repeat">
-      <a:schemeClr val="dk2"/>
-    </dgm:fillClrLst>
-    <dgm:linClrLst meth="repeat">
-      <a:schemeClr val="lt2"/>
-    </dgm:linClrLst>
-    <dgm:effectClrLst/>
-    <dgm:txLinClrLst/>
-    <dgm:txFillClrLst/>
-    <dgm:txEffectClrLst/>
-  </dgm:styleLbl>
-  <dgm:styleLbl name="parChTrans2D1">
-    <dgm:fillClrLst meth="repeat">
-      <a:schemeClr val="dk2">
-        <a:tint val="60000"/>
-      </a:schemeClr>
-    </dgm:fillClrLst>
-    <dgm:linClrLst meth="repeat">
-      <a:schemeClr val="dk2">
-        <a:tint val="60000"/>
-      </a:schemeClr>
-    </dgm:linClrLst>
-    <dgm:effectClrLst/>
-    <dgm:txLinClrLst/>
-    <dgm:txFillClrLst meth="repeat">
-      <a:schemeClr val="lt2"/>
-    </dgm:txFillClrLst>
-    <dgm:txEffectClrLst/>
-  </dgm:styleLbl>
-  <dgm:styleLbl name="parChTrans2D2">
-    <dgm:fillClrLst meth="repeat">
-      <a:schemeClr val="dk2"/>
-    </dgm:fillClrLst>
-    <dgm:linClrLst meth="repeat">
-      <a:schemeClr val="dk2"/>
-    </dgm:linClrLst>
-    <dgm:effectClrLst/>
-    <dgm:txLinClrLst/>
-    <dgm:txFillClrLst meth="repeat">
-      <a:schemeClr val="lt2"/>
-    </dgm:txFillClrLst>
-    <dgm:txEffectClrLst/>
-  </dgm:styleLbl>
-  <dgm:styleLbl name="parChTrans2D3">
-    <dgm:fillClrLst meth="repeat">
-      <a:schemeClr val="dk2"/>
-    </dgm:fillClrLst>
-    <dgm:linClrLst meth="repeat">
-      <a:schemeClr val="dk2"/>
-    </dgm:linClrLst>
-    <dgm:effectClrLst/>
-    <dgm:txLinClrLst/>
-    <dgm:txFillClrLst meth="repeat">
-      <a:schemeClr val="lt2"/>
-    </dgm:txFillClrLst>
-    <dgm:txEffectClrLst/>
-  </dgm:styleLbl>
-  <dgm:styleLbl name="parChTrans2D4">
-    <dgm:fillClrLst meth="repeat">
-      <a:schemeClr val="dk2"/>
-    </dgm:fillClrLst>
-    <dgm:linClrLst meth="repeat">
-      <a:schemeClr val="dk2"/>
-    </dgm:linClrLst>
-    <dgm:effectClrLst/>
-    <dgm:txLinClrLst/>
-    <dgm:txFillClrLst meth="repeat">
-      <a:schemeClr val="lt2"/>
-    </dgm:txFillClrLst>
-    <dgm:txEffectClrLst/>
-  </dgm:styleLbl>
-  <dgm:styleLbl name="parChTrans1D1">
-    <dgm:fillClrLst meth="repeat">
-      <a:schemeClr val="dk2"/>
-    </dgm:fillClrLst>
-    <dgm:linClrLst meth="repeat">
-      <a:schemeClr val="dk2">
-        <a:shade val="60000"/>
-      </a:schemeClr>
-    </dgm:linClrLst>
-    <dgm:effectClrLst/>
-    <dgm:txLinClrLst/>
-    <dgm:txFillClrLst meth="repeat">
-      <a:schemeClr val="tx1"/>
-    </dgm:txFillClrLst>
-    <dgm:txEffectClrLst/>
-  </dgm:styleLbl>
-  <dgm:styleLbl name="parChTrans1D2">
-    <dgm:fillClrLst meth="repeat">
-      <a:schemeClr val="dk2"/>
-    </dgm:fillClrLst>
-    <dgm:linClrLst meth="repeat">
-      <a:schemeClr val="dk2">
-        <a:shade val="60000"/>
-      </a:schemeClr>
-    </dgm:linClrLst>
-    <dgm:effectClrLst/>
-    <dgm:txLinClrLst/>
-    <dgm:txFillClrLst meth="repeat">
-      <a:schemeClr val="tx1"/>
-    </dgm:txFillClrLst>
-    <dgm:txEffectClrLst/>
-  </dgm:styleLbl>
-  <dgm:styleLbl name="parChTrans1D3">
-    <dgm:fillClrLst meth="repeat">
-      <a:schemeClr val="dk2"/>
-    </dgm:fillClrLst>
-    <dgm:linClrLst meth="repeat">
-      <a:schemeClr val="dk2">
-        <a:shade val="80000"/>
-      </a:schemeClr>
-    </dgm:linClrLst>
-    <dgm:effectClrLst/>
-    <dgm:txLinClrLst/>
-    <dgm:txFillClrLst meth="repeat">
-      <a:schemeClr val="tx1"/>
-    </dgm:txFillClrLst>
-    <dgm:txEffectClrLst/>
-  </dgm:styleLbl>
-  <dgm:styleLbl name="parChTrans1D4">
-    <dgm:fillClrLst meth="repeat">
-      <a:schemeClr val="dk2"/>
-    </dgm:fillClrLst>
-    <dgm:linClrLst meth="repeat">
-      <a:schemeClr val="dk2">
-        <a:shade val="80000"/>
-      </a:schemeClr>
-    </dgm:linClrLst>
-    <dgm:effectClrLst/>
-    <dgm:txLinClrLst/>
-    <dgm:txFillClrLst meth="repeat">
-      <a:schemeClr val="tx1"/>
-    </dgm:txFillClrLst>
-    <dgm:txEffectClrLst/>
-  </dgm:styleLbl>
-  <dgm:styleLbl name="fgAcc1">
-    <dgm:fillClrLst meth="repeat">
-      <a:schemeClr val="lt2">
-        <a:alpha val="90000"/>
-      </a:schemeClr>
-    </dgm:fillClrLst>
-    <dgm:linClrLst meth="repeat">
-      <a:schemeClr val="dk2"/>
-    </dgm:linClrLst>
-    <dgm:effectClrLst/>
-    <dgm:txLinClrLst/>
-    <dgm:txFillClrLst meth="repeat">
-      <a:schemeClr val="dk1"/>
-    </dgm:txFillClrLst>
-    <dgm:txEffectClrLst/>
-  </dgm:styleLbl>
-  <dgm:styleLbl name="conFgAcc1">
-    <dgm:fillClrLst meth="repeat">
-      <a:schemeClr val="lt2">
-        <a:alpha val="90000"/>
-      </a:schemeClr>
-    </dgm:fillClrLst>
-    <dgm:linClrLst meth="repeat">
-      <a:schemeClr val="dk2"/>
-    </dgm:linClrLst>
-    <dgm:effectClrLst/>
-    <dgm:txLinClrLst/>
-    <dgm:txFillClrLst meth="repeat">
-      <a:schemeClr val="dk1"/>
-    </dgm:txFillClrLst>
-    <dgm:txEffectClrLst/>
-  </dgm:styleLbl>
-  <dgm:styleLbl name="alignAcc1">
-    <dgm:fillClrLst meth="repeat">
-      <a:schemeClr val="lt2">
-        <a:alpha val="90000"/>
-      </a:schemeClr>
-    </dgm:fillClrLst>
-    <dgm:linClrLst meth="repeat">
-      <a:schemeClr val="dk2"/>
-    </dgm:linClrLst>
-    <dgm:effectClrLst/>
-    <dgm:txLinClrLst/>
-    <dgm:txFillClrLst meth="repeat">
-      <a:schemeClr val="dk1"/>
-    </dgm:txFillClrLst>
-    <dgm:txEffectClrLst/>
-  </dgm:styleLbl>
-  <dgm:styleLbl name="trAlignAcc1">
-    <dgm:fillClrLst meth="repeat">
-      <a:schemeClr val="lt2">
-        <a:alpha val="40000"/>
-      </a:schemeClr>
-    </dgm:fillClrLst>
-    <dgm:linClrLst meth="repeat">
-      <a:schemeClr val="dk2"/>
-    </dgm:linClrLst>
-    <dgm:effectClrLst/>
-    <dgm:txLinClrLst/>
-    <dgm:txFillClrLst meth="repeat">
-      <a:schemeClr val="dk1"/>
-    </dgm:txFillClrLst>
-    <dgm:txEffectClrLst/>
-  </dgm:styleLbl>
-  <dgm:styleLbl name="bgAcc1">
-    <dgm:fillClrLst meth="repeat">
-      <a:schemeClr val="lt2">
-        <a:alpha val="90000"/>
-      </a:schemeClr>
-    </dgm:fillClrLst>
-    <dgm:linClrLst meth="repeat">
-      <a:schemeClr val="dk2"/>
-    </dgm:linClrLst>
-    <dgm:effectClrLst/>
-    <dgm:txLinClrLst/>
-    <dgm:txFillClrLst meth="repeat">
-      <a:schemeClr val="dk1"/>
-    </dgm:txFillClrLst>
-    <dgm:txEffectClrLst/>
-  </dgm:styleLbl>
-  <dgm:styleLbl name="solidFgAcc1">
-    <dgm:fillClrLst meth="repeat">
-      <a:schemeClr val="lt2"/>
-    </dgm:fillClrLst>
-    <dgm:linClrLst meth="repeat">
-      <a:schemeClr val="dk2"/>
-    </dgm:linClrLst>
-    <dgm:effectClrLst/>
-    <dgm:txLinClrLst/>
-    <dgm:txFillClrLst meth="repeat">
-      <a:schemeClr val="dk1"/>
-    </dgm:txFillClrLst>
-    <dgm:txEffectClrLst/>
-  </dgm:styleLbl>
-  <dgm:styleLbl name="solidAlignAcc1">
-    <dgm:fillClrLst meth="repeat">
-      <a:schemeClr val="lt2"/>
-    </dgm:fillClrLst>
-    <dgm:linClrLst meth="repeat">
-      <a:schemeClr val="dk2"/>
-    </dgm:linClrLst>
-    <dgm:effectClrLst/>
-    <dgm:txLinClrLst/>
-    <dgm:txFillClrLst meth="repeat">
-      <a:schemeClr val="dk1"/>
-    </dgm:txFillClrLst>
-    <dgm:txEffectClrLst/>
-  </dgm:styleLbl>
-  <dgm:styleLbl name="solidBgAcc1">
-    <dgm:fillClrLst meth="repeat">
-      <a:schemeClr val="lt2"/>
-    </dgm:fillClrLst>
-    <dgm:linClrLst meth="repeat">
-      <a:schemeClr val="dk2"/>
-    </dgm:linClrLst>
-    <dgm:effectClrLst/>
-    <dgm:txLinClrLst/>
-    <dgm:txFillClrLst meth="repeat">
-      <a:schemeClr val="dk1"/>
-    </dgm:txFillClrLst>
-    <dgm:txEffectClrLst/>
-  </dgm:styleLbl>
-  <dgm:styleLbl name="fgAccFollowNode1">
-    <dgm:fillClrLst meth="repeat">
-      <a:schemeClr val="dk2">
-        <a:alpha val="90000"/>
-        <a:tint val="40000"/>
-      </a:schemeClr>
-    </dgm:fillClrLst>
-    <dgm:linClrLst meth="repeat">
-      <a:schemeClr val="dk2">
-        <a:alpha val="90000"/>
-        <a:tint val="40000"/>
-      </a:schemeClr>
-    </dgm:linClrLst>
-    <dgm:effectClrLst/>
-    <dgm:txLinClrLst/>
-    <dgm:txFillClrLst meth="repeat">
-      <a:schemeClr val="dk1"/>
-    </dgm:txFillClrLst>
-    <dgm:txEffectClrLst/>
-  </dgm:styleLbl>
-  <dgm:styleLbl name="alignAccFollowNode1">
-    <dgm:fillClrLst meth="repeat">
-      <a:schemeClr val="dk2">
-        <a:alpha val="90000"/>
-        <a:tint val="40000"/>
-      </a:schemeClr>
-    </dgm:fillClrLst>
-    <dgm:linClrLst meth="repeat">
-      <a:schemeClr val="dk2">
-        <a:alpha val="90000"/>
-        <a:tint val="40000"/>
-      </a:schemeClr>
-    </dgm:linClrLst>
-    <dgm:effectClrLst/>
-    <dgm:txLinClrLst/>
-    <dgm:txFillClrLst meth="repeat">
-      <a:schemeClr val="dk1"/>
-    </dgm:txFillClrLst>
-    <dgm:txEffectClrLst/>
-  </dgm:styleLbl>
-  <dgm:styleLbl name="bgAccFollowNode1">
-    <dgm:fillClrLst meth="repeat">
-      <a:schemeClr val="dk2">
-        <a:alpha val="90000"/>
-        <a:tint val="40000"/>
-      </a:schemeClr>
-    </dgm:fillClrLst>
-    <dgm:linClrLst meth="repeat">
-      <a:schemeClr val="dk2">
-        <a:alpha val="90000"/>
-        <a:tint val="40000"/>
-      </a:schemeClr>
-    </dgm:linClrLst>
-    <dgm:effectClrLst/>
-    <dgm:txLinClrLst/>
-    <dgm:txFillClrLst meth="repeat">
-      <a:schemeClr val="dk1"/>
-    </dgm:txFillClrLst>
-    <dgm:txEffectClrLst/>
-  </dgm:styleLbl>
-  <dgm:styleLbl name="fgAcc0">
-    <dgm:fillClrLst meth="repeat">
-      <a:schemeClr val="lt2">
-        <a:alpha val="90000"/>
-      </a:schemeClr>
-    </dgm:fillClrLst>
-    <dgm:linClrLst meth="repeat">
-      <a:schemeClr val="dk2"/>
-    </dgm:linClrLst>
-    <dgm:effectClrLst/>
-    <dgm:txLinClrLst/>
-    <dgm:txFillClrLst meth="repeat">
-      <a:schemeClr val="dk1"/>
-    </dgm:txFillClrLst>
-    <dgm:txEffectClrLst/>
-  </dgm:styleLbl>
-  <dgm:styleLbl name="fgAcc2">
-    <dgm:fillClrLst meth="repeat">
-      <a:schemeClr val="lt2">
-        <a:alpha val="90000"/>
-      </a:schemeClr>
-    </dgm:fillClrLst>
-    <dgm:linClrLst meth="repeat">
-      <a:schemeClr val="dk2"/>
-    </dgm:linClrLst>
-    <dgm:effectClrLst/>
-    <dgm:txLinClrLst/>
-    <dgm:txFillClrLst meth="repeat">
-      <a:schemeClr val="dk1"/>
-    </dgm:txFillClrLst>
-    <dgm:txEffectClrLst/>
-  </dgm:styleLbl>
-  <dgm:styleLbl name="fgAcc3">
-    <dgm:fillClrLst meth="repeat">
-      <a:schemeClr val="lt2">
-        <a:alpha val="90000"/>
-      </a:schemeClr>
-    </dgm:fillClrLst>
-    <dgm:linClrLst meth="repeat">
-      <a:schemeClr val="dk2"/>
-    </dgm:linClrLst>
-    <dgm:effectClrLst/>
-    <dgm:txLinClrLst/>
-    <dgm:txFillClrLst meth="repeat">
-      <a:schemeClr val="dk1"/>
-    </dgm:txFillClrLst>
-    <dgm:txEffectClrLst/>
-  </dgm:styleLbl>
-  <dgm:styleLbl name="fgAcc4">
-    <dgm:fillClrLst meth="repeat">
-      <a:schemeClr val="lt2">
-        <a:alpha val="90000"/>
-      </a:schemeClr>
-    </dgm:fillClrLst>
-    <dgm:linClrLst meth="repeat">
-      <a:schemeClr val="dk2"/>
-    </dgm:linClrLst>
-    <dgm:effectClrLst/>
-    <dgm:txLinClrLst/>
-    <dgm:txFillClrLst meth="repeat">
-      <a:schemeClr val="dk1"/>
-    </dgm:txFillClrLst>
-    <dgm:txEffectClrLst/>
-  </dgm:styleLbl>
-  <dgm:styleLbl name="bgShp">
-    <dgm:fillClrLst meth="repeat">
       <a:schemeClr val="dk2">
         <a:tint val="40000"/>
       </a:schemeClr>
@@ -1663,383 +917,928 @@
 </dgm:colorsDef>
 </file>
 
-<file path=ppt/diagrams/data1.xml><?xml version="1.0" encoding="utf-8"?>
-<dgm:dataModel xmlns:dgm="http://schemas.openxmlformats.org/drawingml/2006/diagram" xmlns:a="http://schemas.openxmlformats.org/drawingml/2006/main">
-  <dgm:ptLst>
-    <dgm:pt modelId="{C8EA156B-345A-42C1-9CDC-2E5D1E0212E3}" type="doc">
-      <dgm:prSet loTypeId="urn:microsoft.com/office/officeart/2018/2/layout/IconCircleList" loCatId="icon" qsTypeId="urn:microsoft.com/office/officeart/2005/8/quickstyle/simple1" qsCatId="simple" csTypeId="urn:microsoft.com/office/officeart/2018/5/colors/Iconchunking_coloredtext_accent0_3" csCatId="mainScheme" phldr="1"/>
-      <dgm:spPr/>
-      <dgm:t>
-        <a:bodyPr/>
-        <a:lstStyle/>
-        <a:p>
-          <a:endParaRPr lang="en-US"/>
-        </a:p>
-      </dgm:t>
-    </dgm:pt>
-    <dgm:pt modelId="{3FDA0C37-216F-4C1E-A084-D449C360A1E4}">
-      <dgm:prSet/>
-      <dgm:spPr/>
-      <dgm:t>
-        <a:bodyPr/>
-        <a:lstStyle/>
-        <a:p>
-          <a:pPr>
-            <a:lnSpc>
-              <a:spcPct val="100000"/>
-            </a:lnSpc>
-          </a:pPr>
-          <a:r>
-            <a:rPr lang="en-US"/>
-            <a:t>Docker is an open platform for developing, shipping, and running applications. It enables you to </a:t>
-          </a:r>
-          <a:r>
-            <a:rPr lang="en-US" b="1"/>
-            <a:t>separate your applications from your infrastructure</a:t>
-          </a:r>
-          <a:r>
-            <a:rPr lang="en-US"/>
-            <a:t> so you can deliver software quickly.</a:t>
-          </a:r>
-        </a:p>
-      </dgm:t>
-    </dgm:pt>
-    <dgm:pt modelId="{E1BC69F2-107D-4195-BAA2-93BCBE1BC50B}" type="parTrans" cxnId="{C72E15EB-6571-46E4-B6EF-E171AF0E155A}">
-      <dgm:prSet/>
-      <dgm:spPr/>
-      <dgm:t>
-        <a:bodyPr/>
-        <a:lstStyle/>
-        <a:p>
-          <a:endParaRPr lang="en-US"/>
-        </a:p>
-      </dgm:t>
-    </dgm:pt>
-    <dgm:pt modelId="{A624B8A9-122D-4CD9-BD51-499ECC419955}" type="sibTrans" cxnId="{C72E15EB-6571-46E4-B6EF-E171AF0E155A}">
-      <dgm:prSet/>
-      <dgm:spPr/>
-      <dgm:t>
-        <a:bodyPr/>
-        <a:lstStyle/>
-        <a:p>
-          <a:pPr>
-            <a:lnSpc>
-              <a:spcPct val="100000"/>
-            </a:lnSpc>
-          </a:pPr>
-          <a:endParaRPr lang="en-US"/>
-        </a:p>
-      </dgm:t>
-    </dgm:pt>
-    <dgm:pt modelId="{F7865EEA-344F-4CF7-89C2-24FDDC30C4A4}">
-      <dgm:prSet/>
-      <dgm:spPr/>
-      <dgm:t>
-        <a:bodyPr/>
-        <a:lstStyle/>
-        <a:p>
-          <a:pPr>
-            <a:lnSpc>
-              <a:spcPct val="100000"/>
-            </a:lnSpc>
-          </a:pPr>
-          <a:r>
-            <a:rPr lang="en-US" b="0" cap="none" spc="0">
-              <a:effectLst>
-                <a:outerShdw blurRad="38100" dist="19050" dir="2700000" algn="tl" rotWithShape="0">
-                  <a:schemeClr val="dk1">
-                    <a:alpha val="40000"/>
-                  </a:schemeClr>
-                </a:outerShdw>
-              </a:effectLst>
-            </a:rPr>
-            <a:t>With Docker, you can package an application and all its dependencies—such as libraries, binaries, and configuration files—into a standardized unit called a container. Containers are lightweight, portable, and isolated, ensuring that your application runs consistently across different environments, whether it’s a developer’s laptop, a test server, or a cloud production system.</a:t>
-          </a:r>
-        </a:p>
-      </dgm:t>
-    </dgm:pt>
-    <dgm:pt modelId="{2859EBF5-8FFB-4418-91E6-2BCA680EA307}" type="parTrans" cxnId="{4321E7AE-59D9-4BE3-8915-BA8BE48616F7}">
-      <dgm:prSet/>
-      <dgm:spPr/>
-      <dgm:t>
-        <a:bodyPr/>
-        <a:lstStyle/>
-        <a:p>
-          <a:endParaRPr lang="en-US"/>
-        </a:p>
-      </dgm:t>
-    </dgm:pt>
-    <dgm:pt modelId="{9D7208A6-5884-451A-BB7D-1A6B0DEA2908}" type="sibTrans" cxnId="{4321E7AE-59D9-4BE3-8915-BA8BE48616F7}">
-      <dgm:prSet/>
-      <dgm:spPr/>
-      <dgm:t>
-        <a:bodyPr/>
-        <a:lstStyle/>
-        <a:p>
-          <a:pPr>
-            <a:lnSpc>
-              <a:spcPct val="100000"/>
-            </a:lnSpc>
-          </a:pPr>
-          <a:endParaRPr lang="en-US"/>
-        </a:p>
-      </dgm:t>
-    </dgm:pt>
-    <dgm:pt modelId="{EE8B53A7-AB2B-45D6-A5BD-92C264A0B890}">
-      <dgm:prSet/>
-      <dgm:spPr/>
-      <dgm:t>
-        <a:bodyPr/>
-        <a:lstStyle/>
-        <a:p>
-          <a:pPr>
-            <a:lnSpc>
-              <a:spcPct val="100000"/>
-            </a:lnSpc>
-          </a:pPr>
-          <a:r>
-            <a:rPr lang="en-US"/>
-            <a:t>Unlike virtual machines, Docker containers share the host operating system kernel, making them faster to start and more efficient in resource usage. Docker provides tools and a platform to manage the full lifecycle of containers: build, distribute, deploy, and update them easily.</a:t>
-          </a:r>
-        </a:p>
-      </dgm:t>
-    </dgm:pt>
-    <dgm:pt modelId="{D2FE2F98-CC6A-4A16-9955-875C4066E1DA}" type="parTrans" cxnId="{4ADDB31A-652C-41A2-A07E-411A5FDE4DB6}">
-      <dgm:prSet/>
-      <dgm:spPr/>
-      <dgm:t>
-        <a:bodyPr/>
-        <a:lstStyle/>
-        <a:p>
-          <a:endParaRPr lang="en-US"/>
-        </a:p>
-      </dgm:t>
-    </dgm:pt>
-    <dgm:pt modelId="{F5004866-44B9-4606-AE1F-C1C38D3FAEE1}" type="sibTrans" cxnId="{4ADDB31A-652C-41A2-A07E-411A5FDE4DB6}">
-      <dgm:prSet/>
-      <dgm:spPr/>
-      <dgm:t>
-        <a:bodyPr/>
-        <a:lstStyle/>
-        <a:p>
-          <a:endParaRPr lang="en-US"/>
-        </a:p>
-      </dgm:t>
-    </dgm:pt>
-    <dgm:pt modelId="{EA4D5ACE-EE7F-43E5-AC72-0C380F156B0D}" type="pres">
-      <dgm:prSet presAssocID="{C8EA156B-345A-42C1-9CDC-2E5D1E0212E3}" presName="root" presStyleCnt="0">
-        <dgm:presLayoutVars>
-          <dgm:dir/>
-          <dgm:resizeHandles val="exact"/>
-        </dgm:presLayoutVars>
-      </dgm:prSet>
-      <dgm:spPr/>
-    </dgm:pt>
-    <dgm:pt modelId="{E022E521-2ECE-4B1B-B0F5-08C32447C4EC}" type="pres">
-      <dgm:prSet presAssocID="{C8EA156B-345A-42C1-9CDC-2E5D1E0212E3}" presName="container" presStyleCnt="0">
-        <dgm:presLayoutVars>
-          <dgm:dir/>
-          <dgm:resizeHandles val="exact"/>
-        </dgm:presLayoutVars>
-      </dgm:prSet>
-      <dgm:spPr/>
-    </dgm:pt>
-    <dgm:pt modelId="{EF2A7441-C1BC-423D-B252-E227ADA6C86F}" type="pres">
-      <dgm:prSet presAssocID="{3FDA0C37-216F-4C1E-A084-D449C360A1E4}" presName="compNode" presStyleCnt="0"/>
-      <dgm:spPr/>
-    </dgm:pt>
-    <dgm:pt modelId="{93E414F9-4B36-47D2-85A4-92F2324B8007}" type="pres">
-      <dgm:prSet presAssocID="{3FDA0C37-216F-4C1E-A084-D449C360A1E4}" presName="iconBgRect" presStyleLbl="bgShp" presStyleIdx="0" presStyleCnt="3"/>
-      <dgm:spPr/>
-    </dgm:pt>
-    <dgm:pt modelId="{4C075AF5-7538-474E-9456-45E782241F56}" type="pres">
-      <dgm:prSet presAssocID="{3FDA0C37-216F-4C1E-A084-D449C360A1E4}" presName="iconRect" presStyleLbl="node1" presStyleIdx="0" presStyleCnt="3"/>
-      <dgm:spPr>
-        <a:blipFill>
-          <a:blip xmlns:r="http://schemas.openxmlformats.org/officeDocument/2006/relationships" r:embed="rId1">
-            <a:extLst>
-              <a:ext uri="{28A0092B-C50C-407E-A947-70E740481C1C}">
-                <a14:useLocalDpi xmlns:a14="http://schemas.microsoft.com/office/drawing/2010/main" val="0"/>
-              </a:ext>
-              <a:ext uri="{96DAC541-7B7A-43D3-8B79-37D633B846F1}">
-                <asvg:svgBlip xmlns:asvg="http://schemas.microsoft.com/office/drawing/2016/SVG/main" r:embed="rId2"/>
-              </a:ext>
-            </a:extLst>
-          </a:blip>
-          <a:stretch>
-            <a:fillRect/>
-          </a:stretch>
-        </a:blipFill>
-        <a:ln>
-          <a:noFill/>
-        </a:ln>
-      </dgm:spPr>
-      <dgm:extLst>
-        <a:ext uri="{E40237B7-FDA0-4F09-8148-C483321AD2D9}">
-          <dgm14:cNvPr xmlns:dgm14="http://schemas.microsoft.com/office/drawing/2010/diagram" id="0" name="" descr="服务器"/>
-        </a:ext>
-      </dgm:extLst>
-    </dgm:pt>
-    <dgm:pt modelId="{D965181C-9297-43A7-9348-51E690C5827B}" type="pres">
-      <dgm:prSet presAssocID="{3FDA0C37-216F-4C1E-A084-D449C360A1E4}" presName="spaceRect" presStyleCnt="0"/>
-      <dgm:spPr/>
-    </dgm:pt>
-    <dgm:pt modelId="{4F2BD527-7A69-453C-A362-1B878DE41469}" type="pres">
-      <dgm:prSet presAssocID="{3FDA0C37-216F-4C1E-A084-D449C360A1E4}" presName="textRect" presStyleLbl="revTx" presStyleIdx="0" presStyleCnt="3">
-        <dgm:presLayoutVars>
-          <dgm:chMax val="1"/>
-          <dgm:chPref val="1"/>
-        </dgm:presLayoutVars>
-      </dgm:prSet>
-      <dgm:spPr/>
-    </dgm:pt>
-    <dgm:pt modelId="{2979BA28-EFF1-48E1-A290-924303AFCF87}" type="pres">
-      <dgm:prSet presAssocID="{A624B8A9-122D-4CD9-BD51-499ECC419955}" presName="sibTrans" presStyleLbl="sibTrans2D1" presStyleIdx="0" presStyleCnt="0"/>
-      <dgm:spPr/>
-    </dgm:pt>
-    <dgm:pt modelId="{BD60DD8B-F5B6-4390-A931-5E97D66C9C0C}" type="pres">
-      <dgm:prSet presAssocID="{F7865EEA-344F-4CF7-89C2-24FDDC30C4A4}" presName="compNode" presStyleCnt="0"/>
-      <dgm:spPr/>
-    </dgm:pt>
-    <dgm:pt modelId="{C7DBEAE4-1142-4F9B-86A6-DB8D4D622A45}" type="pres">
-      <dgm:prSet presAssocID="{F7865EEA-344F-4CF7-89C2-24FDDC30C4A4}" presName="iconBgRect" presStyleLbl="bgShp" presStyleIdx="1" presStyleCnt="3"/>
-      <dgm:spPr/>
-    </dgm:pt>
-    <dgm:pt modelId="{1104C50E-2502-457B-94CD-8347CEF8DEC1}" type="pres">
-      <dgm:prSet presAssocID="{F7865EEA-344F-4CF7-89C2-24FDDC30C4A4}" presName="iconRect" presStyleLbl="node1" presStyleIdx="1" presStyleCnt="3"/>
-      <dgm:spPr>
-        <a:blipFill>
-          <a:blip xmlns:r="http://schemas.openxmlformats.org/officeDocument/2006/relationships" r:embed="rId3">
-            <a:extLst>
-              <a:ext uri="{28A0092B-C50C-407E-A947-70E740481C1C}">
-                <a14:useLocalDpi xmlns:a14="http://schemas.microsoft.com/office/drawing/2010/main" val="0"/>
-              </a:ext>
-              <a:ext uri="{96DAC541-7B7A-43D3-8B79-37D633B846F1}">
-                <asvg:svgBlip xmlns:asvg="http://schemas.microsoft.com/office/drawing/2016/SVG/main" r:embed="rId4"/>
-              </a:ext>
-            </a:extLst>
-          </a:blip>
-          <a:stretch>
-            <a:fillRect/>
-          </a:stretch>
-        </a:blipFill>
-        <a:ln>
-          <a:noFill/>
-        </a:ln>
-      </dgm:spPr>
-      <dgm:extLst>
-        <a:ext uri="{E40237B7-FDA0-4F09-8148-C483321AD2D9}">
-          <dgm14:cNvPr xmlns:dgm14="http://schemas.microsoft.com/office/drawing/2010/diagram" id="0" name="" descr="Open Folder"/>
-        </a:ext>
-      </dgm:extLst>
-    </dgm:pt>
-    <dgm:pt modelId="{CF9E9C44-B6D2-453E-BEFC-8BB71362971A}" type="pres">
-      <dgm:prSet presAssocID="{F7865EEA-344F-4CF7-89C2-24FDDC30C4A4}" presName="spaceRect" presStyleCnt="0"/>
-      <dgm:spPr/>
-    </dgm:pt>
-    <dgm:pt modelId="{76F10EC3-0DD8-4A6D-92DA-4D1BB60172A1}" type="pres">
-      <dgm:prSet presAssocID="{F7865EEA-344F-4CF7-89C2-24FDDC30C4A4}" presName="textRect" presStyleLbl="revTx" presStyleIdx="1" presStyleCnt="3">
-        <dgm:presLayoutVars>
-          <dgm:chMax val="1"/>
-          <dgm:chPref val="1"/>
-        </dgm:presLayoutVars>
-      </dgm:prSet>
-      <dgm:spPr/>
-    </dgm:pt>
-    <dgm:pt modelId="{C1AA340A-7DFC-4203-BFD2-ED055C4428C7}" type="pres">
-      <dgm:prSet presAssocID="{9D7208A6-5884-451A-BB7D-1A6B0DEA2908}" presName="sibTrans" presStyleLbl="sibTrans2D1" presStyleIdx="0" presStyleCnt="0"/>
-      <dgm:spPr/>
-    </dgm:pt>
-    <dgm:pt modelId="{D123015F-D959-4C84-9F00-23FDE5CBA6DC}" type="pres">
-      <dgm:prSet presAssocID="{EE8B53A7-AB2B-45D6-A5BD-92C264A0B890}" presName="compNode" presStyleCnt="0"/>
-      <dgm:spPr/>
-    </dgm:pt>
-    <dgm:pt modelId="{BBE461A2-B2E7-46DE-A126-62502E11067F}" type="pres">
-      <dgm:prSet presAssocID="{EE8B53A7-AB2B-45D6-A5BD-92C264A0B890}" presName="iconBgRect" presStyleLbl="bgShp" presStyleIdx="2" presStyleCnt="3"/>
-      <dgm:spPr/>
-    </dgm:pt>
-    <dgm:pt modelId="{FD71E8D5-16B4-415A-B0E3-81144A10AB87}" type="pres">
-      <dgm:prSet presAssocID="{EE8B53A7-AB2B-45D6-A5BD-92C264A0B890}" presName="iconRect" presStyleLbl="node1" presStyleIdx="2" presStyleCnt="3"/>
-      <dgm:spPr>
-        <a:blipFill>
-          <a:blip xmlns:r="http://schemas.openxmlformats.org/officeDocument/2006/relationships" r:embed="rId5">
-            <a:extLst>
-              <a:ext uri="{28A0092B-C50C-407E-A947-70E740481C1C}">
-                <a14:useLocalDpi xmlns:a14="http://schemas.microsoft.com/office/drawing/2010/main" val="0"/>
-              </a:ext>
-              <a:ext uri="{96DAC541-7B7A-43D3-8B79-37D633B846F1}">
-                <asvg:svgBlip xmlns:asvg="http://schemas.microsoft.com/office/drawing/2016/SVG/main" r:embed="rId6"/>
-              </a:ext>
-            </a:extLst>
-          </a:blip>
-          <a:stretch>
-            <a:fillRect/>
-          </a:stretch>
-        </a:blipFill>
-        <a:ln>
-          <a:noFill/>
-        </a:ln>
-      </dgm:spPr>
-      <dgm:extLst>
-        <a:ext uri="{E40237B7-FDA0-4F09-8148-C483321AD2D9}">
-          <dgm14:cNvPr xmlns:dgm14="http://schemas.microsoft.com/office/drawing/2010/diagram" id="0" name="" descr="处理器"/>
-        </a:ext>
-      </dgm:extLst>
-    </dgm:pt>
-    <dgm:pt modelId="{14B1CD91-934E-49B4-A2DA-DFBBCCCD3D50}" type="pres">
-      <dgm:prSet presAssocID="{EE8B53A7-AB2B-45D6-A5BD-92C264A0B890}" presName="spaceRect" presStyleCnt="0"/>
-      <dgm:spPr/>
-    </dgm:pt>
-    <dgm:pt modelId="{5EAB437F-7FAD-4E35-8756-182559BF323E}" type="pres">
-      <dgm:prSet presAssocID="{EE8B53A7-AB2B-45D6-A5BD-92C264A0B890}" presName="textRect" presStyleLbl="revTx" presStyleIdx="2" presStyleCnt="3">
-        <dgm:presLayoutVars>
-          <dgm:chMax val="1"/>
-          <dgm:chPref val="1"/>
-        </dgm:presLayoutVars>
-      </dgm:prSet>
-      <dgm:spPr/>
-    </dgm:pt>
-  </dgm:ptLst>
-  <dgm:cxnLst>
-    <dgm:cxn modelId="{3D337904-0ED7-4BAE-A565-CD9B123F6916}" type="presOf" srcId="{3FDA0C37-216F-4C1E-A084-D449C360A1E4}" destId="{4F2BD527-7A69-453C-A362-1B878DE41469}" srcOrd="0" destOrd="0" presId="urn:microsoft.com/office/officeart/2018/2/layout/IconCircleList"/>
-    <dgm:cxn modelId="{4ADDB31A-652C-41A2-A07E-411A5FDE4DB6}" srcId="{C8EA156B-345A-42C1-9CDC-2E5D1E0212E3}" destId="{EE8B53A7-AB2B-45D6-A5BD-92C264A0B890}" srcOrd="2" destOrd="0" parTransId="{D2FE2F98-CC6A-4A16-9955-875C4066E1DA}" sibTransId="{F5004866-44B9-4606-AE1F-C1C38D3FAEE1}"/>
-    <dgm:cxn modelId="{C2C8C325-42FF-4F43-81E1-B92B68B2C968}" type="presOf" srcId="{9D7208A6-5884-451A-BB7D-1A6B0DEA2908}" destId="{C1AA340A-7DFC-4203-BFD2-ED055C4428C7}" srcOrd="0" destOrd="0" presId="urn:microsoft.com/office/officeart/2018/2/layout/IconCircleList"/>
-    <dgm:cxn modelId="{E554CC43-6B15-4EFF-9AFE-DAE5CCA83E1B}" type="presOf" srcId="{C8EA156B-345A-42C1-9CDC-2E5D1E0212E3}" destId="{EA4D5ACE-EE7F-43E5-AC72-0C380F156B0D}" srcOrd="0" destOrd="0" presId="urn:microsoft.com/office/officeart/2018/2/layout/IconCircleList"/>
-    <dgm:cxn modelId="{FCBB2577-D0E6-47CE-AE66-87F460096160}" type="presOf" srcId="{F7865EEA-344F-4CF7-89C2-24FDDC30C4A4}" destId="{76F10EC3-0DD8-4A6D-92DA-4D1BB60172A1}" srcOrd="0" destOrd="0" presId="urn:microsoft.com/office/officeart/2018/2/layout/IconCircleList"/>
-    <dgm:cxn modelId="{4321E7AE-59D9-4BE3-8915-BA8BE48616F7}" srcId="{C8EA156B-345A-42C1-9CDC-2E5D1E0212E3}" destId="{F7865EEA-344F-4CF7-89C2-24FDDC30C4A4}" srcOrd="1" destOrd="0" parTransId="{2859EBF5-8FFB-4418-91E6-2BCA680EA307}" sibTransId="{9D7208A6-5884-451A-BB7D-1A6B0DEA2908}"/>
-    <dgm:cxn modelId="{C72E15EB-6571-46E4-B6EF-E171AF0E155A}" srcId="{C8EA156B-345A-42C1-9CDC-2E5D1E0212E3}" destId="{3FDA0C37-216F-4C1E-A084-D449C360A1E4}" srcOrd="0" destOrd="0" parTransId="{E1BC69F2-107D-4195-BAA2-93BCBE1BC50B}" sibTransId="{A624B8A9-122D-4CD9-BD51-499ECC419955}"/>
-    <dgm:cxn modelId="{1D1C7CF2-C03D-4542-A848-4AB055319B91}" type="presOf" srcId="{EE8B53A7-AB2B-45D6-A5BD-92C264A0B890}" destId="{5EAB437F-7FAD-4E35-8756-182559BF323E}" srcOrd="0" destOrd="0" presId="urn:microsoft.com/office/officeart/2018/2/layout/IconCircleList"/>
-    <dgm:cxn modelId="{4F3B3AF5-4F88-432F-9E8E-A99C2548F50A}" type="presOf" srcId="{A624B8A9-122D-4CD9-BD51-499ECC419955}" destId="{2979BA28-EFF1-48E1-A290-924303AFCF87}" srcOrd="0" destOrd="0" presId="urn:microsoft.com/office/officeart/2018/2/layout/IconCircleList"/>
-    <dgm:cxn modelId="{0E79CBA5-C71E-49B5-A868-FC8B91FABE00}" type="presParOf" srcId="{EA4D5ACE-EE7F-43E5-AC72-0C380F156B0D}" destId="{E022E521-2ECE-4B1B-B0F5-08C32447C4EC}" srcOrd="0" destOrd="0" presId="urn:microsoft.com/office/officeart/2018/2/layout/IconCircleList"/>
-    <dgm:cxn modelId="{41E1D306-AFD6-494B-9311-F9E865850C7E}" type="presParOf" srcId="{E022E521-2ECE-4B1B-B0F5-08C32447C4EC}" destId="{EF2A7441-C1BC-423D-B252-E227ADA6C86F}" srcOrd="0" destOrd="0" presId="urn:microsoft.com/office/officeart/2018/2/layout/IconCircleList"/>
-    <dgm:cxn modelId="{C1BF4AC1-9D50-4831-A584-47D9CFBB3541}" type="presParOf" srcId="{EF2A7441-C1BC-423D-B252-E227ADA6C86F}" destId="{93E414F9-4B36-47D2-85A4-92F2324B8007}" srcOrd="0" destOrd="0" presId="urn:microsoft.com/office/officeart/2018/2/layout/IconCircleList"/>
-    <dgm:cxn modelId="{CFCE2E71-659A-4F1F-9A45-AD451397A177}" type="presParOf" srcId="{EF2A7441-C1BC-423D-B252-E227ADA6C86F}" destId="{4C075AF5-7538-474E-9456-45E782241F56}" srcOrd="1" destOrd="0" presId="urn:microsoft.com/office/officeart/2018/2/layout/IconCircleList"/>
-    <dgm:cxn modelId="{19658055-0584-4CFF-83D4-ECF7958F7BA0}" type="presParOf" srcId="{EF2A7441-C1BC-423D-B252-E227ADA6C86F}" destId="{D965181C-9297-43A7-9348-51E690C5827B}" srcOrd="2" destOrd="0" presId="urn:microsoft.com/office/officeart/2018/2/layout/IconCircleList"/>
-    <dgm:cxn modelId="{99A4D21E-F209-4718-B58C-BDAF7D84EE4A}" type="presParOf" srcId="{EF2A7441-C1BC-423D-B252-E227ADA6C86F}" destId="{4F2BD527-7A69-453C-A362-1B878DE41469}" srcOrd="3" destOrd="0" presId="urn:microsoft.com/office/officeart/2018/2/layout/IconCircleList"/>
-    <dgm:cxn modelId="{D97055B2-7524-45C8-8C38-21CFEA467DDB}" type="presParOf" srcId="{E022E521-2ECE-4B1B-B0F5-08C32447C4EC}" destId="{2979BA28-EFF1-48E1-A290-924303AFCF87}" srcOrd="1" destOrd="0" presId="urn:microsoft.com/office/officeart/2018/2/layout/IconCircleList"/>
-    <dgm:cxn modelId="{46E12E89-AFAF-4369-85C0-F436FFE37184}" type="presParOf" srcId="{E022E521-2ECE-4B1B-B0F5-08C32447C4EC}" destId="{BD60DD8B-F5B6-4390-A931-5E97D66C9C0C}" srcOrd="2" destOrd="0" presId="urn:microsoft.com/office/officeart/2018/2/layout/IconCircleList"/>
-    <dgm:cxn modelId="{E8895ACA-E416-4216-A893-CEE7486F5238}" type="presParOf" srcId="{BD60DD8B-F5B6-4390-A931-5E97D66C9C0C}" destId="{C7DBEAE4-1142-4F9B-86A6-DB8D4D622A45}" srcOrd="0" destOrd="0" presId="urn:microsoft.com/office/officeart/2018/2/layout/IconCircleList"/>
-    <dgm:cxn modelId="{DBC62CEF-DB3F-4361-B1DE-C3403BA1BB62}" type="presParOf" srcId="{BD60DD8B-F5B6-4390-A931-5E97D66C9C0C}" destId="{1104C50E-2502-457B-94CD-8347CEF8DEC1}" srcOrd="1" destOrd="0" presId="urn:microsoft.com/office/officeart/2018/2/layout/IconCircleList"/>
-    <dgm:cxn modelId="{3A3A5307-E3FC-453F-B316-3781B5BEA0DD}" type="presParOf" srcId="{BD60DD8B-F5B6-4390-A931-5E97D66C9C0C}" destId="{CF9E9C44-B6D2-453E-BEFC-8BB71362971A}" srcOrd="2" destOrd="0" presId="urn:microsoft.com/office/officeart/2018/2/layout/IconCircleList"/>
-    <dgm:cxn modelId="{1B237617-75EF-4AEA-97B9-731C90345E4D}" type="presParOf" srcId="{BD60DD8B-F5B6-4390-A931-5E97D66C9C0C}" destId="{76F10EC3-0DD8-4A6D-92DA-4D1BB60172A1}" srcOrd="3" destOrd="0" presId="urn:microsoft.com/office/officeart/2018/2/layout/IconCircleList"/>
-    <dgm:cxn modelId="{790E8398-3987-49CA-BFC3-9C08A3769A99}" type="presParOf" srcId="{E022E521-2ECE-4B1B-B0F5-08C32447C4EC}" destId="{C1AA340A-7DFC-4203-BFD2-ED055C4428C7}" srcOrd="3" destOrd="0" presId="urn:microsoft.com/office/officeart/2018/2/layout/IconCircleList"/>
-    <dgm:cxn modelId="{C0A6F058-A926-4FFA-9ADB-C79F7A49A7ED}" type="presParOf" srcId="{E022E521-2ECE-4B1B-B0F5-08C32447C4EC}" destId="{D123015F-D959-4C84-9F00-23FDE5CBA6DC}" srcOrd="4" destOrd="0" presId="urn:microsoft.com/office/officeart/2018/2/layout/IconCircleList"/>
-    <dgm:cxn modelId="{3FFD6CD2-30A0-497D-A81D-73B16A647A5D}" type="presParOf" srcId="{D123015F-D959-4C84-9F00-23FDE5CBA6DC}" destId="{BBE461A2-B2E7-46DE-A126-62502E11067F}" srcOrd="0" destOrd="0" presId="urn:microsoft.com/office/officeart/2018/2/layout/IconCircleList"/>
-    <dgm:cxn modelId="{4E1B50E6-159E-47EE-A031-5FBC107090B9}" type="presParOf" srcId="{D123015F-D959-4C84-9F00-23FDE5CBA6DC}" destId="{FD71E8D5-16B4-415A-B0E3-81144A10AB87}" srcOrd="1" destOrd="0" presId="urn:microsoft.com/office/officeart/2018/2/layout/IconCircleList"/>
-    <dgm:cxn modelId="{37222604-8B15-4D56-B2FF-A7AFA6E6B924}" type="presParOf" srcId="{D123015F-D959-4C84-9F00-23FDE5CBA6DC}" destId="{14B1CD91-934E-49B4-A2DA-DFBBCCCD3D50}" srcOrd="2" destOrd="0" presId="urn:microsoft.com/office/officeart/2018/2/layout/IconCircleList"/>
-    <dgm:cxn modelId="{746EF720-18CD-4C4D-9CF8-A07E66414CE0}" type="presParOf" srcId="{D123015F-D959-4C84-9F00-23FDE5CBA6DC}" destId="{5EAB437F-7FAD-4E35-8756-182559BF323E}" srcOrd="3" destOrd="0" presId="urn:microsoft.com/office/officeart/2018/2/layout/IconCircleList"/>
-  </dgm:cxnLst>
-  <dgm:bg/>
-  <dgm:whole/>
-  <dgm:extLst>
-    <a:ext uri="http://schemas.microsoft.com/office/drawing/2008/diagram">
-      <dsp:dataModelExt xmlns:dsp="http://schemas.microsoft.com/office/drawing/2008/diagram" relId="rId6" minVer="http://schemas.openxmlformats.org/drawingml/2006/diagram"/>
-    </a:ext>
-  </dgm:extLst>
-</dgm:dataModel>
+<file path=ppt/diagrams/colors2.xml><?xml version="1.0" encoding="utf-8"?>
+<dgm:colorsDef xmlns:dgm="http://schemas.openxmlformats.org/drawingml/2006/diagram" xmlns:a="http://schemas.openxmlformats.org/drawingml/2006/main" uniqueId="urn:microsoft.com/office/officeart/2018/5/colors/Iconchunking_neutralbg_colorful1">
+  <dgm:title val=""/>
+  <dgm:desc val=""/>
+  <dgm:catLst>
+    <dgm:cat type="colorful" pri="10100"/>
+  </dgm:catLst>
+  <dgm:styleLbl name="node0">
+    <dgm:fillClrLst meth="repeat">
+      <a:schemeClr val="accent1"/>
+    </dgm:fillClrLst>
+    <dgm:linClrLst meth="repeat">
+      <a:schemeClr val="lt1"/>
+    </dgm:linClrLst>
+    <dgm:effectClrLst/>
+    <dgm:txLinClrLst/>
+    <dgm:txFillClrLst/>
+    <dgm:txEffectClrLst/>
+  </dgm:styleLbl>
+  <dgm:styleLbl name="node1">
+    <dgm:fillClrLst meth="repeat">
+      <a:schemeClr val="accent2"/>
+      <a:schemeClr val="accent3"/>
+      <a:schemeClr val="accent4"/>
+      <a:schemeClr val="accent5"/>
+      <a:schemeClr val="accent6"/>
+    </dgm:fillClrLst>
+    <dgm:linClrLst meth="repeat">
+      <a:schemeClr val="lt1">
+        <a:alpha val="0"/>
+      </a:schemeClr>
+    </dgm:linClrLst>
+    <dgm:effectClrLst/>
+    <dgm:txLinClrLst/>
+    <dgm:txFillClrLst/>
+    <dgm:txEffectClrLst/>
+  </dgm:styleLbl>
+  <dgm:styleLbl name="alignNode1">
+    <dgm:fillClrLst meth="repeat">
+      <a:schemeClr val="accent2"/>
+      <a:schemeClr val="accent3"/>
+      <a:schemeClr val="accent4"/>
+      <a:schemeClr val="accent5"/>
+      <a:schemeClr val="accent6"/>
+    </dgm:fillClrLst>
+    <dgm:linClrLst meth="repeat">
+      <a:schemeClr val="accent2"/>
+      <a:schemeClr val="accent3"/>
+      <a:schemeClr val="accent4"/>
+      <a:schemeClr val="accent5"/>
+      <a:schemeClr val="accent6"/>
+    </dgm:linClrLst>
+    <dgm:effectClrLst/>
+    <dgm:txLinClrLst/>
+    <dgm:txFillClrLst/>
+    <dgm:txEffectClrLst/>
+  </dgm:styleLbl>
+  <dgm:styleLbl name="lnNode1">
+    <dgm:fillClrLst meth="repeat">
+      <a:schemeClr val="accent2"/>
+      <a:schemeClr val="accent3"/>
+      <a:schemeClr val="accent4"/>
+      <a:schemeClr val="accent5"/>
+      <a:schemeClr val="accent6"/>
+    </dgm:fillClrLst>
+    <dgm:linClrLst meth="repeat">
+      <a:schemeClr val="lt1"/>
+    </dgm:linClrLst>
+    <dgm:effectClrLst/>
+    <dgm:txLinClrLst/>
+    <dgm:txFillClrLst/>
+    <dgm:txEffectClrLst/>
+  </dgm:styleLbl>
+  <dgm:styleLbl name="vennNode1">
+    <dgm:fillClrLst meth="repeat">
+      <a:schemeClr val="accent2">
+        <a:alpha val="50000"/>
+      </a:schemeClr>
+      <a:schemeClr val="accent3">
+        <a:alpha val="50000"/>
+      </a:schemeClr>
+      <a:schemeClr val="accent4">
+        <a:alpha val="50000"/>
+      </a:schemeClr>
+      <a:schemeClr val="accent5">
+        <a:alpha val="50000"/>
+      </a:schemeClr>
+      <a:schemeClr val="accent6">
+        <a:alpha val="50000"/>
+      </a:schemeClr>
+    </dgm:fillClrLst>
+    <dgm:linClrLst meth="repeat">
+      <a:schemeClr val="lt1"/>
+    </dgm:linClrLst>
+    <dgm:effectClrLst/>
+    <dgm:txLinClrLst/>
+    <dgm:txFillClrLst/>
+    <dgm:txEffectClrLst/>
+  </dgm:styleLbl>
+  <dgm:styleLbl name="node2">
+    <dgm:fillClrLst>
+      <a:schemeClr val="accent2"/>
+    </dgm:fillClrLst>
+    <dgm:linClrLst meth="repeat">
+      <a:schemeClr val="lt1"/>
+    </dgm:linClrLst>
+    <dgm:effectClrLst/>
+    <dgm:txLinClrLst/>
+    <dgm:txFillClrLst/>
+    <dgm:txEffectClrLst/>
+  </dgm:styleLbl>
+  <dgm:styleLbl name="node3">
+    <dgm:fillClrLst>
+      <a:schemeClr val="accent3"/>
+    </dgm:fillClrLst>
+    <dgm:linClrLst meth="repeat">
+      <a:schemeClr val="lt1"/>
+    </dgm:linClrLst>
+    <dgm:effectClrLst/>
+    <dgm:txLinClrLst/>
+    <dgm:txFillClrLst/>
+    <dgm:txEffectClrLst/>
+  </dgm:styleLbl>
+  <dgm:styleLbl name="node4">
+    <dgm:fillClrLst>
+      <a:schemeClr val="accent4"/>
+    </dgm:fillClrLst>
+    <dgm:linClrLst meth="repeat">
+      <a:schemeClr val="lt1"/>
+    </dgm:linClrLst>
+    <dgm:effectClrLst/>
+    <dgm:txLinClrLst/>
+    <dgm:txFillClrLst/>
+    <dgm:txEffectClrLst/>
+  </dgm:styleLbl>
+  <dgm:styleLbl name="fgImgPlace1">
+    <dgm:fillClrLst meth="repeat">
+      <a:schemeClr val="accent2">
+        <a:tint val="50000"/>
+      </a:schemeClr>
+      <a:schemeClr val="accent3">
+        <a:tint val="50000"/>
+      </a:schemeClr>
+      <a:schemeClr val="accent4">
+        <a:tint val="50000"/>
+      </a:schemeClr>
+      <a:schemeClr val="accent5">
+        <a:tint val="50000"/>
+      </a:schemeClr>
+      <a:schemeClr val="accent6">
+        <a:tint val="50000"/>
+      </a:schemeClr>
+    </dgm:fillClrLst>
+    <dgm:linClrLst meth="repeat">
+      <a:schemeClr val="lt1"/>
+    </dgm:linClrLst>
+    <dgm:effectClrLst/>
+    <dgm:txLinClrLst/>
+    <dgm:txFillClrLst meth="repeat">
+      <a:schemeClr val="lt1"/>
+    </dgm:txFillClrLst>
+    <dgm:txEffectClrLst/>
+  </dgm:styleLbl>
+  <dgm:styleLbl name="alignImgPlace1">
+    <dgm:fillClrLst>
+      <a:schemeClr val="accent1">
+        <a:tint val="50000"/>
+      </a:schemeClr>
+      <a:schemeClr val="accent2">
+        <a:tint val="20000"/>
+      </a:schemeClr>
+    </dgm:fillClrLst>
+    <dgm:linClrLst meth="repeat">
+      <a:schemeClr val="lt1"/>
+    </dgm:linClrLst>
+    <dgm:effectClrLst/>
+    <dgm:txLinClrLst/>
+    <dgm:txFillClrLst meth="repeat">
+      <a:schemeClr val="lt1"/>
+    </dgm:txFillClrLst>
+    <dgm:txEffectClrLst/>
+  </dgm:styleLbl>
+  <dgm:styleLbl name="bgImgPlace1">
+    <dgm:fillClrLst>
+      <a:schemeClr val="accent1">
+        <a:tint val="50000"/>
+      </a:schemeClr>
+      <a:schemeClr val="accent2">
+        <a:tint val="20000"/>
+      </a:schemeClr>
+    </dgm:fillClrLst>
+    <dgm:linClrLst meth="repeat">
+      <a:schemeClr val="lt1"/>
+    </dgm:linClrLst>
+    <dgm:effectClrLst/>
+    <dgm:txLinClrLst/>
+    <dgm:txFillClrLst meth="repeat">
+      <a:schemeClr val="lt1"/>
+    </dgm:txFillClrLst>
+    <dgm:txEffectClrLst/>
+  </dgm:styleLbl>
+  <dgm:styleLbl name="sibTrans2D1">
+    <dgm:fillClrLst meth="repeat">
+      <a:schemeClr val="accent2"/>
+      <a:schemeClr val="accent3"/>
+      <a:schemeClr val="accent4"/>
+      <a:schemeClr val="accent5"/>
+      <a:schemeClr val="accent6"/>
+    </dgm:fillClrLst>
+    <dgm:linClrLst meth="cycle">
+      <a:schemeClr val="lt1"/>
+    </dgm:linClrLst>
+    <dgm:effectClrLst/>
+    <dgm:txLinClrLst/>
+    <dgm:txFillClrLst/>
+    <dgm:txEffectClrLst/>
+  </dgm:styleLbl>
+  <dgm:styleLbl name="fgSibTrans2D1">
+    <dgm:fillClrLst meth="repeat">
+      <a:schemeClr val="accent2"/>
+      <a:schemeClr val="accent3"/>
+      <a:schemeClr val="accent4"/>
+      <a:schemeClr val="accent5"/>
+      <a:schemeClr val="accent6"/>
+    </dgm:fillClrLst>
+    <dgm:linClrLst meth="cycle">
+      <a:schemeClr val="lt1"/>
+    </dgm:linClrLst>
+    <dgm:effectClrLst/>
+    <dgm:txLinClrLst/>
+    <dgm:txFillClrLst meth="repeat">
+      <a:schemeClr val="lt1"/>
+    </dgm:txFillClrLst>
+    <dgm:txEffectClrLst/>
+  </dgm:styleLbl>
+  <dgm:styleLbl name="bgSibTrans2D1">
+    <dgm:fillClrLst meth="repeat">
+      <a:schemeClr val="accent2"/>
+      <a:schemeClr val="accent3"/>
+      <a:schemeClr val="accent4"/>
+      <a:schemeClr val="accent5"/>
+      <a:schemeClr val="accent6"/>
+    </dgm:fillClrLst>
+    <dgm:linClrLst meth="cycle">
+      <a:schemeClr val="lt1"/>
+    </dgm:linClrLst>
+    <dgm:effectClrLst/>
+    <dgm:txLinClrLst/>
+    <dgm:txFillClrLst meth="repeat">
+      <a:schemeClr val="lt1"/>
+    </dgm:txFillClrLst>
+    <dgm:txEffectClrLst/>
+  </dgm:styleLbl>
+  <dgm:styleLbl name="sibTrans1D1">
+    <dgm:fillClrLst meth="repeat">
+      <a:schemeClr val="accent2"/>
+      <a:schemeClr val="accent3"/>
+      <a:schemeClr val="accent4"/>
+      <a:schemeClr val="accent5"/>
+      <a:schemeClr val="accent6"/>
+    </dgm:fillClrLst>
+    <dgm:linClrLst meth="repeat">
+      <a:schemeClr val="accent2"/>
+      <a:schemeClr val="accent3"/>
+      <a:schemeClr val="accent4"/>
+      <a:schemeClr val="accent5"/>
+      <a:schemeClr val="accent6"/>
+    </dgm:linClrLst>
+    <dgm:effectClrLst/>
+    <dgm:txLinClrLst/>
+    <dgm:txFillClrLst meth="repeat">
+      <a:schemeClr val="tx1"/>
+    </dgm:txFillClrLst>
+    <dgm:txEffectClrLst/>
+  </dgm:styleLbl>
+  <dgm:styleLbl name="callout">
+    <dgm:fillClrLst meth="repeat">
+      <a:schemeClr val="accent2"/>
+    </dgm:fillClrLst>
+    <dgm:linClrLst meth="repeat">
+      <a:schemeClr val="accent2">
+        <a:tint val="50000"/>
+      </a:schemeClr>
+    </dgm:linClrLst>
+    <dgm:effectClrLst/>
+    <dgm:txLinClrLst/>
+    <dgm:txFillClrLst meth="repeat">
+      <a:schemeClr val="tx1"/>
+    </dgm:txFillClrLst>
+    <dgm:txEffectClrLst/>
+  </dgm:styleLbl>
+  <dgm:styleLbl name="asst0">
+    <dgm:fillClrLst meth="repeat">
+      <a:schemeClr val="accent1"/>
+    </dgm:fillClrLst>
+    <dgm:linClrLst meth="repeat">
+      <a:schemeClr val="lt1"/>
+    </dgm:linClrLst>
+    <dgm:effectClrLst/>
+    <dgm:txLinClrLst/>
+    <dgm:txFillClrLst/>
+    <dgm:txEffectClrLst/>
+  </dgm:styleLbl>
+  <dgm:styleLbl name="asst1">
+    <dgm:fillClrLst meth="repeat">
+      <a:schemeClr val="accent2"/>
+    </dgm:fillClrLst>
+    <dgm:linClrLst meth="repeat">
+      <a:schemeClr val="lt1"/>
+    </dgm:linClrLst>
+    <dgm:effectClrLst/>
+    <dgm:txLinClrLst/>
+    <dgm:txFillClrLst/>
+    <dgm:txEffectClrLst/>
+  </dgm:styleLbl>
+  <dgm:styleLbl name="asst2">
+    <dgm:fillClrLst>
+      <a:schemeClr val="accent3"/>
+    </dgm:fillClrLst>
+    <dgm:linClrLst meth="repeat">
+      <a:schemeClr val="lt1"/>
+    </dgm:linClrLst>
+    <dgm:effectClrLst/>
+    <dgm:txLinClrLst/>
+    <dgm:txFillClrLst/>
+    <dgm:txEffectClrLst/>
+  </dgm:styleLbl>
+  <dgm:styleLbl name="asst3">
+    <dgm:fillClrLst>
+      <a:schemeClr val="accent4"/>
+    </dgm:fillClrLst>
+    <dgm:linClrLst meth="repeat">
+      <a:schemeClr val="lt1"/>
+    </dgm:linClrLst>
+    <dgm:effectClrLst/>
+    <dgm:txLinClrLst/>
+    <dgm:txFillClrLst/>
+    <dgm:txEffectClrLst/>
+  </dgm:styleLbl>
+  <dgm:styleLbl name="asst4">
+    <dgm:fillClrLst>
+      <a:schemeClr val="accent5"/>
+    </dgm:fillClrLst>
+    <dgm:linClrLst meth="repeat">
+      <a:schemeClr val="lt1"/>
+    </dgm:linClrLst>
+    <dgm:effectClrLst/>
+    <dgm:txLinClrLst/>
+    <dgm:txFillClrLst/>
+    <dgm:txEffectClrLst/>
+  </dgm:styleLbl>
+  <dgm:styleLbl name="parChTrans2D1">
+    <dgm:fillClrLst meth="repeat">
+      <a:schemeClr val="accent2"/>
+    </dgm:fillClrLst>
+    <dgm:linClrLst meth="repeat">
+      <a:schemeClr val="lt1"/>
+    </dgm:linClrLst>
+    <dgm:effectClrLst/>
+    <dgm:txLinClrLst/>
+    <dgm:txFillClrLst meth="repeat">
+      <a:schemeClr val="lt1"/>
+    </dgm:txFillClrLst>
+    <dgm:txEffectClrLst/>
+  </dgm:styleLbl>
+  <dgm:styleLbl name="parChTrans2D2">
+    <dgm:fillClrLst meth="repeat">
+      <a:schemeClr val="accent3"/>
+    </dgm:fillClrLst>
+    <dgm:linClrLst meth="repeat">
+      <a:schemeClr val="lt1"/>
+    </dgm:linClrLst>
+    <dgm:effectClrLst/>
+    <dgm:txLinClrLst/>
+    <dgm:txFillClrLst/>
+    <dgm:txEffectClrLst/>
+  </dgm:styleLbl>
+  <dgm:styleLbl name="parChTrans2D3">
+    <dgm:fillClrLst meth="repeat">
+      <a:schemeClr val="accent4"/>
+    </dgm:fillClrLst>
+    <dgm:linClrLst meth="repeat">
+      <a:schemeClr val="lt1"/>
+    </dgm:linClrLst>
+    <dgm:effectClrLst/>
+    <dgm:txLinClrLst/>
+    <dgm:txFillClrLst/>
+    <dgm:txEffectClrLst/>
+  </dgm:styleLbl>
+  <dgm:styleLbl name="parChTrans2D4">
+    <dgm:fillClrLst meth="repeat">
+      <a:schemeClr val="accent5"/>
+    </dgm:fillClrLst>
+    <dgm:linClrLst meth="repeat">
+      <a:schemeClr val="lt1"/>
+    </dgm:linClrLst>
+    <dgm:effectClrLst/>
+    <dgm:txLinClrLst/>
+    <dgm:txFillClrLst meth="repeat">
+      <a:schemeClr val="lt1"/>
+    </dgm:txFillClrLst>
+    <dgm:txEffectClrLst/>
+  </dgm:styleLbl>
+  <dgm:styleLbl name="parChTrans1D1">
+    <dgm:fillClrLst meth="repeat">
+      <a:schemeClr val="accent2"/>
+    </dgm:fillClrLst>
+    <dgm:linClrLst meth="repeat">
+      <a:schemeClr val="accent1"/>
+    </dgm:linClrLst>
+    <dgm:effectClrLst/>
+    <dgm:txLinClrLst/>
+    <dgm:txFillClrLst meth="repeat">
+      <a:schemeClr val="tx1"/>
+    </dgm:txFillClrLst>
+    <dgm:txEffectClrLst/>
+  </dgm:styleLbl>
+  <dgm:styleLbl name="parChTrans1D2">
+    <dgm:fillClrLst meth="repeat">
+      <a:schemeClr val="accent3">
+        <a:tint val="90000"/>
+      </a:schemeClr>
+    </dgm:fillClrLst>
+    <dgm:linClrLst meth="repeat">
+      <a:schemeClr val="accent2"/>
+    </dgm:linClrLst>
+    <dgm:effectClrLst/>
+    <dgm:txLinClrLst/>
+    <dgm:txFillClrLst meth="repeat">
+      <a:schemeClr val="tx1"/>
+    </dgm:txFillClrLst>
+    <dgm:txEffectClrLst/>
+  </dgm:styleLbl>
+  <dgm:styleLbl name="parChTrans1D3">
+    <dgm:fillClrLst meth="repeat">
+      <a:schemeClr val="accent4">
+        <a:tint val="70000"/>
+      </a:schemeClr>
+    </dgm:fillClrLst>
+    <dgm:linClrLst meth="repeat">
+      <a:schemeClr val="accent3"/>
+    </dgm:linClrLst>
+    <dgm:effectClrLst/>
+    <dgm:txLinClrLst/>
+    <dgm:txFillClrLst meth="repeat">
+      <a:schemeClr val="tx1"/>
+    </dgm:txFillClrLst>
+    <dgm:txEffectClrLst/>
+  </dgm:styleLbl>
+  <dgm:styleLbl name="parChTrans1D4">
+    <dgm:fillClrLst meth="repeat">
+      <a:schemeClr val="accent5">
+        <a:tint val="50000"/>
+      </a:schemeClr>
+    </dgm:fillClrLst>
+    <dgm:linClrLst meth="repeat">
+      <a:schemeClr val="accent4"/>
+    </dgm:linClrLst>
+    <dgm:effectClrLst/>
+    <dgm:txLinClrLst/>
+    <dgm:txFillClrLst meth="repeat">
+      <a:schemeClr val="tx1"/>
+    </dgm:txFillClrLst>
+    <dgm:txEffectClrLst/>
+  </dgm:styleLbl>
+  <dgm:styleLbl name="fgAcc1">
+    <dgm:fillClrLst meth="repeat">
+      <a:schemeClr val="lt1">
+        <a:alpha val="90000"/>
+      </a:schemeClr>
+    </dgm:fillClrLst>
+    <dgm:linClrLst meth="repeat">
+      <a:schemeClr val="accent2"/>
+      <a:schemeClr val="accent3"/>
+      <a:schemeClr val="accent4"/>
+      <a:schemeClr val="accent5"/>
+      <a:schemeClr val="accent6"/>
+    </dgm:linClrLst>
+    <dgm:effectClrLst/>
+    <dgm:txLinClrLst/>
+    <dgm:txFillClrLst meth="repeat">
+      <a:schemeClr val="dk1"/>
+    </dgm:txFillClrLst>
+    <dgm:txEffectClrLst/>
+  </dgm:styleLbl>
+  <dgm:styleLbl name="conFgAcc1">
+    <dgm:fillClrLst meth="repeat">
+      <a:schemeClr val="lt1">
+        <a:alpha val="90000"/>
+      </a:schemeClr>
+    </dgm:fillClrLst>
+    <dgm:linClrLst meth="repeat">
+      <a:schemeClr val="accent2"/>
+      <a:schemeClr val="accent3"/>
+      <a:schemeClr val="accent4"/>
+      <a:schemeClr val="accent5"/>
+      <a:schemeClr val="accent6"/>
+    </dgm:linClrLst>
+    <dgm:effectClrLst/>
+    <dgm:txLinClrLst/>
+    <dgm:txFillClrLst meth="repeat">
+      <a:schemeClr val="dk1"/>
+    </dgm:txFillClrLst>
+    <dgm:txEffectClrLst/>
+  </dgm:styleLbl>
+  <dgm:styleLbl name="alignAcc1">
+    <dgm:fillClrLst meth="repeat">
+      <a:schemeClr val="lt1">
+        <a:alpha val="90000"/>
+      </a:schemeClr>
+    </dgm:fillClrLst>
+    <dgm:linClrLst meth="repeat">
+      <a:schemeClr val="accent2"/>
+      <a:schemeClr val="accent3"/>
+      <a:schemeClr val="accent4"/>
+      <a:schemeClr val="accent5"/>
+      <a:schemeClr val="accent6"/>
+    </dgm:linClrLst>
+    <dgm:effectClrLst/>
+    <dgm:txLinClrLst/>
+    <dgm:txFillClrLst meth="repeat">
+      <a:schemeClr val="dk1"/>
+    </dgm:txFillClrLst>
+    <dgm:txEffectClrLst/>
+  </dgm:styleLbl>
+  <dgm:styleLbl name="trAlignAcc1">
+    <dgm:fillClrLst meth="repeat">
+      <a:schemeClr val="lt1">
+        <a:alpha val="40000"/>
+      </a:schemeClr>
+    </dgm:fillClrLst>
+    <dgm:linClrLst meth="repeat">
+      <a:schemeClr val="accent1"/>
+    </dgm:linClrLst>
+    <dgm:effectClrLst/>
+    <dgm:txLinClrLst/>
+    <dgm:txFillClrLst meth="repeat">
+      <a:schemeClr val="dk1"/>
+    </dgm:txFillClrLst>
+    <dgm:txEffectClrLst/>
+  </dgm:styleLbl>
+  <dgm:styleLbl name="bgAcc1">
+    <dgm:fillClrLst meth="repeat">
+      <a:schemeClr val="lt1">
+        <a:alpha val="90000"/>
+      </a:schemeClr>
+    </dgm:fillClrLst>
+    <dgm:linClrLst meth="repeat">
+      <a:schemeClr val="accent2"/>
+      <a:schemeClr val="accent3"/>
+      <a:schemeClr val="accent4"/>
+      <a:schemeClr val="accent5"/>
+      <a:schemeClr val="accent6"/>
+    </dgm:linClrLst>
+    <dgm:effectClrLst/>
+    <dgm:txLinClrLst/>
+    <dgm:txFillClrLst meth="repeat">
+      <a:schemeClr val="dk1"/>
+    </dgm:txFillClrLst>
+    <dgm:txEffectClrLst/>
+  </dgm:styleLbl>
+  <dgm:styleLbl name="solidFgAcc1">
+    <dgm:fillClrLst meth="repeat">
+      <a:schemeClr val="lt1"/>
+    </dgm:fillClrLst>
+    <dgm:linClrLst meth="repeat">
+      <a:schemeClr val="accent2"/>
+      <a:schemeClr val="accent3"/>
+      <a:schemeClr val="accent4"/>
+      <a:schemeClr val="accent5"/>
+      <a:schemeClr val="accent6"/>
+    </dgm:linClrLst>
+    <dgm:effectClrLst/>
+    <dgm:txLinClrLst/>
+    <dgm:txFillClrLst meth="repeat">
+      <a:schemeClr val="dk1"/>
+    </dgm:txFillClrLst>
+    <dgm:txEffectClrLst/>
+  </dgm:styleLbl>
+  <dgm:styleLbl name="solidAlignAcc1">
+    <dgm:fillClrLst meth="repeat">
+      <a:schemeClr val="lt1"/>
+    </dgm:fillClrLst>
+    <dgm:linClrLst meth="repeat">
+      <a:schemeClr val="accent2"/>
+      <a:schemeClr val="accent3"/>
+      <a:schemeClr val="accent4"/>
+      <a:schemeClr val="accent5"/>
+      <a:schemeClr val="accent6"/>
+    </dgm:linClrLst>
+    <dgm:effectClrLst/>
+    <dgm:txLinClrLst/>
+    <dgm:txFillClrLst meth="repeat">
+      <a:schemeClr val="dk1"/>
+    </dgm:txFillClrLst>
+    <dgm:txEffectClrLst/>
+  </dgm:styleLbl>
+  <dgm:styleLbl name="solidBgAcc1">
+    <dgm:fillClrLst meth="repeat">
+      <a:schemeClr val="lt1"/>
+    </dgm:fillClrLst>
+    <dgm:linClrLst meth="repeat">
+      <a:schemeClr val="accent2"/>
+      <a:schemeClr val="accent3"/>
+      <a:schemeClr val="accent4"/>
+      <a:schemeClr val="accent5"/>
+      <a:schemeClr val="accent6"/>
+    </dgm:linClrLst>
+    <dgm:effectClrLst/>
+    <dgm:txLinClrLst/>
+    <dgm:txFillClrLst meth="repeat">
+      <a:schemeClr val="dk1"/>
+    </dgm:txFillClrLst>
+    <dgm:txEffectClrLst/>
+  </dgm:styleLbl>
+  <dgm:styleLbl name="fgAccFollowNode1">
+    <dgm:fillClrLst meth="repeat">
+      <a:schemeClr val="accent2">
+        <a:tint val="40000"/>
+        <a:alpha val="90000"/>
+      </a:schemeClr>
+      <a:schemeClr val="accent3">
+        <a:tint val="40000"/>
+        <a:alpha val="90000"/>
+      </a:schemeClr>
+      <a:schemeClr val="accent4">
+        <a:tint val="40000"/>
+        <a:alpha val="90000"/>
+      </a:schemeClr>
+      <a:schemeClr val="accent5">
+        <a:tint val="40000"/>
+        <a:alpha val="90000"/>
+      </a:schemeClr>
+      <a:schemeClr val="accent6">
+        <a:tint val="40000"/>
+        <a:alpha val="90000"/>
+      </a:schemeClr>
+    </dgm:fillClrLst>
+    <dgm:linClrLst meth="repeat">
+      <a:schemeClr val="accent2">
+        <a:tint val="40000"/>
+        <a:alpha val="90000"/>
+      </a:schemeClr>
+      <a:schemeClr val="accent3">
+        <a:tint val="40000"/>
+        <a:alpha val="90000"/>
+      </a:schemeClr>
+      <a:schemeClr val="accent4">
+        <a:tint val="40000"/>
+        <a:alpha val="90000"/>
+      </a:schemeClr>
+      <a:schemeClr val="accent5">
+        <a:tint val="40000"/>
+        <a:alpha val="90000"/>
+      </a:schemeClr>
+      <a:schemeClr val="accent6">
+        <a:tint val="40000"/>
+        <a:alpha val="90000"/>
+      </a:schemeClr>
+    </dgm:linClrLst>
+    <dgm:effectClrLst/>
+    <dgm:txLinClrLst/>
+    <dgm:txFillClrLst meth="repeat">
+      <a:schemeClr val="dk1"/>
+    </dgm:txFillClrLst>
+    <dgm:txEffectClrLst/>
+  </dgm:styleLbl>
+  <dgm:styleLbl name="alignAccFollowNode1">
+    <dgm:fillClrLst meth="repeat">
+      <a:schemeClr val="accent2">
+        <a:tint val="40000"/>
+        <a:alpha val="90000"/>
+      </a:schemeClr>
+      <a:schemeClr val="accent3">
+        <a:tint val="40000"/>
+        <a:alpha val="90000"/>
+      </a:schemeClr>
+      <a:schemeClr val="accent4">
+        <a:tint val="40000"/>
+        <a:alpha val="90000"/>
+      </a:schemeClr>
+      <a:schemeClr val="accent5">
+        <a:tint val="40000"/>
+        <a:alpha val="90000"/>
+      </a:schemeClr>
+      <a:schemeClr val="accent6">
+        <a:tint val="40000"/>
+        <a:alpha val="90000"/>
+      </a:schemeClr>
+    </dgm:fillClrLst>
+    <dgm:linClrLst meth="repeat">
+      <a:schemeClr val="accent2">
+        <a:tint val="40000"/>
+        <a:alpha val="90000"/>
+      </a:schemeClr>
+      <a:schemeClr val="accent3">
+        <a:tint val="40000"/>
+        <a:alpha val="90000"/>
+      </a:schemeClr>
+      <a:schemeClr val="accent4">
+        <a:tint val="40000"/>
+        <a:alpha val="90000"/>
+      </a:schemeClr>
+      <a:schemeClr val="accent5">
+        <a:tint val="40000"/>
+        <a:alpha val="90000"/>
+      </a:schemeClr>
+      <a:schemeClr val="accent6">
+        <a:tint val="40000"/>
+        <a:alpha val="90000"/>
+      </a:schemeClr>
+    </dgm:linClrLst>
+    <dgm:effectClrLst/>
+    <dgm:txLinClrLst/>
+    <dgm:txFillClrLst meth="repeat">
+      <a:schemeClr val="dk1"/>
+    </dgm:txFillClrLst>
+    <dgm:txEffectClrLst/>
+  </dgm:styleLbl>
+  <dgm:styleLbl name="bgAccFollowNode1">
+    <dgm:fillClrLst meth="repeat">
+      <a:schemeClr val="accent2">
+        <a:tint val="40000"/>
+        <a:alpha val="90000"/>
+      </a:schemeClr>
+      <a:schemeClr val="accent3">
+        <a:tint val="40000"/>
+        <a:alpha val="90000"/>
+      </a:schemeClr>
+      <a:schemeClr val="accent4">
+        <a:tint val="40000"/>
+        <a:alpha val="90000"/>
+      </a:schemeClr>
+      <a:schemeClr val="accent5">
+        <a:tint val="40000"/>
+        <a:alpha val="90000"/>
+      </a:schemeClr>
+      <a:schemeClr val="accent6">
+        <a:tint val="40000"/>
+        <a:alpha val="90000"/>
+      </a:schemeClr>
+    </dgm:fillClrLst>
+    <dgm:linClrLst meth="repeat">
+      <a:schemeClr val="accent2">
+        <a:tint val="40000"/>
+        <a:alpha val="90000"/>
+      </a:schemeClr>
+      <a:schemeClr val="accent3">
+        <a:tint val="40000"/>
+        <a:alpha val="90000"/>
+      </a:schemeClr>
+      <a:schemeClr val="accent4">
+        <a:tint val="40000"/>
+        <a:alpha val="90000"/>
+      </a:schemeClr>
+      <a:schemeClr val="accent5">
+        <a:tint val="40000"/>
+        <a:alpha val="90000"/>
+      </a:schemeClr>
+      <a:schemeClr val="accent6">
+        <a:tint val="40000"/>
+        <a:alpha val="90000"/>
+      </a:schemeClr>
+    </dgm:linClrLst>
+    <dgm:effectClrLst/>
+    <dgm:txLinClrLst/>
+    <dgm:txFillClrLst meth="repeat">
+      <a:schemeClr val="dk1"/>
+    </dgm:txFillClrLst>
+    <dgm:txEffectClrLst/>
+  </dgm:styleLbl>
+  <dgm:styleLbl name="fgAcc0">
+    <dgm:fillClrLst meth="repeat">
+      <a:schemeClr val="lt1">
+        <a:alpha val="90000"/>
+      </a:schemeClr>
+    </dgm:fillClrLst>
+    <dgm:linClrLst>
+      <a:schemeClr val="accent1"/>
+    </dgm:linClrLst>
+    <dgm:effectClrLst/>
+    <dgm:txLinClrLst/>
+    <dgm:txFillClrLst meth="repeat">
+      <a:schemeClr val="dk1"/>
+    </dgm:txFillClrLst>
+    <dgm:txEffectClrLst/>
+  </dgm:styleLbl>
+  <dgm:styleLbl name="fgAcc2">
+    <dgm:fillClrLst meth="repeat">
+      <a:schemeClr val="lt1">
+        <a:alpha val="90000"/>
+      </a:schemeClr>
+    </dgm:fillClrLst>
+    <dgm:linClrLst>
+      <a:schemeClr val="accent2"/>
+    </dgm:linClrLst>
+    <dgm:effectClrLst/>
+    <dgm:txLinClrLst/>
+    <dgm:txFillClrLst meth="repeat">
+      <a:schemeClr val="dk1"/>
+    </dgm:txFillClrLst>
+    <dgm:txEffectClrLst/>
+  </dgm:styleLbl>
+  <dgm:styleLbl name="fgAcc3">
+    <dgm:fillClrLst meth="repeat">
+      <a:schemeClr val="lt1">
+        <a:alpha val="90000"/>
+      </a:schemeClr>
+    </dgm:fillClrLst>
+    <dgm:linClrLst>
+      <a:schemeClr val="accent3"/>
+    </dgm:linClrLst>
+    <dgm:effectClrLst/>
+    <dgm:txLinClrLst/>
+    <dgm:txFillClrLst meth="repeat">
+      <a:schemeClr val="dk1"/>
+    </dgm:txFillClrLst>
+    <dgm:txEffectClrLst/>
+  </dgm:styleLbl>
+  <dgm:styleLbl name="fgAcc4">
+    <dgm:fillClrLst meth="repeat">
+      <a:schemeClr val="lt1">
+        <a:alpha val="90000"/>
+      </a:schemeClr>
+    </dgm:fillClrLst>
+    <dgm:linClrLst>
+      <a:schemeClr val="accent4"/>
+    </dgm:linClrLst>
+    <dgm:effectClrLst/>
+    <dgm:txLinClrLst/>
+    <dgm:txFillClrLst meth="repeat">
+      <a:schemeClr val="dk1"/>
+    </dgm:txFillClrLst>
+    <dgm:txEffectClrLst/>
+  </dgm:styleLbl>
+  <dgm:styleLbl name="bgShp">
+    <dgm:fillClrLst meth="repeat">
+      <a:schemeClr val="bg1">
+        <a:lumMod val="95000"/>
+      </a:schemeClr>
+    </dgm:fillClrLst>
+    <dgm:linClrLst meth="repeat">
+      <a:schemeClr val="dk1"/>
+    </dgm:linClrLst>
+    <dgm:effectClrLst/>
+    <dgm:txLinClrLst/>
+    <dgm:txFillClrLst meth="repeat">
+      <a:schemeClr val="dk1"/>
+    </dgm:txFillClrLst>
+    <dgm:txEffectClrLst/>
+  </dgm:styleLbl>
+  <dgm:styleLbl name="dkBgShp">
+    <dgm:fillClrLst meth="repeat">
+      <a:schemeClr val="accent2">
+        <a:shade val="90000"/>
+      </a:schemeClr>
+    </dgm:fillClrLst>
+    <dgm:linClrLst meth="repeat">
+      <a:schemeClr val="dk1"/>
+    </dgm:linClrLst>
+    <dgm:effectClrLst/>
+    <dgm:txLinClrLst/>
+    <dgm:txFillClrLst meth="repeat">
+      <a:schemeClr val="lt1"/>
+    </dgm:txFillClrLst>
+    <dgm:txEffectClrLst/>
+  </dgm:styleLbl>
+  <dgm:styleLbl name="trBgShp">
+    <dgm:fillClrLst meth="repeat">
+      <a:schemeClr val="accent1">
+        <a:tint val="50000"/>
+        <a:alpha val="40000"/>
+      </a:schemeClr>
+    </dgm:fillClrLst>
+    <dgm:linClrLst meth="repeat">
+      <a:schemeClr val="accent2"/>
+    </dgm:linClrLst>
+    <dgm:effectClrLst/>
+    <dgm:txLinClrLst/>
+    <dgm:txFillClrLst meth="repeat">
+      <a:schemeClr val="lt1"/>
+    </dgm:txFillClrLst>
+    <dgm:txEffectClrLst/>
+  </dgm:styleLbl>
+  <dgm:styleLbl name="fgShp">
+    <dgm:fillClrLst meth="repeat">
+      <a:schemeClr val="accent2">
+        <a:tint val="40000"/>
+      </a:schemeClr>
+    </dgm:fillClrLst>
+    <dgm:linClrLst meth="repeat">
+      <a:schemeClr val="lt1"/>
+    </dgm:linClrLst>
+    <dgm:effectClrLst/>
+    <dgm:txLinClrLst/>
+    <dgm:txFillClrLst meth="repeat">
+      <a:schemeClr val="dk1"/>
+    </dgm:txFillClrLst>
+    <dgm:txEffectClrLst/>
+  </dgm:styleLbl>
+  <dgm:styleLbl name="revTx">
+    <dgm:fillClrLst meth="repeat">
+      <a:schemeClr val="lt1">
+        <a:alpha val="0"/>
+      </a:schemeClr>
+    </dgm:fillClrLst>
+    <dgm:linClrLst meth="repeat">
+      <a:schemeClr val="dk1">
+        <a:alpha val="0"/>
+      </a:schemeClr>
+    </dgm:linClrLst>
+    <dgm:effectClrLst/>
+    <dgm:txLinClrLst/>
+    <dgm:txFillClrLst meth="repeat">
+      <a:schemeClr val="tx1"/>
+    </dgm:txFillClrLst>
+    <dgm:txEffectClrLst/>
+  </dgm:styleLbl>
+</dgm:colorsDef>
 </file>
 
-<file path=ppt/diagrams/data2.xml><?xml version="1.0" encoding="utf-8"?>
+<file path=ppt/diagrams/data1.xml><?xml version="1.0" encoding="utf-8"?>
 <dgm:dataModel xmlns:dgm="http://schemas.openxmlformats.org/drawingml/2006/diagram" xmlns:a="http://schemas.openxmlformats.org/drawingml/2006/main">
   <dgm:ptLst>
     <dgm:pt modelId="{C0A5E0DA-0C7D-40F5-B443-457FE6C6BFD2}" type="doc">
@@ -2347,66 +2146,212 @@
 </dgm:dataModel>
 </file>
 
-<file path=ppt/diagrams/drawing1.xml><?xml version="1.0" encoding="utf-8"?>
-<dsp:drawing xmlns:dgm="http://schemas.openxmlformats.org/drawingml/2006/diagram" xmlns:dsp="http://schemas.microsoft.com/office/drawing/2008/diagram" xmlns:a="http://schemas.openxmlformats.org/drawingml/2006/main">
-  <dsp:spTree>
-    <dsp:nvGrpSpPr>
-      <dsp:cNvPr id="0" name=""/>
-      <dsp:cNvGrpSpPr/>
-    </dsp:nvGrpSpPr>
-    <dsp:grpSpPr/>
-    <dsp:sp modelId="{93E414F9-4B36-47D2-85A4-92F2324B8007}">
-      <dsp:nvSpPr>
-        <dsp:cNvPr id="0" name=""/>
-        <dsp:cNvSpPr/>
-      </dsp:nvSpPr>
-      <dsp:spPr>
-        <a:xfrm>
-          <a:off x="82613" y="1727046"/>
-          <a:ext cx="897246" cy="897246"/>
-        </a:xfrm>
-        <a:prstGeom prst="ellipse">
-          <a:avLst/>
-        </a:prstGeom>
-        <a:solidFill>
-          <a:schemeClr val="dk2">
-            <a:hueOff val="0"/>
-            <a:satOff val="0"/>
-            <a:lumOff val="0"/>
-            <a:alphaOff val="0"/>
-          </a:schemeClr>
-        </a:solidFill>
-        <a:ln>
-          <a:noFill/>
-        </a:ln>
-        <a:effectLst/>
-      </dsp:spPr>
-      <dsp:style>
-        <a:lnRef idx="0">
-          <a:scrgbClr r="0" g="0" b="0"/>
-        </a:lnRef>
-        <a:fillRef idx="1">
-          <a:scrgbClr r="0" g="0" b="0"/>
-        </a:fillRef>
-        <a:effectRef idx="0">
-          <a:scrgbClr r="0" g="0" b="0"/>
-        </a:effectRef>
-        <a:fontRef idx="minor"/>
-      </dsp:style>
-    </dsp:sp>
-    <dsp:sp modelId="{4C075AF5-7538-474E-9456-45E782241F56}">
-      <dsp:nvSpPr>
-        <dsp:cNvPr id="0" name=""/>
-        <dsp:cNvSpPr/>
-      </dsp:nvSpPr>
-      <dsp:spPr>
-        <a:xfrm>
-          <a:off x="271034" y="1915467"/>
-          <a:ext cx="520402" cy="520402"/>
-        </a:xfrm>
-        <a:prstGeom prst="rect">
-          <a:avLst/>
-        </a:prstGeom>
+<file path=ppt/diagrams/data2.xml><?xml version="1.0" encoding="utf-8"?>
+<dgm:dataModel xmlns:dgm="http://schemas.openxmlformats.org/drawingml/2006/diagram" xmlns:a="http://schemas.openxmlformats.org/drawingml/2006/main">
+  <dgm:ptLst>
+    <dgm:pt modelId="{4C8565CF-E2B6-47FD-A8D0-CF3B61BF3245}" type="doc">
+      <dgm:prSet loTypeId="urn:microsoft.com/office/officeart/2018/2/layout/IconLabelList" loCatId="icon" qsTypeId="urn:microsoft.com/office/officeart/2005/8/quickstyle/simple1" qsCatId="simple" csTypeId="urn:microsoft.com/office/officeart/2018/5/colors/Iconchunking_neutralbg_colorful1" csCatId="colorful" phldr="1"/>
+      <dgm:spPr/>
+      <dgm:t>
+        <a:bodyPr/>
+        <a:lstStyle/>
+        <a:p>
+          <a:endParaRPr lang="en-US"/>
+        </a:p>
+      </dgm:t>
+    </dgm:pt>
+    <dgm:pt modelId="{CF9EAE2B-82F0-4EB9-8A22-DA94D5AB72AE}">
+      <dgm:prSet/>
+      <dgm:spPr/>
+      <dgm:t>
+        <a:bodyPr/>
+        <a:lstStyle/>
+        <a:p>
+          <a:r>
+            <a:rPr lang="en-US"/>
+            <a:t>1. </a:t>
+          </a:r>
+          <a:r>
+            <a:rPr lang="en-US" b="1"/>
+            <a:t>Build an image</a:t>
+          </a:r>
+          <a:r>
+            <a:rPr lang="en-US"/>
+            <a:t>: Developers define the application's environment and dependencies by writing a Dockerfile, then build the image using the `docker build` command.</a:t>
+          </a:r>
+        </a:p>
+      </dgm:t>
+    </dgm:pt>
+    <dgm:pt modelId="{06E666DE-CC10-4B82-99F6-2A4645283377}" type="parTrans" cxnId="{2AB9F796-82D7-4F64-B4DC-48F2910F0212}">
+      <dgm:prSet/>
+      <dgm:spPr/>
+      <dgm:t>
+        <a:bodyPr/>
+        <a:lstStyle/>
+        <a:p>
+          <a:endParaRPr lang="en-US"/>
+        </a:p>
+      </dgm:t>
+    </dgm:pt>
+    <dgm:pt modelId="{18E44D54-BD15-4291-A554-2C580564EDAA}" type="sibTrans" cxnId="{2AB9F796-82D7-4F64-B4DC-48F2910F0212}">
+      <dgm:prSet/>
+      <dgm:spPr/>
+      <dgm:t>
+        <a:bodyPr/>
+        <a:lstStyle/>
+        <a:p>
+          <a:endParaRPr lang="en-US"/>
+        </a:p>
+      </dgm:t>
+    </dgm:pt>
+    <dgm:pt modelId="{5E95DECB-3BA4-4BA0-B459-65627A92A143}">
+      <dgm:prSet/>
+      <dgm:spPr/>
+      <dgm:t>
+        <a:bodyPr/>
+        <a:lstStyle/>
+        <a:p>
+          <a:r>
+            <a:rPr lang="en-US"/>
+            <a:t>2. </a:t>
+          </a:r>
+          <a:r>
+            <a:rPr lang="en-US" b="1"/>
+            <a:t>Distribute the image</a:t>
+          </a:r>
+          <a:r>
+            <a:rPr lang="en-US"/>
+            <a:t>: The built image can be uploaded to a Docker Registry for other users to use.</a:t>
+          </a:r>
+        </a:p>
+      </dgm:t>
+    </dgm:pt>
+    <dgm:pt modelId="{AFB4440A-1B85-48F2-8059-D5E9D038D5B3}" type="parTrans" cxnId="{5EA22C9C-1FFC-4AE7-B173-43FE617378FB}">
+      <dgm:prSet/>
+      <dgm:spPr/>
+      <dgm:t>
+        <a:bodyPr/>
+        <a:lstStyle/>
+        <a:p>
+          <a:endParaRPr lang="en-US"/>
+        </a:p>
+      </dgm:t>
+    </dgm:pt>
+    <dgm:pt modelId="{B2E22E20-0801-44A5-B028-95E187DEBCF8}" type="sibTrans" cxnId="{5EA22C9C-1FFC-4AE7-B173-43FE617378FB}">
+      <dgm:prSet/>
+      <dgm:spPr/>
+      <dgm:t>
+        <a:bodyPr/>
+        <a:lstStyle/>
+        <a:p>
+          <a:endParaRPr lang="en-US"/>
+        </a:p>
+      </dgm:t>
+    </dgm:pt>
+    <dgm:pt modelId="{759CB0C8-9765-4AB1-8111-0C5C35BC5D28}">
+      <dgm:prSet/>
+      <dgm:spPr/>
+      <dgm:t>
+        <a:bodyPr/>
+        <a:lstStyle/>
+        <a:p>
+          <a:r>
+            <a:rPr lang="en-US"/>
+            <a:t>3. </a:t>
+          </a:r>
+          <a:r>
+            <a:rPr lang="en-US" b="1"/>
+            <a:t>Run a container</a:t>
+          </a:r>
+          <a:r>
+            <a:rPr lang="en-US"/>
+            <a:t>: Users can pull images from the Registry and run containers using the `docker run` command.</a:t>
+          </a:r>
+        </a:p>
+      </dgm:t>
+    </dgm:pt>
+    <dgm:pt modelId="{EC667FD2-E4B5-4CD9-9307-10CF55814AFF}" type="parTrans" cxnId="{D20F4139-D5D6-47A6-BF04-8899DBB019B0}">
+      <dgm:prSet/>
+      <dgm:spPr/>
+      <dgm:t>
+        <a:bodyPr/>
+        <a:lstStyle/>
+        <a:p>
+          <a:endParaRPr lang="en-US"/>
+        </a:p>
+      </dgm:t>
+    </dgm:pt>
+    <dgm:pt modelId="{8F726AC8-941F-48B8-A66C-FC2B2143FB0B}" type="sibTrans" cxnId="{D20F4139-D5D6-47A6-BF04-8899DBB019B0}">
+      <dgm:prSet/>
+      <dgm:spPr/>
+      <dgm:t>
+        <a:bodyPr/>
+        <a:lstStyle/>
+        <a:p>
+          <a:endParaRPr lang="en-US"/>
+        </a:p>
+      </dgm:t>
+    </dgm:pt>
+    <dgm:pt modelId="{F64FFE80-8C68-4F46-B1AD-B9F28C62B236}">
+      <dgm:prSet/>
+      <dgm:spPr/>
+      <dgm:t>
+        <a:bodyPr/>
+        <a:lstStyle/>
+        <a:p>
+          <a:r>
+            <a:rPr lang="en-US"/>
+            <a:t>4. </a:t>
+          </a:r>
+          <a:r>
+            <a:rPr lang="en-US" b="1"/>
+            <a:t>Manage containers</a:t>
+          </a:r>
+          <a:r>
+            <a:rPr lang="en-US"/>
+            <a:t>: Users can manage running containers using commands like `docker ps`, `docker stop`, `docker restart`, etc.</a:t>
+          </a:r>
+        </a:p>
+      </dgm:t>
+    </dgm:pt>
+    <dgm:pt modelId="{8B8C149A-5F7E-4D36-90AB-F26EE3C1D115}" type="parTrans" cxnId="{C7E8D66B-8043-4B26-BD26-9B64F7BA20E5}">
+      <dgm:prSet/>
+      <dgm:spPr/>
+      <dgm:t>
+        <a:bodyPr/>
+        <a:lstStyle/>
+        <a:p>
+          <a:endParaRPr lang="en-US"/>
+        </a:p>
+      </dgm:t>
+    </dgm:pt>
+    <dgm:pt modelId="{07BEF38D-D1F8-4FCE-98D6-74C81496B020}" type="sibTrans" cxnId="{C7E8D66B-8043-4B26-BD26-9B64F7BA20E5}">
+      <dgm:prSet/>
+      <dgm:spPr/>
+      <dgm:t>
+        <a:bodyPr/>
+        <a:lstStyle/>
+        <a:p>
+          <a:endParaRPr lang="en-US"/>
+        </a:p>
+      </dgm:t>
+    </dgm:pt>
+    <dgm:pt modelId="{AE1EC1FC-922D-4D5A-8E43-F4DC90840DC3}" type="pres">
+      <dgm:prSet presAssocID="{4C8565CF-E2B6-47FD-A8D0-CF3B61BF3245}" presName="root" presStyleCnt="0">
+        <dgm:presLayoutVars>
+          <dgm:dir/>
+          <dgm:resizeHandles val="exact"/>
+        </dgm:presLayoutVars>
+      </dgm:prSet>
+      <dgm:spPr/>
+    </dgm:pt>
+    <dgm:pt modelId="{BC5F99F3-5A89-440D-AB06-7ECB07370B06}" type="pres">
+      <dgm:prSet presAssocID="{CF9EAE2B-82F0-4EB9-8A22-DA94D5AB72AE}" presName="compNode" presStyleCnt="0"/>
+      <dgm:spPr/>
+    </dgm:pt>
+    <dgm:pt modelId="{66309D32-609D-40C6-A4AD-21FD00804342}" type="pres">
+      <dgm:prSet presAssocID="{CF9EAE2B-82F0-4EB9-8A22-DA94D5AB72AE}" presName="iconRect" presStyleLbl="node1" presStyleIdx="0" presStyleCnt="4"/>
+      <dgm:spPr>
         <a:blipFill>
           <a:blip xmlns:r="http://schemas.openxmlformats.org/officeDocument/2006/relationships" r:embed="rId1">
             <a:extLst>
@@ -2422,148 +2367,40 @@
             <a:fillRect/>
           </a:stretch>
         </a:blipFill>
-        <a:ln w="19050" cap="flat" cmpd="sng" algn="ctr">
-          <a:noFill/>
-          <a:prstDash val="solid"/>
-          <a:miter lim="800000"/>
-        </a:ln>
-        <a:effectLst/>
-      </dsp:spPr>
-      <dsp:style>
-        <a:lnRef idx="2">
-          <a:scrgbClr r="0" g="0" b="0"/>
-        </a:lnRef>
-        <a:fillRef idx="1">
-          <a:scrgbClr r="0" g="0" b="0"/>
-        </a:fillRef>
-        <a:effectRef idx="0">
-          <a:scrgbClr r="0" g="0" b="0"/>
-        </a:effectRef>
-        <a:fontRef idx="minor">
-          <a:schemeClr val="lt1"/>
-        </a:fontRef>
-      </dsp:style>
-    </dsp:sp>
-    <dsp:sp modelId="{4F2BD527-7A69-453C-A362-1B878DE41469}">
-      <dsp:nvSpPr>
-        <dsp:cNvPr id="0" name=""/>
-        <dsp:cNvSpPr/>
-      </dsp:nvSpPr>
-      <dsp:spPr>
-        <a:xfrm>
-          <a:off x="1172126" y="1727046"/>
-          <a:ext cx="2114937" cy="897246"/>
-        </a:xfrm>
-        <a:prstGeom prst="rect">
-          <a:avLst/>
-        </a:prstGeom>
-        <a:noFill/>
         <a:ln>
           <a:noFill/>
         </a:ln>
-        <a:effectLst/>
-      </dsp:spPr>
-      <dsp:style>
-        <a:lnRef idx="0">
-          <a:scrgbClr r="0" g="0" b="0"/>
-        </a:lnRef>
-        <a:fillRef idx="0">
-          <a:scrgbClr r="0" g="0" b="0"/>
-        </a:fillRef>
-        <a:effectRef idx="0">
-          <a:scrgbClr r="0" g="0" b="0"/>
-        </a:effectRef>
-        <a:fontRef idx="minor"/>
-      </dsp:style>
-      <dsp:txBody>
-        <a:bodyPr spcFirstLastPara="0" vert="horz" wrap="square" lIns="0" tIns="0" rIns="0" bIns="0" numCol="1" spcCol="1270" anchor="ctr" anchorCtr="0">
-          <a:noAutofit/>
-        </a:bodyPr>
-        <a:lstStyle/>
-        <a:p>
-          <a:pPr marL="0" lvl="0" indent="0" algn="l" defTabSz="488950">
-            <a:lnSpc>
-              <a:spcPct val="100000"/>
-            </a:lnSpc>
-            <a:spcBef>
-              <a:spcPct val="0"/>
-            </a:spcBef>
-            <a:spcAft>
-              <a:spcPct val="35000"/>
-            </a:spcAft>
-            <a:buNone/>
-          </a:pPr>
-          <a:r>
-            <a:rPr lang="en-US" sz="1100" kern="1200"/>
-            <a:t>Docker is an open platform for developing, shipping, and running applications. It enables you to </a:t>
-          </a:r>
-          <a:r>
-            <a:rPr lang="en-US" sz="1100" b="1" kern="1200"/>
-            <a:t>separate your applications from your infrastructure</a:t>
-          </a:r>
-          <a:r>
-            <a:rPr lang="en-US" sz="1100" kern="1200"/>
-            <a:t> so you can deliver software quickly.</a:t>
-          </a:r>
-        </a:p>
-      </dsp:txBody>
-      <dsp:txXfrm>
-        <a:off x="1172126" y="1727046"/>
-        <a:ext cx="2114937" cy="897246"/>
-      </dsp:txXfrm>
-    </dsp:sp>
-    <dsp:sp modelId="{C7DBEAE4-1142-4F9B-86A6-DB8D4D622A45}">
-      <dsp:nvSpPr>
-        <dsp:cNvPr id="0" name=""/>
-        <dsp:cNvSpPr/>
-      </dsp:nvSpPr>
-      <dsp:spPr>
-        <a:xfrm>
-          <a:off x="3655575" y="1727046"/>
-          <a:ext cx="897246" cy="897246"/>
-        </a:xfrm>
-        <a:prstGeom prst="ellipse">
-          <a:avLst/>
-        </a:prstGeom>
-        <a:solidFill>
-          <a:schemeClr val="dk2">
-            <a:hueOff val="0"/>
-            <a:satOff val="0"/>
-            <a:lumOff val="0"/>
-            <a:alphaOff val="0"/>
-          </a:schemeClr>
-        </a:solidFill>
-        <a:ln>
-          <a:noFill/>
-        </a:ln>
-        <a:effectLst/>
-      </dsp:spPr>
-      <dsp:style>
-        <a:lnRef idx="0">
-          <a:scrgbClr r="0" g="0" b="0"/>
-        </a:lnRef>
-        <a:fillRef idx="1">
-          <a:scrgbClr r="0" g="0" b="0"/>
-        </a:fillRef>
-        <a:effectRef idx="0">
-          <a:scrgbClr r="0" g="0" b="0"/>
-        </a:effectRef>
-        <a:fontRef idx="minor"/>
-      </dsp:style>
-    </dsp:sp>
-    <dsp:sp modelId="{1104C50E-2502-457B-94CD-8347CEF8DEC1}">
-      <dsp:nvSpPr>
-        <dsp:cNvPr id="0" name=""/>
-        <dsp:cNvSpPr/>
-      </dsp:nvSpPr>
-      <dsp:spPr>
-        <a:xfrm>
-          <a:off x="3843996" y="1915467"/>
-          <a:ext cx="520402" cy="520402"/>
-        </a:xfrm>
-        <a:prstGeom prst="rect">
-          <a:avLst/>
-        </a:prstGeom>
+      </dgm:spPr>
+      <dgm:extLst>
+        <a:ext uri="{E40237B7-FDA0-4F09-8148-C483321AD2D9}">
+          <dgm14:cNvPr xmlns:dgm14="http://schemas.microsoft.com/office/drawing/2010/diagram" id="0" name="" descr="挖掘机"/>
+        </a:ext>
+      </dgm:extLst>
+    </dgm:pt>
+    <dgm:pt modelId="{56CCF85F-A7BC-4E4E-BAC5-63D622CEB936}" type="pres">
+      <dgm:prSet presAssocID="{CF9EAE2B-82F0-4EB9-8A22-DA94D5AB72AE}" presName="spaceRect" presStyleCnt="0"/>
+      <dgm:spPr/>
+    </dgm:pt>
+    <dgm:pt modelId="{245C0006-6FFA-4D84-AF63-D4793F65BB15}" type="pres">
+      <dgm:prSet presAssocID="{CF9EAE2B-82F0-4EB9-8A22-DA94D5AB72AE}" presName="textRect" presStyleLbl="revTx" presStyleIdx="0" presStyleCnt="4">
+        <dgm:presLayoutVars>
+          <dgm:chMax val="1"/>
+          <dgm:chPref val="1"/>
+        </dgm:presLayoutVars>
+      </dgm:prSet>
+      <dgm:spPr/>
+    </dgm:pt>
+    <dgm:pt modelId="{332716EB-B28D-4AA4-AFD0-C6D8730A9204}" type="pres">
+      <dgm:prSet presAssocID="{18E44D54-BD15-4291-A554-2C580564EDAA}" presName="sibTrans" presStyleCnt="0"/>
+      <dgm:spPr/>
+    </dgm:pt>
+    <dgm:pt modelId="{EC1627C5-A8C9-496F-8BB3-C3F8C95EB71C}" type="pres">
+      <dgm:prSet presAssocID="{5E95DECB-3BA4-4BA0-B459-65627A92A143}" presName="compNode" presStyleCnt="0"/>
+      <dgm:spPr/>
+    </dgm:pt>
+    <dgm:pt modelId="{32B64A6C-B51B-4384-B029-15B5A807F299}" type="pres">
+      <dgm:prSet presAssocID="{5E95DECB-3BA4-4BA0-B459-65627A92A143}" presName="iconRect" presStyleLbl="node1" presStyleIdx="1" presStyleCnt="4"/>
+      <dgm:spPr>
         <a:blipFill>
           <a:blip xmlns:r="http://schemas.openxmlformats.org/officeDocument/2006/relationships" r:embed="rId3">
             <a:extLst>
@@ -2579,148 +2416,40 @@
             <a:fillRect/>
           </a:stretch>
         </a:blipFill>
-        <a:ln w="19050" cap="flat" cmpd="sng" algn="ctr">
-          <a:noFill/>
-          <a:prstDash val="solid"/>
-          <a:miter lim="800000"/>
-        </a:ln>
-        <a:effectLst/>
-      </dsp:spPr>
-      <dsp:style>
-        <a:lnRef idx="2">
-          <a:scrgbClr r="0" g="0" b="0"/>
-        </a:lnRef>
-        <a:fillRef idx="1">
-          <a:scrgbClr r="0" g="0" b="0"/>
-        </a:fillRef>
-        <a:effectRef idx="0">
-          <a:scrgbClr r="0" g="0" b="0"/>
-        </a:effectRef>
-        <a:fontRef idx="minor">
-          <a:schemeClr val="lt1"/>
-        </a:fontRef>
-      </dsp:style>
-    </dsp:sp>
-    <dsp:sp modelId="{76F10EC3-0DD8-4A6D-92DA-4D1BB60172A1}">
-      <dsp:nvSpPr>
-        <dsp:cNvPr id="0" name=""/>
-        <dsp:cNvSpPr/>
-      </dsp:nvSpPr>
-      <dsp:spPr>
-        <a:xfrm>
-          <a:off x="4745088" y="1727046"/>
-          <a:ext cx="2114937" cy="897246"/>
-        </a:xfrm>
-        <a:prstGeom prst="rect">
-          <a:avLst/>
-        </a:prstGeom>
-        <a:noFill/>
         <a:ln>
           <a:noFill/>
         </a:ln>
-        <a:effectLst/>
-      </dsp:spPr>
-      <dsp:style>
-        <a:lnRef idx="0">
-          <a:scrgbClr r="0" g="0" b="0"/>
-        </a:lnRef>
-        <a:fillRef idx="0">
-          <a:scrgbClr r="0" g="0" b="0"/>
-        </a:fillRef>
-        <a:effectRef idx="0">
-          <a:scrgbClr r="0" g="0" b="0"/>
-        </a:effectRef>
-        <a:fontRef idx="minor"/>
-      </dsp:style>
-      <dsp:txBody>
-        <a:bodyPr spcFirstLastPara="0" vert="horz" wrap="square" lIns="0" tIns="0" rIns="0" bIns="0" numCol="1" spcCol="1270" anchor="ctr" anchorCtr="0">
-          <a:noAutofit/>
-        </a:bodyPr>
-        <a:lstStyle/>
-        <a:p>
-          <a:pPr marL="0" lvl="0" indent="0" algn="l" defTabSz="488950">
-            <a:lnSpc>
-              <a:spcPct val="100000"/>
-            </a:lnSpc>
-            <a:spcBef>
-              <a:spcPct val="0"/>
-            </a:spcBef>
-            <a:spcAft>
-              <a:spcPct val="35000"/>
-            </a:spcAft>
-            <a:buNone/>
-          </a:pPr>
-          <a:r>
-            <a:rPr lang="en-US" sz="1100" b="0" kern="1200" cap="none" spc="0">
-              <a:effectLst>
-                <a:outerShdw blurRad="38100" dist="19050" dir="2700000" algn="tl" rotWithShape="0">
-                  <a:schemeClr val="dk1">
-                    <a:alpha val="40000"/>
-                  </a:schemeClr>
-                </a:outerShdw>
-              </a:effectLst>
-            </a:rPr>
-            <a:t>With Docker, you can package an application and all its dependencies—such as libraries, binaries, and configuration files—into a standardized unit called a container. Containers are lightweight, portable, and isolated, ensuring that your application runs consistently across different environments, whether it’s a developer’s laptop, a test server, or a cloud production system.</a:t>
-          </a:r>
-        </a:p>
-      </dsp:txBody>
-      <dsp:txXfrm>
-        <a:off x="4745088" y="1727046"/>
-        <a:ext cx="2114937" cy="897246"/>
-      </dsp:txXfrm>
-    </dsp:sp>
-    <dsp:sp modelId="{BBE461A2-B2E7-46DE-A126-62502E11067F}">
-      <dsp:nvSpPr>
-        <dsp:cNvPr id="0" name=""/>
-        <dsp:cNvSpPr/>
-      </dsp:nvSpPr>
-      <dsp:spPr>
-        <a:xfrm>
-          <a:off x="7228536" y="1727046"/>
-          <a:ext cx="897246" cy="897246"/>
-        </a:xfrm>
-        <a:prstGeom prst="ellipse">
-          <a:avLst/>
-        </a:prstGeom>
-        <a:solidFill>
-          <a:schemeClr val="dk2">
-            <a:hueOff val="0"/>
-            <a:satOff val="0"/>
-            <a:lumOff val="0"/>
-            <a:alphaOff val="0"/>
-          </a:schemeClr>
-        </a:solidFill>
-        <a:ln>
-          <a:noFill/>
-        </a:ln>
-        <a:effectLst/>
-      </dsp:spPr>
-      <dsp:style>
-        <a:lnRef idx="0">
-          <a:scrgbClr r="0" g="0" b="0"/>
-        </a:lnRef>
-        <a:fillRef idx="1">
-          <a:scrgbClr r="0" g="0" b="0"/>
-        </a:fillRef>
-        <a:effectRef idx="0">
-          <a:scrgbClr r="0" g="0" b="0"/>
-        </a:effectRef>
-        <a:fontRef idx="minor"/>
-      </dsp:style>
-    </dsp:sp>
-    <dsp:sp modelId="{FD71E8D5-16B4-415A-B0E3-81144A10AB87}">
-      <dsp:nvSpPr>
-        <dsp:cNvPr id="0" name=""/>
-        <dsp:cNvSpPr/>
-      </dsp:nvSpPr>
-      <dsp:spPr>
-        <a:xfrm>
-          <a:off x="7416958" y="1915467"/>
-          <a:ext cx="520402" cy="520402"/>
-        </a:xfrm>
-        <a:prstGeom prst="rect">
-          <a:avLst/>
-        </a:prstGeom>
+      </dgm:spPr>
+      <dgm:extLst>
+        <a:ext uri="{E40237B7-FDA0-4F09-8148-C483321AD2D9}">
+          <dgm14:cNvPr xmlns:dgm14="http://schemas.microsoft.com/office/drawing/2010/diagram" id="0" name="" descr="垃圾"/>
+        </a:ext>
+      </dgm:extLst>
+    </dgm:pt>
+    <dgm:pt modelId="{B5DEA512-9642-4740-A7C2-28F80B4BF4E0}" type="pres">
+      <dgm:prSet presAssocID="{5E95DECB-3BA4-4BA0-B459-65627A92A143}" presName="spaceRect" presStyleCnt="0"/>
+      <dgm:spPr/>
+    </dgm:pt>
+    <dgm:pt modelId="{42620BF5-5D22-4D56-8B33-7E578A8D79CB}" type="pres">
+      <dgm:prSet presAssocID="{5E95DECB-3BA4-4BA0-B459-65627A92A143}" presName="textRect" presStyleLbl="revTx" presStyleIdx="1" presStyleCnt="4">
+        <dgm:presLayoutVars>
+          <dgm:chMax val="1"/>
+          <dgm:chPref val="1"/>
+        </dgm:presLayoutVars>
+      </dgm:prSet>
+      <dgm:spPr/>
+    </dgm:pt>
+    <dgm:pt modelId="{51330E8C-4E12-4993-BB76-13D6230992B9}" type="pres">
+      <dgm:prSet presAssocID="{B2E22E20-0801-44A5-B028-95E187DEBCF8}" presName="sibTrans" presStyleCnt="0"/>
+      <dgm:spPr/>
+    </dgm:pt>
+    <dgm:pt modelId="{1F714734-A3DC-44F3-A107-350ED022220F}" type="pres">
+      <dgm:prSet presAssocID="{759CB0C8-9765-4AB1-8111-0C5C35BC5D28}" presName="compNode" presStyleCnt="0"/>
+      <dgm:spPr/>
+    </dgm:pt>
+    <dgm:pt modelId="{7C22AE03-D053-4BA6-9526-F0B45B947F09}" type="pres">
+      <dgm:prSet presAssocID="{759CB0C8-9765-4AB1-8111-0C5C35BC5D28}" presName="iconRect" presStyleLbl="node1" presStyleIdx="2" presStyleCnt="4"/>
+      <dgm:spPr>
         <a:blipFill>
           <a:blip xmlns:r="http://schemas.openxmlformats.org/officeDocument/2006/relationships" r:embed="rId5">
             <a:extLst>
@@ -2736,93 +2465,120 @@
             <a:fillRect/>
           </a:stretch>
         </a:blipFill>
-        <a:ln w="19050" cap="flat" cmpd="sng" algn="ctr">
-          <a:noFill/>
-          <a:prstDash val="solid"/>
-          <a:miter lim="800000"/>
-        </a:ln>
-        <a:effectLst/>
-      </dsp:spPr>
-      <dsp:style>
-        <a:lnRef idx="2">
-          <a:scrgbClr r="0" g="0" b="0"/>
-        </a:lnRef>
-        <a:fillRef idx="1">
-          <a:scrgbClr r="0" g="0" b="0"/>
-        </a:fillRef>
-        <a:effectRef idx="0">
-          <a:scrgbClr r="0" g="0" b="0"/>
-        </a:effectRef>
-        <a:fontRef idx="minor">
-          <a:schemeClr val="lt1"/>
-        </a:fontRef>
-      </dsp:style>
-    </dsp:sp>
-    <dsp:sp modelId="{5EAB437F-7FAD-4E35-8756-182559BF323E}">
-      <dsp:nvSpPr>
-        <dsp:cNvPr id="0" name=""/>
-        <dsp:cNvSpPr/>
-      </dsp:nvSpPr>
-      <dsp:spPr>
-        <a:xfrm>
-          <a:off x="8318049" y="1727046"/>
-          <a:ext cx="2114937" cy="897246"/>
-        </a:xfrm>
-        <a:prstGeom prst="rect">
-          <a:avLst/>
-        </a:prstGeom>
-        <a:noFill/>
         <a:ln>
           <a:noFill/>
         </a:ln>
-        <a:effectLst/>
-      </dsp:spPr>
-      <dsp:style>
-        <a:lnRef idx="0">
-          <a:scrgbClr r="0" g="0" b="0"/>
-        </a:lnRef>
-        <a:fillRef idx="0">
-          <a:scrgbClr r="0" g="0" b="0"/>
-        </a:fillRef>
-        <a:effectRef idx="0">
-          <a:scrgbClr r="0" g="0" b="0"/>
-        </a:effectRef>
-        <a:fontRef idx="minor"/>
-      </dsp:style>
-      <dsp:txBody>
-        <a:bodyPr spcFirstLastPara="0" vert="horz" wrap="square" lIns="0" tIns="0" rIns="0" bIns="0" numCol="1" spcCol="1270" anchor="ctr" anchorCtr="0">
-          <a:noAutofit/>
-        </a:bodyPr>
-        <a:lstStyle/>
-        <a:p>
-          <a:pPr marL="0" lvl="0" indent="0" algn="l" defTabSz="488950">
-            <a:lnSpc>
-              <a:spcPct val="100000"/>
-            </a:lnSpc>
-            <a:spcBef>
-              <a:spcPct val="0"/>
-            </a:spcBef>
-            <a:spcAft>
-              <a:spcPct val="35000"/>
-            </a:spcAft>
-            <a:buNone/>
-          </a:pPr>
-          <a:r>
-            <a:rPr lang="en-US" sz="1100" kern="1200"/>
-            <a:t>Unlike virtual machines, Docker containers share the host operating system kernel, making them faster to start and more efficient in resource usage. Docker provides tools and a platform to manage the full lifecycle of containers: build, distribute, deploy, and update them easily.</a:t>
-          </a:r>
-        </a:p>
-      </dsp:txBody>
-      <dsp:txXfrm>
-        <a:off x="8318049" y="1727046"/>
-        <a:ext cx="2114937" cy="897246"/>
-      </dsp:txXfrm>
-    </dsp:sp>
-  </dsp:spTree>
-</dsp:drawing>
+      </dgm:spPr>
+      <dgm:extLst>
+        <a:ext uri="{E40237B7-FDA0-4F09-8148-C483321AD2D9}">
+          <dgm14:cNvPr xmlns:dgm14="http://schemas.microsoft.com/office/drawing/2010/diagram" id="0" name="" descr="数据库"/>
+        </a:ext>
+      </dgm:extLst>
+    </dgm:pt>
+    <dgm:pt modelId="{ADD8248D-E6EF-4126-B7E8-FEF6C21673AB}" type="pres">
+      <dgm:prSet presAssocID="{759CB0C8-9765-4AB1-8111-0C5C35BC5D28}" presName="spaceRect" presStyleCnt="0"/>
+      <dgm:spPr/>
+    </dgm:pt>
+    <dgm:pt modelId="{7DFA52A9-ECD3-4877-9089-9B1B6E399EA3}" type="pres">
+      <dgm:prSet presAssocID="{759CB0C8-9765-4AB1-8111-0C5C35BC5D28}" presName="textRect" presStyleLbl="revTx" presStyleIdx="2" presStyleCnt="4">
+        <dgm:presLayoutVars>
+          <dgm:chMax val="1"/>
+          <dgm:chPref val="1"/>
+        </dgm:presLayoutVars>
+      </dgm:prSet>
+      <dgm:spPr/>
+    </dgm:pt>
+    <dgm:pt modelId="{E2F38A19-DE0B-46CD-80DA-A3D0CCBE37F9}" type="pres">
+      <dgm:prSet presAssocID="{8F726AC8-941F-48B8-A66C-FC2B2143FB0B}" presName="sibTrans" presStyleCnt="0"/>
+      <dgm:spPr/>
+    </dgm:pt>
+    <dgm:pt modelId="{322BA708-3375-4ED6-A6A5-6D1AA7E4FE85}" type="pres">
+      <dgm:prSet presAssocID="{F64FFE80-8C68-4F46-B1AD-B9F28C62B236}" presName="compNode" presStyleCnt="0"/>
+      <dgm:spPr/>
+    </dgm:pt>
+    <dgm:pt modelId="{AF868EC2-003C-40DF-9246-B7DA37903B19}" type="pres">
+      <dgm:prSet presAssocID="{F64FFE80-8C68-4F46-B1AD-B9F28C62B236}" presName="iconRect" presStyleLbl="node1" presStyleIdx="3" presStyleCnt="4"/>
+      <dgm:spPr>
+        <a:blipFill>
+          <a:blip xmlns:r="http://schemas.openxmlformats.org/officeDocument/2006/relationships" r:embed="rId7">
+            <a:extLst>
+              <a:ext uri="{28A0092B-C50C-407E-A947-70E740481C1C}">
+                <a14:useLocalDpi xmlns:a14="http://schemas.microsoft.com/office/drawing/2010/main" val="0"/>
+              </a:ext>
+              <a:ext uri="{96DAC541-7B7A-43D3-8B79-37D633B846F1}">
+                <asvg:svgBlip xmlns:asvg="http://schemas.microsoft.com/office/drawing/2016/SVG/main" r:embed="rId8"/>
+              </a:ext>
+            </a:extLst>
+          </a:blip>
+          <a:stretch>
+            <a:fillRect/>
+          </a:stretch>
+        </a:blipFill>
+        <a:ln>
+          <a:noFill/>
+        </a:ln>
+      </dgm:spPr>
+      <dgm:extLst>
+        <a:ext uri="{E40237B7-FDA0-4F09-8148-C483321AD2D9}">
+          <dgm14:cNvPr xmlns:dgm14="http://schemas.microsoft.com/office/drawing/2010/diagram" id="0" name="" descr="秒表"/>
+        </a:ext>
+      </dgm:extLst>
+    </dgm:pt>
+    <dgm:pt modelId="{B4D1D9B7-6EB6-48E2-AF49-F7C76034DCCB}" type="pres">
+      <dgm:prSet presAssocID="{F64FFE80-8C68-4F46-B1AD-B9F28C62B236}" presName="spaceRect" presStyleCnt="0"/>
+      <dgm:spPr/>
+    </dgm:pt>
+    <dgm:pt modelId="{676306A9-24DF-4863-A257-2159C4236569}" type="pres">
+      <dgm:prSet presAssocID="{F64FFE80-8C68-4F46-B1AD-B9F28C62B236}" presName="textRect" presStyleLbl="revTx" presStyleIdx="3" presStyleCnt="4">
+        <dgm:presLayoutVars>
+          <dgm:chMax val="1"/>
+          <dgm:chPref val="1"/>
+        </dgm:presLayoutVars>
+      </dgm:prSet>
+      <dgm:spPr/>
+    </dgm:pt>
+  </dgm:ptLst>
+  <dgm:cxnLst>
+    <dgm:cxn modelId="{1D7F4F2B-6398-4266-BF95-05EC55615E6F}" type="presOf" srcId="{5E95DECB-3BA4-4BA0-B459-65627A92A143}" destId="{42620BF5-5D22-4D56-8B33-7E578A8D79CB}" srcOrd="0" destOrd="0" presId="urn:microsoft.com/office/officeart/2018/2/layout/IconLabelList"/>
+    <dgm:cxn modelId="{D20F4139-D5D6-47A6-BF04-8899DBB019B0}" srcId="{4C8565CF-E2B6-47FD-A8D0-CF3B61BF3245}" destId="{759CB0C8-9765-4AB1-8111-0C5C35BC5D28}" srcOrd="2" destOrd="0" parTransId="{EC667FD2-E4B5-4CD9-9307-10CF55814AFF}" sibTransId="{8F726AC8-941F-48B8-A66C-FC2B2143FB0B}"/>
+    <dgm:cxn modelId="{C7E8D66B-8043-4B26-BD26-9B64F7BA20E5}" srcId="{4C8565CF-E2B6-47FD-A8D0-CF3B61BF3245}" destId="{F64FFE80-8C68-4F46-B1AD-B9F28C62B236}" srcOrd="3" destOrd="0" parTransId="{8B8C149A-5F7E-4D36-90AB-F26EE3C1D115}" sibTransId="{07BEF38D-D1F8-4FCE-98D6-74C81496B020}"/>
+    <dgm:cxn modelId="{F9A8B593-BC34-45FE-8B7D-6FC2F5836EED}" type="presOf" srcId="{4C8565CF-E2B6-47FD-A8D0-CF3B61BF3245}" destId="{AE1EC1FC-922D-4D5A-8E43-F4DC90840DC3}" srcOrd="0" destOrd="0" presId="urn:microsoft.com/office/officeart/2018/2/layout/IconLabelList"/>
+    <dgm:cxn modelId="{2AB9F796-82D7-4F64-B4DC-48F2910F0212}" srcId="{4C8565CF-E2B6-47FD-A8D0-CF3B61BF3245}" destId="{CF9EAE2B-82F0-4EB9-8A22-DA94D5AB72AE}" srcOrd="0" destOrd="0" parTransId="{06E666DE-CC10-4B82-99F6-2A4645283377}" sibTransId="{18E44D54-BD15-4291-A554-2C580564EDAA}"/>
+    <dgm:cxn modelId="{5EA22C9C-1FFC-4AE7-B173-43FE617378FB}" srcId="{4C8565CF-E2B6-47FD-A8D0-CF3B61BF3245}" destId="{5E95DECB-3BA4-4BA0-B459-65627A92A143}" srcOrd="1" destOrd="0" parTransId="{AFB4440A-1B85-48F2-8059-D5E9D038D5B3}" sibTransId="{B2E22E20-0801-44A5-B028-95E187DEBCF8}"/>
+    <dgm:cxn modelId="{658B70CE-07F7-4511-BA3A-FFFA0C203551}" type="presOf" srcId="{F64FFE80-8C68-4F46-B1AD-B9F28C62B236}" destId="{676306A9-24DF-4863-A257-2159C4236569}" srcOrd="0" destOrd="0" presId="urn:microsoft.com/office/officeart/2018/2/layout/IconLabelList"/>
+    <dgm:cxn modelId="{7F8B27F0-1306-49B2-B189-B5DA54250C01}" type="presOf" srcId="{CF9EAE2B-82F0-4EB9-8A22-DA94D5AB72AE}" destId="{245C0006-6FFA-4D84-AF63-D4793F65BB15}" srcOrd="0" destOrd="0" presId="urn:microsoft.com/office/officeart/2018/2/layout/IconLabelList"/>
+    <dgm:cxn modelId="{B32948F6-1EA4-4238-B868-78D9F52056FB}" type="presOf" srcId="{759CB0C8-9765-4AB1-8111-0C5C35BC5D28}" destId="{7DFA52A9-ECD3-4877-9089-9B1B6E399EA3}" srcOrd="0" destOrd="0" presId="urn:microsoft.com/office/officeart/2018/2/layout/IconLabelList"/>
+    <dgm:cxn modelId="{8BEA8A9A-CC11-42D5-8B00-8A7CD762D336}" type="presParOf" srcId="{AE1EC1FC-922D-4D5A-8E43-F4DC90840DC3}" destId="{BC5F99F3-5A89-440D-AB06-7ECB07370B06}" srcOrd="0" destOrd="0" presId="urn:microsoft.com/office/officeart/2018/2/layout/IconLabelList"/>
+    <dgm:cxn modelId="{B3675660-52E2-465F-972E-DA4DB4581C22}" type="presParOf" srcId="{BC5F99F3-5A89-440D-AB06-7ECB07370B06}" destId="{66309D32-609D-40C6-A4AD-21FD00804342}" srcOrd="0" destOrd="0" presId="urn:microsoft.com/office/officeart/2018/2/layout/IconLabelList"/>
+    <dgm:cxn modelId="{90385F37-E788-40E7-BF56-A103663CEDE6}" type="presParOf" srcId="{BC5F99F3-5A89-440D-AB06-7ECB07370B06}" destId="{56CCF85F-A7BC-4E4E-BAC5-63D622CEB936}" srcOrd="1" destOrd="0" presId="urn:microsoft.com/office/officeart/2018/2/layout/IconLabelList"/>
+    <dgm:cxn modelId="{DB52A577-EA9B-4AD0-8A1B-092DB1E7236F}" type="presParOf" srcId="{BC5F99F3-5A89-440D-AB06-7ECB07370B06}" destId="{245C0006-6FFA-4D84-AF63-D4793F65BB15}" srcOrd="2" destOrd="0" presId="urn:microsoft.com/office/officeart/2018/2/layout/IconLabelList"/>
+    <dgm:cxn modelId="{5FBA689E-1363-42A5-BD0F-AAC9742BF481}" type="presParOf" srcId="{AE1EC1FC-922D-4D5A-8E43-F4DC90840DC3}" destId="{332716EB-B28D-4AA4-AFD0-C6D8730A9204}" srcOrd="1" destOrd="0" presId="urn:microsoft.com/office/officeart/2018/2/layout/IconLabelList"/>
+    <dgm:cxn modelId="{5D91BD2C-05E8-4480-93BF-CADCDF5B2436}" type="presParOf" srcId="{AE1EC1FC-922D-4D5A-8E43-F4DC90840DC3}" destId="{EC1627C5-A8C9-496F-8BB3-C3F8C95EB71C}" srcOrd="2" destOrd="0" presId="urn:microsoft.com/office/officeart/2018/2/layout/IconLabelList"/>
+    <dgm:cxn modelId="{B96F6F23-14AB-4A0D-82FA-6797E305A31B}" type="presParOf" srcId="{EC1627C5-A8C9-496F-8BB3-C3F8C95EB71C}" destId="{32B64A6C-B51B-4384-B029-15B5A807F299}" srcOrd="0" destOrd="0" presId="urn:microsoft.com/office/officeart/2018/2/layout/IconLabelList"/>
+    <dgm:cxn modelId="{AF9CF0E3-3755-4761-B4D0-FAD7E5ACAB73}" type="presParOf" srcId="{EC1627C5-A8C9-496F-8BB3-C3F8C95EB71C}" destId="{B5DEA512-9642-4740-A7C2-28F80B4BF4E0}" srcOrd="1" destOrd="0" presId="urn:microsoft.com/office/officeart/2018/2/layout/IconLabelList"/>
+    <dgm:cxn modelId="{9CC11CBE-810B-424D-8378-7671F6EC25FE}" type="presParOf" srcId="{EC1627C5-A8C9-496F-8BB3-C3F8C95EB71C}" destId="{42620BF5-5D22-4D56-8B33-7E578A8D79CB}" srcOrd="2" destOrd="0" presId="urn:microsoft.com/office/officeart/2018/2/layout/IconLabelList"/>
+    <dgm:cxn modelId="{732A4760-8D1C-4530-8CFB-B52317E9C3CF}" type="presParOf" srcId="{AE1EC1FC-922D-4D5A-8E43-F4DC90840DC3}" destId="{51330E8C-4E12-4993-BB76-13D6230992B9}" srcOrd="3" destOrd="0" presId="urn:microsoft.com/office/officeart/2018/2/layout/IconLabelList"/>
+    <dgm:cxn modelId="{7679DDF1-8496-4752-8E24-0999268FC061}" type="presParOf" srcId="{AE1EC1FC-922D-4D5A-8E43-F4DC90840DC3}" destId="{1F714734-A3DC-44F3-A107-350ED022220F}" srcOrd="4" destOrd="0" presId="urn:microsoft.com/office/officeart/2018/2/layout/IconLabelList"/>
+    <dgm:cxn modelId="{BBA73224-DC14-4ED7-9091-2B7D189019B0}" type="presParOf" srcId="{1F714734-A3DC-44F3-A107-350ED022220F}" destId="{7C22AE03-D053-4BA6-9526-F0B45B947F09}" srcOrd="0" destOrd="0" presId="urn:microsoft.com/office/officeart/2018/2/layout/IconLabelList"/>
+    <dgm:cxn modelId="{E4072B8F-3294-4C8F-91E7-3C76550F1756}" type="presParOf" srcId="{1F714734-A3DC-44F3-A107-350ED022220F}" destId="{ADD8248D-E6EF-4126-B7E8-FEF6C21673AB}" srcOrd="1" destOrd="0" presId="urn:microsoft.com/office/officeart/2018/2/layout/IconLabelList"/>
+    <dgm:cxn modelId="{BF75C117-EF32-4CCA-91BD-0A4FC6A1A328}" type="presParOf" srcId="{1F714734-A3DC-44F3-A107-350ED022220F}" destId="{7DFA52A9-ECD3-4877-9089-9B1B6E399EA3}" srcOrd="2" destOrd="0" presId="urn:microsoft.com/office/officeart/2018/2/layout/IconLabelList"/>
+    <dgm:cxn modelId="{7DC8C75F-4EAF-4521-9179-95520ACD82B4}" type="presParOf" srcId="{AE1EC1FC-922D-4D5A-8E43-F4DC90840DC3}" destId="{E2F38A19-DE0B-46CD-80DA-A3D0CCBE37F9}" srcOrd="5" destOrd="0" presId="urn:microsoft.com/office/officeart/2018/2/layout/IconLabelList"/>
+    <dgm:cxn modelId="{64E1569F-4A8C-4A9F-91B8-84BDF8F465F2}" type="presParOf" srcId="{AE1EC1FC-922D-4D5A-8E43-F4DC90840DC3}" destId="{322BA708-3375-4ED6-A6A5-6D1AA7E4FE85}" srcOrd="6" destOrd="0" presId="urn:microsoft.com/office/officeart/2018/2/layout/IconLabelList"/>
+    <dgm:cxn modelId="{D5D8C0D2-9505-420B-8913-026FD0AEB38E}" type="presParOf" srcId="{322BA708-3375-4ED6-A6A5-6D1AA7E4FE85}" destId="{AF868EC2-003C-40DF-9246-B7DA37903B19}" srcOrd="0" destOrd="0" presId="urn:microsoft.com/office/officeart/2018/2/layout/IconLabelList"/>
+    <dgm:cxn modelId="{CAAEACDF-0E2F-4CAD-8F76-EED3B9202476}" type="presParOf" srcId="{322BA708-3375-4ED6-A6A5-6D1AA7E4FE85}" destId="{B4D1D9B7-6EB6-48E2-AF49-F7C76034DCCB}" srcOrd="1" destOrd="0" presId="urn:microsoft.com/office/officeart/2018/2/layout/IconLabelList"/>
+    <dgm:cxn modelId="{A36F6770-A983-41FB-B0B8-1488F4C4B778}" type="presParOf" srcId="{322BA708-3375-4ED6-A6A5-6D1AA7E4FE85}" destId="{676306A9-24DF-4863-A257-2159C4236569}" srcOrd="2" destOrd="0" presId="urn:microsoft.com/office/officeart/2018/2/layout/IconLabelList"/>
+  </dgm:cxnLst>
+  <dgm:bg/>
+  <dgm:whole/>
+  <dgm:extLst>
+    <a:ext uri="http://schemas.microsoft.com/office/drawing/2008/diagram">
+      <dsp:dataModelExt xmlns:dsp="http://schemas.microsoft.com/office/drawing/2008/diagram" relId="rId6" minVer="http://schemas.openxmlformats.org/drawingml/2006/diagram"/>
+    </a:ext>
+  </dgm:extLst>
+</dgm:dataModel>
 </file>
 
-<file path=ppt/diagrams/drawing2.xml><?xml version="1.0" encoding="utf-8"?>
+<file path=ppt/diagrams/drawing1.xml><?xml version="1.0" encoding="utf-8"?>
 <dsp:drawing xmlns:dgm="http://schemas.openxmlformats.org/drawingml/2006/diagram" xmlns:dsp="http://schemas.microsoft.com/office/drawing/2008/diagram" xmlns:a="http://schemas.openxmlformats.org/drawingml/2006/main">
   <dsp:spTree>
     <dsp:nvGrpSpPr>
@@ -3358,219 +3114,491 @@
 </dsp:drawing>
 </file>
 
-<file path=ppt/diagrams/layout1.xml><?xml version="1.0" encoding="utf-8"?>
-<dgm:layoutDef xmlns:dgm="http://schemas.openxmlformats.org/drawingml/2006/diagram" xmlns:a="http://schemas.openxmlformats.org/drawingml/2006/main" uniqueId="urn:microsoft.com/office/officeart/2018/2/layout/IconCircleList">
-  <dgm:title val="Icon Circle List"/>
-  <dgm:desc val="Use to show non-sequential or grouped chunks of information accompanied by related visuals. Circular shapes can hold an icon or small picture and corresponding text box shows Level 1 text. Works best for icons or small pictures with medium-length descriptions."/>
-  <dgm:catLst>
-    <dgm:cat type="icon" pri="500"/>
-  </dgm:catLst>
-  <dgm:sampData useDef="1">
-    <dgm:dataModel>
-      <dgm:ptLst/>
-      <dgm:bg/>
-      <dgm:whole/>
-    </dgm:dataModel>
-  </dgm:sampData>
-  <dgm:styleData useDef="1">
-    <dgm:dataModel>
-      <dgm:ptLst/>
-      <dgm:bg/>
-      <dgm:whole/>
-    </dgm:dataModel>
-  </dgm:styleData>
-  <dgm:clrData useDef="1">
-    <dgm:dataModel>
-      <dgm:ptLst/>
-      <dgm:bg/>
-      <dgm:whole/>
-    </dgm:dataModel>
-  </dgm:clrData>
-  <dgm:layoutNode name="root">
-    <dgm:varLst>
-      <dgm:dir/>
-      <dgm:resizeHandles val="exact"/>
-    </dgm:varLst>
-    <dgm:alg type="sp"/>
-    <dgm:shape xmlns:r="http://schemas.openxmlformats.org/officeDocument/2006/relationships" r:blip="">
-      <dgm:adjLst/>
-    </dgm:shape>
-    <dgm:presOf/>
-    <dgm:choose name="Name0">
-      <dgm:if name="Name1" axis="ch" ptType="node" func="cnt" op="lte" val="3">
-        <dgm:constrLst>
-          <dgm:constr type="w" for="ch" forName="container" refType="w"/>
-          <dgm:constr type="h" for="ch" forName="container" refType="h" fact="0.4"/>
-        </dgm:constrLst>
-      </dgm:if>
-      <dgm:else name="Name2">
-        <dgm:constrLst>
-          <dgm:constr type="w" for="ch" forName="container" refType="w"/>
-          <dgm:constr type="h" for="ch" forName="container" refType="h"/>
-        </dgm:constrLst>
-      </dgm:else>
-    </dgm:choose>
-    <dgm:ruleLst>
-      <dgm:rule type="h" for="ch" forName="container" val="INF" fact="NaN" max="NaN"/>
-    </dgm:ruleLst>
-    <dgm:layoutNode name="container">
-      <dgm:varLst>
-        <dgm:dir/>
-        <dgm:resizeHandles val="exact"/>
-      </dgm:varLst>
-      <dgm:choose name="Name3">
-        <dgm:if name="Name4" axis="self" func="var" arg="dir" op="equ" val="norm">
-          <dgm:alg type="snake">
-            <dgm:param type="grDir" val="tL"/>
-            <dgm:param type="flowDir" val="row"/>
-            <dgm:param type="contDir" val="sameDir"/>
-          </dgm:alg>
-        </dgm:if>
-        <dgm:else name="Name5">
-          <dgm:alg type="snake">
-            <dgm:param type="grDir" val="tR"/>
-            <dgm:param type="flowDir" val="row"/>
-            <dgm:param type="contDir" val="sameDir"/>
-          </dgm:alg>
-        </dgm:else>
-      </dgm:choose>
-      <dgm:shape xmlns:r="http://schemas.openxmlformats.org/officeDocument/2006/relationships" r:blip="">
-        <dgm:adjLst/>
-      </dgm:shape>
-      <dgm:presOf/>
-      <dgm:constrLst>
-        <dgm:constr type="w" for="ch" forName="compNode" refType="w"/>
-        <dgm:constr type="h" for="ch" forName="compNode" refType="w" fact="0.28"/>
-        <dgm:constr type="w" for="ch" forName="sibTrans" refType="w" refFor="ch" refForName="compNode" fact="0.115"/>
-        <dgm:constr type="sp" refType="h" op="equ" fact="0.17"/>
-        <dgm:constr type="primFontSz" for="des" ptType="node" op="equ" val="24"/>
-        <dgm:constr type="h" for="des" forName="compNode" op="equ"/>
-        <dgm:constr type="h" for="des" forName="iconBgRect" op="equ"/>
-      </dgm:constrLst>
-      <dgm:ruleLst>
-        <dgm:rule type="w" for="ch" forName="compNode" val="60" fact="NaN" max="NaN"/>
-      </dgm:ruleLst>
-      <dgm:forEach name="Name6" axis="ch" ptType="node">
-        <dgm:layoutNode name="compNode">
-          <dgm:alg type="composite"/>
-          <dgm:shape xmlns:r="http://schemas.openxmlformats.org/officeDocument/2006/relationships" r:blip="">
-            <dgm:adjLst/>
-          </dgm:shape>
-          <dgm:presOf axis="self"/>
-          <dgm:constrLst>
-            <dgm:constr type="w" for="ch" forName="iconBgRect" refType="w" fact="0.28"/>
-            <dgm:constr type="h" for="ch" forName="iconBgRect" refType="w" refFor="ch" refForName="iconBgRect"/>
-            <dgm:constr type="t" for="ch" forName="iconBgRect"/>
-            <dgm:constr type="l" for="ch" forName="iconBgRect"/>
-            <dgm:constr type="w" for="ch" forName="iconRect" refType="w" refFor="ch" refForName="iconBgRect" fact="0.58"/>
-            <dgm:constr type="h" for="ch" forName="iconRect" refType="w" refFor="ch" refForName="iconRect"/>
-            <dgm:constr type="ctrX" for="ch" forName="iconRect" refType="ctrX" refFor="ch" refForName="iconBgRect"/>
-            <dgm:constr type="ctrY" for="ch" forName="iconRect" refType="ctrY" refFor="ch" refForName="iconBgRect"/>
-            <dgm:constr type="w" for="ch" forName="spaceRect" refType="w" fact="0.06"/>
-            <dgm:constr type="h" for="ch" forName="spaceRect" refType="h" refFor="ch" refForName="iconBgRect"/>
-            <dgm:constr type="t" for="ch" forName="spaceRect" refType="t" refFor="ch" refForName="iconBgRect"/>
-            <dgm:constr type="l" for="ch" forName="spaceRect" refType="r" refFor="ch" refForName="iconBgRect"/>
-            <dgm:constr type="h" for="ch" forName="textRect" refType="h" refFor="ch" refForName="iconBgRect"/>
-            <dgm:constr type="t" for="ch" forName="textRect" refType="t" refFor="ch" refForName="iconBgRect"/>
-            <dgm:constr type="l" for="ch" forName="textRect" refType="r" refFor="ch" refForName="spaceRect"/>
-          </dgm:constrLst>
-          <dgm:ruleLst/>
-          <dgm:layoutNode name="iconBgRect" styleLbl="bgShp">
-            <dgm:alg type="sp"/>
-            <dgm:shape xmlns:r="http://schemas.openxmlformats.org/officeDocument/2006/relationships" type="ellipse" r:blip="">
-              <dgm:adjLst/>
-            </dgm:shape>
-            <dgm:presOf/>
-            <dgm:constrLst/>
-            <dgm:ruleLst/>
-          </dgm:layoutNode>
-          <dgm:layoutNode name="iconRect" styleLbl="node1">
-            <dgm:alg type="sp"/>
-            <dgm:shape xmlns:r="http://schemas.openxmlformats.org/officeDocument/2006/relationships" type="rect" r:blip="" blipPhldr="1">
-              <dgm:adjLst/>
-            </dgm:shape>
-            <dgm:presOf/>
-            <dgm:constrLst/>
-            <dgm:ruleLst/>
-          </dgm:layoutNode>
-          <dgm:layoutNode name="spaceRect">
-            <dgm:alg type="sp"/>
-            <dgm:shape xmlns:r="http://schemas.openxmlformats.org/officeDocument/2006/relationships" r:blip="">
-              <dgm:adjLst/>
-            </dgm:shape>
-            <dgm:presOf/>
-            <dgm:constrLst/>
-            <dgm:ruleLst/>
-          </dgm:layoutNode>
-          <dgm:layoutNode name="textRect" styleLbl="revTx">
-            <dgm:varLst>
-              <dgm:chMax val="1"/>
-              <dgm:chPref val="1"/>
-            </dgm:varLst>
-            <dgm:choose name="Name7">
-              <dgm:if name="Name8" func="var" arg="dir" op="equ" val="norm">
-                <dgm:alg type="tx">
-                  <dgm:param type="txAnchorVert" val="mid"/>
-                  <dgm:param type="parTxLTRAlign" val="l"/>
-                  <dgm:param type="shpTxLTRAlignCh" val="l"/>
-                  <dgm:param type="parTxRTLAlign" val="l"/>
-                  <dgm:param type="shpTxRTLAlignCh" val="l"/>
-                </dgm:alg>
-              </dgm:if>
-              <dgm:else name="Name9">
-                <dgm:alg type="tx">
-                  <dgm:param type="txAnchorVert" val="mid"/>
-                  <dgm:param type="parTxLTRAlign" val="r"/>
-                  <dgm:param type="shpTxLTRAlignCh" val="r"/>
-                  <dgm:param type="parTxRTLAlign" val="r"/>
-                  <dgm:param type="shpTxRTLAlignCh" val="r"/>
-                </dgm:alg>
-              </dgm:else>
-            </dgm:choose>
-            <dgm:shape xmlns:r="http://schemas.openxmlformats.org/officeDocument/2006/relationships" type="rect" r:blip="">
-              <dgm:adjLst/>
-            </dgm:shape>
-            <dgm:presOf axis="self" ptType="node"/>
-            <dgm:constrLst>
-              <dgm:constr type="lMarg"/>
-              <dgm:constr type="rMarg"/>
-              <dgm:constr type="tMarg"/>
-              <dgm:constr type="bMarg"/>
-            </dgm:constrLst>
-            <dgm:ruleLst>
-              <dgm:rule type="primFontSz" val="11" fact="NaN" max="NaN"/>
-            </dgm:ruleLst>
-          </dgm:layoutNode>
-        </dgm:layoutNode>
-        <dgm:forEach name="Name10" axis="followSib" ptType="sibTrans" cnt="1">
-          <dgm:layoutNode name="sibTrans">
-            <dgm:alg type="sp"/>
-            <dgm:shape xmlns:r="http://schemas.openxmlformats.org/officeDocument/2006/relationships" type="rect" r:blip="" hideGeom="1">
-              <dgm:adjLst/>
-            </dgm:shape>
-            <dgm:presOf axis="self"/>
-            <dgm:constrLst/>
-            <dgm:ruleLst/>
-          </dgm:layoutNode>
-        </dgm:forEach>
-      </dgm:forEach>
-    </dgm:layoutNode>
-  </dgm:layoutNode>
-  <dgm:extLst>
-    <a:ext uri="{68A01E43-0DF5-4B5B-8FA6-DAF915123BFB}">
-      <dgm1612:lstStyle xmlns:dgm1612="http://schemas.microsoft.com/office/drawing/2016/12/diagram">
-        <a:lvl1pPr>
-          <a:lnSpc>
-            <a:spcPct val="100000"/>
-          </a:lnSpc>
-        </a:lvl1pPr>
-      </dgm1612:lstStyle>
-    </a:ext>
-  </dgm:extLst>
-</dgm:layoutDef>
+<file path=ppt/diagrams/drawing2.xml><?xml version="1.0" encoding="utf-8"?>
+<dsp:drawing xmlns:dgm="http://schemas.openxmlformats.org/drawingml/2006/diagram" xmlns:dsp="http://schemas.microsoft.com/office/drawing/2008/diagram" xmlns:a="http://schemas.openxmlformats.org/drawingml/2006/main">
+  <dsp:spTree>
+    <dsp:nvGrpSpPr>
+      <dsp:cNvPr id="0" name=""/>
+      <dsp:cNvGrpSpPr/>
+    </dsp:nvGrpSpPr>
+    <dsp:grpSpPr/>
+    <dsp:sp modelId="{66309D32-609D-40C6-A4AD-21FD00804342}">
+      <dsp:nvSpPr>
+        <dsp:cNvPr id="0" name=""/>
+        <dsp:cNvSpPr/>
+      </dsp:nvSpPr>
+      <dsp:spPr>
+        <a:xfrm>
+          <a:off x="752566" y="700948"/>
+          <a:ext cx="1066720" cy="1066720"/>
+        </a:xfrm>
+        <a:prstGeom prst="rect">
+          <a:avLst/>
+        </a:prstGeom>
+        <a:blipFill>
+          <a:blip xmlns:r="http://schemas.openxmlformats.org/officeDocument/2006/relationships" r:embed="rId1">
+            <a:extLst>
+              <a:ext uri="{28A0092B-C50C-407E-A947-70E740481C1C}">
+                <a14:useLocalDpi xmlns:a14="http://schemas.microsoft.com/office/drawing/2010/main" val="0"/>
+              </a:ext>
+              <a:ext uri="{96DAC541-7B7A-43D3-8B79-37D633B846F1}">
+                <asvg:svgBlip xmlns:asvg="http://schemas.microsoft.com/office/drawing/2016/SVG/main" r:embed="rId2"/>
+              </a:ext>
+            </a:extLst>
+          </a:blip>
+          <a:stretch>
+            <a:fillRect/>
+          </a:stretch>
+        </a:blipFill>
+        <a:ln w="19050" cap="flat" cmpd="sng" algn="ctr">
+          <a:noFill/>
+          <a:prstDash val="solid"/>
+          <a:miter lim="800000"/>
+        </a:ln>
+        <a:effectLst/>
+      </dsp:spPr>
+      <dsp:style>
+        <a:lnRef idx="2">
+          <a:scrgbClr r="0" g="0" b="0"/>
+        </a:lnRef>
+        <a:fillRef idx="1">
+          <a:scrgbClr r="0" g="0" b="0"/>
+        </a:fillRef>
+        <a:effectRef idx="0">
+          <a:scrgbClr r="0" g="0" b="0"/>
+        </a:effectRef>
+        <a:fontRef idx="minor">
+          <a:schemeClr val="lt1"/>
+        </a:fontRef>
+      </dsp:style>
+    </dsp:sp>
+    <dsp:sp modelId="{245C0006-6FFA-4D84-AF63-D4793F65BB15}">
+      <dsp:nvSpPr>
+        <dsp:cNvPr id="0" name=""/>
+        <dsp:cNvSpPr/>
+      </dsp:nvSpPr>
+      <dsp:spPr>
+        <a:xfrm>
+          <a:off x="100682" y="2110956"/>
+          <a:ext cx="2370489" cy="877500"/>
+        </a:xfrm>
+        <a:prstGeom prst="rect">
+          <a:avLst/>
+        </a:prstGeom>
+        <a:noFill/>
+        <a:ln>
+          <a:noFill/>
+        </a:ln>
+        <a:effectLst/>
+      </dsp:spPr>
+      <dsp:style>
+        <a:lnRef idx="0">
+          <a:scrgbClr r="0" g="0" b="0"/>
+        </a:lnRef>
+        <a:fillRef idx="0">
+          <a:scrgbClr r="0" g="0" b="0"/>
+        </a:fillRef>
+        <a:effectRef idx="0">
+          <a:scrgbClr r="0" g="0" b="0"/>
+        </a:effectRef>
+        <a:fontRef idx="minor"/>
+      </dsp:style>
+      <dsp:txBody>
+        <a:bodyPr spcFirstLastPara="0" vert="horz" wrap="square" lIns="0" tIns="0" rIns="0" bIns="0" numCol="1" spcCol="1270" anchor="t" anchorCtr="0">
+          <a:noAutofit/>
+        </a:bodyPr>
+        <a:lstStyle/>
+        <a:p>
+          <a:pPr marL="0" lvl="0" indent="0" algn="ctr" defTabSz="488950">
+            <a:lnSpc>
+              <a:spcPct val="90000"/>
+            </a:lnSpc>
+            <a:spcBef>
+              <a:spcPct val="0"/>
+            </a:spcBef>
+            <a:spcAft>
+              <a:spcPct val="35000"/>
+            </a:spcAft>
+            <a:buNone/>
+          </a:pPr>
+          <a:r>
+            <a:rPr lang="en-US" sz="1100" kern="1200"/>
+            <a:t>1. </a:t>
+          </a:r>
+          <a:r>
+            <a:rPr lang="en-US" sz="1100" b="1" kern="1200"/>
+            <a:t>Build an image</a:t>
+          </a:r>
+          <a:r>
+            <a:rPr lang="en-US" sz="1100" kern="1200"/>
+            <a:t>: Developers define the application's environment and dependencies by writing a Dockerfile, then build the image using the `docker build` command.</a:t>
+          </a:r>
+        </a:p>
+      </dsp:txBody>
+      <dsp:txXfrm>
+        <a:off x="100682" y="2110956"/>
+        <a:ext cx="2370489" cy="877500"/>
+      </dsp:txXfrm>
+    </dsp:sp>
+    <dsp:sp modelId="{32B64A6C-B51B-4384-B029-15B5A807F299}">
+      <dsp:nvSpPr>
+        <dsp:cNvPr id="0" name=""/>
+        <dsp:cNvSpPr/>
+      </dsp:nvSpPr>
+      <dsp:spPr>
+        <a:xfrm>
+          <a:off x="3537891" y="700948"/>
+          <a:ext cx="1066720" cy="1066720"/>
+        </a:xfrm>
+        <a:prstGeom prst="rect">
+          <a:avLst/>
+        </a:prstGeom>
+        <a:blipFill>
+          <a:blip xmlns:r="http://schemas.openxmlformats.org/officeDocument/2006/relationships" r:embed="rId3">
+            <a:extLst>
+              <a:ext uri="{28A0092B-C50C-407E-A947-70E740481C1C}">
+                <a14:useLocalDpi xmlns:a14="http://schemas.microsoft.com/office/drawing/2010/main" val="0"/>
+              </a:ext>
+              <a:ext uri="{96DAC541-7B7A-43D3-8B79-37D633B846F1}">
+                <asvg:svgBlip xmlns:asvg="http://schemas.microsoft.com/office/drawing/2016/SVG/main" r:embed="rId4"/>
+              </a:ext>
+            </a:extLst>
+          </a:blip>
+          <a:stretch>
+            <a:fillRect/>
+          </a:stretch>
+        </a:blipFill>
+        <a:ln w="19050" cap="flat" cmpd="sng" algn="ctr">
+          <a:noFill/>
+          <a:prstDash val="solid"/>
+          <a:miter lim="800000"/>
+        </a:ln>
+        <a:effectLst/>
+      </dsp:spPr>
+      <dsp:style>
+        <a:lnRef idx="2">
+          <a:scrgbClr r="0" g="0" b="0"/>
+        </a:lnRef>
+        <a:fillRef idx="1">
+          <a:scrgbClr r="0" g="0" b="0"/>
+        </a:fillRef>
+        <a:effectRef idx="0">
+          <a:scrgbClr r="0" g="0" b="0"/>
+        </a:effectRef>
+        <a:fontRef idx="minor">
+          <a:schemeClr val="lt1"/>
+        </a:fontRef>
+      </dsp:style>
+    </dsp:sp>
+    <dsp:sp modelId="{42620BF5-5D22-4D56-8B33-7E578A8D79CB}">
+      <dsp:nvSpPr>
+        <dsp:cNvPr id="0" name=""/>
+        <dsp:cNvSpPr/>
+      </dsp:nvSpPr>
+      <dsp:spPr>
+        <a:xfrm>
+          <a:off x="2886007" y="2110956"/>
+          <a:ext cx="2370489" cy="877500"/>
+        </a:xfrm>
+        <a:prstGeom prst="rect">
+          <a:avLst/>
+        </a:prstGeom>
+        <a:noFill/>
+        <a:ln>
+          <a:noFill/>
+        </a:ln>
+        <a:effectLst/>
+      </dsp:spPr>
+      <dsp:style>
+        <a:lnRef idx="0">
+          <a:scrgbClr r="0" g="0" b="0"/>
+        </a:lnRef>
+        <a:fillRef idx="0">
+          <a:scrgbClr r="0" g="0" b="0"/>
+        </a:fillRef>
+        <a:effectRef idx="0">
+          <a:scrgbClr r="0" g="0" b="0"/>
+        </a:effectRef>
+        <a:fontRef idx="minor"/>
+      </dsp:style>
+      <dsp:txBody>
+        <a:bodyPr spcFirstLastPara="0" vert="horz" wrap="square" lIns="0" tIns="0" rIns="0" bIns="0" numCol="1" spcCol="1270" anchor="t" anchorCtr="0">
+          <a:noAutofit/>
+        </a:bodyPr>
+        <a:lstStyle/>
+        <a:p>
+          <a:pPr marL="0" lvl="0" indent="0" algn="ctr" defTabSz="488950">
+            <a:lnSpc>
+              <a:spcPct val="90000"/>
+            </a:lnSpc>
+            <a:spcBef>
+              <a:spcPct val="0"/>
+            </a:spcBef>
+            <a:spcAft>
+              <a:spcPct val="35000"/>
+            </a:spcAft>
+            <a:buNone/>
+          </a:pPr>
+          <a:r>
+            <a:rPr lang="en-US" sz="1100" kern="1200"/>
+            <a:t>2. </a:t>
+          </a:r>
+          <a:r>
+            <a:rPr lang="en-US" sz="1100" b="1" kern="1200"/>
+            <a:t>Distribute the image</a:t>
+          </a:r>
+          <a:r>
+            <a:rPr lang="en-US" sz="1100" kern="1200"/>
+            <a:t>: The built image can be uploaded to a Docker Registry for other users to use.</a:t>
+          </a:r>
+        </a:p>
+      </dsp:txBody>
+      <dsp:txXfrm>
+        <a:off x="2886007" y="2110956"/>
+        <a:ext cx="2370489" cy="877500"/>
+      </dsp:txXfrm>
+    </dsp:sp>
+    <dsp:sp modelId="{7C22AE03-D053-4BA6-9526-F0B45B947F09}">
+      <dsp:nvSpPr>
+        <dsp:cNvPr id="0" name=""/>
+        <dsp:cNvSpPr/>
+      </dsp:nvSpPr>
+      <dsp:spPr>
+        <a:xfrm>
+          <a:off x="6323216" y="700948"/>
+          <a:ext cx="1066720" cy="1066720"/>
+        </a:xfrm>
+        <a:prstGeom prst="rect">
+          <a:avLst/>
+        </a:prstGeom>
+        <a:blipFill>
+          <a:blip xmlns:r="http://schemas.openxmlformats.org/officeDocument/2006/relationships" r:embed="rId5">
+            <a:extLst>
+              <a:ext uri="{28A0092B-C50C-407E-A947-70E740481C1C}">
+                <a14:useLocalDpi xmlns:a14="http://schemas.microsoft.com/office/drawing/2010/main" val="0"/>
+              </a:ext>
+              <a:ext uri="{96DAC541-7B7A-43D3-8B79-37D633B846F1}">
+                <asvg:svgBlip xmlns:asvg="http://schemas.microsoft.com/office/drawing/2016/SVG/main" r:embed="rId6"/>
+              </a:ext>
+            </a:extLst>
+          </a:blip>
+          <a:stretch>
+            <a:fillRect/>
+          </a:stretch>
+        </a:blipFill>
+        <a:ln w="19050" cap="flat" cmpd="sng" algn="ctr">
+          <a:noFill/>
+          <a:prstDash val="solid"/>
+          <a:miter lim="800000"/>
+        </a:ln>
+        <a:effectLst/>
+      </dsp:spPr>
+      <dsp:style>
+        <a:lnRef idx="2">
+          <a:scrgbClr r="0" g="0" b="0"/>
+        </a:lnRef>
+        <a:fillRef idx="1">
+          <a:scrgbClr r="0" g="0" b="0"/>
+        </a:fillRef>
+        <a:effectRef idx="0">
+          <a:scrgbClr r="0" g="0" b="0"/>
+        </a:effectRef>
+        <a:fontRef idx="minor">
+          <a:schemeClr val="lt1"/>
+        </a:fontRef>
+      </dsp:style>
+    </dsp:sp>
+    <dsp:sp modelId="{7DFA52A9-ECD3-4877-9089-9B1B6E399EA3}">
+      <dsp:nvSpPr>
+        <dsp:cNvPr id="0" name=""/>
+        <dsp:cNvSpPr/>
+      </dsp:nvSpPr>
+      <dsp:spPr>
+        <a:xfrm>
+          <a:off x="5671332" y="2110956"/>
+          <a:ext cx="2370489" cy="877500"/>
+        </a:xfrm>
+        <a:prstGeom prst="rect">
+          <a:avLst/>
+        </a:prstGeom>
+        <a:noFill/>
+        <a:ln>
+          <a:noFill/>
+        </a:ln>
+        <a:effectLst/>
+      </dsp:spPr>
+      <dsp:style>
+        <a:lnRef idx="0">
+          <a:scrgbClr r="0" g="0" b="0"/>
+        </a:lnRef>
+        <a:fillRef idx="0">
+          <a:scrgbClr r="0" g="0" b="0"/>
+        </a:fillRef>
+        <a:effectRef idx="0">
+          <a:scrgbClr r="0" g="0" b="0"/>
+        </a:effectRef>
+        <a:fontRef idx="minor"/>
+      </dsp:style>
+      <dsp:txBody>
+        <a:bodyPr spcFirstLastPara="0" vert="horz" wrap="square" lIns="0" tIns="0" rIns="0" bIns="0" numCol="1" spcCol="1270" anchor="t" anchorCtr="0">
+          <a:noAutofit/>
+        </a:bodyPr>
+        <a:lstStyle/>
+        <a:p>
+          <a:pPr marL="0" lvl="0" indent="0" algn="ctr" defTabSz="488950">
+            <a:lnSpc>
+              <a:spcPct val="90000"/>
+            </a:lnSpc>
+            <a:spcBef>
+              <a:spcPct val="0"/>
+            </a:spcBef>
+            <a:spcAft>
+              <a:spcPct val="35000"/>
+            </a:spcAft>
+            <a:buNone/>
+          </a:pPr>
+          <a:r>
+            <a:rPr lang="en-US" sz="1100" kern="1200"/>
+            <a:t>3. </a:t>
+          </a:r>
+          <a:r>
+            <a:rPr lang="en-US" sz="1100" b="1" kern="1200"/>
+            <a:t>Run a container</a:t>
+          </a:r>
+          <a:r>
+            <a:rPr lang="en-US" sz="1100" kern="1200"/>
+            <a:t>: Users can pull images from the Registry and run containers using the `docker run` command.</a:t>
+          </a:r>
+        </a:p>
+      </dsp:txBody>
+      <dsp:txXfrm>
+        <a:off x="5671332" y="2110956"/>
+        <a:ext cx="2370489" cy="877500"/>
+      </dsp:txXfrm>
+    </dsp:sp>
+    <dsp:sp modelId="{AF868EC2-003C-40DF-9246-B7DA37903B19}">
+      <dsp:nvSpPr>
+        <dsp:cNvPr id="0" name=""/>
+        <dsp:cNvSpPr/>
+      </dsp:nvSpPr>
+      <dsp:spPr>
+        <a:xfrm>
+          <a:off x="9108541" y="700948"/>
+          <a:ext cx="1066720" cy="1066720"/>
+        </a:xfrm>
+        <a:prstGeom prst="rect">
+          <a:avLst/>
+        </a:prstGeom>
+        <a:blipFill>
+          <a:blip xmlns:r="http://schemas.openxmlformats.org/officeDocument/2006/relationships" r:embed="rId7">
+            <a:extLst>
+              <a:ext uri="{28A0092B-C50C-407E-A947-70E740481C1C}">
+                <a14:useLocalDpi xmlns:a14="http://schemas.microsoft.com/office/drawing/2010/main" val="0"/>
+              </a:ext>
+              <a:ext uri="{96DAC541-7B7A-43D3-8B79-37D633B846F1}">
+                <asvg:svgBlip xmlns:asvg="http://schemas.microsoft.com/office/drawing/2016/SVG/main" r:embed="rId8"/>
+              </a:ext>
+            </a:extLst>
+          </a:blip>
+          <a:stretch>
+            <a:fillRect/>
+          </a:stretch>
+        </a:blipFill>
+        <a:ln w="19050" cap="flat" cmpd="sng" algn="ctr">
+          <a:noFill/>
+          <a:prstDash val="solid"/>
+          <a:miter lim="800000"/>
+        </a:ln>
+        <a:effectLst/>
+      </dsp:spPr>
+      <dsp:style>
+        <a:lnRef idx="2">
+          <a:scrgbClr r="0" g="0" b="0"/>
+        </a:lnRef>
+        <a:fillRef idx="1">
+          <a:scrgbClr r="0" g="0" b="0"/>
+        </a:fillRef>
+        <a:effectRef idx="0">
+          <a:scrgbClr r="0" g="0" b="0"/>
+        </a:effectRef>
+        <a:fontRef idx="minor">
+          <a:schemeClr val="lt1"/>
+        </a:fontRef>
+      </dsp:style>
+    </dsp:sp>
+    <dsp:sp modelId="{676306A9-24DF-4863-A257-2159C4236569}">
+      <dsp:nvSpPr>
+        <dsp:cNvPr id="0" name=""/>
+        <dsp:cNvSpPr/>
+      </dsp:nvSpPr>
+      <dsp:spPr>
+        <a:xfrm>
+          <a:off x="8456657" y="2110956"/>
+          <a:ext cx="2370489" cy="877500"/>
+        </a:xfrm>
+        <a:prstGeom prst="rect">
+          <a:avLst/>
+        </a:prstGeom>
+        <a:noFill/>
+        <a:ln>
+          <a:noFill/>
+        </a:ln>
+        <a:effectLst/>
+      </dsp:spPr>
+      <dsp:style>
+        <a:lnRef idx="0">
+          <a:scrgbClr r="0" g="0" b="0"/>
+        </a:lnRef>
+        <a:fillRef idx="0">
+          <a:scrgbClr r="0" g="0" b="0"/>
+        </a:fillRef>
+        <a:effectRef idx="0">
+          <a:scrgbClr r="0" g="0" b="0"/>
+        </a:effectRef>
+        <a:fontRef idx="minor"/>
+      </dsp:style>
+      <dsp:txBody>
+        <a:bodyPr spcFirstLastPara="0" vert="horz" wrap="square" lIns="0" tIns="0" rIns="0" bIns="0" numCol="1" spcCol="1270" anchor="t" anchorCtr="0">
+          <a:noAutofit/>
+        </a:bodyPr>
+        <a:lstStyle/>
+        <a:p>
+          <a:pPr marL="0" lvl="0" indent="0" algn="ctr" defTabSz="488950">
+            <a:lnSpc>
+              <a:spcPct val="90000"/>
+            </a:lnSpc>
+            <a:spcBef>
+              <a:spcPct val="0"/>
+            </a:spcBef>
+            <a:spcAft>
+              <a:spcPct val="35000"/>
+            </a:spcAft>
+            <a:buNone/>
+          </a:pPr>
+          <a:r>
+            <a:rPr lang="en-US" sz="1100" kern="1200"/>
+            <a:t>4. </a:t>
+          </a:r>
+          <a:r>
+            <a:rPr lang="en-US" sz="1100" b="1" kern="1200"/>
+            <a:t>Manage containers</a:t>
+          </a:r>
+          <a:r>
+            <a:rPr lang="en-US" sz="1100" kern="1200"/>
+            <a:t>: Users can manage running containers using commands like `docker ps`, `docker stop`, `docker restart`, etc.</a:t>
+          </a:r>
+        </a:p>
+      </dsp:txBody>
+      <dsp:txXfrm>
+        <a:off x="8456657" y="2110956"/>
+        <a:ext cx="2370489" cy="877500"/>
+      </dsp:txXfrm>
+    </dsp:sp>
+  </dsp:spTree>
+</dsp:drawing>
 </file>
 
-<file path=ppt/diagrams/layout2.xml><?xml version="1.0" encoding="utf-8"?>
+<file path=ppt/diagrams/layout1.xml><?xml version="1.0" encoding="utf-8"?>
 <dgm:layoutDef xmlns:dgm="http://schemas.openxmlformats.org/drawingml/2006/diagram" xmlns:a="http://schemas.openxmlformats.org/drawingml/2006/main" uniqueId="urn:microsoft.com/office/officeart/2005/8/layout/hierarchy1">
   <dgm:title val=""/>
   <dgm:desc val=""/>
@@ -4133,6 +4161,196 @@
 </dgm:layoutDef>
 </file>
 
+<file path=ppt/diagrams/layout2.xml><?xml version="1.0" encoding="utf-8"?>
+<dgm:layoutDef xmlns:dgm="http://schemas.openxmlformats.org/drawingml/2006/diagram" xmlns:a="http://schemas.openxmlformats.org/drawingml/2006/main" uniqueId="urn:microsoft.com/office/officeart/2018/2/layout/IconLabelList">
+  <dgm:title val="Icon Label List"/>
+  <dgm:desc val="Use to show non-sequential or grouped chunks of information accompanied by a related visuals. Works best with icons or small pictures with short text captions."/>
+  <dgm:catLst>
+    <dgm:cat type="icon" pri="500"/>
+  </dgm:catLst>
+  <dgm:sampData useDef="1">
+    <dgm:dataModel>
+      <dgm:ptLst/>
+      <dgm:bg/>
+      <dgm:whole/>
+    </dgm:dataModel>
+  </dgm:sampData>
+  <dgm:styleData useDef="1">
+    <dgm:dataModel>
+      <dgm:ptLst/>
+      <dgm:bg/>
+      <dgm:whole/>
+    </dgm:dataModel>
+  </dgm:styleData>
+  <dgm:clrData useDef="1">
+    <dgm:dataModel>
+      <dgm:ptLst/>
+      <dgm:bg/>
+      <dgm:whole/>
+    </dgm:dataModel>
+  </dgm:clrData>
+  <dgm:layoutNode name="root">
+    <dgm:varLst>
+      <dgm:dir/>
+      <dgm:resizeHandles val="exact"/>
+    </dgm:varLst>
+    <dgm:choose name="Name0">
+      <dgm:if name="Name1" axis="self" func="var" arg="dir" op="equ" val="norm">
+        <dgm:alg type="snake">
+          <dgm:param type="grDir" val="tL"/>
+          <dgm:param type="flowDir" val="row"/>
+          <dgm:param type="contDir" val="sameDir"/>
+          <dgm:param type="off" val="ctr"/>
+          <dgm:param type="vertAlign" val="mid"/>
+          <dgm:param type="horzAlign" val="ctr"/>
+        </dgm:alg>
+      </dgm:if>
+      <dgm:else name="Name2">
+        <dgm:alg type="snake">
+          <dgm:param type="grDir" val="tR"/>
+          <dgm:param type="flowDir" val="row"/>
+          <dgm:param type="contDir" val="sameDir"/>
+          <dgm:param type="off" val="ctr"/>
+          <dgm:param type="vertAlign" val="mid"/>
+          <dgm:param type="horzAlign" val="ctr"/>
+        </dgm:alg>
+      </dgm:else>
+    </dgm:choose>
+    <dgm:shape xmlns:r="http://schemas.openxmlformats.org/officeDocument/2006/relationships" r:blip="">
+      <dgm:adjLst/>
+    </dgm:shape>
+    <dgm:presOf/>
+    <dgm:choose name="Name3">
+      <dgm:if name="Name4" axis="ch" ptType="node" func="cnt" op="lte" val="2">
+        <dgm:constrLst>
+          <dgm:constr type="h" for="ch" forName="compNode" refType="h" fact="0.4"/>
+          <dgm:constr type="w" for="ch" forName="compNode" val="120"/>
+          <dgm:constr type="w" for="ch" forName="sibTrans" refType="w" refFor="ch" refForName="compNode" fact="0.175"/>
+          <dgm:constr type="sp" refType="w" refFor="ch" refForName="compNode" op="equ" fact="0.25"/>
+          <dgm:constr type="primFontSz" for="des" ptType="node" op="equ" val="50"/>
+          <dgm:constr type="h" for="des" forName="compNode" op="equ"/>
+          <dgm:constr type="h" for="des" forName="textRect" op="equ"/>
+        </dgm:constrLst>
+      </dgm:if>
+      <dgm:if name="Name5" axis="ch" ptType="node" func="cnt" op="lte" val="4">
+        <dgm:constrLst>
+          <dgm:constr type="h" for="ch" forName="compNode" refType="h" fact="0.4"/>
+          <dgm:constr type="w" for="ch" forName="compNode" refType="w"/>
+          <dgm:constr type="w" for="ch" forName="sibTrans" refType="w" refFor="ch" refForName="compNode" fact="0.175"/>
+          <dgm:constr type="sp" refType="w" refFor="ch" refForName="compNode" op="equ" fact="0.25"/>
+          <dgm:constr type="primFontSz" for="des" ptType="node" op="equ" val="36"/>
+          <dgm:constr type="h" for="des" forName="compNode" op="equ"/>
+          <dgm:constr type="h" for="des" forName="textRect" op="equ"/>
+        </dgm:constrLst>
+      </dgm:if>
+      <dgm:else name="Name6">
+        <dgm:constrLst>
+          <dgm:constr type="h" for="ch" forName="compNode" refType="h" fact="0.4"/>
+          <dgm:constr type="w" for="ch" forName="compNode" refType="w"/>
+          <dgm:constr type="w" for="ch" forName="sibTrans" refType="w" refFor="ch" refForName="compNode" fact="0.175"/>
+          <dgm:constr type="sp" refType="w" refFor="ch" refForName="compNode" op="equ" fact="0.25"/>
+          <dgm:constr type="primFontSz" for="des" ptType="node" op="equ" val="24"/>
+          <dgm:constr type="h" for="des" forName="compNode" op="equ"/>
+          <dgm:constr type="h" for="des" forName="textRect" op="equ"/>
+        </dgm:constrLst>
+      </dgm:else>
+    </dgm:choose>
+    <dgm:ruleLst>
+      <dgm:rule type="w" for="ch" forName="compNode" val="50" fact="NaN" max="NaN"/>
+    </dgm:ruleLst>
+    <dgm:forEach name="Name7" axis="ch" ptType="node">
+      <dgm:layoutNode name="compNode">
+        <dgm:alg type="composite"/>
+        <dgm:shape xmlns:r="http://schemas.openxmlformats.org/officeDocument/2006/relationships" r:blip="">
+          <dgm:adjLst/>
+        </dgm:shape>
+        <dgm:presOf axis="self"/>
+        <dgm:constrLst>
+          <dgm:constr type="w" for="ch" forName="iconRect" refType="w" fact="0.45"/>
+          <dgm:constr type="h" for="ch" forName="iconRect" refType="w" refFor="ch" refForName="iconRect"/>
+          <dgm:constr type="ctrX" for="ch" forName="iconRect" refType="w" fact="0.5"/>
+          <dgm:constr type="t" for="ch" forName="iconRect"/>
+          <dgm:constr type="h" for="ch" forName="spaceRect" refType="h" fact="0.15"/>
+          <dgm:constr type="w" for="ch" forName="spaceRect" refType="w"/>
+          <dgm:constr type="l" for="ch" forName="spaceRect"/>
+          <dgm:constr type="t" for="ch" forName="spaceRect" refType="b" refFor="ch" refForName="iconRect"/>
+          <dgm:constr type="h" for="ch" forName="textRect" val="20"/>
+          <dgm:constr type="w" for="ch" forName="textRect" refType="w"/>
+          <dgm:constr type="l" for="ch" forName="textRect"/>
+          <dgm:constr type="t" for="ch" forName="textRect" refType="b" refFor="ch" refForName="spaceRect"/>
+        </dgm:constrLst>
+        <dgm:ruleLst>
+          <dgm:rule type="h" val="INF" fact="NaN" max="NaN"/>
+        </dgm:ruleLst>
+        <dgm:layoutNode name="iconRect" styleLbl="node1">
+          <dgm:alg type="sp"/>
+          <dgm:shape xmlns:r="http://schemas.openxmlformats.org/officeDocument/2006/relationships" type="rect" r:blip="" blipPhldr="1">
+            <dgm:adjLst/>
+          </dgm:shape>
+          <dgm:presOf/>
+          <dgm:constrLst/>
+          <dgm:ruleLst/>
+        </dgm:layoutNode>
+        <dgm:layoutNode name="spaceRect">
+          <dgm:alg type="sp"/>
+          <dgm:shape xmlns:r="http://schemas.openxmlformats.org/officeDocument/2006/relationships" r:blip="">
+            <dgm:adjLst/>
+          </dgm:shape>
+          <dgm:presOf/>
+          <dgm:constrLst/>
+          <dgm:ruleLst/>
+        </dgm:layoutNode>
+        <dgm:layoutNode name="textRect" styleLbl="revTx">
+          <dgm:varLst>
+            <dgm:chMax val="1"/>
+            <dgm:chPref val="1"/>
+          </dgm:varLst>
+          <dgm:alg type="tx">
+            <dgm:param type="txAnchorVert" val="t"/>
+          </dgm:alg>
+          <dgm:shape xmlns:r="http://schemas.openxmlformats.org/officeDocument/2006/relationships" type="rect" r:blip="">
+            <dgm:adjLst/>
+          </dgm:shape>
+          <dgm:presOf axis="self" ptType="node"/>
+          <dgm:constrLst>
+            <dgm:constr type="lMarg"/>
+            <dgm:constr type="rMarg"/>
+            <dgm:constr type="tMarg"/>
+            <dgm:constr type="bMarg"/>
+          </dgm:constrLst>
+          <dgm:ruleLst>
+            <dgm:rule type="primFontSz" val="11" fact="NaN" max="NaN"/>
+            <dgm:rule type="h" val="INF" fact="NaN" max="NaN"/>
+          </dgm:ruleLst>
+        </dgm:layoutNode>
+      </dgm:layoutNode>
+      <dgm:forEach name="Name8" axis="followSib" ptType="sibTrans" cnt="1">
+        <dgm:layoutNode name="sibTrans">
+          <dgm:alg type="sp"/>
+          <dgm:shape xmlns:r="http://schemas.openxmlformats.org/officeDocument/2006/relationships" r:blip="">
+            <dgm:adjLst/>
+          </dgm:shape>
+          <dgm:presOf axis="self"/>
+          <dgm:constrLst/>
+          <dgm:ruleLst/>
+        </dgm:layoutNode>
+      </dgm:forEach>
+    </dgm:forEach>
+  </dgm:layoutNode>
+  <dgm:extLst>
+    <a:ext uri="{68A01E43-0DF5-4B5B-8FA6-DAF915123BFB}">
+      <dgm1612:lstStyle xmlns:dgm1612="http://schemas.microsoft.com/office/drawing/2016/12/diagram">
+        <a:lvl1pPr>
+          <a:lnSpc>
+            <a:spcPct val="100000"/>
+          </a:lnSpc>
+        </a:lvl1pPr>
+      </dgm1612:lstStyle>
+    </a:ext>
+  </dgm:extLst>
+</dgm:layoutDef>
+</file>
+
 <file path=ppt/diagrams/quickStyle1.xml><?xml version="1.0" encoding="utf-8"?>
 <dgm:styleDef xmlns:dgm="http://schemas.openxmlformats.org/drawingml/2006/diagram" xmlns:a="http://schemas.openxmlformats.org/drawingml/2006/main" uniqueId="urn:microsoft.com/office/officeart/2005/8/quickstyle/simple1">
   <dgm:title val=""/>
@@ -6199,6 +6417,355 @@
     </dgm:style>
   </dgm:styleLbl>
 </dgm:styleDef>
+</file>
+
+<file path=ppt/notesMasters/notesMaster1.xml><?xml version="1.0" encoding="utf-8"?>
+<p:notesMaster xmlns:a="http://schemas.openxmlformats.org/drawingml/2006/main" xmlns:r="http://schemas.openxmlformats.org/officeDocument/2006/relationships" xmlns:p="http://schemas.openxmlformats.org/presentationml/2006/main">
+  <p:cSld>
+    <p:bg>
+      <p:bgRef idx="1001">
+        <a:schemeClr val="bg1"/>
+      </p:bgRef>
+    </p:bg>
+    <p:spTree>
+      <p:nvGrpSpPr>
+        <p:cNvPr id="1" name=""/>
+        <p:cNvGrpSpPr/>
+        <p:nvPr/>
+      </p:nvGrpSpPr>
+      <p:grpSpPr>
+        <a:xfrm>
+          <a:off x="0" y="0"/>
+          <a:ext cx="0" cy="0"/>
+          <a:chOff x="0" y="0"/>
+          <a:chExt cx="0" cy="0"/>
+        </a:xfrm>
+      </p:grpSpPr>
+      <p:sp>
+        <p:nvSpPr>
+          <p:cNvPr id="2" name="页眉占位符 1"/>
+          <p:cNvSpPr>
+            <a:spLocks noGrp="1"/>
+          </p:cNvSpPr>
+          <p:nvPr>
+            <p:ph type="hdr" sz="quarter"/>
+          </p:nvPr>
+        </p:nvSpPr>
+        <p:spPr>
+          <a:xfrm>
+            <a:off x="0" y="0"/>
+            <a:ext cx="2971800" cy="458788"/>
+          </a:xfrm>
+          <a:prstGeom prst="rect">
+            <a:avLst/>
+          </a:prstGeom>
+        </p:spPr>
+        <p:txBody>
+          <a:bodyPr vert="horz" lIns="91440" tIns="45720" rIns="91440" bIns="45720" rtlCol="0"/>
+          <a:lstStyle>
+            <a:lvl1pPr algn="l">
+              <a:defRPr sz="1200"/>
+            </a:lvl1pPr>
+          </a:lstStyle>
+          <a:p>
+            <a:endParaRPr lang="zh-CN" altLang="en-US"/>
+          </a:p>
+        </p:txBody>
+      </p:sp>
+      <p:sp>
+        <p:nvSpPr>
+          <p:cNvPr id="3" name="日期占位符 2"/>
+          <p:cNvSpPr>
+            <a:spLocks noGrp="1"/>
+          </p:cNvSpPr>
+          <p:nvPr>
+            <p:ph type="dt" idx="1"/>
+          </p:nvPr>
+        </p:nvSpPr>
+        <p:spPr>
+          <a:xfrm>
+            <a:off x="3884613" y="0"/>
+            <a:ext cx="2971800" cy="458788"/>
+          </a:xfrm>
+          <a:prstGeom prst="rect">
+            <a:avLst/>
+          </a:prstGeom>
+        </p:spPr>
+        <p:txBody>
+          <a:bodyPr vert="horz" lIns="91440" tIns="45720" rIns="91440" bIns="45720" rtlCol="0"/>
+          <a:lstStyle>
+            <a:lvl1pPr algn="r">
+              <a:defRPr sz="1200"/>
+            </a:lvl1pPr>
+          </a:lstStyle>
+          <a:p>
+            <a:fld id="{FC9F4620-1FA7-46AB-AD2D-7679273AEFAC}" type="datetimeFigureOut">
+              <a:rPr lang="zh-CN" altLang="en-US" smtClean="0"/>
+              <a:t>2026/3/3</a:t>
+            </a:fld>
+            <a:endParaRPr lang="zh-CN" altLang="en-US"/>
+          </a:p>
+        </p:txBody>
+      </p:sp>
+      <p:sp>
+        <p:nvSpPr>
+          <p:cNvPr id="4" name="幻灯片图像占位符 3"/>
+          <p:cNvSpPr>
+            <a:spLocks noGrp="1" noRot="1" noChangeAspect="1"/>
+          </p:cNvSpPr>
+          <p:nvPr>
+            <p:ph type="sldImg" idx="2"/>
+          </p:nvPr>
+        </p:nvSpPr>
+        <p:spPr>
+          <a:xfrm>
+            <a:off x="685800" y="1143000"/>
+            <a:ext cx="5486400" cy="3086100"/>
+          </a:xfrm>
+          <a:prstGeom prst="rect">
+            <a:avLst/>
+          </a:prstGeom>
+          <a:noFill/>
+          <a:ln w="12700">
+            <a:solidFill>
+              <a:prstClr val="black"/>
+            </a:solidFill>
+          </a:ln>
+        </p:spPr>
+        <p:txBody>
+          <a:bodyPr vert="horz" lIns="91440" tIns="45720" rIns="91440" bIns="45720" rtlCol="0" anchor="ctr"/>
+          <a:lstStyle/>
+          <a:p>
+            <a:endParaRPr lang="zh-CN" altLang="en-US"/>
+          </a:p>
+        </p:txBody>
+      </p:sp>
+      <p:sp>
+        <p:nvSpPr>
+          <p:cNvPr id="5" name="备注占位符 4"/>
+          <p:cNvSpPr>
+            <a:spLocks noGrp="1"/>
+          </p:cNvSpPr>
+          <p:nvPr>
+            <p:ph type="body" sz="quarter" idx="3"/>
+          </p:nvPr>
+        </p:nvSpPr>
+        <p:spPr>
+          <a:xfrm>
+            <a:off x="685800" y="4400550"/>
+            <a:ext cx="5486400" cy="3600450"/>
+          </a:xfrm>
+          <a:prstGeom prst="rect">
+            <a:avLst/>
+          </a:prstGeom>
+        </p:spPr>
+        <p:txBody>
+          <a:bodyPr vert="horz" lIns="91440" tIns="45720" rIns="91440" bIns="45720" rtlCol="0"/>
+          <a:lstStyle/>
+          <a:p>
+            <a:pPr lvl="0"/>
+            <a:r>
+              <a:rPr lang="zh-CN" altLang="en-US"/>
+              <a:t>单击此处编辑母版文本样式</a:t>
+            </a:r>
+          </a:p>
+          <a:p>
+            <a:pPr lvl="1"/>
+            <a:r>
+              <a:rPr lang="zh-CN" altLang="en-US"/>
+              <a:t>二级</a:t>
+            </a:r>
+          </a:p>
+          <a:p>
+            <a:pPr lvl="2"/>
+            <a:r>
+              <a:rPr lang="zh-CN" altLang="en-US"/>
+              <a:t>三级</a:t>
+            </a:r>
+          </a:p>
+          <a:p>
+            <a:pPr lvl="3"/>
+            <a:r>
+              <a:rPr lang="zh-CN" altLang="en-US"/>
+              <a:t>四级</a:t>
+            </a:r>
+          </a:p>
+          <a:p>
+            <a:pPr lvl="4"/>
+            <a:r>
+              <a:rPr lang="zh-CN" altLang="en-US"/>
+              <a:t>五级</a:t>
+            </a:r>
+          </a:p>
+        </p:txBody>
+      </p:sp>
+      <p:sp>
+        <p:nvSpPr>
+          <p:cNvPr id="6" name="页脚占位符 5"/>
+          <p:cNvSpPr>
+            <a:spLocks noGrp="1"/>
+          </p:cNvSpPr>
+          <p:nvPr>
+            <p:ph type="ftr" sz="quarter" idx="4"/>
+          </p:nvPr>
+        </p:nvSpPr>
+        <p:spPr>
+          <a:xfrm>
+            <a:off x="0" y="8685213"/>
+            <a:ext cx="2971800" cy="458787"/>
+          </a:xfrm>
+          <a:prstGeom prst="rect">
+            <a:avLst/>
+          </a:prstGeom>
+        </p:spPr>
+        <p:txBody>
+          <a:bodyPr vert="horz" lIns="91440" tIns="45720" rIns="91440" bIns="45720" rtlCol="0" anchor="b"/>
+          <a:lstStyle>
+            <a:lvl1pPr algn="l">
+              <a:defRPr sz="1200"/>
+            </a:lvl1pPr>
+          </a:lstStyle>
+          <a:p>
+            <a:endParaRPr lang="zh-CN" altLang="en-US"/>
+          </a:p>
+        </p:txBody>
+      </p:sp>
+      <p:sp>
+        <p:nvSpPr>
+          <p:cNvPr id="7" name="灯片编号占位符 6"/>
+          <p:cNvSpPr>
+            <a:spLocks noGrp="1"/>
+          </p:cNvSpPr>
+          <p:nvPr>
+            <p:ph type="sldNum" sz="quarter" idx="5"/>
+          </p:nvPr>
+        </p:nvSpPr>
+        <p:spPr>
+          <a:xfrm>
+            <a:off x="3884613" y="8685213"/>
+            <a:ext cx="2971800" cy="458787"/>
+          </a:xfrm>
+          <a:prstGeom prst="rect">
+            <a:avLst/>
+          </a:prstGeom>
+        </p:spPr>
+        <p:txBody>
+          <a:bodyPr vert="horz" lIns="91440" tIns="45720" rIns="91440" bIns="45720" rtlCol="0" anchor="b"/>
+          <a:lstStyle>
+            <a:lvl1pPr algn="r">
+              <a:defRPr sz="1200"/>
+            </a:lvl1pPr>
+          </a:lstStyle>
+          <a:p>
+            <a:fld id="{70ED95D6-B5D6-4D98-B301-5F0D903896A8}" type="slidenum">
+              <a:rPr lang="zh-CN" altLang="en-US" smtClean="0"/>
+              <a:t>‹#›</a:t>
+            </a:fld>
+            <a:endParaRPr lang="zh-CN" altLang="en-US"/>
+          </a:p>
+        </p:txBody>
+      </p:sp>
+    </p:spTree>
+    <p:extLst>
+      <p:ext uri="{BB962C8B-B14F-4D97-AF65-F5344CB8AC3E}">
+        <p14:creationId xmlns:p14="http://schemas.microsoft.com/office/powerpoint/2010/main" val="3827291550"/>
+      </p:ext>
+    </p:extLst>
+  </p:cSld>
+  <p:clrMap bg1="lt1" tx1="dk1" bg2="lt2" tx2="dk2" accent1="accent1" accent2="accent2" accent3="accent3" accent4="accent4" accent5="accent5" accent6="accent6" hlink="hlink" folHlink="folHlink"/>
+  <p:notesStyle>
+    <a:lvl1pPr marL="0" algn="l" defTabSz="914400" rtl="0" eaLnBrk="1" latinLnBrk="0" hangingPunct="1">
+      <a:defRPr sz="1200" kern="1200">
+        <a:solidFill>
+          <a:schemeClr val="tx1"/>
+        </a:solidFill>
+        <a:latin typeface="+mn-lt"/>
+        <a:ea typeface="+mn-ea"/>
+        <a:cs typeface="+mn-cs"/>
+      </a:defRPr>
+    </a:lvl1pPr>
+    <a:lvl2pPr marL="457200" algn="l" defTabSz="914400" rtl="0" eaLnBrk="1" latinLnBrk="0" hangingPunct="1">
+      <a:defRPr sz="1200" kern="1200">
+        <a:solidFill>
+          <a:schemeClr val="tx1"/>
+        </a:solidFill>
+        <a:latin typeface="+mn-lt"/>
+        <a:ea typeface="+mn-ea"/>
+        <a:cs typeface="+mn-cs"/>
+      </a:defRPr>
+    </a:lvl2pPr>
+    <a:lvl3pPr marL="914400" algn="l" defTabSz="914400" rtl="0" eaLnBrk="1" latinLnBrk="0" hangingPunct="1">
+      <a:defRPr sz="1200" kern="1200">
+        <a:solidFill>
+          <a:schemeClr val="tx1"/>
+        </a:solidFill>
+        <a:latin typeface="+mn-lt"/>
+        <a:ea typeface="+mn-ea"/>
+        <a:cs typeface="+mn-cs"/>
+      </a:defRPr>
+    </a:lvl3pPr>
+    <a:lvl4pPr marL="1371600" algn="l" defTabSz="914400" rtl="0" eaLnBrk="1" latinLnBrk="0" hangingPunct="1">
+      <a:defRPr sz="1200" kern="1200">
+        <a:solidFill>
+          <a:schemeClr val="tx1"/>
+        </a:solidFill>
+        <a:latin typeface="+mn-lt"/>
+        <a:ea typeface="+mn-ea"/>
+        <a:cs typeface="+mn-cs"/>
+      </a:defRPr>
+    </a:lvl4pPr>
+    <a:lvl5pPr marL="1828800" algn="l" defTabSz="914400" rtl="0" eaLnBrk="1" latinLnBrk="0" hangingPunct="1">
+      <a:defRPr sz="1200" kern="1200">
+        <a:solidFill>
+          <a:schemeClr val="tx1"/>
+        </a:solidFill>
+        <a:latin typeface="+mn-lt"/>
+        <a:ea typeface="+mn-ea"/>
+        <a:cs typeface="+mn-cs"/>
+      </a:defRPr>
+    </a:lvl5pPr>
+    <a:lvl6pPr marL="2286000" algn="l" defTabSz="914400" rtl="0" eaLnBrk="1" latinLnBrk="0" hangingPunct="1">
+      <a:defRPr sz="1200" kern="1200">
+        <a:solidFill>
+          <a:schemeClr val="tx1"/>
+        </a:solidFill>
+        <a:latin typeface="+mn-lt"/>
+        <a:ea typeface="+mn-ea"/>
+        <a:cs typeface="+mn-cs"/>
+      </a:defRPr>
+    </a:lvl6pPr>
+    <a:lvl7pPr marL="2743200" algn="l" defTabSz="914400" rtl="0" eaLnBrk="1" latinLnBrk="0" hangingPunct="1">
+      <a:defRPr sz="1200" kern="1200">
+        <a:solidFill>
+          <a:schemeClr val="tx1"/>
+        </a:solidFill>
+        <a:latin typeface="+mn-lt"/>
+        <a:ea typeface="+mn-ea"/>
+        <a:cs typeface="+mn-cs"/>
+      </a:defRPr>
+    </a:lvl7pPr>
+    <a:lvl8pPr marL="3200400" algn="l" defTabSz="914400" rtl="0" eaLnBrk="1" latinLnBrk="0" hangingPunct="1">
+      <a:defRPr sz="1200" kern="1200">
+        <a:solidFill>
+          <a:schemeClr val="tx1"/>
+        </a:solidFill>
+        <a:latin typeface="+mn-lt"/>
+        <a:ea typeface="+mn-ea"/>
+        <a:cs typeface="+mn-cs"/>
+      </a:defRPr>
+    </a:lvl8pPr>
+    <a:lvl9pPr marL="3657600" algn="l" defTabSz="914400" rtl="0" eaLnBrk="1" latinLnBrk="0" hangingPunct="1">
+      <a:defRPr sz="1200" kern="1200">
+        <a:solidFill>
+          <a:schemeClr val="tx1"/>
+        </a:solidFill>
+        <a:latin typeface="+mn-lt"/>
+        <a:ea typeface="+mn-ea"/>
+        <a:cs typeface="+mn-cs"/>
+      </a:defRPr>
+    </a:lvl9pPr>
+  </p:notesStyle>
+</p:notesMaster>
 </file>
 
 <file path=ppt/slideLayouts/slideLayout1.xml><?xml version="1.0" encoding="utf-8"?>
@@ -9742,6 +10309,290 @@
 <file path=ppt/slides/slide10.xml><?xml version="1.0" encoding="utf-8"?>
 <p:sld xmlns:a="http://schemas.openxmlformats.org/drawingml/2006/main" xmlns:r="http://schemas.openxmlformats.org/officeDocument/2006/relationships" xmlns:p="http://schemas.openxmlformats.org/presentationml/2006/main">
   <p:cSld>
+    <p:spTree>
+      <p:nvGrpSpPr>
+        <p:cNvPr id="1" name=""/>
+        <p:cNvGrpSpPr/>
+        <p:nvPr/>
+      </p:nvGrpSpPr>
+      <p:grpSpPr>
+        <a:xfrm>
+          <a:off x="0" y="0"/>
+          <a:ext cx="0" cy="0"/>
+          <a:chOff x="0" y="0"/>
+          <a:chExt cx="0" cy="0"/>
+        </a:xfrm>
+      </p:grpSpPr>
+      <p:sp>
+        <p:nvSpPr>
+          <p:cNvPr id="3" name="内容占位符 2">
+            <a:extLst>
+              <a:ext uri="{FF2B5EF4-FFF2-40B4-BE49-F238E27FC236}">
+                <a16:creationId xmlns:a16="http://schemas.microsoft.com/office/drawing/2014/main" id="{F7049513-54F0-8B7B-AB38-E274D1DD0D1F}"/>
+              </a:ext>
+            </a:extLst>
+          </p:cNvPr>
+          <p:cNvSpPr>
+            <a:spLocks noGrp="1"/>
+          </p:cNvSpPr>
+          <p:nvPr>
+            <p:ph idx="1"/>
+          </p:nvPr>
+        </p:nvSpPr>
+        <p:spPr>
+          <a:xfrm>
+            <a:off x="249054" y="444873"/>
+            <a:ext cx="11546091" cy="5968254"/>
+          </a:xfrm>
+        </p:spPr>
+        <p:txBody>
+          <a:bodyPr>
+            <a:normAutofit fontScale="92500" lnSpcReduction="20000"/>
+          </a:bodyPr>
+          <a:lstStyle/>
+          <a:p>
+            <a:r>
+              <a:rPr lang="en-US" altLang="zh-CN" dirty="0"/>
+              <a:t>This led to environment configuration problems because different applications might require different environments</a:t>
+            </a:r>
+          </a:p>
+          <a:p>
+            <a:endParaRPr lang="en-US" altLang="zh-CN" dirty="0"/>
+          </a:p>
+          <a:p>
+            <a:r>
+              <a:rPr lang="en-US" altLang="zh-CN" dirty="0"/>
+              <a:t>To solve this problem, Hykes began thinking about how to package applications and their environments together so they could run anywhere.</a:t>
+            </a:r>
+          </a:p>
+          <a:p>
+            <a:br>
+              <a:rPr lang="en-US" altLang="zh-CN" dirty="0"/>
+            </a:br>
+            <a:endParaRPr lang="en-US" altLang="zh-CN" dirty="0"/>
+          </a:p>
+          <a:p>
+            <a:r>
+              <a:rPr lang="en-US" altLang="zh-CN" dirty="0"/>
+              <a:t>Furthermore, Hykes decided to create a new tool for packaging applications and their environments.</a:t>
+            </a:r>
+          </a:p>
+          <a:p>
+            <a:br>
+              <a:rPr lang="en-US" altLang="zh-CN" dirty="0"/>
+            </a:br>
+            <a:endParaRPr lang="en-US" altLang="zh-CN" dirty="0"/>
+          </a:p>
+          <a:p>
+            <a:r>
+              <a:rPr lang="en-US" altLang="zh-CN" dirty="0"/>
+              <a:t>And the name of a dock worker is exactly Docker. Hykes thought this name was very appropriate for the tool's functionality, so he named the tool Docker.</a:t>
+            </a:r>
+          </a:p>
+          <a:p>
+            <a:br>
+              <a:rPr lang="en-US" altLang="zh-CN" dirty="0"/>
+            </a:br>
+            <a:endParaRPr lang="en-US" altLang="zh-CN" dirty="0"/>
+          </a:p>
+          <a:p>
+            <a:r>
+              <a:rPr lang="en-US" altLang="zh-CN" dirty="0"/>
+              <a:t>Thus, Docker was born.</a:t>
+            </a:r>
+          </a:p>
+          <a:p>
+            <a:endParaRPr lang="zh-CN" altLang="en-US" dirty="0"/>
+          </a:p>
+        </p:txBody>
+      </p:sp>
+    </p:spTree>
+    <p:extLst>
+      <p:ext uri="{BB962C8B-B14F-4D97-AF65-F5344CB8AC3E}">
+        <p14:creationId xmlns:p14="http://schemas.microsoft.com/office/powerpoint/2010/main" val="504623597"/>
+      </p:ext>
+    </p:extLst>
+  </p:cSld>
+  <p:clrMapOvr>
+    <a:masterClrMapping/>
+  </p:clrMapOvr>
+</p:sld>
+</file>
+
+<file path=ppt/slides/slide11.xml><?xml version="1.0" encoding="utf-8"?>
+<p:sld xmlns:a="http://schemas.openxmlformats.org/drawingml/2006/main" xmlns:r="http://schemas.openxmlformats.org/officeDocument/2006/relationships" xmlns:p="http://schemas.openxmlformats.org/presentationml/2006/main">
+  <p:cSld>
+    <p:spTree>
+      <p:nvGrpSpPr>
+        <p:cNvPr id="1" name=""/>
+        <p:cNvGrpSpPr/>
+        <p:nvPr/>
+      </p:nvGrpSpPr>
+      <p:grpSpPr>
+        <a:xfrm>
+          <a:off x="0" y="0"/>
+          <a:ext cx="0" cy="0"/>
+          <a:chOff x="0" y="0"/>
+          <a:chExt cx="0" cy="0"/>
+        </a:xfrm>
+      </p:grpSpPr>
+      <p:pic>
+        <p:nvPicPr>
+          <p:cNvPr id="5" name="图片 4" descr="卡通人物&#10;&#10;AI 生成的内容可能不正确。">
+            <a:extLst>
+              <a:ext uri="{FF2B5EF4-FFF2-40B4-BE49-F238E27FC236}">
+                <a16:creationId xmlns:a16="http://schemas.microsoft.com/office/drawing/2014/main" id="{E46527FA-D17E-1D56-28DF-B45607ACE5A0}"/>
+              </a:ext>
+            </a:extLst>
+          </p:cNvPr>
+          <p:cNvPicPr>
+            <a:picLocks noChangeAspect="1"/>
+          </p:cNvPicPr>
+          <p:nvPr/>
+        </p:nvPicPr>
+        <p:blipFill>
+          <a:blip r:embed="rId2">
+            <a:extLst>
+              <a:ext uri="{28A0092B-C50C-407E-A947-70E740481C1C}">
+                <a14:useLocalDpi xmlns:a14="http://schemas.microsoft.com/office/drawing/2010/main" val="0"/>
+              </a:ext>
+            </a:extLst>
+          </a:blip>
+          <a:stretch>
+            <a:fillRect/>
+          </a:stretch>
+        </p:blipFill>
+        <p:spPr>
+          <a:xfrm>
+            <a:off x="1189794" y="640029"/>
+            <a:ext cx="4191000" cy="4191000"/>
+          </a:xfrm>
+          <a:prstGeom prst="rect">
+            <a:avLst/>
+          </a:prstGeom>
+        </p:spPr>
+      </p:pic>
+      <p:sp>
+        <p:nvSpPr>
+          <p:cNvPr id="6" name="文本框 5">
+            <a:extLst>
+              <a:ext uri="{FF2B5EF4-FFF2-40B4-BE49-F238E27FC236}">
+                <a16:creationId xmlns:a16="http://schemas.microsoft.com/office/drawing/2014/main" id="{A3D49999-93D8-1B2B-4078-5606FA6D61A5}"/>
+              </a:ext>
+            </a:extLst>
+          </p:cNvPr>
+          <p:cNvSpPr txBox="1"/>
+          <p:nvPr/>
+        </p:nvSpPr>
+        <p:spPr>
+          <a:xfrm>
+            <a:off x="7146950" y="1089965"/>
+            <a:ext cx="3855256" cy="369332"/>
+          </a:xfrm>
+          <a:prstGeom prst="rect">
+            <a:avLst/>
+          </a:prstGeom>
+          <a:noFill/>
+        </p:spPr>
+        <p:txBody>
+          <a:bodyPr wrap="square" rtlCol="0">
+            <a:spAutoFit/>
+          </a:bodyPr>
+          <a:lstStyle/>
+          <a:p>
+            <a:r>
+              <a:rPr lang="en-US" altLang="zh-CN" dirty="0"/>
+              <a:t>Now , you might have one question:</a:t>
+            </a:r>
+          </a:p>
+        </p:txBody>
+      </p:sp>
+      <p:sp>
+        <p:nvSpPr>
+          <p:cNvPr id="7" name="文本框 6">
+            <a:extLst>
+              <a:ext uri="{FF2B5EF4-FFF2-40B4-BE49-F238E27FC236}">
+                <a16:creationId xmlns:a16="http://schemas.microsoft.com/office/drawing/2014/main" id="{E10CE702-86AE-716F-E774-FE8E1316A00B}"/>
+              </a:ext>
+            </a:extLst>
+          </p:cNvPr>
+          <p:cNvSpPr txBox="1"/>
+          <p:nvPr/>
+        </p:nvSpPr>
+        <p:spPr>
+          <a:xfrm>
+            <a:off x="7146950" y="2706624"/>
+            <a:ext cx="3555188" cy="1200329"/>
+          </a:xfrm>
+          <a:prstGeom prst="rect">
+            <a:avLst/>
+          </a:prstGeom>
+          <a:noFill/>
+        </p:spPr>
+        <p:txBody>
+          <a:bodyPr wrap="square" rtlCol="0">
+            <a:spAutoFit/>
+          </a:bodyPr>
+          <a:lstStyle/>
+          <a:p>
+            <a:r>
+              <a:rPr lang="en-US" altLang="zh-CN" dirty="0"/>
+              <a:t>Why can't virtual machines solve this problem? Isn't it also a famous containerization technology?</a:t>
+            </a:r>
+          </a:p>
+        </p:txBody>
+      </p:sp>
+      <p:sp>
+        <p:nvSpPr>
+          <p:cNvPr id="8" name="文本框 7">
+            <a:extLst>
+              <a:ext uri="{FF2B5EF4-FFF2-40B4-BE49-F238E27FC236}">
+                <a16:creationId xmlns:a16="http://schemas.microsoft.com/office/drawing/2014/main" id="{63A1620D-A614-1DCE-81ED-0E31EDEAE5E6}"/>
+              </a:ext>
+            </a:extLst>
+          </p:cNvPr>
+          <p:cNvSpPr txBox="1"/>
+          <p:nvPr/>
+        </p:nvSpPr>
+        <p:spPr>
+          <a:xfrm>
+            <a:off x="7309063" y="4436988"/>
+            <a:ext cx="3080730" cy="1200329"/>
+          </a:xfrm>
+          <a:prstGeom prst="rect">
+            <a:avLst/>
+          </a:prstGeom>
+          <a:noFill/>
+        </p:spPr>
+        <p:txBody>
+          <a:bodyPr wrap="square" rtlCol="0">
+            <a:spAutoFit/>
+          </a:bodyPr>
+          <a:lstStyle/>
+          <a:p>
+            <a:r>
+              <a:rPr lang="en-US" altLang="zh-CN"/>
+              <a:t>Next, I'll briefly introduce the differences between Docker and virtual machines, as well as Docker's advantages.</a:t>
+            </a:r>
+          </a:p>
+        </p:txBody>
+      </p:sp>
+    </p:spTree>
+    <p:extLst>
+      <p:ext uri="{BB962C8B-B14F-4D97-AF65-F5344CB8AC3E}">
+        <p14:creationId xmlns:p14="http://schemas.microsoft.com/office/powerpoint/2010/main" val="3447865296"/>
+      </p:ext>
+    </p:extLst>
+  </p:cSld>
+  <p:clrMapOvr>
+    <a:masterClrMapping/>
+  </p:clrMapOvr>
+</p:sld>
+</file>
+
+<file path=ppt/slides/slide12.xml><?xml version="1.0" encoding="utf-8"?>
+<p:sld xmlns:a="http://schemas.openxmlformats.org/drawingml/2006/main" xmlns:r="http://schemas.openxmlformats.org/officeDocument/2006/relationships" xmlns:p="http://schemas.openxmlformats.org/presentationml/2006/main">
+  <p:cSld>
     <p:bg>
       <p:bgPr>
         <a:solidFill>
@@ -10054,7 +10905,7 @@
 </p:sld>
 </file>
 
-<file path=ppt/slides/slide11.xml><?xml version="1.0" encoding="utf-8"?>
+<file path=ppt/slides/slide13.xml><?xml version="1.0" encoding="utf-8"?>
 <p:sld xmlns:a="http://schemas.openxmlformats.org/drawingml/2006/main" xmlns:r="http://schemas.openxmlformats.org/officeDocument/2006/relationships" xmlns:p="http://schemas.openxmlformats.org/presentationml/2006/main">
   <p:cSld>
     <p:bg>
@@ -10477,7 +11328,7 @@
 </p:sld>
 </file>
 
-<file path=ppt/slides/slide12.xml><?xml version="1.0" encoding="utf-8"?>
+<file path=ppt/slides/slide14.xml><?xml version="1.0" encoding="utf-8"?>
 <p:sld xmlns:a="http://schemas.openxmlformats.org/drawingml/2006/main" xmlns:r="http://schemas.openxmlformats.org/officeDocument/2006/relationships" xmlns:p="http://schemas.openxmlformats.org/presentationml/2006/main">
   <p:cSld>
     <p:bg>
@@ -11287,7 +12138,7 @@
 </p:sld>
 </file>
 
-<file path=ppt/slides/slide13.xml><?xml version="1.0" encoding="utf-8"?>
+<file path=ppt/slides/slide15.xml><?xml version="1.0" encoding="utf-8"?>
 <p:sld xmlns:a="http://schemas.openxmlformats.org/drawingml/2006/main" xmlns:r="http://schemas.openxmlformats.org/officeDocument/2006/relationships" xmlns:p="http://schemas.openxmlformats.org/presentationml/2006/main">
   <p:cSld>
     <p:bg>
@@ -11488,7 +12339,7 @@
 </p:sld>
 </file>
 
-<file path=ppt/slides/slide14.xml><?xml version="1.0" encoding="utf-8"?>
+<file path=ppt/slides/slide16.xml><?xml version="1.0" encoding="utf-8"?>
 <p:sld xmlns:a="http://schemas.openxmlformats.org/drawingml/2006/main" xmlns:r="http://schemas.openxmlformats.org/officeDocument/2006/relationships" xmlns:p="http://schemas.openxmlformats.org/presentationml/2006/main">
   <p:cSld>
     <p:bg>
@@ -11938,113 +12789,207 @@
       </p:sp>
       <p:sp>
         <p:nvSpPr>
-          <p:cNvPr id="3" name="内容占位符 2">
+          <p:cNvPr id="5" name="文本框 4">
             <a:extLst>
               <a:ext uri="{FF2B5EF4-FFF2-40B4-BE49-F238E27FC236}">
-                <a16:creationId xmlns:a16="http://schemas.microsoft.com/office/drawing/2014/main" id="{2862D583-3B9F-11F6-4B46-7A2B3461F478}"/>
+                <a16:creationId xmlns:a16="http://schemas.microsoft.com/office/drawing/2014/main" id="{9D851C41-F6E3-3350-EAE4-73EC535B2606}"/>
               </a:ext>
             </a:extLst>
           </p:cNvPr>
-          <p:cNvSpPr>
-            <a:spLocks noGrp="1"/>
-          </p:cNvSpPr>
-          <p:nvPr>
-            <p:ph idx="1"/>
-          </p:nvPr>
+          <p:cNvSpPr txBox="1"/>
+          <p:nvPr/>
         </p:nvSpPr>
         <p:spPr>
           <a:xfrm>
-            <a:off x="1463657" y="2098392"/>
-            <a:ext cx="9724031" cy="4245265"/>
+            <a:off x="3011971" y="2093929"/>
+            <a:ext cx="2634474" cy="2862322"/>
           </a:xfrm>
+          <a:prstGeom prst="rect">
+            <a:avLst/>
+          </a:prstGeom>
+          <a:noFill/>
         </p:spPr>
         <p:txBody>
-          <a:bodyPr anchor="ctr">
-            <a:normAutofit fontScale="40000" lnSpcReduction="20000"/>
+          <a:bodyPr wrap="square" rtlCol="0">
+            <a:spAutoFit/>
           </a:bodyPr>
           <a:lstStyle/>
           <a:p>
             <a:r>
-              <a:rPr lang="en-US" altLang="zh-CN" sz="4500" dirty="0"/>
-              <a:t>Docker can be divided into the following components, which together form Docker's complete ecosystem:</a:t>
-            </a:r>
-          </a:p>
-          <a:p>
-            <a:br>
-              <a:rPr lang="en-US" altLang="zh-CN" sz="4500" dirty="0"/>
-            </a:br>
-            <a:endParaRPr lang="en-US" altLang="zh-CN" sz="4500" dirty="0"/>
-          </a:p>
-          <a:p>
-            <a:r>
-              <a:rPr lang="en-US" altLang="zh-CN" sz="4500" dirty="0"/>
-              <a:t>- </a:t>
-            </a:r>
-            <a:r>
-              <a:rPr lang="en-US" altLang="zh-CN" sz="4500" b="1" dirty="0"/>
+              <a:rPr lang="en-US" altLang="zh-CN" b="1" dirty="0"/>
               <a:t>Docker Client</a:t>
             </a:r>
             <a:r>
-              <a:rPr lang="en-US" altLang="zh-CN" sz="4500" dirty="0"/>
-              <a:t>: A command-line tool for users to interact with Docker, responsible for receiving user commands and sending them to the Docker Daemon for execution</a:t>
+              <a:rPr lang="en-US" altLang="zh-CN" dirty="0"/>
+              <a:t>:</a:t>
             </a:r>
           </a:p>
           <a:p>
+            <a:pPr marL="285750" indent="-285750">
+              <a:buFontTx/>
+              <a:buChar char="-"/>
+            </a:pPr>
+            <a:endParaRPr lang="en-US" altLang="zh-CN" dirty="0"/>
+          </a:p>
+          <a:p>
             <a:r>
-              <a:rPr lang="en-US" altLang="zh-CN" sz="4500" dirty="0"/>
-              <a:t>- </a:t>
+              <a:rPr lang="en-US" altLang="zh-CN" dirty="0"/>
+              <a:t> A command-line tool for users to interact with Docker, responsible for receiving user commands and sending them to the Docker Daemon for execution</a:t>
             </a:r>
+          </a:p>
+          <a:p>
+            <a:endParaRPr lang="zh-CN" altLang="en-US" dirty="0"/>
+          </a:p>
+        </p:txBody>
+      </p:sp>
+      <p:sp>
+        <p:nvSpPr>
+          <p:cNvPr id="7" name="文本框 6">
+            <a:extLst>
+              <a:ext uri="{FF2B5EF4-FFF2-40B4-BE49-F238E27FC236}">
+                <a16:creationId xmlns:a16="http://schemas.microsoft.com/office/drawing/2014/main" id="{FD819B0A-DECB-793C-690A-47359AFB4F59}"/>
+              </a:ext>
+            </a:extLst>
+          </p:cNvPr>
+          <p:cNvSpPr txBox="1"/>
+          <p:nvPr/>
+        </p:nvSpPr>
+        <p:spPr>
+          <a:xfrm>
+            <a:off x="6203861" y="2093929"/>
+            <a:ext cx="2369458" cy="2585323"/>
+          </a:xfrm>
+          <a:prstGeom prst="rect">
+            <a:avLst/>
+          </a:prstGeom>
+          <a:noFill/>
+        </p:spPr>
+        <p:txBody>
+          <a:bodyPr wrap="square" rtlCol="0">
+            <a:spAutoFit/>
+          </a:bodyPr>
+          <a:lstStyle/>
+          <a:p>
             <a:r>
-              <a:rPr lang="en-US" altLang="zh-CN" sz="4500" b="1" dirty="0"/>
+              <a:rPr lang="en-US" altLang="zh-CN" b="1" dirty="0"/>
               <a:t>Docker Daemon</a:t>
             </a:r>
             <a:r>
-              <a:rPr lang="en-US" altLang="zh-CN" sz="4500" dirty="0"/>
-              <a:t>: A background service process responsible for processing Docker Client instructions and managing resources such as images and containers</a:t>
+              <a:rPr lang="en-US" altLang="zh-CN" dirty="0"/>
+              <a:t>: </a:t>
             </a:r>
           </a:p>
           <a:p>
+            <a:endParaRPr lang="en-US" altLang="zh-CN" dirty="0"/>
+          </a:p>
+          <a:p>
             <a:r>
-              <a:rPr lang="en-US" altLang="zh-CN" sz="4500" dirty="0"/>
-              <a:t>- </a:t>
+              <a:rPr lang="en-US" altLang="zh-CN" dirty="0"/>
+              <a:t>A background service process responsible for processing Docker Client instructions and managing resources such as images and containers</a:t>
             </a:r>
+            <a:endParaRPr lang="zh-CN" altLang="en-US" dirty="0"/>
+          </a:p>
+        </p:txBody>
+      </p:sp>
+      <p:sp>
+        <p:nvSpPr>
+          <p:cNvPr id="9" name="文本框 8">
+            <a:extLst>
+              <a:ext uri="{FF2B5EF4-FFF2-40B4-BE49-F238E27FC236}">
+                <a16:creationId xmlns:a16="http://schemas.microsoft.com/office/drawing/2014/main" id="{EC35B82B-C1BE-5B93-65F0-FB145BB66BE2}"/>
+              </a:ext>
+            </a:extLst>
+          </p:cNvPr>
+          <p:cNvSpPr txBox="1"/>
+          <p:nvPr/>
+        </p:nvSpPr>
+        <p:spPr>
+          <a:xfrm>
+            <a:off x="9475400" y="2093929"/>
+            <a:ext cx="2140825" cy="3693319"/>
+          </a:xfrm>
+          <a:prstGeom prst="rect">
+            <a:avLst/>
+          </a:prstGeom>
+          <a:noFill/>
+        </p:spPr>
+        <p:txBody>
+          <a:bodyPr wrap="square" rtlCol="0">
+            <a:spAutoFit/>
+          </a:bodyPr>
+          <a:lstStyle/>
+          <a:p>
             <a:r>
-              <a:rPr lang="en-US" altLang="zh-CN" sz="4500" b="1" dirty="0"/>
+              <a:rPr lang="en-US" altLang="zh-CN" b="1" dirty="0"/>
               <a:t>Docker Registry</a:t>
             </a:r>
             <a:r>
-              <a:rPr lang="en-US" altLang="zh-CN" sz="4500" dirty="0"/>
-              <a:t>: An image repository responsible for storing and distributing Docker images, similar to GitHub, with the most commonly used being the official Docker Hub</a:t>
+              <a:rPr lang="en-US" altLang="zh-CN" dirty="0"/>
+              <a:t>: </a:t>
             </a:r>
           </a:p>
           <a:p>
+            <a:endParaRPr lang="en-US" altLang="zh-CN" dirty="0"/>
+          </a:p>
+          <a:p>
             <a:r>
-              <a:rPr lang="en-US" altLang="zh-CN" sz="4500" dirty="0"/>
-              <a:t>- </a:t>
+              <a:rPr lang="en-US" altLang="zh-CN" dirty="0"/>
+              <a:t>An image repository responsible for storing and distributing Docker images, similar to GitHub, with the most commonly used being the official Docker Hub</a:t>
             </a:r>
+          </a:p>
+          <a:p>
+            <a:endParaRPr lang="zh-CN" altLang="en-US" dirty="0"/>
+          </a:p>
+        </p:txBody>
+      </p:sp>
+      <p:sp>
+        <p:nvSpPr>
+          <p:cNvPr id="11" name="文本框 10">
+            <a:extLst>
+              <a:ext uri="{FF2B5EF4-FFF2-40B4-BE49-F238E27FC236}">
+                <a16:creationId xmlns:a16="http://schemas.microsoft.com/office/drawing/2014/main" id="{E3C33CC7-9B16-3C38-E502-C80EEA1BC0DD}"/>
+              </a:ext>
+            </a:extLst>
+          </p:cNvPr>
+          <p:cNvSpPr txBox="1"/>
+          <p:nvPr/>
+        </p:nvSpPr>
+        <p:spPr>
+          <a:xfrm>
+            <a:off x="637066" y="2093929"/>
+            <a:ext cx="1737840" cy="2862322"/>
+          </a:xfrm>
+          <a:prstGeom prst="rect">
+            <a:avLst/>
+          </a:prstGeom>
+          <a:noFill/>
+        </p:spPr>
+        <p:txBody>
+          <a:bodyPr wrap="square" rtlCol="0">
+            <a:spAutoFit/>
+          </a:bodyPr>
+          <a:lstStyle/>
+          <a:p>
             <a:r>
-              <a:rPr lang="en-US" altLang="zh-CN" sz="4500" b="1" dirty="0"/>
+              <a:rPr lang="en-US" altLang="zh-CN" b="1" dirty="0"/>
               <a:t>Docker Objects</a:t>
             </a:r>
             <a:r>
-              <a:rPr lang="en-US" altLang="zh-CN" sz="4500" dirty="0"/>
-              <a:t>: Core objects including images, containers, networks, volumes, etc.</a:t>
+              <a:rPr lang="en-US" altLang="zh-CN" dirty="0"/>
+              <a:t>: </a:t>
             </a:r>
           </a:p>
           <a:p>
-            <a:br>
-              <a:rPr lang="en-US" altLang="zh-CN" sz="4500" dirty="0"/>
-            </a:br>
-            <a:endParaRPr lang="en-US" altLang="zh-CN" sz="4500" dirty="0"/>
+            <a:endParaRPr lang="en-US" altLang="zh-CN" dirty="0"/>
           </a:p>
           <a:p>
             <a:r>
-              <a:rPr lang="en-US" altLang="zh-CN" sz="4500" dirty="0"/>
-              <a:t>Docker adopts a client-server architecture, where the Client communicates with the Daemon through a REST API, allowing Docker to be operated locally or remotely.</a:t>
+              <a:rPr lang="en-US" altLang="zh-CN" dirty="0"/>
+              <a:t>Core objects including images, containers, networks, volumes, etc.</a:t>
             </a:r>
           </a:p>
           <a:p>
-            <a:endParaRPr lang="zh-CN" altLang="en-US" sz="2000" dirty="0"/>
+            <a:endParaRPr lang="zh-CN" altLang="en-US" dirty="0"/>
           </a:p>
         </p:txBody>
       </p:sp>
@@ -12061,7 +13006,7 @@
 </p:sld>
 </file>
 
-<file path=ppt/slides/slide15.xml><?xml version="1.0" encoding="utf-8"?>
+<file path=ppt/slides/slide17.xml><?xml version="1.0" encoding="utf-8"?>
 <p:sld xmlns:a="http://schemas.openxmlformats.org/drawingml/2006/main" xmlns:r="http://schemas.openxmlformats.org/officeDocument/2006/relationships" xmlns:p="http://schemas.openxmlformats.org/presentationml/2006/main">
   <p:cSld>
     <p:bg>
@@ -12262,7 +13207,7 @@
 </p:sld>
 </file>
 
-<file path=ppt/slides/slide16.xml><?xml version="1.0" encoding="utf-8"?>
+<file path=ppt/slides/slide18.xml><?xml version="1.0" encoding="utf-8"?>
 <p:sld xmlns:a="http://schemas.openxmlformats.org/drawingml/2006/main" xmlns:r="http://schemas.openxmlformats.org/officeDocument/2006/relationships" xmlns:p="http://schemas.openxmlformats.org/presentationml/2006/main">
   <p:cSld>
     <p:bg>
@@ -12289,10 +13234,10 @@
       </p:grpSpPr>
       <p:sp useBgFill="1">
         <p:nvSpPr>
-          <p:cNvPr id="8" name="Rectangle 7">
+          <p:cNvPr id="22" name="Rectangle 21">
             <a:extLst>
               <a:ext uri="{FF2B5EF4-FFF2-40B4-BE49-F238E27FC236}">
-                <a16:creationId xmlns:a16="http://schemas.microsoft.com/office/drawing/2014/main" id="{1B15ED52-F352-441B-82BF-E0EA34836D08}"/>
+                <a16:creationId xmlns:a16="http://schemas.microsoft.com/office/drawing/2014/main" id="{BACC6370-2D7E-4714-9D71-7542949D7D5D}"/>
               </a:ext>
               <a:ext uri="{C183D7F6-B498-43B3-948B-1728B52AA6E4}">
                 <adec:decorative xmlns:adec="http://schemas.microsoft.com/office/drawing/2017/decorative" val="1"/>
@@ -12365,10 +13310,10 @@
       </p:sp>
       <p:sp>
         <p:nvSpPr>
-          <p:cNvPr id="10" name="Rectangle 9">
+          <p:cNvPr id="24" name="Rectangle 23">
             <a:extLst>
               <a:ext uri="{FF2B5EF4-FFF2-40B4-BE49-F238E27FC236}">
-                <a16:creationId xmlns:a16="http://schemas.microsoft.com/office/drawing/2014/main" id="{3B2E3793-BFE6-45A2-9B7B-E18844431C99}"/>
+                <a16:creationId xmlns:a16="http://schemas.microsoft.com/office/drawing/2014/main" id="{F68B3F68-107C-434F-AA38-110D5EA91B85}"/>
               </a:ext>
               <a:ext uri="{C183D7F6-B498-43B3-948B-1728B52AA6E4}">
                 <adec:decorative xmlns:adec="http://schemas.microsoft.com/office/drawing/2017/decorative" val="1"/>
@@ -12388,8 +13333,8 @@
         </p:nvSpPr>
         <p:spPr>
           <a:xfrm flipH="1">
-            <a:off x="-1" y="-1"/>
-            <a:ext cx="12191998" cy="1590742"/>
+            <a:off x="2" y="0"/>
+            <a:ext cx="12191998" cy="2170031"/>
           </a:xfrm>
           <a:prstGeom prst="rect">
             <a:avLst/>
@@ -12397,7 +13342,9 @@
           <a:gradFill>
             <a:gsLst>
               <a:gs pos="0">
-                <a:srgbClr val="000000"/>
+                <a:srgbClr val="000000">
+                  <a:alpha val="96000"/>
+                </a:srgbClr>
               </a:gs>
               <a:gs pos="100000">
                 <a:schemeClr val="accent1">
@@ -12405,7 +13352,7 @@
                 </a:schemeClr>
               </a:gs>
             </a:gsLst>
-            <a:lin ang="8400000" scaled="0"/>
+            <a:lin ang="19800000" scaled="0"/>
           </a:gradFill>
           <a:ln>
             <a:noFill/>
@@ -12438,10 +13385,10 @@
       </p:sp>
       <p:sp>
         <p:nvSpPr>
-          <p:cNvPr id="12" name="Rectangle 11">
+          <p:cNvPr id="26" name="Rectangle 25">
             <a:extLst>
               <a:ext uri="{FF2B5EF4-FFF2-40B4-BE49-F238E27FC236}">
-                <a16:creationId xmlns:a16="http://schemas.microsoft.com/office/drawing/2014/main" id="{BC4C4868-CB8F-4AF9-9CDB-8108F2C19B67}"/>
+                <a16:creationId xmlns:a16="http://schemas.microsoft.com/office/drawing/2014/main" id="{AAD0DBB9-1A4B-4391-81D4-CB19F9AB918A}"/>
               </a:ext>
               <a:ext uri="{C183D7F6-B498-43B3-948B-1728B52AA6E4}">
                 <adec:decorative xmlns:adec="http://schemas.microsoft.com/office/drawing/2017/decorative" val="1"/>
@@ -12460,28 +13407,28 @@
           </p:nvPr>
         </p:nvSpPr>
         <p:spPr>
-          <a:xfrm rot="10800000" flipH="1">
-            <a:off x="-3" y="0"/>
-            <a:ext cx="8115306" cy="1590742"/>
+          <a:xfrm flipH="1">
+            <a:off x="8082819" y="0"/>
+            <a:ext cx="4097211" cy="2170661"/>
           </a:xfrm>
           <a:prstGeom prst="rect">
             <a:avLst/>
           </a:prstGeom>
           <a:gradFill>
             <a:gsLst>
-              <a:gs pos="20000">
+              <a:gs pos="19000">
                 <a:schemeClr val="accent1">
-                  <a:alpha val="0"/>
+                  <a:lumMod val="50000"/>
+                  <a:alpha val="68000"/>
                 </a:schemeClr>
               </a:gs>
               <a:gs pos="100000">
                 <a:schemeClr val="accent1">
-                  <a:lumMod val="50000"/>
-                  <a:alpha val="55000"/>
+                  <a:alpha val="48000"/>
                 </a:schemeClr>
               </a:gs>
             </a:gsLst>
-            <a:lin ang="13800000" scaled="0"/>
+            <a:lin ang="19200000" scaled="0"/>
           </a:gradFill>
           <a:ln>
             <a:noFill/>
@@ -12514,10 +13461,10 @@
       </p:sp>
       <p:sp>
         <p:nvSpPr>
-          <p:cNvPr id="14" name="Rectangle 13">
+          <p:cNvPr id="28" name="Rectangle 27">
             <a:extLst>
               <a:ext uri="{FF2B5EF4-FFF2-40B4-BE49-F238E27FC236}">
-                <a16:creationId xmlns:a16="http://schemas.microsoft.com/office/drawing/2014/main" id="{375E0459-6403-40CD-989D-56A4407CA12E}"/>
+                <a16:creationId xmlns:a16="http://schemas.microsoft.com/office/drawing/2014/main" id="{063BBA22-50EA-4C4D-BE05-F1CE4E63AA56}"/>
               </a:ext>
               <a:ext uri="{C183D7F6-B498-43B3-948B-1728B52AA6E4}">
                 <adec:decorative xmlns:adec="http://schemas.microsoft.com/office/drawing/2017/decorative" val="1"/>
@@ -12536,27 +13483,28 @@
           </p:nvPr>
         </p:nvSpPr>
         <p:spPr>
-          <a:xfrm flipH="1">
-            <a:off x="8115299" y="-1"/>
-            <a:ext cx="4076698" cy="1590742"/>
+          <a:xfrm rot="16200000" flipH="1">
+            <a:off x="5010646" y="-5010043"/>
+            <a:ext cx="2170709" cy="12192000"/>
           </a:xfrm>
           <a:prstGeom prst="rect">
             <a:avLst/>
           </a:prstGeom>
           <a:gradFill>
             <a:gsLst>
-              <a:gs pos="0">
+              <a:gs pos="23000">
                 <a:schemeClr val="accent1">
-                  <a:alpha val="66000"/>
+                  <a:lumMod val="75000"/>
+                  <a:alpha val="16000"/>
                 </a:schemeClr>
               </a:gs>
-              <a:gs pos="100000">
+              <a:gs pos="99000">
                 <a:srgbClr val="000000">
-                  <a:alpha val="30000"/>
+                  <a:alpha val="45000"/>
                 </a:srgbClr>
               </a:gs>
             </a:gsLst>
-            <a:lin ang="13200000" scaled="0"/>
+            <a:lin ang="21000000" scaled="0"/>
           </a:gradFill>
           <a:ln>
             <a:noFill/>
@@ -12583,83 +13531,7 @@
           <a:lstStyle/>
           <a:p>
             <a:pPr algn="ctr"/>
-            <a:endParaRPr lang="en-US"/>
-          </a:p>
-        </p:txBody>
-      </p:sp>
-      <p:sp>
-        <p:nvSpPr>
-          <p:cNvPr id="16" name="Rectangle 15">
-            <a:extLst>
-              <a:ext uri="{FF2B5EF4-FFF2-40B4-BE49-F238E27FC236}">
-                <a16:creationId xmlns:a16="http://schemas.microsoft.com/office/drawing/2014/main" id="{53E5B1A8-3AC9-4BD1-9BBC-78CA94F2D1BA}"/>
-              </a:ext>
-              <a:ext uri="{C183D7F6-B498-43B3-948B-1728B52AA6E4}">
-                <adec:decorative xmlns:adec="http://schemas.microsoft.com/office/drawing/2017/decorative" val="1"/>
-              </a:ext>
-            </a:extLst>
-          </p:cNvPr>
-          <p:cNvSpPr>
-            <a:spLocks noGrp="1" noRot="1" noChangeAspect="1" noMove="1" noResize="1" noEditPoints="1" noAdjustHandles="1" noChangeArrowheads="1" noChangeShapeType="1" noTextEdit="1"/>
-          </p:cNvSpPr>
-          <p:nvPr>
-            <p:extLst>
-              <p:ext uri="{386F3935-93C4-4BCD-93E2-E3B085C9AB24}">
-                <p16:designElem xmlns:p16="http://schemas.microsoft.com/office/powerpoint/2015/main" val="1"/>
-              </p:ext>
-            </p:extLst>
-          </p:nvPr>
-        </p:nvSpPr>
-        <p:spPr>
-          <a:xfrm>
-            <a:off x="459350" y="-1"/>
-            <a:ext cx="11732646" cy="1597433"/>
-          </a:xfrm>
-          <a:prstGeom prst="rect">
-            <a:avLst/>
-          </a:prstGeom>
-          <a:gradFill>
-            <a:gsLst>
-              <a:gs pos="50000">
-                <a:srgbClr val="000000">
-                  <a:alpha val="0"/>
-                </a:srgbClr>
-              </a:gs>
-              <a:gs pos="99000">
-                <a:schemeClr val="accent1">
-                  <a:lumMod val="50000"/>
-                  <a:alpha val="52000"/>
-                </a:schemeClr>
-              </a:gs>
-            </a:gsLst>
-            <a:lin ang="16800000" scaled="0"/>
-          </a:gradFill>
-          <a:ln>
-            <a:noFill/>
-          </a:ln>
-        </p:spPr>
-        <p:style>
-          <a:lnRef idx="2">
-            <a:schemeClr val="accent1">
-              <a:shade val="50000"/>
-            </a:schemeClr>
-          </a:lnRef>
-          <a:fillRef idx="1">
-            <a:schemeClr val="accent1"/>
-          </a:fillRef>
-          <a:effectRef idx="0">
-            <a:schemeClr val="accent1"/>
-          </a:effectRef>
-          <a:fontRef idx="minor">
-            <a:schemeClr val="lt1"/>
-          </a:fontRef>
-        </p:style>
-        <p:txBody>
-          <a:bodyPr rtlCol="0" anchor="ctr"/>
-          <a:lstStyle/>
-          <a:p>
-            <a:pPr algn="ctr"/>
-            <a:endParaRPr lang="en-US"/>
+            <a:endParaRPr lang="en-US" dirty="0"/>
           </a:p>
         </p:txBody>
       </p:sp>
@@ -12681,12 +13553,12 @@
         </p:nvSpPr>
         <p:spPr>
           <a:xfrm>
-            <a:off x="1371599" y="294538"/>
-            <a:ext cx="9895951" cy="1033669"/>
+            <a:off x="1383564" y="348865"/>
+            <a:ext cx="9718111" cy="1576446"/>
           </a:xfrm>
         </p:spPr>
         <p:txBody>
-          <a:bodyPr>
+          <a:bodyPr anchor="ctr">
             <a:normAutofit/>
           </a:bodyPr>
           <a:lstStyle/>
@@ -12707,94 +13579,37 @@
           </a:p>
         </p:txBody>
       </p:sp>
-      <p:sp>
-        <p:nvSpPr>
-          <p:cNvPr id="3" name="内容占位符 2">
+      <p:graphicFrame>
+        <p:nvGraphicFramePr>
+          <p:cNvPr id="18" name="内容占位符 2">
             <a:extLst>
               <a:ext uri="{FF2B5EF4-FFF2-40B4-BE49-F238E27FC236}">
-                <a16:creationId xmlns:a16="http://schemas.microsoft.com/office/drawing/2014/main" id="{95387EC9-9713-F415-91DD-C16CA8F7B9E7}"/>
+                <a16:creationId xmlns:a16="http://schemas.microsoft.com/office/drawing/2014/main" id="{07471DF1-9B70-BE31-49DF-0CC7852F2758}"/>
               </a:ext>
             </a:extLst>
           </p:cNvPr>
-          <p:cNvSpPr>
-            <a:spLocks noGrp="1"/>
-          </p:cNvSpPr>
+          <p:cNvGraphicFramePr>
+            <a:graphicFrameLocks noGrp="1"/>
+          </p:cNvGraphicFramePr>
           <p:nvPr>
             <p:ph idx="1"/>
+            <p:extLst>
+              <p:ext uri="{D42A27DB-BD31-4B8C-83A1-F6EECF244321}">
+                <p14:modId xmlns:p14="http://schemas.microsoft.com/office/powerpoint/2010/main" val="3232254986"/>
+              </p:ext>
+            </p:extLst>
           </p:nvPr>
-        </p:nvSpPr>
-        <p:spPr>
-          <a:xfrm>
-            <a:off x="1233982" y="2259675"/>
-            <a:ext cx="9724031" cy="3683358"/>
-          </a:xfrm>
-        </p:spPr>
-        <p:txBody>
-          <a:bodyPr anchor="ctr">
-            <a:normAutofit/>
-          </a:bodyPr>
-          <a:lstStyle/>
-          <a:p>
-            <a:r>
-              <a:rPr lang="en-US" altLang="zh-CN" sz="2000"/>
-              <a:t>1. </a:t>
-            </a:r>
-            <a:r>
-              <a:rPr lang="en-US" altLang="zh-CN" sz="2000" b="1"/>
-              <a:t>Build an image</a:t>
-            </a:r>
-            <a:r>
-              <a:rPr lang="en-US" altLang="zh-CN" sz="2000"/>
-              <a:t>: Developers define the application's environment and dependencies by writing a Dockerfile, then build the image using the `docker build` command.</a:t>
-            </a:r>
-          </a:p>
-          <a:p>
-            <a:r>
-              <a:rPr lang="en-US" altLang="zh-CN" sz="2000"/>
-              <a:t>2. </a:t>
-            </a:r>
-            <a:r>
-              <a:rPr lang="en-US" altLang="zh-CN" sz="2000" b="1"/>
-              <a:t>Distribute the image</a:t>
-            </a:r>
-            <a:r>
-              <a:rPr lang="en-US" altLang="zh-CN" sz="2000"/>
-              <a:t>: The built image can be uploaded to a Docker Registry for other users to use.</a:t>
-            </a:r>
-          </a:p>
-          <a:p>
-            <a:r>
-              <a:rPr lang="en-US" altLang="zh-CN" sz="2000"/>
-              <a:t>3. </a:t>
-            </a:r>
-            <a:r>
-              <a:rPr lang="en-US" altLang="zh-CN" sz="2000" b="1"/>
-              <a:t>Run a container</a:t>
-            </a:r>
-            <a:r>
-              <a:rPr lang="en-US" altLang="zh-CN" sz="2000"/>
-              <a:t>: Users can pull images from the Registry and run containers using the `docker run` command.</a:t>
-            </a:r>
-          </a:p>
-          <a:p>
-            <a:r>
-              <a:rPr lang="en-US" altLang="zh-CN" sz="2000"/>
-              <a:t>4. </a:t>
-            </a:r>
-            <a:r>
-              <a:rPr lang="en-US" altLang="zh-CN" sz="2000" b="1"/>
-              <a:t>Manage containers</a:t>
-            </a:r>
-            <a:r>
-              <a:rPr lang="en-US" altLang="zh-CN" sz="2000"/>
-              <a:t>: Users can manage running containers using commands like `docker ps`, `docker stop`, `docker restart`, etc.</a:t>
-            </a:r>
-          </a:p>
-          <a:p>
-            <a:endParaRPr lang="zh-CN" altLang="en-US" sz="2000"/>
-          </a:p>
-        </p:txBody>
-      </p:sp>
+        </p:nvGraphicFramePr>
+        <p:xfrm>
+          <a:off x="644056" y="2615979"/>
+          <a:ext cx="10927829" cy="3689405"/>
+        </p:xfrm>
+        <a:graphic>
+          <a:graphicData uri="http://schemas.openxmlformats.org/drawingml/2006/diagram">
+            <dgm:relIds xmlns:dgm="http://schemas.openxmlformats.org/drawingml/2006/diagram" xmlns:r="http://schemas.openxmlformats.org/officeDocument/2006/relationships" r:dm="rId2" r:lo="rId3" r:qs="rId4" r:cs="rId5"/>
+          </a:graphicData>
+        </a:graphic>
+      </p:graphicFrame>
     </p:spTree>
     <p:extLst>
       <p:ext uri="{BB962C8B-B14F-4D97-AF65-F5344CB8AC3E}">
@@ -12808,7 +13623,7 @@
 </p:sld>
 </file>
 
-<file path=ppt/slides/slide17.xml><?xml version="1.0" encoding="utf-8"?>
+<file path=ppt/slides/slide19.xml><?xml version="1.0" encoding="utf-8"?>
 <p:sld xmlns:a="http://schemas.openxmlformats.org/drawingml/2006/main" xmlns:r="http://schemas.openxmlformats.org/officeDocument/2006/relationships" xmlns:p="http://schemas.openxmlformats.org/presentationml/2006/main">
   <p:cSld>
     <p:bg>
@@ -13534,6 +14349,9 @@
             </a:r>
           </a:p>
           <a:p>
+            <a:pPr marL="0" indent="0">
+              <a:buNone/>
+            </a:pPr>
             <a:br>
               <a:rPr lang="en-US" altLang="zh-CN" sz="2000" dirty="0"/>
             </a:br>
@@ -13546,15 +14364,18 @@
             </a:r>
           </a:p>
           <a:p>
+            <a:endParaRPr lang="en-US" altLang="zh-CN" sz="2000" dirty="0"/>
+          </a:p>
+          <a:p>
             <a:r>
               <a:rPr lang="en-US" altLang="zh-CN" sz="2000" dirty="0"/>
               <a:t>- Relies on the image's system files to run, using the Linux kernel to execute processes (regardless of the current device's system type)</a:t>
             </a:r>
           </a:p>
           <a:p>
-            <a:br>
-              <a:rPr lang="en-US" altLang="zh-CN" sz="2000" dirty="0"/>
-            </a:br>
+            <a:pPr marL="0" indent="0">
+              <a:buNone/>
+            </a:pPr>
             <a:endParaRPr lang="en-US" altLang="zh-CN" sz="2000" dirty="0"/>
           </a:p>
           <a:p>
@@ -13581,7 +14402,391 @@
 </p:sld>
 </file>
 
-<file path=ppt/slides/slide18.xml><?xml version="1.0" encoding="utf-8"?>
+<file path=ppt/slides/slide2.xml><?xml version="1.0" encoding="utf-8"?>
+<p:sld xmlns:a="http://schemas.openxmlformats.org/drawingml/2006/main" xmlns:r="http://schemas.openxmlformats.org/officeDocument/2006/relationships" xmlns:p="http://schemas.openxmlformats.org/presentationml/2006/main">
+  <p:cSld>
+    <p:spTree>
+      <p:nvGrpSpPr>
+        <p:cNvPr id="1" name=""/>
+        <p:cNvGrpSpPr/>
+        <p:nvPr/>
+      </p:nvGrpSpPr>
+      <p:grpSpPr>
+        <a:xfrm>
+          <a:off x="0" y="0"/>
+          <a:ext cx="0" cy="0"/>
+          <a:chOff x="0" y="0"/>
+          <a:chExt cx="0" cy="0"/>
+        </a:xfrm>
+      </p:grpSpPr>
+      <p:pic>
+        <p:nvPicPr>
+          <p:cNvPr id="2050" name="Picture 2" descr="立体电脑的简笔画怎么画（汇总10张）_简笔画图片大全">
+            <a:extLst>
+              <a:ext uri="{FF2B5EF4-FFF2-40B4-BE49-F238E27FC236}">
+                <a16:creationId xmlns:a16="http://schemas.microsoft.com/office/drawing/2014/main" id="{4A4D61E0-330F-6928-82E8-376DA74F350D}"/>
+              </a:ext>
+            </a:extLst>
+          </p:cNvPr>
+          <p:cNvPicPr>
+            <a:picLocks noChangeAspect="1" noChangeArrowheads="1"/>
+          </p:cNvPicPr>
+          <p:nvPr/>
+        </p:nvPicPr>
+        <p:blipFill>
+          <a:blip r:embed="rId2">
+            <a:extLst>
+              <a:ext uri="{28A0092B-C50C-407E-A947-70E740481C1C}">
+                <a14:useLocalDpi xmlns:a14="http://schemas.microsoft.com/office/drawing/2010/main" val="0"/>
+              </a:ext>
+            </a:extLst>
+          </a:blip>
+          <a:srcRect/>
+          <a:stretch>
+            <a:fillRect/>
+          </a:stretch>
+        </p:blipFill>
+        <p:spPr bwMode="auto">
+          <a:xfrm>
+            <a:off x="1478014" y="497397"/>
+            <a:ext cx="1894293" cy="2844372"/>
+          </a:xfrm>
+          <a:prstGeom prst="rect">
+            <a:avLst/>
+          </a:prstGeom>
+          <a:noFill/>
+          <a:extLst>
+            <a:ext uri="{909E8E84-426E-40DD-AFC4-6F175D3DCCD1}">
+              <a14:hiddenFill xmlns:a14="http://schemas.microsoft.com/office/drawing/2010/main">
+                <a:solidFill>
+                  <a:srgbClr val="FFFFFF"/>
+                </a:solidFill>
+              </a14:hiddenFill>
+            </a:ext>
+          </a:extLst>
+        </p:spPr>
+      </p:pic>
+      <p:sp>
+        <p:nvSpPr>
+          <p:cNvPr id="4" name="文本框 3">
+            <a:extLst>
+              <a:ext uri="{FF2B5EF4-FFF2-40B4-BE49-F238E27FC236}">
+                <a16:creationId xmlns:a16="http://schemas.microsoft.com/office/drawing/2014/main" id="{15B9DF86-A99A-F003-26CA-152E68FC77D1}"/>
+              </a:ext>
+            </a:extLst>
+          </p:cNvPr>
+          <p:cNvSpPr txBox="1"/>
+          <p:nvPr/>
+        </p:nvSpPr>
+        <p:spPr>
+          <a:xfrm>
+            <a:off x="1609074" y="3642970"/>
+            <a:ext cx="1632172" cy="369332"/>
+          </a:xfrm>
+          <a:prstGeom prst="rect">
+            <a:avLst/>
+          </a:prstGeom>
+          <a:noFill/>
+        </p:spPr>
+        <p:txBody>
+          <a:bodyPr wrap="square" rtlCol="0">
+            <a:spAutoFit/>
+          </a:bodyPr>
+          <a:lstStyle/>
+          <a:p>
+            <a:r>
+              <a:rPr lang="en-US" altLang="zh-CN" dirty="0"/>
+              <a:t>Equipment  A</a:t>
+            </a:r>
+            <a:endParaRPr lang="zh-CN" altLang="en-US" dirty="0"/>
+          </a:p>
+        </p:txBody>
+      </p:sp>
+      <p:pic>
+        <p:nvPicPr>
+          <p:cNvPr id="5" name="Picture 2" descr="立体电脑的简笔画怎么画（汇总10张）_简笔画图片大全">
+            <a:extLst>
+              <a:ext uri="{FF2B5EF4-FFF2-40B4-BE49-F238E27FC236}">
+                <a16:creationId xmlns:a16="http://schemas.microsoft.com/office/drawing/2014/main" id="{24671658-66ED-ACDE-F0EF-DB788E9A16FF}"/>
+              </a:ext>
+            </a:extLst>
+          </p:cNvPr>
+          <p:cNvPicPr>
+            <a:picLocks noChangeAspect="1" noChangeArrowheads="1"/>
+          </p:cNvPicPr>
+          <p:nvPr/>
+        </p:nvPicPr>
+        <p:blipFill>
+          <a:blip r:embed="rId2">
+            <a:extLst>
+              <a:ext uri="{28A0092B-C50C-407E-A947-70E740481C1C}">
+                <a14:useLocalDpi xmlns:a14="http://schemas.microsoft.com/office/drawing/2010/main" val="0"/>
+              </a:ext>
+            </a:extLst>
+          </a:blip>
+          <a:srcRect/>
+          <a:stretch>
+            <a:fillRect/>
+          </a:stretch>
+        </p:blipFill>
+        <p:spPr bwMode="auto">
+          <a:xfrm>
+            <a:off x="8819693" y="497397"/>
+            <a:ext cx="1894293" cy="2844372"/>
+          </a:xfrm>
+          <a:prstGeom prst="rect">
+            <a:avLst/>
+          </a:prstGeom>
+          <a:noFill/>
+          <a:extLst>
+            <a:ext uri="{909E8E84-426E-40DD-AFC4-6F175D3DCCD1}">
+              <a14:hiddenFill xmlns:a14="http://schemas.microsoft.com/office/drawing/2010/main">
+                <a:solidFill>
+                  <a:srgbClr val="FFFFFF"/>
+                </a:solidFill>
+              </a14:hiddenFill>
+            </a:ext>
+          </a:extLst>
+        </p:spPr>
+      </p:pic>
+      <p:sp>
+        <p:nvSpPr>
+          <p:cNvPr id="6" name="文本框 5">
+            <a:extLst>
+              <a:ext uri="{FF2B5EF4-FFF2-40B4-BE49-F238E27FC236}">
+                <a16:creationId xmlns:a16="http://schemas.microsoft.com/office/drawing/2014/main" id="{819A7B77-08F2-FDD0-5831-C4778136F5AE}"/>
+              </a:ext>
+            </a:extLst>
+          </p:cNvPr>
+          <p:cNvSpPr txBox="1"/>
+          <p:nvPr/>
+        </p:nvSpPr>
+        <p:spPr>
+          <a:xfrm>
+            <a:off x="9025795" y="3642971"/>
+            <a:ext cx="1472992" cy="369332"/>
+          </a:xfrm>
+          <a:prstGeom prst="rect">
+            <a:avLst/>
+          </a:prstGeom>
+          <a:noFill/>
+        </p:spPr>
+        <p:txBody>
+          <a:bodyPr wrap="square" rtlCol="0">
+            <a:spAutoFit/>
+          </a:bodyPr>
+          <a:lstStyle/>
+          <a:p>
+            <a:r>
+              <a:rPr lang="en-US" altLang="zh-CN" dirty="0"/>
+              <a:t>Equipment</a:t>
+            </a:r>
+            <a:r>
+              <a:rPr lang="zh-CN" altLang="en-US" dirty="0"/>
+              <a:t> </a:t>
+            </a:r>
+            <a:r>
+              <a:rPr lang="en-US" altLang="zh-CN" dirty="0"/>
+              <a:t>B</a:t>
+            </a:r>
+            <a:endParaRPr lang="zh-CN" altLang="en-US" dirty="0"/>
+          </a:p>
+        </p:txBody>
+      </p:sp>
+      <p:pic>
+        <p:nvPicPr>
+          <p:cNvPr id="8" name="图片 7" descr="图片包含 游戏机, 镜子&#10;&#10;AI 生成的内容可能不正确。">
+            <a:extLst>
+              <a:ext uri="{FF2B5EF4-FFF2-40B4-BE49-F238E27FC236}">
+                <a16:creationId xmlns:a16="http://schemas.microsoft.com/office/drawing/2014/main" id="{53422CC3-1A35-49D1-3749-9E15E3AE9D49}"/>
+              </a:ext>
+            </a:extLst>
+          </p:cNvPr>
+          <p:cNvPicPr>
+            <a:picLocks noChangeAspect="1"/>
+          </p:cNvPicPr>
+          <p:nvPr/>
+        </p:nvPicPr>
+        <p:blipFill>
+          <a:blip r:embed="rId3">
+            <a:extLst>
+              <a:ext uri="{28A0092B-C50C-407E-A947-70E740481C1C}">
+                <a14:useLocalDpi xmlns:a14="http://schemas.microsoft.com/office/drawing/2010/main" val="0"/>
+              </a:ext>
+            </a:extLst>
+          </a:blip>
+          <a:stretch>
+            <a:fillRect/>
+          </a:stretch>
+        </p:blipFill>
+        <p:spPr>
+          <a:xfrm>
+            <a:off x="5024437" y="3642970"/>
+            <a:ext cx="2143125" cy="1739900"/>
+          </a:xfrm>
+          <a:prstGeom prst="rect">
+            <a:avLst/>
+          </a:prstGeom>
+        </p:spPr>
+      </p:pic>
+      <p:sp>
+        <p:nvSpPr>
+          <p:cNvPr id="9" name="文本框 8">
+            <a:extLst>
+              <a:ext uri="{FF2B5EF4-FFF2-40B4-BE49-F238E27FC236}">
+                <a16:creationId xmlns:a16="http://schemas.microsoft.com/office/drawing/2014/main" id="{B8CC2F63-910E-AFC8-9F57-300F9B1BDDC7}"/>
+              </a:ext>
+            </a:extLst>
+          </p:cNvPr>
+          <p:cNvSpPr txBox="1"/>
+          <p:nvPr/>
+        </p:nvSpPr>
+        <p:spPr>
+          <a:xfrm>
+            <a:off x="4962790" y="5661475"/>
+            <a:ext cx="2266418" cy="369332"/>
+          </a:xfrm>
+          <a:prstGeom prst="rect">
+            <a:avLst/>
+          </a:prstGeom>
+          <a:noFill/>
+        </p:spPr>
+        <p:txBody>
+          <a:bodyPr wrap="square" rtlCol="0">
+            <a:spAutoFit/>
+          </a:bodyPr>
+          <a:lstStyle/>
+          <a:p>
+            <a:r>
+              <a:rPr lang="en-US" altLang="zh-CN" dirty="0"/>
+              <a:t>Project</a:t>
+            </a:r>
+            <a:r>
+              <a:rPr lang="zh-CN" altLang="en-US" dirty="0"/>
+              <a:t> </a:t>
+            </a:r>
+            <a:r>
+              <a:rPr lang="en-US" altLang="zh-CN" dirty="0"/>
+              <a:t>document</a:t>
+            </a:r>
+            <a:r>
+              <a:rPr lang="zh-CN" altLang="en-US" dirty="0"/>
+              <a:t> </a:t>
+            </a:r>
+            <a:r>
+              <a:rPr lang="en-US" altLang="zh-CN" dirty="0"/>
+              <a:t>file</a:t>
+            </a:r>
+            <a:endParaRPr lang="zh-CN" altLang="en-US" dirty="0"/>
+          </a:p>
+        </p:txBody>
+      </p:sp>
+      <p:sp>
+        <p:nvSpPr>
+          <p:cNvPr id="12" name="箭头: 右 11">
+            <a:extLst>
+              <a:ext uri="{FF2B5EF4-FFF2-40B4-BE49-F238E27FC236}">
+                <a16:creationId xmlns:a16="http://schemas.microsoft.com/office/drawing/2014/main" id="{C577BED7-D191-94E4-A6C4-7C8C9519677E}"/>
+              </a:ext>
+            </a:extLst>
+          </p:cNvPr>
+          <p:cNvSpPr/>
+          <p:nvPr/>
+        </p:nvSpPr>
+        <p:spPr>
+          <a:xfrm rot="3253689">
+            <a:off x="3575301" y="2477065"/>
+            <a:ext cx="1472859" cy="950509"/>
+          </a:xfrm>
+          <a:prstGeom prst="rightArrow">
+            <a:avLst/>
+          </a:prstGeom>
+        </p:spPr>
+        <p:style>
+          <a:lnRef idx="2">
+            <a:schemeClr val="accent1">
+              <a:shade val="15000"/>
+            </a:schemeClr>
+          </a:lnRef>
+          <a:fillRef idx="1">
+            <a:schemeClr val="accent1"/>
+          </a:fillRef>
+          <a:effectRef idx="0">
+            <a:schemeClr val="accent1"/>
+          </a:effectRef>
+          <a:fontRef idx="minor">
+            <a:schemeClr val="lt1"/>
+          </a:fontRef>
+        </p:style>
+        <p:txBody>
+          <a:bodyPr rtlCol="0" anchor="ctr"/>
+          <a:lstStyle/>
+          <a:p>
+            <a:pPr algn="ctr"/>
+            <a:endParaRPr lang="zh-CN" altLang="en-US"/>
+          </a:p>
+        </p:txBody>
+      </p:sp>
+      <p:sp>
+        <p:nvSpPr>
+          <p:cNvPr id="13" name="箭头: 右 12">
+            <a:extLst>
+              <a:ext uri="{FF2B5EF4-FFF2-40B4-BE49-F238E27FC236}">
+                <a16:creationId xmlns:a16="http://schemas.microsoft.com/office/drawing/2014/main" id="{A6286F44-BD16-9B14-3242-4E24F5201ED7}"/>
+              </a:ext>
+            </a:extLst>
+          </p:cNvPr>
+          <p:cNvSpPr/>
+          <p:nvPr/>
+        </p:nvSpPr>
+        <p:spPr>
+          <a:xfrm rot="18710958">
+            <a:off x="7143840" y="2384732"/>
+            <a:ext cx="1472859" cy="950509"/>
+          </a:xfrm>
+          <a:prstGeom prst="rightArrow">
+            <a:avLst/>
+          </a:prstGeom>
+        </p:spPr>
+        <p:style>
+          <a:lnRef idx="2">
+            <a:schemeClr val="accent1">
+              <a:shade val="15000"/>
+            </a:schemeClr>
+          </a:lnRef>
+          <a:fillRef idx="1">
+            <a:schemeClr val="accent1"/>
+          </a:fillRef>
+          <a:effectRef idx="0">
+            <a:schemeClr val="accent1"/>
+          </a:effectRef>
+          <a:fontRef idx="minor">
+            <a:schemeClr val="lt1"/>
+          </a:fontRef>
+        </p:style>
+        <p:txBody>
+          <a:bodyPr rtlCol="0" anchor="ctr"/>
+          <a:lstStyle/>
+          <a:p>
+            <a:pPr algn="ctr"/>
+            <a:endParaRPr lang="zh-CN" altLang="en-US"/>
+          </a:p>
+        </p:txBody>
+      </p:sp>
+    </p:spTree>
+    <p:extLst>
+      <p:ext uri="{BB962C8B-B14F-4D97-AF65-F5344CB8AC3E}">
+        <p14:creationId xmlns:p14="http://schemas.microsoft.com/office/powerpoint/2010/main" val="2451879848"/>
+      </p:ext>
+    </p:extLst>
+  </p:cSld>
+  <p:clrMapOvr>
+    <a:masterClrMapping/>
+  </p:clrMapOvr>
+</p:sld>
+</file>
+
+<file path=ppt/slides/slide20.xml><?xml version="1.0" encoding="utf-8"?>
 <p:sld xmlns:a="http://schemas.openxmlformats.org/drawingml/2006/main" xmlns:r="http://schemas.openxmlformats.org/officeDocument/2006/relationships" xmlns:p="http://schemas.openxmlformats.org/presentationml/2006/main">
   <p:cSld>
     <p:bg>
@@ -14312,6 +15517,9 @@
             </a:r>
           </a:p>
           <a:p>
+            <a:pPr marL="0" indent="0">
+              <a:buNone/>
+            </a:pPr>
             <a:br>
               <a:rPr lang="en-US" altLang="zh-CN" sz="2900" dirty="0"/>
             </a:br>
@@ -14324,6 +15532,9 @@
             </a:r>
           </a:p>
           <a:p>
+            <a:pPr marL="0" indent="0">
+              <a:buNone/>
+            </a:pPr>
             <a:br>
               <a:rPr lang="en-US" altLang="zh-CN" sz="2900" dirty="0"/>
             </a:br>
@@ -14336,6 +15547,9 @@
             </a:r>
           </a:p>
           <a:p>
+            <a:pPr marL="0" indent="0">
+              <a:buNone/>
+            </a:pPr>
             <a:br>
               <a:rPr lang="en-US" altLang="zh-CN" sz="2900" dirty="0"/>
             </a:br>
@@ -14360,6 +15574,9 @@
             </a:r>
           </a:p>
           <a:p>
+            <a:pPr marL="0" indent="0">
+              <a:buNone/>
+            </a:pPr>
             <a:br>
               <a:rPr lang="en-US" altLang="zh-CN" sz="2900" dirty="0"/>
             </a:br>
@@ -14372,6 +15589,9 @@
             </a:r>
           </a:p>
           <a:p>
+            <a:pPr marL="0" indent="0">
+              <a:buNone/>
+            </a:pPr>
             <a:br>
               <a:rPr lang="en-US" altLang="zh-CN" sz="2900" dirty="0"/>
             </a:br>
@@ -14401,7 +15621,7 @@
 </p:sld>
 </file>
 
-<file path=ppt/slides/slide19.xml><?xml version="1.0" encoding="utf-8"?>
+<file path=ppt/slides/slide21.xml><?xml version="1.0" encoding="utf-8"?>
 <p:sld xmlns:a="http://schemas.openxmlformats.org/drawingml/2006/main" xmlns:r="http://schemas.openxmlformats.org/officeDocument/2006/relationships" xmlns:p="http://schemas.openxmlformats.org/presentationml/2006/main">
   <p:cSld>
     <p:spTree>
@@ -14470,391 +15690,7 @@
 </p:sld>
 </file>
 
-<file path=ppt/slides/slide2.xml><?xml version="1.0" encoding="utf-8"?>
-<p:sld xmlns:a="http://schemas.openxmlformats.org/drawingml/2006/main" xmlns:r="http://schemas.openxmlformats.org/officeDocument/2006/relationships" xmlns:p="http://schemas.openxmlformats.org/presentationml/2006/main">
-  <p:cSld>
-    <p:spTree>
-      <p:nvGrpSpPr>
-        <p:cNvPr id="1" name=""/>
-        <p:cNvGrpSpPr/>
-        <p:nvPr/>
-      </p:nvGrpSpPr>
-      <p:grpSpPr>
-        <a:xfrm>
-          <a:off x="0" y="0"/>
-          <a:ext cx="0" cy="0"/>
-          <a:chOff x="0" y="0"/>
-          <a:chExt cx="0" cy="0"/>
-        </a:xfrm>
-      </p:grpSpPr>
-      <p:pic>
-        <p:nvPicPr>
-          <p:cNvPr id="2050" name="Picture 2" descr="立体电脑的简笔画怎么画（汇总10张）_简笔画图片大全">
-            <a:extLst>
-              <a:ext uri="{FF2B5EF4-FFF2-40B4-BE49-F238E27FC236}">
-                <a16:creationId xmlns:a16="http://schemas.microsoft.com/office/drawing/2014/main" id="{4A4D61E0-330F-6928-82E8-376DA74F350D}"/>
-              </a:ext>
-            </a:extLst>
-          </p:cNvPr>
-          <p:cNvPicPr>
-            <a:picLocks noChangeAspect="1" noChangeArrowheads="1"/>
-          </p:cNvPicPr>
-          <p:nvPr/>
-        </p:nvPicPr>
-        <p:blipFill>
-          <a:blip r:embed="rId2">
-            <a:extLst>
-              <a:ext uri="{28A0092B-C50C-407E-A947-70E740481C1C}">
-                <a14:useLocalDpi xmlns:a14="http://schemas.microsoft.com/office/drawing/2010/main" val="0"/>
-              </a:ext>
-            </a:extLst>
-          </a:blip>
-          <a:srcRect/>
-          <a:stretch>
-            <a:fillRect/>
-          </a:stretch>
-        </p:blipFill>
-        <p:spPr bwMode="auto">
-          <a:xfrm>
-            <a:off x="1478014" y="497397"/>
-            <a:ext cx="1894293" cy="2844372"/>
-          </a:xfrm>
-          <a:prstGeom prst="rect">
-            <a:avLst/>
-          </a:prstGeom>
-          <a:noFill/>
-          <a:extLst>
-            <a:ext uri="{909E8E84-426E-40DD-AFC4-6F175D3DCCD1}">
-              <a14:hiddenFill xmlns:a14="http://schemas.microsoft.com/office/drawing/2010/main">
-                <a:solidFill>
-                  <a:srgbClr val="FFFFFF"/>
-                </a:solidFill>
-              </a14:hiddenFill>
-            </a:ext>
-          </a:extLst>
-        </p:spPr>
-      </p:pic>
-      <p:sp>
-        <p:nvSpPr>
-          <p:cNvPr id="4" name="文本框 3">
-            <a:extLst>
-              <a:ext uri="{FF2B5EF4-FFF2-40B4-BE49-F238E27FC236}">
-                <a16:creationId xmlns:a16="http://schemas.microsoft.com/office/drawing/2014/main" id="{15B9DF86-A99A-F003-26CA-152E68FC77D1}"/>
-              </a:ext>
-            </a:extLst>
-          </p:cNvPr>
-          <p:cNvSpPr txBox="1"/>
-          <p:nvPr/>
-        </p:nvSpPr>
-        <p:spPr>
-          <a:xfrm>
-            <a:off x="1609074" y="3642970"/>
-            <a:ext cx="1632172" cy="369332"/>
-          </a:xfrm>
-          <a:prstGeom prst="rect">
-            <a:avLst/>
-          </a:prstGeom>
-          <a:noFill/>
-        </p:spPr>
-        <p:txBody>
-          <a:bodyPr wrap="square" rtlCol="0">
-            <a:spAutoFit/>
-          </a:bodyPr>
-          <a:lstStyle/>
-          <a:p>
-            <a:r>
-              <a:rPr lang="en-US" altLang="zh-CN" dirty="0"/>
-              <a:t>Equipment  A</a:t>
-            </a:r>
-            <a:endParaRPr lang="zh-CN" altLang="en-US" dirty="0"/>
-          </a:p>
-        </p:txBody>
-      </p:sp>
-      <p:pic>
-        <p:nvPicPr>
-          <p:cNvPr id="5" name="Picture 2" descr="立体电脑的简笔画怎么画（汇总10张）_简笔画图片大全">
-            <a:extLst>
-              <a:ext uri="{FF2B5EF4-FFF2-40B4-BE49-F238E27FC236}">
-                <a16:creationId xmlns:a16="http://schemas.microsoft.com/office/drawing/2014/main" id="{24671658-66ED-ACDE-F0EF-DB788E9A16FF}"/>
-              </a:ext>
-            </a:extLst>
-          </p:cNvPr>
-          <p:cNvPicPr>
-            <a:picLocks noChangeAspect="1" noChangeArrowheads="1"/>
-          </p:cNvPicPr>
-          <p:nvPr/>
-        </p:nvPicPr>
-        <p:blipFill>
-          <a:blip r:embed="rId2">
-            <a:extLst>
-              <a:ext uri="{28A0092B-C50C-407E-A947-70E740481C1C}">
-                <a14:useLocalDpi xmlns:a14="http://schemas.microsoft.com/office/drawing/2010/main" val="0"/>
-              </a:ext>
-            </a:extLst>
-          </a:blip>
-          <a:srcRect/>
-          <a:stretch>
-            <a:fillRect/>
-          </a:stretch>
-        </p:blipFill>
-        <p:spPr bwMode="auto">
-          <a:xfrm>
-            <a:off x="8819693" y="497397"/>
-            <a:ext cx="1894293" cy="2844372"/>
-          </a:xfrm>
-          <a:prstGeom prst="rect">
-            <a:avLst/>
-          </a:prstGeom>
-          <a:noFill/>
-          <a:extLst>
-            <a:ext uri="{909E8E84-426E-40DD-AFC4-6F175D3DCCD1}">
-              <a14:hiddenFill xmlns:a14="http://schemas.microsoft.com/office/drawing/2010/main">
-                <a:solidFill>
-                  <a:srgbClr val="FFFFFF"/>
-                </a:solidFill>
-              </a14:hiddenFill>
-            </a:ext>
-          </a:extLst>
-        </p:spPr>
-      </p:pic>
-      <p:sp>
-        <p:nvSpPr>
-          <p:cNvPr id="6" name="文本框 5">
-            <a:extLst>
-              <a:ext uri="{FF2B5EF4-FFF2-40B4-BE49-F238E27FC236}">
-                <a16:creationId xmlns:a16="http://schemas.microsoft.com/office/drawing/2014/main" id="{819A7B77-08F2-FDD0-5831-C4778136F5AE}"/>
-              </a:ext>
-            </a:extLst>
-          </p:cNvPr>
-          <p:cNvSpPr txBox="1"/>
-          <p:nvPr/>
-        </p:nvSpPr>
-        <p:spPr>
-          <a:xfrm>
-            <a:off x="9025795" y="3642971"/>
-            <a:ext cx="1472992" cy="369332"/>
-          </a:xfrm>
-          <a:prstGeom prst="rect">
-            <a:avLst/>
-          </a:prstGeom>
-          <a:noFill/>
-        </p:spPr>
-        <p:txBody>
-          <a:bodyPr wrap="square" rtlCol="0">
-            <a:spAutoFit/>
-          </a:bodyPr>
-          <a:lstStyle/>
-          <a:p>
-            <a:r>
-              <a:rPr lang="en-US" altLang="zh-CN" dirty="0"/>
-              <a:t>Equipment</a:t>
-            </a:r>
-            <a:r>
-              <a:rPr lang="zh-CN" altLang="en-US" dirty="0"/>
-              <a:t> </a:t>
-            </a:r>
-            <a:r>
-              <a:rPr lang="en-US" altLang="zh-CN" dirty="0"/>
-              <a:t>B</a:t>
-            </a:r>
-            <a:endParaRPr lang="zh-CN" altLang="en-US" dirty="0"/>
-          </a:p>
-        </p:txBody>
-      </p:sp>
-      <p:pic>
-        <p:nvPicPr>
-          <p:cNvPr id="8" name="图片 7" descr="图片包含 游戏机, 镜子&#10;&#10;AI 生成的内容可能不正确。">
-            <a:extLst>
-              <a:ext uri="{FF2B5EF4-FFF2-40B4-BE49-F238E27FC236}">
-                <a16:creationId xmlns:a16="http://schemas.microsoft.com/office/drawing/2014/main" id="{53422CC3-1A35-49D1-3749-9E15E3AE9D49}"/>
-              </a:ext>
-            </a:extLst>
-          </p:cNvPr>
-          <p:cNvPicPr>
-            <a:picLocks noChangeAspect="1"/>
-          </p:cNvPicPr>
-          <p:nvPr/>
-        </p:nvPicPr>
-        <p:blipFill>
-          <a:blip r:embed="rId3">
-            <a:extLst>
-              <a:ext uri="{28A0092B-C50C-407E-A947-70E740481C1C}">
-                <a14:useLocalDpi xmlns:a14="http://schemas.microsoft.com/office/drawing/2010/main" val="0"/>
-              </a:ext>
-            </a:extLst>
-          </a:blip>
-          <a:stretch>
-            <a:fillRect/>
-          </a:stretch>
-        </p:blipFill>
-        <p:spPr>
-          <a:xfrm>
-            <a:off x="5024437" y="3642970"/>
-            <a:ext cx="2143125" cy="1739900"/>
-          </a:xfrm>
-          <a:prstGeom prst="rect">
-            <a:avLst/>
-          </a:prstGeom>
-        </p:spPr>
-      </p:pic>
-      <p:sp>
-        <p:nvSpPr>
-          <p:cNvPr id="9" name="文本框 8">
-            <a:extLst>
-              <a:ext uri="{FF2B5EF4-FFF2-40B4-BE49-F238E27FC236}">
-                <a16:creationId xmlns:a16="http://schemas.microsoft.com/office/drawing/2014/main" id="{B8CC2F63-910E-AFC8-9F57-300F9B1BDDC7}"/>
-              </a:ext>
-            </a:extLst>
-          </p:cNvPr>
-          <p:cNvSpPr txBox="1"/>
-          <p:nvPr/>
-        </p:nvSpPr>
-        <p:spPr>
-          <a:xfrm>
-            <a:off x="4962790" y="5661475"/>
-            <a:ext cx="2266418" cy="369332"/>
-          </a:xfrm>
-          <a:prstGeom prst="rect">
-            <a:avLst/>
-          </a:prstGeom>
-          <a:noFill/>
-        </p:spPr>
-        <p:txBody>
-          <a:bodyPr wrap="square" rtlCol="0">
-            <a:spAutoFit/>
-          </a:bodyPr>
-          <a:lstStyle/>
-          <a:p>
-            <a:r>
-              <a:rPr lang="en-US" altLang="zh-CN" dirty="0"/>
-              <a:t>Project</a:t>
-            </a:r>
-            <a:r>
-              <a:rPr lang="zh-CN" altLang="en-US" dirty="0"/>
-              <a:t> </a:t>
-            </a:r>
-            <a:r>
-              <a:rPr lang="en-US" altLang="zh-CN" dirty="0"/>
-              <a:t>document</a:t>
-            </a:r>
-            <a:r>
-              <a:rPr lang="zh-CN" altLang="en-US" dirty="0"/>
-              <a:t> </a:t>
-            </a:r>
-            <a:r>
-              <a:rPr lang="en-US" altLang="zh-CN" dirty="0"/>
-              <a:t>file</a:t>
-            </a:r>
-            <a:endParaRPr lang="zh-CN" altLang="en-US" dirty="0"/>
-          </a:p>
-        </p:txBody>
-      </p:sp>
-      <p:sp>
-        <p:nvSpPr>
-          <p:cNvPr id="12" name="箭头: 右 11">
-            <a:extLst>
-              <a:ext uri="{FF2B5EF4-FFF2-40B4-BE49-F238E27FC236}">
-                <a16:creationId xmlns:a16="http://schemas.microsoft.com/office/drawing/2014/main" id="{C577BED7-D191-94E4-A6C4-7C8C9519677E}"/>
-              </a:ext>
-            </a:extLst>
-          </p:cNvPr>
-          <p:cNvSpPr/>
-          <p:nvPr/>
-        </p:nvSpPr>
-        <p:spPr>
-          <a:xfrm rot="3253689">
-            <a:off x="3575301" y="2477065"/>
-            <a:ext cx="1472859" cy="950509"/>
-          </a:xfrm>
-          <a:prstGeom prst="rightArrow">
-            <a:avLst/>
-          </a:prstGeom>
-        </p:spPr>
-        <p:style>
-          <a:lnRef idx="2">
-            <a:schemeClr val="accent1">
-              <a:shade val="15000"/>
-            </a:schemeClr>
-          </a:lnRef>
-          <a:fillRef idx="1">
-            <a:schemeClr val="accent1"/>
-          </a:fillRef>
-          <a:effectRef idx="0">
-            <a:schemeClr val="accent1"/>
-          </a:effectRef>
-          <a:fontRef idx="minor">
-            <a:schemeClr val="lt1"/>
-          </a:fontRef>
-        </p:style>
-        <p:txBody>
-          <a:bodyPr rtlCol="0" anchor="ctr"/>
-          <a:lstStyle/>
-          <a:p>
-            <a:pPr algn="ctr"/>
-            <a:endParaRPr lang="zh-CN" altLang="en-US"/>
-          </a:p>
-        </p:txBody>
-      </p:sp>
-      <p:sp>
-        <p:nvSpPr>
-          <p:cNvPr id="13" name="箭头: 右 12">
-            <a:extLst>
-              <a:ext uri="{FF2B5EF4-FFF2-40B4-BE49-F238E27FC236}">
-                <a16:creationId xmlns:a16="http://schemas.microsoft.com/office/drawing/2014/main" id="{A6286F44-BD16-9B14-3242-4E24F5201ED7}"/>
-              </a:ext>
-            </a:extLst>
-          </p:cNvPr>
-          <p:cNvSpPr/>
-          <p:nvPr/>
-        </p:nvSpPr>
-        <p:spPr>
-          <a:xfrm rot="18710958">
-            <a:off x="7143840" y="2384732"/>
-            <a:ext cx="1472859" cy="950509"/>
-          </a:xfrm>
-          <a:prstGeom prst="rightArrow">
-            <a:avLst/>
-          </a:prstGeom>
-        </p:spPr>
-        <p:style>
-          <a:lnRef idx="2">
-            <a:schemeClr val="accent1">
-              <a:shade val="15000"/>
-            </a:schemeClr>
-          </a:lnRef>
-          <a:fillRef idx="1">
-            <a:schemeClr val="accent1"/>
-          </a:fillRef>
-          <a:effectRef idx="0">
-            <a:schemeClr val="accent1"/>
-          </a:effectRef>
-          <a:fontRef idx="minor">
-            <a:schemeClr val="lt1"/>
-          </a:fontRef>
-        </p:style>
-        <p:txBody>
-          <a:bodyPr rtlCol="0" anchor="ctr"/>
-          <a:lstStyle/>
-          <a:p>
-            <a:pPr algn="ctr"/>
-            <a:endParaRPr lang="zh-CN" altLang="en-US"/>
-          </a:p>
-        </p:txBody>
-      </p:sp>
-    </p:spTree>
-    <p:extLst>
-      <p:ext uri="{BB962C8B-B14F-4D97-AF65-F5344CB8AC3E}">
-        <p14:creationId xmlns:p14="http://schemas.microsoft.com/office/powerpoint/2010/main" val="2451879848"/>
-      </p:ext>
-    </p:extLst>
-  </p:cSld>
-  <p:clrMapOvr>
-    <a:masterClrMapping/>
-  </p:clrMapOvr>
-</p:sld>
-</file>
-
-<file path=ppt/slides/slide20.xml><?xml version="1.0" encoding="utf-8"?>
+<file path=ppt/slides/slide22.xml><?xml version="1.0" encoding="utf-8"?>
 <p:sld xmlns:a="http://schemas.openxmlformats.org/drawingml/2006/main" xmlns:r="http://schemas.openxmlformats.org/officeDocument/2006/relationships" xmlns:p="http://schemas.openxmlformats.org/presentationml/2006/main">
   <p:cSld>
     <p:spTree>
@@ -15515,183 +16351,10 @@
       </p:grpSpPr>
       <p:sp useBgFill="1">
         <p:nvSpPr>
-          <p:cNvPr id="10" name="Rectangle 9">
+          <p:cNvPr id="15" name="Rectangle 14">
             <a:extLst>
               <a:ext uri="{FF2B5EF4-FFF2-40B4-BE49-F238E27FC236}">
-                <a16:creationId xmlns:a16="http://schemas.microsoft.com/office/drawing/2014/main" id="{6C4028FD-8BAA-4A19-BFDE-594D991B7552}"/>
-              </a:ext>
-              <a:ext uri="{C183D7F6-B498-43B3-948B-1728B52AA6E4}">
-                <adec:decorative xmlns:adec="http://schemas.microsoft.com/office/drawing/2017/decorative" val="1"/>
-              </a:ext>
-            </a:extLst>
-          </p:cNvPr>
-          <p:cNvSpPr>
-            <a:spLocks noGrp="1" noRot="1" noChangeAspect="1" noMove="1" noResize="1" noEditPoints="1" noAdjustHandles="1" noChangeArrowheads="1" noChangeShapeType="1" noTextEdit="1"/>
-          </p:cNvSpPr>
-          <p:nvPr>
-            <p:extLst>
-              <p:ext uri="{386F3935-93C4-4BCD-93E2-E3B085C9AB24}">
-                <p16:designElem xmlns:p16="http://schemas.microsoft.com/office/powerpoint/2015/main" val="1"/>
-              </p:ext>
-            </p:extLst>
-          </p:nvPr>
-        </p:nvSpPr>
-        <p:spPr>
-          <a:xfrm>
-            <a:off x="-1" y="0"/>
-            <a:ext cx="12188952" cy="6858000"/>
-          </a:xfrm>
-          <a:prstGeom prst="rect">
-            <a:avLst/>
-          </a:prstGeom>
-          <a:ln>
-            <a:noFill/>
-          </a:ln>
-        </p:spPr>
-        <p:style>
-          <a:lnRef idx="2">
-            <a:schemeClr val="accent1">
-              <a:shade val="50000"/>
-            </a:schemeClr>
-          </a:lnRef>
-          <a:fillRef idx="1">
-            <a:schemeClr val="accent1"/>
-          </a:fillRef>
-          <a:effectRef idx="0">
-            <a:schemeClr val="accent1"/>
-          </a:effectRef>
-          <a:fontRef idx="minor">
-            <a:schemeClr val="lt1"/>
-          </a:fontRef>
-        </p:style>
-        <p:txBody>
-          <a:bodyPr rtlCol="0" anchor="ctr"/>
-          <a:lstStyle/>
-          <a:p>
-            <a:pPr algn="ctr"/>
-            <a:endParaRPr lang="en-US"/>
-          </a:p>
-        </p:txBody>
-      </p:sp>
-      <p:sp>
-        <p:nvSpPr>
-          <p:cNvPr id="2" name="标题 1">
-            <a:extLst>
-              <a:ext uri="{FF2B5EF4-FFF2-40B4-BE49-F238E27FC236}">
-                <a16:creationId xmlns:a16="http://schemas.microsoft.com/office/drawing/2014/main" id="{BB39C718-38D6-39E5-1F84-D7DEA15AB05E}"/>
-              </a:ext>
-            </a:extLst>
-          </p:cNvPr>
-          <p:cNvSpPr>
-            <a:spLocks noGrp="1"/>
-          </p:cNvSpPr>
-          <p:nvPr>
-            <p:ph type="title"/>
-          </p:nvPr>
-        </p:nvSpPr>
-        <p:spPr>
-          <a:xfrm>
-            <a:off x="838200" y="556995"/>
-            <a:ext cx="10515600" cy="1133693"/>
-          </a:xfrm>
-        </p:spPr>
-        <p:txBody>
-          <a:bodyPr>
-            <a:normAutofit/>
-          </a:bodyPr>
-          <a:lstStyle/>
-          <a:p>
-            <a:r>
-              <a:rPr lang="en-US" altLang="zh-CN" sz="5200"/>
-              <a:t>What</a:t>
-            </a:r>
-            <a:r>
-              <a:rPr lang="zh-CN" altLang="en-US" sz="5200"/>
-              <a:t> </a:t>
-            </a:r>
-            <a:r>
-              <a:rPr lang="en-US" altLang="zh-CN" sz="5200"/>
-              <a:t>is Docker</a:t>
-            </a:r>
-            <a:endParaRPr lang="zh-CN" altLang="en-US" sz="5200"/>
-          </a:p>
-        </p:txBody>
-      </p:sp>
-      <p:graphicFrame>
-        <p:nvGraphicFramePr>
-          <p:cNvPr id="5" name="内容占位符 2">
-            <a:extLst>
-              <a:ext uri="{FF2B5EF4-FFF2-40B4-BE49-F238E27FC236}">
-                <a16:creationId xmlns:a16="http://schemas.microsoft.com/office/drawing/2014/main" id="{15643BEA-8207-E511-75EC-CFA91A90CC28}"/>
-              </a:ext>
-            </a:extLst>
-          </p:cNvPr>
-          <p:cNvGraphicFramePr>
-            <a:graphicFrameLocks noGrp="1"/>
-          </p:cNvGraphicFramePr>
-          <p:nvPr>
-            <p:ph idx="1"/>
-            <p:extLst>
-              <p:ext uri="{D42A27DB-BD31-4B8C-83A1-F6EECF244321}">
-                <p14:modId xmlns:p14="http://schemas.microsoft.com/office/powerpoint/2010/main" val="3619619776"/>
-              </p:ext>
-            </p:extLst>
-          </p:nvPr>
-        </p:nvGraphicFramePr>
-        <p:xfrm>
-          <a:off x="838200" y="1825625"/>
-          <a:ext cx="10515600" cy="4351338"/>
-        </p:xfrm>
-        <a:graphic>
-          <a:graphicData uri="http://schemas.openxmlformats.org/drawingml/2006/diagram">
-            <dgm:relIds xmlns:dgm="http://schemas.openxmlformats.org/drawingml/2006/diagram" xmlns:r="http://schemas.openxmlformats.org/officeDocument/2006/relationships" r:dm="rId2" r:lo="rId3" r:qs="rId4" r:cs="rId5"/>
-          </a:graphicData>
-        </a:graphic>
-      </p:graphicFrame>
-    </p:spTree>
-    <p:extLst>
-      <p:ext uri="{BB962C8B-B14F-4D97-AF65-F5344CB8AC3E}">
-        <p14:creationId xmlns:p14="http://schemas.microsoft.com/office/powerpoint/2010/main" val="98530905"/>
-      </p:ext>
-    </p:extLst>
-  </p:cSld>
-  <p:clrMapOvr>
-    <a:masterClrMapping/>
-  </p:clrMapOvr>
-</p:sld>
-</file>
-
-<file path=ppt/slides/slide6.xml><?xml version="1.0" encoding="utf-8"?>
-<p:sld xmlns:a="http://schemas.openxmlformats.org/drawingml/2006/main" xmlns:r="http://schemas.openxmlformats.org/officeDocument/2006/relationships" xmlns:p="http://schemas.openxmlformats.org/presentationml/2006/main">
-  <p:cSld>
-    <p:bg>
-      <p:bgPr>
-        <a:solidFill>
-          <a:schemeClr val="bg1"/>
-        </a:solidFill>
-        <a:effectLst/>
-      </p:bgPr>
-    </p:bg>
-    <p:spTree>
-      <p:nvGrpSpPr>
-        <p:cNvPr id="1" name=""/>
-        <p:cNvGrpSpPr/>
-        <p:nvPr/>
-      </p:nvGrpSpPr>
-      <p:grpSpPr>
-        <a:xfrm>
-          <a:off x="0" y="0"/>
-          <a:ext cx="0" cy="0"/>
-          <a:chOff x="0" y="0"/>
-          <a:chExt cx="0" cy="0"/>
-        </a:xfrm>
-      </p:grpSpPr>
-      <p:sp useBgFill="1">
-        <p:nvSpPr>
-          <p:cNvPr id="8" name="Rectangle 7">
-            <a:extLst>
-              <a:ext uri="{FF2B5EF4-FFF2-40B4-BE49-F238E27FC236}">
-                <a16:creationId xmlns:a16="http://schemas.microsoft.com/office/drawing/2014/main" id="{1B15ED52-F352-441B-82BF-E0EA34836D08}"/>
+                <a16:creationId xmlns:a16="http://schemas.microsoft.com/office/drawing/2014/main" id="{09588DA8-065E-4F6F-8EFD-43104AB2E0CF}"/>
               </a:ext>
               <a:ext uri="{C183D7F6-B498-43B3-948B-1728B52AA6E4}">
                 <adec:decorative xmlns:adec="http://schemas.microsoft.com/office/drawing/2017/decorative" val="1"/>
@@ -15762,684 +16425,9 @@
           </a:p>
         </p:txBody>
       </p:sp>
-      <p:sp>
-        <p:nvSpPr>
-          <p:cNvPr id="10" name="Rectangle 9">
-            <a:extLst>
-              <a:ext uri="{FF2B5EF4-FFF2-40B4-BE49-F238E27FC236}">
-                <a16:creationId xmlns:a16="http://schemas.microsoft.com/office/drawing/2014/main" id="{3B2E3793-BFE6-45A2-9B7B-E18844431C99}"/>
-              </a:ext>
-              <a:ext uri="{C183D7F6-B498-43B3-948B-1728B52AA6E4}">
-                <adec:decorative xmlns:adec="http://schemas.microsoft.com/office/drawing/2017/decorative" val="1"/>
-              </a:ext>
-            </a:extLst>
-          </p:cNvPr>
-          <p:cNvSpPr>
-            <a:spLocks noGrp="1" noRot="1" noChangeAspect="1" noMove="1" noResize="1" noEditPoints="1" noAdjustHandles="1" noChangeArrowheads="1" noChangeShapeType="1" noTextEdit="1"/>
-          </p:cNvSpPr>
-          <p:nvPr>
-            <p:extLst>
-              <p:ext uri="{386F3935-93C4-4BCD-93E2-E3B085C9AB24}">
-                <p16:designElem xmlns:p16="http://schemas.microsoft.com/office/powerpoint/2015/main" val="1"/>
-              </p:ext>
-            </p:extLst>
-          </p:nvPr>
-        </p:nvSpPr>
-        <p:spPr>
-          <a:xfrm flipH="1">
-            <a:off x="-1" y="-1"/>
-            <a:ext cx="12191998" cy="1590742"/>
-          </a:xfrm>
-          <a:prstGeom prst="rect">
-            <a:avLst/>
-          </a:prstGeom>
-          <a:gradFill>
-            <a:gsLst>
-              <a:gs pos="0">
-                <a:srgbClr val="000000"/>
-              </a:gs>
-              <a:gs pos="100000">
-                <a:schemeClr val="accent1">
-                  <a:lumMod val="75000"/>
-                </a:schemeClr>
-              </a:gs>
-            </a:gsLst>
-            <a:lin ang="8400000" scaled="0"/>
-          </a:gradFill>
-          <a:ln>
-            <a:noFill/>
-          </a:ln>
-        </p:spPr>
-        <p:style>
-          <a:lnRef idx="2">
-            <a:schemeClr val="accent1">
-              <a:shade val="50000"/>
-            </a:schemeClr>
-          </a:lnRef>
-          <a:fillRef idx="1">
-            <a:schemeClr val="accent1"/>
-          </a:fillRef>
-          <a:effectRef idx="0">
-            <a:schemeClr val="accent1"/>
-          </a:effectRef>
-          <a:fontRef idx="minor">
-            <a:schemeClr val="lt1"/>
-          </a:fontRef>
-        </p:style>
-        <p:txBody>
-          <a:bodyPr rtlCol="0" anchor="ctr"/>
-          <a:lstStyle/>
-          <a:p>
-            <a:pPr algn="ctr"/>
-            <a:endParaRPr lang="en-US"/>
-          </a:p>
-        </p:txBody>
-      </p:sp>
-      <p:sp>
-        <p:nvSpPr>
-          <p:cNvPr id="12" name="Rectangle 11">
-            <a:extLst>
-              <a:ext uri="{FF2B5EF4-FFF2-40B4-BE49-F238E27FC236}">
-                <a16:creationId xmlns:a16="http://schemas.microsoft.com/office/drawing/2014/main" id="{BC4C4868-CB8F-4AF9-9CDB-8108F2C19B67}"/>
-              </a:ext>
-              <a:ext uri="{C183D7F6-B498-43B3-948B-1728B52AA6E4}">
-                <adec:decorative xmlns:adec="http://schemas.microsoft.com/office/drawing/2017/decorative" val="1"/>
-              </a:ext>
-            </a:extLst>
-          </p:cNvPr>
-          <p:cNvSpPr>
-            <a:spLocks noGrp="1" noRot="1" noChangeAspect="1" noMove="1" noResize="1" noEditPoints="1" noAdjustHandles="1" noChangeArrowheads="1" noChangeShapeType="1" noTextEdit="1"/>
-          </p:cNvSpPr>
-          <p:nvPr>
-            <p:extLst>
-              <p:ext uri="{386F3935-93C4-4BCD-93E2-E3B085C9AB24}">
-                <p16:designElem xmlns:p16="http://schemas.microsoft.com/office/powerpoint/2015/main" val="1"/>
-              </p:ext>
-            </p:extLst>
-          </p:nvPr>
-        </p:nvSpPr>
-        <p:spPr>
-          <a:xfrm rot="10800000" flipH="1">
-            <a:off x="-3" y="0"/>
-            <a:ext cx="8115306" cy="1590742"/>
-          </a:xfrm>
-          <a:prstGeom prst="rect">
-            <a:avLst/>
-          </a:prstGeom>
-          <a:gradFill>
-            <a:gsLst>
-              <a:gs pos="20000">
-                <a:schemeClr val="accent1">
-                  <a:alpha val="0"/>
-                </a:schemeClr>
-              </a:gs>
-              <a:gs pos="100000">
-                <a:schemeClr val="accent1">
-                  <a:lumMod val="50000"/>
-                  <a:alpha val="55000"/>
-                </a:schemeClr>
-              </a:gs>
-            </a:gsLst>
-            <a:lin ang="13800000" scaled="0"/>
-          </a:gradFill>
-          <a:ln>
-            <a:noFill/>
-          </a:ln>
-        </p:spPr>
-        <p:style>
-          <a:lnRef idx="2">
-            <a:schemeClr val="accent1">
-              <a:shade val="50000"/>
-            </a:schemeClr>
-          </a:lnRef>
-          <a:fillRef idx="1">
-            <a:schemeClr val="accent1"/>
-          </a:fillRef>
-          <a:effectRef idx="0">
-            <a:schemeClr val="accent1"/>
-          </a:effectRef>
-          <a:fontRef idx="minor">
-            <a:schemeClr val="lt1"/>
-          </a:fontRef>
-        </p:style>
-        <p:txBody>
-          <a:bodyPr rtlCol="0" anchor="ctr"/>
-          <a:lstStyle/>
-          <a:p>
-            <a:pPr algn="ctr"/>
-            <a:endParaRPr lang="en-US"/>
-          </a:p>
-        </p:txBody>
-      </p:sp>
-      <p:sp>
-        <p:nvSpPr>
-          <p:cNvPr id="14" name="Rectangle 13">
-            <a:extLst>
-              <a:ext uri="{FF2B5EF4-FFF2-40B4-BE49-F238E27FC236}">
-                <a16:creationId xmlns:a16="http://schemas.microsoft.com/office/drawing/2014/main" id="{375E0459-6403-40CD-989D-56A4407CA12E}"/>
-              </a:ext>
-              <a:ext uri="{C183D7F6-B498-43B3-948B-1728B52AA6E4}">
-                <adec:decorative xmlns:adec="http://schemas.microsoft.com/office/drawing/2017/decorative" val="1"/>
-              </a:ext>
-            </a:extLst>
-          </p:cNvPr>
-          <p:cNvSpPr>
-            <a:spLocks noGrp="1" noRot="1" noChangeAspect="1" noMove="1" noResize="1" noEditPoints="1" noAdjustHandles="1" noChangeArrowheads="1" noChangeShapeType="1" noTextEdit="1"/>
-          </p:cNvSpPr>
-          <p:nvPr>
-            <p:extLst>
-              <p:ext uri="{386F3935-93C4-4BCD-93E2-E3B085C9AB24}">
-                <p16:designElem xmlns:p16="http://schemas.microsoft.com/office/powerpoint/2015/main" val="1"/>
-              </p:ext>
-            </p:extLst>
-          </p:nvPr>
-        </p:nvSpPr>
-        <p:spPr>
-          <a:xfrm flipH="1">
-            <a:off x="8115299" y="-1"/>
-            <a:ext cx="4076698" cy="1590742"/>
-          </a:xfrm>
-          <a:prstGeom prst="rect">
-            <a:avLst/>
-          </a:prstGeom>
-          <a:gradFill>
-            <a:gsLst>
-              <a:gs pos="0">
-                <a:schemeClr val="accent1">
-                  <a:alpha val="66000"/>
-                </a:schemeClr>
-              </a:gs>
-              <a:gs pos="100000">
-                <a:srgbClr val="000000">
-                  <a:alpha val="30000"/>
-                </a:srgbClr>
-              </a:gs>
-            </a:gsLst>
-            <a:lin ang="13200000" scaled="0"/>
-          </a:gradFill>
-          <a:ln>
-            <a:noFill/>
-          </a:ln>
-        </p:spPr>
-        <p:style>
-          <a:lnRef idx="2">
-            <a:schemeClr val="accent1">
-              <a:shade val="50000"/>
-            </a:schemeClr>
-          </a:lnRef>
-          <a:fillRef idx="1">
-            <a:schemeClr val="accent1"/>
-          </a:fillRef>
-          <a:effectRef idx="0">
-            <a:schemeClr val="accent1"/>
-          </a:effectRef>
-          <a:fontRef idx="minor">
-            <a:schemeClr val="lt1"/>
-          </a:fontRef>
-        </p:style>
-        <p:txBody>
-          <a:bodyPr rtlCol="0" anchor="ctr"/>
-          <a:lstStyle/>
-          <a:p>
-            <a:pPr algn="ctr"/>
-            <a:endParaRPr lang="en-US"/>
-          </a:p>
-        </p:txBody>
-      </p:sp>
-      <p:sp>
-        <p:nvSpPr>
-          <p:cNvPr id="16" name="Rectangle 15">
-            <a:extLst>
-              <a:ext uri="{FF2B5EF4-FFF2-40B4-BE49-F238E27FC236}">
-                <a16:creationId xmlns:a16="http://schemas.microsoft.com/office/drawing/2014/main" id="{53E5B1A8-3AC9-4BD1-9BBC-78CA94F2D1BA}"/>
-              </a:ext>
-              <a:ext uri="{C183D7F6-B498-43B3-948B-1728B52AA6E4}">
-                <adec:decorative xmlns:adec="http://schemas.microsoft.com/office/drawing/2017/decorative" val="1"/>
-              </a:ext>
-            </a:extLst>
-          </p:cNvPr>
-          <p:cNvSpPr>
-            <a:spLocks noGrp="1" noRot="1" noChangeAspect="1" noMove="1" noResize="1" noEditPoints="1" noAdjustHandles="1" noChangeArrowheads="1" noChangeShapeType="1" noTextEdit="1"/>
-          </p:cNvSpPr>
-          <p:nvPr>
-            <p:extLst>
-              <p:ext uri="{386F3935-93C4-4BCD-93E2-E3B085C9AB24}">
-                <p16:designElem xmlns:p16="http://schemas.microsoft.com/office/powerpoint/2015/main" val="1"/>
-              </p:ext>
-            </p:extLst>
-          </p:nvPr>
-        </p:nvSpPr>
-        <p:spPr>
-          <a:xfrm>
-            <a:off x="459350" y="-1"/>
-            <a:ext cx="11732646" cy="1597433"/>
-          </a:xfrm>
-          <a:prstGeom prst="rect">
-            <a:avLst/>
-          </a:prstGeom>
-          <a:gradFill>
-            <a:gsLst>
-              <a:gs pos="50000">
-                <a:srgbClr val="000000">
-                  <a:alpha val="0"/>
-                </a:srgbClr>
-              </a:gs>
-              <a:gs pos="99000">
-                <a:schemeClr val="accent1">
-                  <a:lumMod val="50000"/>
-                  <a:alpha val="52000"/>
-                </a:schemeClr>
-              </a:gs>
-            </a:gsLst>
-            <a:lin ang="16800000" scaled="0"/>
-          </a:gradFill>
-          <a:ln>
-            <a:noFill/>
-          </a:ln>
-        </p:spPr>
-        <p:style>
-          <a:lnRef idx="2">
-            <a:schemeClr val="accent1">
-              <a:shade val="50000"/>
-            </a:schemeClr>
-          </a:lnRef>
-          <a:fillRef idx="1">
-            <a:schemeClr val="accent1"/>
-          </a:fillRef>
-          <a:effectRef idx="0">
-            <a:schemeClr val="accent1"/>
-          </a:effectRef>
-          <a:fontRef idx="minor">
-            <a:schemeClr val="lt1"/>
-          </a:fontRef>
-        </p:style>
-        <p:txBody>
-          <a:bodyPr rtlCol="0" anchor="ctr"/>
-          <a:lstStyle/>
-          <a:p>
-            <a:pPr algn="ctr"/>
-            <a:endParaRPr lang="en-US"/>
-          </a:p>
-        </p:txBody>
-      </p:sp>
-      <p:sp>
-        <p:nvSpPr>
-          <p:cNvPr id="3" name="内容占位符 2">
-            <a:extLst>
-              <a:ext uri="{FF2B5EF4-FFF2-40B4-BE49-F238E27FC236}">
-                <a16:creationId xmlns:a16="http://schemas.microsoft.com/office/drawing/2014/main" id="{516C5EF1-A6C0-B45C-847F-8AB141A7AB6B}"/>
-              </a:ext>
-            </a:extLst>
-          </p:cNvPr>
-          <p:cNvSpPr>
-            <a:spLocks noGrp="1"/>
-          </p:cNvSpPr>
-          <p:nvPr>
-            <p:ph idx="1"/>
-          </p:nvPr>
-        </p:nvSpPr>
-        <p:spPr>
-          <a:xfrm>
-            <a:off x="1463657" y="1778149"/>
-            <a:ext cx="9724031" cy="3683358"/>
-          </a:xfrm>
-        </p:spPr>
-        <p:txBody>
-          <a:bodyPr anchor="ctr">
-            <a:normAutofit fontScale="92500"/>
-          </a:bodyPr>
-          <a:lstStyle/>
-          <a:p>
-            <a:pPr marL="0" indent="0">
-              <a:buNone/>
-            </a:pPr>
-            <a:r>
-              <a:rPr lang="en-US" altLang="zh-CN" sz="5400" dirty="0"/>
-              <a:t>Today</a:t>
-            </a:r>
-            <a:endParaRPr lang="en-US" altLang="zh-CN" sz="2000" dirty="0"/>
-          </a:p>
-          <a:p>
-            <a:endParaRPr lang="en-US" altLang="zh-CN" sz="2000" dirty="0"/>
-          </a:p>
-          <a:p>
-            <a:pPr marL="0" indent="0">
-              <a:buNone/>
-            </a:pPr>
-            <a:r>
-              <a:rPr lang="en-US" altLang="zh-CN" sz="2000" dirty="0"/>
-              <a:t>	 </a:t>
-            </a:r>
-            <a:r>
-              <a:rPr lang="en-US" altLang="zh-CN" sz="6000" dirty="0"/>
-              <a:t>we are going to create a container through image, and learning how to use them</a:t>
-            </a:r>
-            <a:r>
-              <a:rPr lang="en-US" altLang="zh-CN" sz="2000" dirty="0"/>
-              <a:t>.</a:t>
-            </a:r>
-            <a:endParaRPr lang="zh-CN" altLang="en-US" sz="2000" dirty="0"/>
-          </a:p>
-        </p:txBody>
-      </p:sp>
-    </p:spTree>
-    <p:extLst>
-      <p:ext uri="{BB962C8B-B14F-4D97-AF65-F5344CB8AC3E}">
-        <p14:creationId xmlns:p14="http://schemas.microsoft.com/office/powerpoint/2010/main" val="2134265141"/>
-      </p:ext>
-    </p:extLst>
-  </p:cSld>
-  <p:clrMapOvr>
-    <a:masterClrMapping/>
-  </p:clrMapOvr>
-</p:sld>
-</file>
-
-<file path=ppt/slides/slide7.xml><?xml version="1.0" encoding="utf-8"?>
-<p:sld xmlns:a="http://schemas.openxmlformats.org/drawingml/2006/main" xmlns:r="http://schemas.openxmlformats.org/officeDocument/2006/relationships" xmlns:p="http://schemas.openxmlformats.org/presentationml/2006/main">
-  <p:cSld>
-    <p:bg>
-      <p:bgPr>
-        <a:solidFill>
-          <a:srgbClr val="000000"/>
-        </a:solidFill>
-        <a:effectLst/>
-      </p:bgPr>
-    </p:bg>
-    <p:spTree>
-      <p:nvGrpSpPr>
-        <p:cNvPr id="1" name=""/>
-        <p:cNvGrpSpPr/>
-        <p:nvPr/>
-      </p:nvGrpSpPr>
-      <p:grpSpPr>
-        <a:xfrm>
-          <a:off x="0" y="0"/>
-          <a:ext cx="0" cy="0"/>
-          <a:chOff x="0" y="0"/>
-          <a:chExt cx="0" cy="0"/>
-        </a:xfrm>
-      </p:grpSpPr>
-      <p:sp>
-        <p:nvSpPr>
-          <p:cNvPr id="32" name="Rectangle 31">
-            <a:extLst>
-              <a:ext uri="{FF2B5EF4-FFF2-40B4-BE49-F238E27FC236}">
-                <a16:creationId xmlns:a16="http://schemas.microsoft.com/office/drawing/2014/main" id="{71B2258F-86CA-4D4D-8270-BC05FCDEBFB3}"/>
-              </a:ext>
-              <a:ext uri="{C183D7F6-B498-43B3-948B-1728B52AA6E4}">
-                <adec:decorative xmlns:adec="http://schemas.microsoft.com/office/drawing/2017/decorative" val="1"/>
-              </a:ext>
-            </a:extLst>
-          </p:cNvPr>
-          <p:cNvSpPr>
-            <a:spLocks noGrp="1" noRot="1" noChangeAspect="1" noMove="1" noResize="1" noEditPoints="1" noAdjustHandles="1" noChangeArrowheads="1" noChangeShapeType="1" noTextEdit="1"/>
-          </p:cNvSpPr>
-          <p:nvPr>
-            <p:extLst>
-              <p:ext uri="{386F3935-93C4-4BCD-93E2-E3B085C9AB24}">
-                <p16:designElem xmlns:p16="http://schemas.microsoft.com/office/powerpoint/2015/main" val="1"/>
-              </p:ext>
-            </p:extLst>
-          </p:nvPr>
-        </p:nvSpPr>
-        <p:spPr>
-          <a:xfrm>
-            <a:off x="0" y="0"/>
-            <a:ext cx="12192000" cy="6857999"/>
-          </a:xfrm>
-          <a:prstGeom prst="rect">
-            <a:avLst/>
-          </a:prstGeom>
-          <a:solidFill>
-            <a:srgbClr val="000000"/>
-          </a:solidFill>
-          <a:ln>
-            <a:noFill/>
-          </a:ln>
-        </p:spPr>
-        <p:style>
-          <a:lnRef idx="2">
-            <a:schemeClr val="accent1">
-              <a:shade val="50000"/>
-            </a:schemeClr>
-          </a:lnRef>
-          <a:fillRef idx="1">
-            <a:schemeClr val="accent1"/>
-          </a:fillRef>
-          <a:effectRef idx="0">
-            <a:schemeClr val="accent1"/>
-          </a:effectRef>
-          <a:fontRef idx="minor">
-            <a:schemeClr val="lt1"/>
-          </a:fontRef>
-        </p:style>
-        <p:txBody>
-          <a:bodyPr rtlCol="0" anchor="ctr"/>
-          <a:lstStyle/>
-          <a:p>
-            <a:pPr algn="ctr"/>
-            <a:endParaRPr lang="en-US"/>
-          </a:p>
-        </p:txBody>
-      </p:sp>
-      <p:pic>
-        <p:nvPicPr>
-          <p:cNvPr id="4" name="Picture 4" descr="干货 | 一文搞定 Docker 容器技术与常用命令 -阿里云开发者社区">
-            <a:extLst>
-              <a:ext uri="{FF2B5EF4-FFF2-40B4-BE49-F238E27FC236}">
-                <a16:creationId xmlns:a16="http://schemas.microsoft.com/office/drawing/2014/main" id="{43C37884-1760-A27D-3EE2-C0FEFFE60AD8}"/>
-              </a:ext>
-            </a:extLst>
-          </p:cNvPr>
-          <p:cNvPicPr>
-            <a:picLocks noChangeAspect="1" noChangeArrowheads="1"/>
-          </p:cNvPicPr>
-          <p:nvPr/>
-        </p:nvPicPr>
-        <p:blipFill>
-          <a:blip r:embed="rId2">
-            <a:alphaModFix amt="50000"/>
-            <a:extLst>
-              <a:ext uri="{28A0092B-C50C-407E-A947-70E740481C1C}">
-                <a14:useLocalDpi xmlns:a14="http://schemas.microsoft.com/office/drawing/2010/main" val="0"/>
-              </a:ext>
-            </a:extLst>
-          </a:blip>
-          <a:srcRect l="14459" r="18430"/>
-          <a:stretch>
-            <a:fillRect/>
-          </a:stretch>
-        </p:blipFill>
-        <p:spPr bwMode="auto">
-          <a:xfrm>
-            <a:off x="20" y="1"/>
-            <a:ext cx="12191980" cy="6857999"/>
-          </a:xfrm>
-          <a:prstGeom prst="rect">
-            <a:avLst/>
-          </a:prstGeom>
-          <a:noFill/>
-          <a:extLst>
-            <a:ext uri="{909E8E84-426E-40DD-AFC4-6F175D3DCCD1}">
-              <a14:hiddenFill xmlns:a14="http://schemas.microsoft.com/office/drawing/2010/main">
-                <a:solidFill>
-                  <a:srgbClr val="FFFFFF"/>
-                </a:solidFill>
-              </a14:hiddenFill>
-            </a:ext>
-          </a:extLst>
-        </p:spPr>
-      </p:pic>
-      <p:sp>
-        <p:nvSpPr>
-          <p:cNvPr id="5" name="文本框 4">
-            <a:extLst>
-              <a:ext uri="{FF2B5EF4-FFF2-40B4-BE49-F238E27FC236}">
-                <a16:creationId xmlns:a16="http://schemas.microsoft.com/office/drawing/2014/main" id="{2E4CAE86-DC78-53DE-0AD6-A932887F47F5}"/>
-              </a:ext>
-            </a:extLst>
-          </p:cNvPr>
-          <p:cNvSpPr txBox="1"/>
-          <p:nvPr/>
-        </p:nvSpPr>
-        <p:spPr>
-          <a:xfrm>
-            <a:off x="1524000" y="1122362"/>
-            <a:ext cx="9144000" cy="2900518"/>
-          </a:xfrm>
-          <a:prstGeom prst="rect">
-            <a:avLst/>
-          </a:prstGeom>
-        </p:spPr>
-        <p:txBody>
-          <a:bodyPr vert="horz" lIns="91440" tIns="45720" rIns="91440" bIns="45720" rtlCol="0" anchor="b">
-            <a:normAutofit/>
-          </a:bodyPr>
-          <a:lstStyle/>
-          <a:p>
-            <a:pPr algn="ctr">
-              <a:lnSpc>
-                <a:spcPct val="90000"/>
-              </a:lnSpc>
-              <a:spcBef>
-                <a:spcPct val="0"/>
-              </a:spcBef>
-              <a:spcAft>
-                <a:spcPts val="600"/>
-              </a:spcAft>
-            </a:pPr>
-            <a:r>
-              <a:rPr lang="en-US" altLang="zh-CN" sz="6000" dirty="0">
-                <a:solidFill>
-                  <a:srgbClr val="FFFFFF"/>
-                </a:solidFill>
-                <a:latin typeface="+mj-lt"/>
-                <a:ea typeface="+mj-ea"/>
-                <a:cs typeface="+mj-cs"/>
-              </a:rPr>
-              <a:t>2.Origin of Docker</a:t>
-            </a:r>
-          </a:p>
-        </p:txBody>
-      </p:sp>
-    </p:spTree>
-    <p:extLst>
-      <p:ext uri="{BB962C8B-B14F-4D97-AF65-F5344CB8AC3E}">
-        <p14:creationId xmlns:p14="http://schemas.microsoft.com/office/powerpoint/2010/main" val="1223358467"/>
-      </p:ext>
-    </p:extLst>
-  </p:cSld>
-  <p:clrMapOvr>
-    <a:overrideClrMapping bg1="dk1" tx1="lt1" bg2="dk2" tx2="lt2" accent1="accent1" accent2="accent2" accent3="accent3" accent4="accent4" accent5="accent5" accent6="accent6" hlink="hlink" folHlink="folHlink"/>
-  </p:clrMapOvr>
-</p:sld>
-</file>
-
-<file path=ppt/slides/slide8.xml><?xml version="1.0" encoding="utf-8"?>
-<p:sld xmlns:a="http://schemas.openxmlformats.org/drawingml/2006/main" xmlns:r="http://schemas.openxmlformats.org/officeDocument/2006/relationships" xmlns:p="http://schemas.openxmlformats.org/presentationml/2006/main">
-  <p:cSld>
-    <p:bg>
-      <p:bgPr>
-        <a:solidFill>
-          <a:schemeClr val="bg1"/>
-        </a:solidFill>
-        <a:effectLst/>
-      </p:bgPr>
-    </p:bg>
-    <p:spTree>
-      <p:nvGrpSpPr>
-        <p:cNvPr id="1" name=""/>
-        <p:cNvGrpSpPr/>
-        <p:nvPr/>
-      </p:nvGrpSpPr>
-      <p:grpSpPr>
-        <a:xfrm>
-          <a:off x="0" y="0"/>
-          <a:ext cx="0" cy="0"/>
-          <a:chOff x="0" y="0"/>
-          <a:chExt cx="0" cy="0"/>
-        </a:xfrm>
-      </p:grpSpPr>
       <p:sp useBgFill="1">
         <p:nvSpPr>
-          <p:cNvPr id="21" name="Rectangle 20">
-            <a:extLst>
-              <a:ext uri="{FF2B5EF4-FFF2-40B4-BE49-F238E27FC236}">
-                <a16:creationId xmlns:a16="http://schemas.microsoft.com/office/drawing/2014/main" id="{09588DA8-065E-4F6F-8EFD-43104AB2E0CF}"/>
-              </a:ext>
-              <a:ext uri="{C183D7F6-B498-43B3-948B-1728B52AA6E4}">
-                <adec:decorative xmlns:adec="http://schemas.microsoft.com/office/drawing/2017/decorative" val="1"/>
-              </a:ext>
-            </a:extLst>
-          </p:cNvPr>
-          <p:cNvSpPr>
-            <a:spLocks noGrp="1" noRot="1" noChangeAspect="1" noMove="1" noResize="1" noEditPoints="1" noAdjustHandles="1" noChangeArrowheads="1" noChangeShapeType="1" noTextEdit="1"/>
-          </p:cNvSpPr>
-          <p:nvPr>
-            <p:extLst>
-              <p:ext uri="{386F3935-93C4-4BCD-93E2-E3B085C9AB24}">
-                <p16:designElem xmlns:p16="http://schemas.microsoft.com/office/powerpoint/2015/main" val="1"/>
-              </p:ext>
-            </p:extLst>
-          </p:nvPr>
-        </p:nvSpPr>
-        <p:spPr>
-          <a:xfrm>
-            <a:off x="0" y="0"/>
-            <a:ext cx="12192000" cy="6858000"/>
-          </a:xfrm>
-          <a:prstGeom prst="rect">
-            <a:avLst/>
-          </a:prstGeom>
-          <a:ln w="12700" cap="flat" cmpd="sng" algn="ctr">
-            <a:noFill/>
-            <a:prstDash val="solid"/>
-            <a:miter lim="800000"/>
-          </a:ln>
-          <a:effectLst/>
-          <a:extLst>
-            <a:ext uri="{91240B29-F687-4F45-9708-019B960494DF}">
-              <a14:hiddenLine xmlns:a14="http://schemas.microsoft.com/office/drawing/2010/main" w="12700" cap="flat" cmpd="sng" algn="ctr">
-                <a:solidFill>
-                  <a:schemeClr val="accent1">
-                    <a:shade val="50000"/>
-                  </a:schemeClr>
-                </a:solidFill>
-                <a:prstDash val="solid"/>
-                <a:miter lim="800000"/>
-              </a14:hiddenLine>
-            </a:ext>
-          </a:extLst>
-        </p:spPr>
-        <p:style>
-          <a:lnRef idx="2">
-            <a:schemeClr val="accent1">
-              <a:shade val="50000"/>
-            </a:schemeClr>
-          </a:lnRef>
-          <a:fillRef idx="1">
-            <a:schemeClr val="accent1"/>
-          </a:fillRef>
-          <a:effectRef idx="0">
-            <a:schemeClr val="accent1"/>
-          </a:effectRef>
-          <a:fontRef idx="minor">
-            <a:schemeClr val="lt1"/>
-          </a:fontRef>
-        </p:style>
-        <p:txBody>
-          <a:bodyPr rtlCol="0" anchor="ctr"/>
-          <a:lstStyle/>
-          <a:p>
-            <a:pPr algn="ctr"/>
-            <a:endParaRPr lang="en-US"/>
-          </a:p>
-        </p:txBody>
-      </p:sp>
-      <p:sp useBgFill="1">
-        <p:nvSpPr>
-          <p:cNvPr id="23" name="Rectangle 22">
+          <p:cNvPr id="17" name="Rectangle 16">
             <a:extLst>
               <a:ext uri="{FF2B5EF4-FFF2-40B4-BE49-F238E27FC236}">
                 <a16:creationId xmlns:a16="http://schemas.microsoft.com/office/drawing/2014/main" id="{C4285719-470E-454C-AF62-8323075F1F5B}"/>
@@ -16515,7 +16503,7 @@
       </p:sp>
       <p:sp>
         <p:nvSpPr>
-          <p:cNvPr id="25" name="Rectangle 24">
+          <p:cNvPr id="19" name="Rectangle 18">
             <a:extLst>
               <a:ext uri="{FF2B5EF4-FFF2-40B4-BE49-F238E27FC236}">
                 <a16:creationId xmlns:a16="http://schemas.microsoft.com/office/drawing/2014/main" id="{CD9FE4EF-C4D8-49A0-B2FF-81D8DB7D8A24}"/>
@@ -16588,7 +16576,7 @@
       </p:sp>
       <p:sp>
         <p:nvSpPr>
-          <p:cNvPr id="27" name="Rectangle 26">
+          <p:cNvPr id="21" name="Rectangle 20">
             <a:extLst>
               <a:ext uri="{FF2B5EF4-FFF2-40B4-BE49-F238E27FC236}">
                 <a16:creationId xmlns:a16="http://schemas.microsoft.com/office/drawing/2014/main" id="{4300840D-0A0B-4512-BACA-B439D5B9C57C}"/>
@@ -16663,7 +16651,7 @@
       </p:sp>
       <p:sp>
         <p:nvSpPr>
-          <p:cNvPr id="29" name="Rectangle 28">
+          <p:cNvPr id="23" name="Rectangle 22">
             <a:extLst>
               <a:ext uri="{FF2B5EF4-FFF2-40B4-BE49-F238E27FC236}">
                 <a16:creationId xmlns:a16="http://schemas.microsoft.com/office/drawing/2014/main" id="{D2B78728-A580-49A7-84F9-6EF6F583ADE0}"/>
@@ -16738,7 +16726,7 @@
       </p:sp>
       <p:sp>
         <p:nvSpPr>
-          <p:cNvPr id="31" name="Freeform: Shape 30">
+          <p:cNvPr id="25" name="Freeform: Shape 24">
             <a:extLst>
               <a:ext uri="{FF2B5EF4-FFF2-40B4-BE49-F238E27FC236}">
                 <a16:creationId xmlns:a16="http://schemas.microsoft.com/office/drawing/2014/main" id="{38FAA1A1-D861-433F-88FA-1E9D6FD31D11}"/>
@@ -16908,7 +16896,7 @@
       </p:sp>
       <p:sp>
         <p:nvSpPr>
-          <p:cNvPr id="33" name="Rectangle 32">
+          <p:cNvPr id="27" name="Rectangle 26">
             <a:extLst>
               <a:ext uri="{FF2B5EF4-FFF2-40B4-BE49-F238E27FC236}">
                 <a16:creationId xmlns:a16="http://schemas.microsoft.com/office/drawing/2014/main" id="{8D71EDA1-87BF-4D5D-AB79-F346FD19278A}"/>
@@ -16985,10 +16973,71 @@
       </p:sp>
       <p:sp>
         <p:nvSpPr>
-          <p:cNvPr id="3" name="内容占位符 2">
+          <p:cNvPr id="2" name="标题 1">
             <a:extLst>
               <a:ext uri="{FF2B5EF4-FFF2-40B4-BE49-F238E27FC236}">
-                <a16:creationId xmlns:a16="http://schemas.microsoft.com/office/drawing/2014/main" id="{B0AE7D5A-7B89-F153-97AF-B5CDAA27F5A1}"/>
+                <a16:creationId xmlns:a16="http://schemas.microsoft.com/office/drawing/2014/main" id="{BB39C718-38D6-39E5-1F84-D7DEA15AB05E}"/>
+              </a:ext>
+            </a:extLst>
+          </p:cNvPr>
+          <p:cNvSpPr>
+            <a:spLocks noGrp="1"/>
+          </p:cNvSpPr>
+          <p:nvPr>
+            <p:ph type="title"/>
+          </p:nvPr>
+        </p:nvSpPr>
+        <p:spPr>
+          <a:xfrm>
+            <a:off x="466722" y="586855"/>
+            <a:ext cx="3201366" cy="3387497"/>
+          </a:xfrm>
+        </p:spPr>
+        <p:txBody>
+          <a:bodyPr anchor="b">
+            <a:normAutofit/>
+          </a:bodyPr>
+          <a:lstStyle/>
+          <a:p>
+            <a:pPr algn="r"/>
+            <a:r>
+              <a:rPr lang="en-US" altLang="zh-CN" sz="4000" dirty="0">
+                <a:solidFill>
+                  <a:srgbClr val="FFFFFF"/>
+                </a:solidFill>
+              </a:rPr>
+              <a:t>What</a:t>
+            </a:r>
+            <a:r>
+              <a:rPr lang="zh-CN" altLang="en-US" sz="4000" dirty="0">
+                <a:solidFill>
+                  <a:srgbClr val="FFFFFF"/>
+                </a:solidFill>
+              </a:rPr>
+              <a:t> </a:t>
+            </a:r>
+            <a:r>
+              <a:rPr lang="en-US" altLang="zh-CN" sz="4000" dirty="0">
+                <a:solidFill>
+                  <a:srgbClr val="FFFFFF"/>
+                </a:solidFill>
+              </a:rPr>
+              <a:t>is Docker</a:t>
+            </a:r>
+            <a:endParaRPr lang="zh-CN" altLang="en-US" sz="4000" dirty="0">
+              <a:solidFill>
+                <a:srgbClr val="FFFFFF"/>
+              </a:solidFill>
+            </a:endParaRPr>
+          </a:p>
+        </p:txBody>
+      </p:sp>
+      <p:sp>
+        <p:nvSpPr>
+          <p:cNvPr id="4" name="内容占位符 3">
+            <a:extLst>
+              <a:ext uri="{FF2B5EF4-FFF2-40B4-BE49-F238E27FC236}">
+                <a16:creationId xmlns:a16="http://schemas.microsoft.com/office/drawing/2014/main" id="{A1CD8E45-7BE9-27F3-5E5B-A91804082F46}"/>
               </a:ext>
             </a:extLst>
           </p:cNvPr>
@@ -17001,106 +17050,1479 @@
         </p:nvSpPr>
         <p:spPr>
           <a:xfrm>
-            <a:off x="4425696" y="197510"/>
-            <a:ext cx="7556601" cy="6371540"/>
+            <a:off x="4810259" y="649480"/>
+            <a:ext cx="6555347" cy="5546047"/>
           </a:xfrm>
         </p:spPr>
         <p:txBody>
           <a:bodyPr anchor="ctr">
-            <a:normAutofit lnSpcReduction="10000"/>
+            <a:normAutofit/>
           </a:bodyPr>
           <a:lstStyle/>
           <a:p>
             <a:r>
-              <a:rPr lang="en-US" altLang="zh-CN" sz="1400" dirty="0"/>
+              <a:rPr lang="en-US" altLang="zh-CN" sz="1900"/>
+              <a:t>Simply put, Docker is a lightweight containerization technology and platform used to solve common environment problems in programming.</a:t>
+            </a:r>
+          </a:p>
+          <a:p>
+            <a:br>
+              <a:rPr lang="en-US" altLang="zh-CN" sz="1900"/>
+            </a:br>
+            <a:endParaRPr lang="en-US" altLang="zh-CN" sz="1900"/>
+          </a:p>
+          <a:p>
+            <a:r>
+              <a:rPr lang="en-US" altLang="zh-CN" sz="1900"/>
+              <a:t>It packages applications, dependencies, and user-space environments together in a container.</a:t>
+            </a:r>
+          </a:p>
+          <a:p>
+            <a:br>
+              <a:rPr lang="en-US" altLang="zh-CN" sz="1900"/>
+            </a:br>
+            <a:endParaRPr lang="en-US" altLang="zh-CN" sz="1900"/>
+          </a:p>
+          <a:p>
+            <a:r>
+              <a:rPr lang="en-US" altLang="zh-CN" sz="1900"/>
+              <a:t>Subsequently, if you need to run this application on another computer, you just need to run this container without worrying about the application's environment issues.</a:t>
+            </a:r>
+          </a:p>
+          <a:p>
+            <a:br>
+              <a:rPr lang="en-US" altLang="zh-CN" sz="1900"/>
+            </a:br>
+            <a:endParaRPr lang="en-US" altLang="zh-CN" sz="1900"/>
+          </a:p>
+          <a:p>
+            <a:r>
+              <a:rPr lang="en-US" altLang="zh-CN" sz="1900"/>
+              <a:t>Today, we will learn how to use Docker to build a container and how to use this container to run our applications.</a:t>
+            </a:r>
+          </a:p>
+        </p:txBody>
+      </p:sp>
+    </p:spTree>
+    <p:extLst>
+      <p:ext uri="{BB962C8B-B14F-4D97-AF65-F5344CB8AC3E}">
+        <p14:creationId xmlns:p14="http://schemas.microsoft.com/office/powerpoint/2010/main" val="98530905"/>
+      </p:ext>
+    </p:extLst>
+  </p:cSld>
+  <p:clrMapOvr>
+    <a:masterClrMapping/>
+  </p:clrMapOvr>
+</p:sld>
+</file>
+
+<file path=ppt/slides/slide6.xml><?xml version="1.0" encoding="utf-8"?>
+<p:sld xmlns:a="http://schemas.openxmlformats.org/drawingml/2006/main" xmlns:r="http://schemas.openxmlformats.org/officeDocument/2006/relationships" xmlns:p="http://schemas.openxmlformats.org/presentationml/2006/main">
+  <p:cSld>
+    <p:bg>
+      <p:bgPr>
+        <a:solidFill>
+          <a:schemeClr val="bg1"/>
+        </a:solidFill>
+        <a:effectLst/>
+      </p:bgPr>
+    </p:bg>
+    <p:spTree>
+      <p:nvGrpSpPr>
+        <p:cNvPr id="1" name=""/>
+        <p:cNvGrpSpPr/>
+        <p:nvPr/>
+      </p:nvGrpSpPr>
+      <p:grpSpPr>
+        <a:xfrm>
+          <a:off x="0" y="0"/>
+          <a:ext cx="0" cy="0"/>
+          <a:chOff x="0" y="0"/>
+          <a:chExt cx="0" cy="0"/>
+        </a:xfrm>
+      </p:grpSpPr>
+      <p:sp useBgFill="1">
+        <p:nvSpPr>
+          <p:cNvPr id="8" name="Rectangle 7">
+            <a:extLst>
+              <a:ext uri="{FF2B5EF4-FFF2-40B4-BE49-F238E27FC236}">
+                <a16:creationId xmlns:a16="http://schemas.microsoft.com/office/drawing/2014/main" id="{1B15ED52-F352-441B-82BF-E0EA34836D08}"/>
+              </a:ext>
+              <a:ext uri="{C183D7F6-B498-43B3-948B-1728B52AA6E4}">
+                <adec:decorative xmlns:adec="http://schemas.microsoft.com/office/drawing/2017/decorative" val="1"/>
+              </a:ext>
+            </a:extLst>
+          </p:cNvPr>
+          <p:cNvSpPr>
+            <a:spLocks noGrp="1" noRot="1" noChangeAspect="1" noMove="1" noResize="1" noEditPoints="1" noAdjustHandles="1" noChangeArrowheads="1" noChangeShapeType="1" noTextEdit="1"/>
+          </p:cNvSpPr>
+          <p:nvPr>
+            <p:extLst>
+              <p:ext uri="{386F3935-93C4-4BCD-93E2-E3B085C9AB24}">
+                <p16:designElem xmlns:p16="http://schemas.microsoft.com/office/powerpoint/2015/main" val="1"/>
+              </p:ext>
+            </p:extLst>
+          </p:nvPr>
+        </p:nvSpPr>
+        <p:spPr>
+          <a:xfrm>
+            <a:off x="0" y="0"/>
+            <a:ext cx="12192000" cy="6858000"/>
+          </a:xfrm>
+          <a:prstGeom prst="rect">
+            <a:avLst/>
+          </a:prstGeom>
+          <a:ln w="12700" cap="flat" cmpd="sng" algn="ctr">
+            <a:noFill/>
+            <a:prstDash val="solid"/>
+            <a:miter lim="800000"/>
+          </a:ln>
+          <a:effectLst/>
+          <a:extLst>
+            <a:ext uri="{91240B29-F687-4F45-9708-019B960494DF}">
+              <a14:hiddenLine xmlns:a14="http://schemas.microsoft.com/office/drawing/2010/main" w="12700" cap="flat" cmpd="sng" algn="ctr">
+                <a:solidFill>
+                  <a:schemeClr val="accent1">
+                    <a:shade val="50000"/>
+                  </a:schemeClr>
+                </a:solidFill>
+                <a:prstDash val="solid"/>
+                <a:miter lim="800000"/>
+              </a14:hiddenLine>
+            </a:ext>
+          </a:extLst>
+        </p:spPr>
+        <p:style>
+          <a:lnRef idx="2">
+            <a:schemeClr val="accent1">
+              <a:shade val="50000"/>
+            </a:schemeClr>
+          </a:lnRef>
+          <a:fillRef idx="1">
+            <a:schemeClr val="accent1"/>
+          </a:fillRef>
+          <a:effectRef idx="0">
+            <a:schemeClr val="accent1"/>
+          </a:effectRef>
+          <a:fontRef idx="minor">
+            <a:schemeClr val="lt1"/>
+          </a:fontRef>
+        </p:style>
+        <p:txBody>
+          <a:bodyPr rtlCol="0" anchor="ctr"/>
+          <a:lstStyle/>
+          <a:p>
+            <a:pPr algn="ctr"/>
+            <a:endParaRPr lang="en-US"/>
+          </a:p>
+        </p:txBody>
+      </p:sp>
+      <p:sp>
+        <p:nvSpPr>
+          <p:cNvPr id="10" name="Rectangle 9">
+            <a:extLst>
+              <a:ext uri="{FF2B5EF4-FFF2-40B4-BE49-F238E27FC236}">
+                <a16:creationId xmlns:a16="http://schemas.microsoft.com/office/drawing/2014/main" id="{3B2E3793-BFE6-45A2-9B7B-E18844431C99}"/>
+              </a:ext>
+              <a:ext uri="{C183D7F6-B498-43B3-948B-1728B52AA6E4}">
+                <adec:decorative xmlns:adec="http://schemas.microsoft.com/office/drawing/2017/decorative" val="1"/>
+              </a:ext>
+            </a:extLst>
+          </p:cNvPr>
+          <p:cNvSpPr>
+            <a:spLocks noGrp="1" noRot="1" noChangeAspect="1" noMove="1" noResize="1" noEditPoints="1" noAdjustHandles="1" noChangeArrowheads="1" noChangeShapeType="1" noTextEdit="1"/>
+          </p:cNvSpPr>
+          <p:nvPr>
+            <p:extLst>
+              <p:ext uri="{386F3935-93C4-4BCD-93E2-E3B085C9AB24}">
+                <p16:designElem xmlns:p16="http://schemas.microsoft.com/office/powerpoint/2015/main" val="1"/>
+              </p:ext>
+            </p:extLst>
+          </p:nvPr>
+        </p:nvSpPr>
+        <p:spPr>
+          <a:xfrm flipH="1">
+            <a:off x="-1" y="-1"/>
+            <a:ext cx="12191998" cy="1590742"/>
+          </a:xfrm>
+          <a:prstGeom prst="rect">
+            <a:avLst/>
+          </a:prstGeom>
+          <a:gradFill>
+            <a:gsLst>
+              <a:gs pos="0">
+                <a:srgbClr val="000000"/>
+              </a:gs>
+              <a:gs pos="100000">
+                <a:schemeClr val="accent1">
+                  <a:lumMod val="75000"/>
+                </a:schemeClr>
+              </a:gs>
+            </a:gsLst>
+            <a:lin ang="8400000" scaled="0"/>
+          </a:gradFill>
+          <a:ln>
+            <a:noFill/>
+          </a:ln>
+        </p:spPr>
+        <p:style>
+          <a:lnRef idx="2">
+            <a:schemeClr val="accent1">
+              <a:shade val="50000"/>
+            </a:schemeClr>
+          </a:lnRef>
+          <a:fillRef idx="1">
+            <a:schemeClr val="accent1"/>
+          </a:fillRef>
+          <a:effectRef idx="0">
+            <a:schemeClr val="accent1"/>
+          </a:effectRef>
+          <a:fontRef idx="minor">
+            <a:schemeClr val="lt1"/>
+          </a:fontRef>
+        </p:style>
+        <p:txBody>
+          <a:bodyPr rtlCol="0" anchor="ctr"/>
+          <a:lstStyle/>
+          <a:p>
+            <a:pPr algn="ctr"/>
+            <a:endParaRPr lang="en-US"/>
+          </a:p>
+        </p:txBody>
+      </p:sp>
+      <p:sp>
+        <p:nvSpPr>
+          <p:cNvPr id="12" name="Rectangle 11">
+            <a:extLst>
+              <a:ext uri="{FF2B5EF4-FFF2-40B4-BE49-F238E27FC236}">
+                <a16:creationId xmlns:a16="http://schemas.microsoft.com/office/drawing/2014/main" id="{BC4C4868-CB8F-4AF9-9CDB-8108F2C19B67}"/>
+              </a:ext>
+              <a:ext uri="{C183D7F6-B498-43B3-948B-1728B52AA6E4}">
+                <adec:decorative xmlns:adec="http://schemas.microsoft.com/office/drawing/2017/decorative" val="1"/>
+              </a:ext>
+            </a:extLst>
+          </p:cNvPr>
+          <p:cNvSpPr>
+            <a:spLocks noGrp="1" noRot="1" noChangeAspect="1" noMove="1" noResize="1" noEditPoints="1" noAdjustHandles="1" noChangeArrowheads="1" noChangeShapeType="1" noTextEdit="1"/>
+          </p:cNvSpPr>
+          <p:nvPr>
+            <p:extLst>
+              <p:ext uri="{386F3935-93C4-4BCD-93E2-E3B085C9AB24}">
+                <p16:designElem xmlns:p16="http://schemas.microsoft.com/office/powerpoint/2015/main" val="1"/>
+              </p:ext>
+            </p:extLst>
+          </p:nvPr>
+        </p:nvSpPr>
+        <p:spPr>
+          <a:xfrm rot="10800000" flipH="1">
+            <a:off x="-3" y="0"/>
+            <a:ext cx="8115306" cy="1590742"/>
+          </a:xfrm>
+          <a:prstGeom prst="rect">
+            <a:avLst/>
+          </a:prstGeom>
+          <a:gradFill>
+            <a:gsLst>
+              <a:gs pos="20000">
+                <a:schemeClr val="accent1">
+                  <a:alpha val="0"/>
+                </a:schemeClr>
+              </a:gs>
+              <a:gs pos="100000">
+                <a:schemeClr val="accent1">
+                  <a:lumMod val="50000"/>
+                  <a:alpha val="55000"/>
+                </a:schemeClr>
+              </a:gs>
+            </a:gsLst>
+            <a:lin ang="13800000" scaled="0"/>
+          </a:gradFill>
+          <a:ln>
+            <a:noFill/>
+          </a:ln>
+        </p:spPr>
+        <p:style>
+          <a:lnRef idx="2">
+            <a:schemeClr val="accent1">
+              <a:shade val="50000"/>
+            </a:schemeClr>
+          </a:lnRef>
+          <a:fillRef idx="1">
+            <a:schemeClr val="accent1"/>
+          </a:fillRef>
+          <a:effectRef idx="0">
+            <a:schemeClr val="accent1"/>
+          </a:effectRef>
+          <a:fontRef idx="minor">
+            <a:schemeClr val="lt1"/>
+          </a:fontRef>
+        </p:style>
+        <p:txBody>
+          <a:bodyPr rtlCol="0" anchor="ctr"/>
+          <a:lstStyle/>
+          <a:p>
+            <a:pPr algn="ctr"/>
+            <a:endParaRPr lang="en-US"/>
+          </a:p>
+        </p:txBody>
+      </p:sp>
+      <p:sp>
+        <p:nvSpPr>
+          <p:cNvPr id="14" name="Rectangle 13">
+            <a:extLst>
+              <a:ext uri="{FF2B5EF4-FFF2-40B4-BE49-F238E27FC236}">
+                <a16:creationId xmlns:a16="http://schemas.microsoft.com/office/drawing/2014/main" id="{375E0459-6403-40CD-989D-56A4407CA12E}"/>
+              </a:ext>
+              <a:ext uri="{C183D7F6-B498-43B3-948B-1728B52AA6E4}">
+                <adec:decorative xmlns:adec="http://schemas.microsoft.com/office/drawing/2017/decorative" val="1"/>
+              </a:ext>
+            </a:extLst>
+          </p:cNvPr>
+          <p:cNvSpPr>
+            <a:spLocks noGrp="1" noRot="1" noChangeAspect="1" noMove="1" noResize="1" noEditPoints="1" noAdjustHandles="1" noChangeArrowheads="1" noChangeShapeType="1" noTextEdit="1"/>
+          </p:cNvSpPr>
+          <p:nvPr>
+            <p:extLst>
+              <p:ext uri="{386F3935-93C4-4BCD-93E2-E3B085C9AB24}">
+                <p16:designElem xmlns:p16="http://schemas.microsoft.com/office/powerpoint/2015/main" val="1"/>
+              </p:ext>
+            </p:extLst>
+          </p:nvPr>
+        </p:nvSpPr>
+        <p:spPr>
+          <a:xfrm flipH="1">
+            <a:off x="8115299" y="-1"/>
+            <a:ext cx="4076698" cy="1590742"/>
+          </a:xfrm>
+          <a:prstGeom prst="rect">
+            <a:avLst/>
+          </a:prstGeom>
+          <a:gradFill>
+            <a:gsLst>
+              <a:gs pos="0">
+                <a:schemeClr val="accent1">
+                  <a:alpha val="66000"/>
+                </a:schemeClr>
+              </a:gs>
+              <a:gs pos="100000">
+                <a:srgbClr val="000000">
+                  <a:alpha val="30000"/>
+                </a:srgbClr>
+              </a:gs>
+            </a:gsLst>
+            <a:lin ang="13200000" scaled="0"/>
+          </a:gradFill>
+          <a:ln>
+            <a:noFill/>
+          </a:ln>
+        </p:spPr>
+        <p:style>
+          <a:lnRef idx="2">
+            <a:schemeClr val="accent1">
+              <a:shade val="50000"/>
+            </a:schemeClr>
+          </a:lnRef>
+          <a:fillRef idx="1">
+            <a:schemeClr val="accent1"/>
+          </a:fillRef>
+          <a:effectRef idx="0">
+            <a:schemeClr val="accent1"/>
+          </a:effectRef>
+          <a:fontRef idx="minor">
+            <a:schemeClr val="lt1"/>
+          </a:fontRef>
+        </p:style>
+        <p:txBody>
+          <a:bodyPr rtlCol="0" anchor="ctr"/>
+          <a:lstStyle/>
+          <a:p>
+            <a:pPr algn="ctr"/>
+            <a:endParaRPr lang="en-US"/>
+          </a:p>
+        </p:txBody>
+      </p:sp>
+      <p:sp>
+        <p:nvSpPr>
+          <p:cNvPr id="16" name="Rectangle 15">
+            <a:extLst>
+              <a:ext uri="{FF2B5EF4-FFF2-40B4-BE49-F238E27FC236}">
+                <a16:creationId xmlns:a16="http://schemas.microsoft.com/office/drawing/2014/main" id="{53E5B1A8-3AC9-4BD1-9BBC-78CA94F2D1BA}"/>
+              </a:ext>
+              <a:ext uri="{C183D7F6-B498-43B3-948B-1728B52AA6E4}">
+                <adec:decorative xmlns:adec="http://schemas.microsoft.com/office/drawing/2017/decorative" val="1"/>
+              </a:ext>
+            </a:extLst>
+          </p:cNvPr>
+          <p:cNvSpPr>
+            <a:spLocks noGrp="1" noRot="1" noChangeAspect="1" noMove="1" noResize="1" noEditPoints="1" noAdjustHandles="1" noChangeArrowheads="1" noChangeShapeType="1" noTextEdit="1"/>
+          </p:cNvSpPr>
+          <p:nvPr>
+            <p:extLst>
+              <p:ext uri="{386F3935-93C4-4BCD-93E2-E3B085C9AB24}">
+                <p16:designElem xmlns:p16="http://schemas.microsoft.com/office/powerpoint/2015/main" val="1"/>
+              </p:ext>
+            </p:extLst>
+          </p:nvPr>
+        </p:nvSpPr>
+        <p:spPr>
+          <a:xfrm>
+            <a:off x="459350" y="-1"/>
+            <a:ext cx="11732646" cy="1597433"/>
+          </a:xfrm>
+          <a:prstGeom prst="rect">
+            <a:avLst/>
+          </a:prstGeom>
+          <a:gradFill>
+            <a:gsLst>
+              <a:gs pos="50000">
+                <a:srgbClr val="000000">
+                  <a:alpha val="0"/>
+                </a:srgbClr>
+              </a:gs>
+              <a:gs pos="99000">
+                <a:schemeClr val="accent1">
+                  <a:lumMod val="50000"/>
+                  <a:alpha val="52000"/>
+                </a:schemeClr>
+              </a:gs>
+            </a:gsLst>
+            <a:lin ang="16800000" scaled="0"/>
+          </a:gradFill>
+          <a:ln>
+            <a:noFill/>
+          </a:ln>
+        </p:spPr>
+        <p:style>
+          <a:lnRef idx="2">
+            <a:schemeClr val="accent1">
+              <a:shade val="50000"/>
+            </a:schemeClr>
+          </a:lnRef>
+          <a:fillRef idx="1">
+            <a:schemeClr val="accent1"/>
+          </a:fillRef>
+          <a:effectRef idx="0">
+            <a:schemeClr val="accent1"/>
+          </a:effectRef>
+          <a:fontRef idx="minor">
+            <a:schemeClr val="lt1"/>
+          </a:fontRef>
+        </p:style>
+        <p:txBody>
+          <a:bodyPr rtlCol="0" anchor="ctr"/>
+          <a:lstStyle/>
+          <a:p>
+            <a:pPr algn="ctr"/>
+            <a:endParaRPr lang="en-US"/>
+          </a:p>
+        </p:txBody>
+      </p:sp>
+      <p:sp>
+        <p:nvSpPr>
+          <p:cNvPr id="3" name="内容占位符 2">
+            <a:extLst>
+              <a:ext uri="{FF2B5EF4-FFF2-40B4-BE49-F238E27FC236}">
+                <a16:creationId xmlns:a16="http://schemas.microsoft.com/office/drawing/2014/main" id="{516C5EF1-A6C0-B45C-847F-8AB141A7AB6B}"/>
+              </a:ext>
+            </a:extLst>
+          </p:cNvPr>
+          <p:cNvSpPr>
+            <a:spLocks noGrp="1"/>
+          </p:cNvSpPr>
+          <p:nvPr>
+            <p:ph idx="1"/>
+          </p:nvPr>
+        </p:nvSpPr>
+        <p:spPr>
+          <a:xfrm>
+            <a:off x="1463657" y="1778149"/>
+            <a:ext cx="9724031" cy="3683358"/>
+          </a:xfrm>
+        </p:spPr>
+        <p:txBody>
+          <a:bodyPr anchor="ctr">
+            <a:normAutofit fontScale="92500"/>
+          </a:bodyPr>
+          <a:lstStyle/>
+          <a:p>
+            <a:pPr marL="0" indent="0">
+              <a:buNone/>
+            </a:pPr>
+            <a:r>
+              <a:rPr lang="en-US" altLang="zh-CN" sz="5400" dirty="0"/>
+              <a:t>Today</a:t>
+            </a:r>
+            <a:endParaRPr lang="en-US" altLang="zh-CN" sz="2000" dirty="0"/>
+          </a:p>
+          <a:p>
+            <a:endParaRPr lang="en-US" altLang="zh-CN" sz="2000" dirty="0"/>
+          </a:p>
+          <a:p>
+            <a:pPr marL="0" indent="0">
+              <a:buNone/>
+            </a:pPr>
+            <a:r>
+              <a:rPr lang="en-US" altLang="zh-CN" sz="2000" dirty="0"/>
+              <a:t>	 </a:t>
+            </a:r>
+            <a:r>
+              <a:rPr lang="en-US" altLang="zh-CN" sz="6000" dirty="0"/>
+              <a:t>we are going to create a container through image, and learning how to use them</a:t>
+            </a:r>
+            <a:r>
+              <a:rPr lang="en-US" altLang="zh-CN" sz="2000" dirty="0"/>
+              <a:t>.</a:t>
+            </a:r>
+            <a:r>
+              <a:rPr lang="zh-CN" altLang="en-US" sz="6100" dirty="0"/>
+              <a:t>❤️</a:t>
+            </a:r>
+          </a:p>
+        </p:txBody>
+      </p:sp>
+    </p:spTree>
+    <p:extLst>
+      <p:ext uri="{BB962C8B-B14F-4D97-AF65-F5344CB8AC3E}">
+        <p14:creationId xmlns:p14="http://schemas.microsoft.com/office/powerpoint/2010/main" val="2134265141"/>
+      </p:ext>
+    </p:extLst>
+  </p:cSld>
+  <p:clrMapOvr>
+    <a:masterClrMapping/>
+  </p:clrMapOvr>
+</p:sld>
+</file>
+
+<file path=ppt/slides/slide7.xml><?xml version="1.0" encoding="utf-8"?>
+<p:sld xmlns:a="http://schemas.openxmlformats.org/drawingml/2006/main" xmlns:r="http://schemas.openxmlformats.org/officeDocument/2006/relationships" xmlns:p="http://schemas.openxmlformats.org/presentationml/2006/main">
+  <p:cSld>
+    <p:bg>
+      <p:bgPr>
+        <a:solidFill>
+          <a:srgbClr val="000000"/>
+        </a:solidFill>
+        <a:effectLst/>
+      </p:bgPr>
+    </p:bg>
+    <p:spTree>
+      <p:nvGrpSpPr>
+        <p:cNvPr id="1" name=""/>
+        <p:cNvGrpSpPr/>
+        <p:nvPr/>
+      </p:nvGrpSpPr>
+      <p:grpSpPr>
+        <a:xfrm>
+          <a:off x="0" y="0"/>
+          <a:ext cx="0" cy="0"/>
+          <a:chOff x="0" y="0"/>
+          <a:chExt cx="0" cy="0"/>
+        </a:xfrm>
+      </p:grpSpPr>
+      <p:sp>
+        <p:nvSpPr>
+          <p:cNvPr id="32" name="Rectangle 31">
+            <a:extLst>
+              <a:ext uri="{FF2B5EF4-FFF2-40B4-BE49-F238E27FC236}">
+                <a16:creationId xmlns:a16="http://schemas.microsoft.com/office/drawing/2014/main" id="{71B2258F-86CA-4D4D-8270-BC05FCDEBFB3}"/>
+              </a:ext>
+              <a:ext uri="{C183D7F6-B498-43B3-948B-1728B52AA6E4}">
+                <adec:decorative xmlns:adec="http://schemas.microsoft.com/office/drawing/2017/decorative" val="1"/>
+              </a:ext>
+            </a:extLst>
+          </p:cNvPr>
+          <p:cNvSpPr>
+            <a:spLocks noGrp="1" noRot="1" noChangeAspect="1" noMove="1" noResize="1" noEditPoints="1" noAdjustHandles="1" noChangeArrowheads="1" noChangeShapeType="1" noTextEdit="1"/>
+          </p:cNvSpPr>
+          <p:nvPr>
+            <p:extLst>
+              <p:ext uri="{386F3935-93C4-4BCD-93E2-E3B085C9AB24}">
+                <p16:designElem xmlns:p16="http://schemas.microsoft.com/office/powerpoint/2015/main" val="1"/>
+              </p:ext>
+            </p:extLst>
+          </p:nvPr>
+        </p:nvSpPr>
+        <p:spPr>
+          <a:xfrm>
+            <a:off x="0" y="0"/>
+            <a:ext cx="12192000" cy="6857999"/>
+          </a:xfrm>
+          <a:prstGeom prst="rect">
+            <a:avLst/>
+          </a:prstGeom>
+          <a:solidFill>
+            <a:srgbClr val="000000"/>
+          </a:solidFill>
+          <a:ln>
+            <a:noFill/>
+          </a:ln>
+        </p:spPr>
+        <p:style>
+          <a:lnRef idx="2">
+            <a:schemeClr val="accent1">
+              <a:shade val="50000"/>
+            </a:schemeClr>
+          </a:lnRef>
+          <a:fillRef idx="1">
+            <a:schemeClr val="accent1"/>
+          </a:fillRef>
+          <a:effectRef idx="0">
+            <a:schemeClr val="accent1"/>
+          </a:effectRef>
+          <a:fontRef idx="minor">
+            <a:schemeClr val="lt1"/>
+          </a:fontRef>
+        </p:style>
+        <p:txBody>
+          <a:bodyPr rtlCol="0" anchor="ctr"/>
+          <a:lstStyle/>
+          <a:p>
+            <a:pPr algn="ctr"/>
+            <a:endParaRPr lang="en-US"/>
+          </a:p>
+        </p:txBody>
+      </p:sp>
+      <p:pic>
+        <p:nvPicPr>
+          <p:cNvPr id="4" name="Picture 4" descr="干货 | 一文搞定 Docker 容器技术与常用命令 -阿里云开发者社区">
+            <a:extLst>
+              <a:ext uri="{FF2B5EF4-FFF2-40B4-BE49-F238E27FC236}">
+                <a16:creationId xmlns:a16="http://schemas.microsoft.com/office/drawing/2014/main" id="{43C37884-1760-A27D-3EE2-C0FEFFE60AD8}"/>
+              </a:ext>
+            </a:extLst>
+          </p:cNvPr>
+          <p:cNvPicPr>
+            <a:picLocks noChangeAspect="1" noChangeArrowheads="1"/>
+          </p:cNvPicPr>
+          <p:nvPr/>
+        </p:nvPicPr>
+        <p:blipFill>
+          <a:blip r:embed="rId2">
+            <a:alphaModFix amt="50000"/>
+            <a:extLst>
+              <a:ext uri="{28A0092B-C50C-407E-A947-70E740481C1C}">
+                <a14:useLocalDpi xmlns:a14="http://schemas.microsoft.com/office/drawing/2010/main" val="0"/>
+              </a:ext>
+            </a:extLst>
+          </a:blip>
+          <a:srcRect l="14459" r="18430"/>
+          <a:stretch>
+            <a:fillRect/>
+          </a:stretch>
+        </p:blipFill>
+        <p:spPr bwMode="auto">
+          <a:xfrm>
+            <a:off x="20" y="1"/>
+            <a:ext cx="12191980" cy="6857999"/>
+          </a:xfrm>
+          <a:prstGeom prst="rect">
+            <a:avLst/>
+          </a:prstGeom>
+          <a:noFill/>
+          <a:extLst>
+            <a:ext uri="{909E8E84-426E-40DD-AFC4-6F175D3DCCD1}">
+              <a14:hiddenFill xmlns:a14="http://schemas.microsoft.com/office/drawing/2010/main">
+                <a:solidFill>
+                  <a:srgbClr val="FFFFFF"/>
+                </a:solidFill>
+              </a14:hiddenFill>
+            </a:ext>
+          </a:extLst>
+        </p:spPr>
+      </p:pic>
+      <p:sp>
+        <p:nvSpPr>
+          <p:cNvPr id="5" name="文本框 4">
+            <a:extLst>
+              <a:ext uri="{FF2B5EF4-FFF2-40B4-BE49-F238E27FC236}">
+                <a16:creationId xmlns:a16="http://schemas.microsoft.com/office/drawing/2014/main" id="{2E4CAE86-DC78-53DE-0AD6-A932887F47F5}"/>
+              </a:ext>
+            </a:extLst>
+          </p:cNvPr>
+          <p:cNvSpPr txBox="1"/>
+          <p:nvPr/>
+        </p:nvSpPr>
+        <p:spPr>
+          <a:xfrm>
+            <a:off x="1524000" y="1122362"/>
+            <a:ext cx="9144000" cy="2900518"/>
+          </a:xfrm>
+          <a:prstGeom prst="rect">
+            <a:avLst/>
+          </a:prstGeom>
+        </p:spPr>
+        <p:txBody>
+          <a:bodyPr vert="horz" lIns="91440" tIns="45720" rIns="91440" bIns="45720" rtlCol="0" anchor="b">
+            <a:normAutofit/>
+          </a:bodyPr>
+          <a:lstStyle/>
+          <a:p>
+            <a:pPr algn="ctr">
+              <a:lnSpc>
+                <a:spcPct val="90000"/>
+              </a:lnSpc>
+              <a:spcBef>
+                <a:spcPct val="0"/>
+              </a:spcBef>
+              <a:spcAft>
+                <a:spcPts val="600"/>
+              </a:spcAft>
+            </a:pPr>
+            <a:r>
+              <a:rPr lang="en-US" altLang="zh-CN" sz="6000" dirty="0">
+                <a:solidFill>
+                  <a:srgbClr val="FFFFFF"/>
+                </a:solidFill>
+                <a:latin typeface="+mj-lt"/>
+                <a:ea typeface="+mj-ea"/>
+                <a:cs typeface="+mj-cs"/>
+              </a:rPr>
+              <a:t>2.Origin of Docker</a:t>
+            </a:r>
+          </a:p>
+        </p:txBody>
+      </p:sp>
+    </p:spTree>
+    <p:extLst>
+      <p:ext uri="{BB962C8B-B14F-4D97-AF65-F5344CB8AC3E}">
+        <p14:creationId xmlns:p14="http://schemas.microsoft.com/office/powerpoint/2010/main" val="1223358467"/>
+      </p:ext>
+    </p:extLst>
+  </p:cSld>
+  <p:clrMapOvr>
+    <a:overrideClrMapping bg1="dk1" tx1="lt1" bg2="dk2" tx2="lt2" accent1="accent1" accent2="accent2" accent3="accent3" accent4="accent4" accent5="accent5" accent6="accent6" hlink="hlink" folHlink="folHlink"/>
+  </p:clrMapOvr>
+</p:sld>
+</file>
+
+<file path=ppt/slides/slide8.xml><?xml version="1.0" encoding="utf-8"?>
+<p:sld xmlns:a="http://schemas.openxmlformats.org/drawingml/2006/main" xmlns:r="http://schemas.openxmlformats.org/officeDocument/2006/relationships" xmlns:p="http://schemas.openxmlformats.org/presentationml/2006/main">
+  <p:cSld>
+    <p:bg>
+      <p:bgPr>
+        <a:solidFill>
+          <a:schemeClr val="bg1"/>
+        </a:solidFill>
+        <a:effectLst/>
+      </p:bgPr>
+    </p:bg>
+    <p:spTree>
+      <p:nvGrpSpPr>
+        <p:cNvPr id="1" name=""/>
+        <p:cNvGrpSpPr/>
+        <p:nvPr/>
+      </p:nvGrpSpPr>
+      <p:grpSpPr>
+        <a:xfrm>
+          <a:off x="0" y="0"/>
+          <a:ext cx="0" cy="0"/>
+          <a:chOff x="0" y="0"/>
+          <a:chExt cx="0" cy="0"/>
+        </a:xfrm>
+      </p:grpSpPr>
+      <p:sp useBgFill="1">
+        <p:nvSpPr>
+          <p:cNvPr id="21" name="Rectangle 20">
+            <a:extLst>
+              <a:ext uri="{FF2B5EF4-FFF2-40B4-BE49-F238E27FC236}">
+                <a16:creationId xmlns:a16="http://schemas.microsoft.com/office/drawing/2014/main" id="{09588DA8-065E-4F6F-8EFD-43104AB2E0CF}"/>
+              </a:ext>
+              <a:ext uri="{C183D7F6-B498-43B3-948B-1728B52AA6E4}">
+                <adec:decorative xmlns:adec="http://schemas.microsoft.com/office/drawing/2017/decorative" val="1"/>
+              </a:ext>
+            </a:extLst>
+          </p:cNvPr>
+          <p:cNvSpPr>
+            <a:spLocks noGrp="1" noRot="1" noChangeAspect="1" noMove="1" noResize="1" noEditPoints="1" noAdjustHandles="1" noChangeArrowheads="1" noChangeShapeType="1" noTextEdit="1"/>
+          </p:cNvSpPr>
+          <p:nvPr>
+            <p:extLst>
+              <p:ext uri="{386F3935-93C4-4BCD-93E2-E3B085C9AB24}">
+                <p16:designElem xmlns:p16="http://schemas.microsoft.com/office/powerpoint/2015/main" val="1"/>
+              </p:ext>
+            </p:extLst>
+          </p:nvPr>
+        </p:nvSpPr>
+        <p:spPr>
+          <a:xfrm>
+            <a:off x="0" y="0"/>
+            <a:ext cx="12192000" cy="6858000"/>
+          </a:xfrm>
+          <a:prstGeom prst="rect">
+            <a:avLst/>
+          </a:prstGeom>
+          <a:ln w="12700" cap="flat" cmpd="sng" algn="ctr">
+            <a:noFill/>
+            <a:prstDash val="solid"/>
+            <a:miter lim="800000"/>
+          </a:ln>
+          <a:effectLst/>
+          <a:extLst>
+            <a:ext uri="{91240B29-F687-4F45-9708-019B960494DF}">
+              <a14:hiddenLine xmlns:a14="http://schemas.microsoft.com/office/drawing/2010/main" w="12700" cap="flat" cmpd="sng" algn="ctr">
+                <a:solidFill>
+                  <a:schemeClr val="accent1">
+                    <a:shade val="50000"/>
+                  </a:schemeClr>
+                </a:solidFill>
+                <a:prstDash val="solid"/>
+                <a:miter lim="800000"/>
+              </a14:hiddenLine>
+            </a:ext>
+          </a:extLst>
+        </p:spPr>
+        <p:style>
+          <a:lnRef idx="2">
+            <a:schemeClr val="accent1">
+              <a:shade val="50000"/>
+            </a:schemeClr>
+          </a:lnRef>
+          <a:fillRef idx="1">
+            <a:schemeClr val="accent1"/>
+          </a:fillRef>
+          <a:effectRef idx="0">
+            <a:schemeClr val="accent1"/>
+          </a:effectRef>
+          <a:fontRef idx="minor">
+            <a:schemeClr val="lt1"/>
+          </a:fontRef>
+        </p:style>
+        <p:txBody>
+          <a:bodyPr rtlCol="0" anchor="ctr"/>
+          <a:lstStyle/>
+          <a:p>
+            <a:pPr algn="ctr"/>
+            <a:endParaRPr lang="en-US"/>
+          </a:p>
+        </p:txBody>
+      </p:sp>
+      <p:sp useBgFill="1">
+        <p:nvSpPr>
+          <p:cNvPr id="23" name="Rectangle 22">
+            <a:extLst>
+              <a:ext uri="{FF2B5EF4-FFF2-40B4-BE49-F238E27FC236}">
+                <a16:creationId xmlns:a16="http://schemas.microsoft.com/office/drawing/2014/main" id="{C4285719-470E-454C-AF62-8323075F1F5B}"/>
+              </a:ext>
+              <a:ext uri="{C183D7F6-B498-43B3-948B-1728B52AA6E4}">
+                <adec:decorative xmlns:adec="http://schemas.microsoft.com/office/drawing/2017/decorative" val="1"/>
+              </a:ext>
+            </a:extLst>
+          </p:cNvPr>
+          <p:cNvSpPr>
+            <a:spLocks noGrp="1" noRot="1" noChangeAspect="1" noMove="1" noResize="1" noEditPoints="1" noAdjustHandles="1" noChangeArrowheads="1" noChangeShapeType="1" noTextEdit="1"/>
+          </p:cNvSpPr>
+          <p:nvPr>
+            <p:extLst>
+              <p:ext uri="{386F3935-93C4-4BCD-93E2-E3B085C9AB24}">
+                <p16:designElem xmlns:p16="http://schemas.microsoft.com/office/powerpoint/2015/main" val="1"/>
+              </p:ext>
+            </p:extLst>
+          </p:nvPr>
+        </p:nvSpPr>
+        <p:spPr>
+          <a:xfrm>
+            <a:off x="0" y="0"/>
+            <a:ext cx="12188952" cy="6858000"/>
+          </a:xfrm>
+          <a:prstGeom prst="rect">
+            <a:avLst/>
+          </a:prstGeom>
+          <a:ln w="12700" cap="flat" cmpd="sng" algn="ctr">
+            <a:noFill/>
+            <a:prstDash val="solid"/>
+            <a:miter lim="800000"/>
+          </a:ln>
+          <a:effectLst/>
+          <a:extLst>
+            <a:ext uri="{91240B29-F687-4F45-9708-019B960494DF}">
+              <a14:hiddenLine xmlns:a14="http://schemas.microsoft.com/office/drawing/2010/main" w="12700" cap="flat" cmpd="sng" algn="ctr">
+                <a:solidFill>
+                  <a:schemeClr val="accent1">
+                    <a:shade val="50000"/>
+                  </a:schemeClr>
+                </a:solidFill>
+                <a:prstDash val="solid"/>
+                <a:miter lim="800000"/>
+              </a14:hiddenLine>
+            </a:ext>
+          </a:extLst>
+        </p:spPr>
+        <p:style>
+          <a:lnRef idx="2">
+            <a:schemeClr val="accent1">
+              <a:shade val="50000"/>
+            </a:schemeClr>
+          </a:lnRef>
+          <a:fillRef idx="1">
+            <a:schemeClr val="accent1"/>
+          </a:fillRef>
+          <a:effectRef idx="0">
+            <a:schemeClr val="accent1"/>
+          </a:effectRef>
+          <a:fontRef idx="minor">
+            <a:schemeClr val="lt1"/>
+          </a:fontRef>
+        </p:style>
+        <p:txBody>
+          <a:bodyPr rtlCol="0" anchor="ctr"/>
+          <a:lstStyle/>
+          <a:p>
+            <a:pPr algn="ctr"/>
+            <a:endParaRPr lang="en-US"/>
+          </a:p>
+        </p:txBody>
+      </p:sp>
+      <p:sp>
+        <p:nvSpPr>
+          <p:cNvPr id="25" name="Rectangle 24">
+            <a:extLst>
+              <a:ext uri="{FF2B5EF4-FFF2-40B4-BE49-F238E27FC236}">
+                <a16:creationId xmlns:a16="http://schemas.microsoft.com/office/drawing/2014/main" id="{CD9FE4EF-C4D8-49A0-B2FF-81D8DB7D8A24}"/>
+              </a:ext>
+              <a:ext uri="{C183D7F6-B498-43B3-948B-1728B52AA6E4}">
+                <adec:decorative xmlns:adec="http://schemas.microsoft.com/office/drawing/2017/decorative" val="1"/>
+              </a:ext>
+            </a:extLst>
+          </p:cNvPr>
+          <p:cNvSpPr>
+            <a:spLocks noGrp="1" noRot="1" noChangeAspect="1" noMove="1" noResize="1" noEditPoints="1" noAdjustHandles="1" noChangeArrowheads="1" noChangeShapeType="1" noTextEdit="1"/>
+          </p:cNvSpPr>
+          <p:nvPr>
+            <p:extLst>
+              <p:ext uri="{386F3935-93C4-4BCD-93E2-E3B085C9AB24}">
+                <p16:designElem xmlns:p16="http://schemas.microsoft.com/office/powerpoint/2015/main" val="1"/>
+              </p:ext>
+            </p:extLst>
+          </p:nvPr>
+        </p:nvSpPr>
+        <p:spPr>
+          <a:xfrm rot="5400000" flipH="1">
+            <a:off x="-1410084" y="1410082"/>
+            <a:ext cx="6858000" cy="4037836"/>
+          </a:xfrm>
+          <a:prstGeom prst="rect">
+            <a:avLst/>
+          </a:prstGeom>
+          <a:gradFill>
+            <a:gsLst>
+              <a:gs pos="8000">
+                <a:srgbClr val="000000"/>
+              </a:gs>
+              <a:gs pos="100000">
+                <a:schemeClr val="accent1">
+                  <a:lumMod val="75000"/>
+                </a:schemeClr>
+              </a:gs>
+            </a:gsLst>
+            <a:lin ang="3000000" scaled="0"/>
+          </a:gradFill>
+          <a:ln>
+            <a:noFill/>
+          </a:ln>
+        </p:spPr>
+        <p:style>
+          <a:lnRef idx="2">
+            <a:schemeClr val="accent1">
+              <a:shade val="50000"/>
+            </a:schemeClr>
+          </a:lnRef>
+          <a:fillRef idx="1">
+            <a:schemeClr val="accent1"/>
+          </a:fillRef>
+          <a:effectRef idx="0">
+            <a:schemeClr val="accent1"/>
+          </a:effectRef>
+          <a:fontRef idx="minor">
+            <a:schemeClr val="lt1"/>
+          </a:fontRef>
+        </p:style>
+        <p:txBody>
+          <a:bodyPr rtlCol="0" anchor="ctr"/>
+          <a:lstStyle/>
+          <a:p>
+            <a:pPr algn="ctr"/>
+            <a:endParaRPr lang="en-US"/>
+          </a:p>
+        </p:txBody>
+      </p:sp>
+      <p:sp>
+        <p:nvSpPr>
+          <p:cNvPr id="27" name="Rectangle 26">
+            <a:extLst>
+              <a:ext uri="{FF2B5EF4-FFF2-40B4-BE49-F238E27FC236}">
+                <a16:creationId xmlns:a16="http://schemas.microsoft.com/office/drawing/2014/main" id="{4300840D-0A0B-4512-BACA-B439D5B9C57C}"/>
+              </a:ext>
+              <a:ext uri="{C183D7F6-B498-43B3-948B-1728B52AA6E4}">
+                <adec:decorative xmlns:adec="http://schemas.microsoft.com/office/drawing/2017/decorative" val="1"/>
+              </a:ext>
+            </a:extLst>
+          </p:cNvPr>
+          <p:cNvSpPr>
+            <a:spLocks noGrp="1" noRot="1" noChangeAspect="1" noMove="1" noResize="1" noEditPoints="1" noAdjustHandles="1" noChangeArrowheads="1" noChangeShapeType="1" noTextEdit="1"/>
+          </p:cNvSpPr>
+          <p:nvPr>
+            <p:extLst>
+              <p:ext uri="{386F3935-93C4-4BCD-93E2-E3B085C9AB24}">
+                <p16:designElem xmlns:p16="http://schemas.microsoft.com/office/powerpoint/2015/main" val="1"/>
+              </p:ext>
+            </p:extLst>
+          </p:nvPr>
+        </p:nvSpPr>
+        <p:spPr>
+          <a:xfrm rot="5400000" flipH="1">
+            <a:off x="-1410085" y="1420219"/>
+            <a:ext cx="6857999" cy="4037839"/>
+          </a:xfrm>
+          <a:prstGeom prst="rect">
+            <a:avLst/>
+          </a:prstGeom>
+          <a:gradFill>
+            <a:gsLst>
+              <a:gs pos="0">
+                <a:srgbClr val="000000">
+                  <a:alpha val="0"/>
+                </a:srgbClr>
+              </a:gs>
+              <a:gs pos="99000">
+                <a:schemeClr val="accent1">
+                  <a:alpha val="46000"/>
+                </a:schemeClr>
+              </a:gs>
+            </a:gsLst>
+            <a:lin ang="1800000" scaled="0"/>
+          </a:gradFill>
+          <a:ln>
+            <a:noFill/>
+          </a:ln>
+        </p:spPr>
+        <p:style>
+          <a:lnRef idx="2">
+            <a:schemeClr val="accent1">
+              <a:shade val="50000"/>
+            </a:schemeClr>
+          </a:lnRef>
+          <a:fillRef idx="1">
+            <a:schemeClr val="accent1"/>
+          </a:fillRef>
+          <a:effectRef idx="0">
+            <a:schemeClr val="accent1"/>
+          </a:effectRef>
+          <a:fontRef idx="minor">
+            <a:schemeClr val="lt1"/>
+          </a:fontRef>
+        </p:style>
+        <p:txBody>
+          <a:bodyPr rtlCol="0" anchor="ctr"/>
+          <a:lstStyle/>
+          <a:p>
+            <a:pPr algn="ctr"/>
+            <a:endParaRPr lang="en-US"/>
+          </a:p>
+        </p:txBody>
+      </p:sp>
+      <p:sp>
+        <p:nvSpPr>
+          <p:cNvPr id="29" name="Rectangle 28">
+            <a:extLst>
+              <a:ext uri="{FF2B5EF4-FFF2-40B4-BE49-F238E27FC236}">
+                <a16:creationId xmlns:a16="http://schemas.microsoft.com/office/drawing/2014/main" id="{D2B78728-A580-49A7-84F9-6EF6F583ADE0}"/>
+              </a:ext>
+              <a:ext uri="{C183D7F6-B498-43B3-948B-1728B52AA6E4}">
+                <adec:decorative xmlns:adec="http://schemas.microsoft.com/office/drawing/2017/decorative" val="1"/>
+              </a:ext>
+            </a:extLst>
+          </p:cNvPr>
+          <p:cNvSpPr>
+            <a:spLocks noGrp="1" noRot="1" noChangeAspect="1" noMove="1" noResize="1" noEditPoints="1" noAdjustHandles="1" noChangeArrowheads="1" noChangeShapeType="1" noTextEdit="1"/>
+          </p:cNvSpPr>
+          <p:nvPr>
+            <p:extLst>
+              <p:ext uri="{386F3935-93C4-4BCD-93E2-E3B085C9AB24}">
+                <p16:designElem xmlns:p16="http://schemas.microsoft.com/office/powerpoint/2015/main" val="1"/>
+              </p:ext>
+            </p:extLst>
+          </p:nvPr>
+        </p:nvSpPr>
+        <p:spPr>
+          <a:xfrm rot="5400000" flipH="1">
+            <a:off x="767923" y="3588085"/>
+            <a:ext cx="2501979" cy="4037841"/>
+          </a:xfrm>
+          <a:prstGeom prst="rect">
+            <a:avLst/>
+          </a:prstGeom>
+          <a:gradFill>
+            <a:gsLst>
+              <a:gs pos="2000">
+                <a:schemeClr val="accent1">
+                  <a:alpha val="29000"/>
+                </a:schemeClr>
+              </a:gs>
+              <a:gs pos="100000">
+                <a:srgbClr val="000000">
+                  <a:alpha val="30000"/>
+                </a:srgbClr>
+              </a:gs>
+            </a:gsLst>
+            <a:lin ang="7800000" scaled="0"/>
+          </a:gradFill>
+          <a:ln>
+            <a:noFill/>
+          </a:ln>
+        </p:spPr>
+        <p:style>
+          <a:lnRef idx="2">
+            <a:schemeClr val="accent1">
+              <a:shade val="50000"/>
+            </a:schemeClr>
+          </a:lnRef>
+          <a:fillRef idx="1">
+            <a:schemeClr val="accent1"/>
+          </a:fillRef>
+          <a:effectRef idx="0">
+            <a:schemeClr val="accent1"/>
+          </a:effectRef>
+          <a:fontRef idx="minor">
+            <a:schemeClr val="lt1"/>
+          </a:fontRef>
+        </p:style>
+        <p:txBody>
+          <a:bodyPr rtlCol="0" anchor="ctr"/>
+          <a:lstStyle/>
+          <a:p>
+            <a:pPr algn="ctr"/>
+            <a:endParaRPr lang="en-US" dirty="0"/>
+          </a:p>
+        </p:txBody>
+      </p:sp>
+      <p:sp>
+        <p:nvSpPr>
+          <p:cNvPr id="31" name="Freeform: Shape 30">
+            <a:extLst>
+              <a:ext uri="{FF2B5EF4-FFF2-40B4-BE49-F238E27FC236}">
+                <a16:creationId xmlns:a16="http://schemas.microsoft.com/office/drawing/2014/main" id="{38FAA1A1-D861-433F-88FA-1E9D6FD31D11}"/>
+              </a:ext>
+              <a:ext uri="{C183D7F6-B498-43B3-948B-1728B52AA6E4}">
+                <adec:decorative xmlns:adec="http://schemas.microsoft.com/office/drawing/2017/decorative" val="1"/>
+              </a:ext>
+            </a:extLst>
+          </p:cNvPr>
+          <p:cNvSpPr>
+            <a:spLocks noGrp="1" noRot="1" noChangeAspect="1" noMove="1" noResize="1" noEditPoints="1" noAdjustHandles="1" noChangeArrowheads="1" noChangeShapeType="1" noTextEdit="1"/>
+          </p:cNvSpPr>
+          <p:nvPr>
+            <p:extLst>
+              <p:ext uri="{386F3935-93C4-4BCD-93E2-E3B085C9AB24}">
+                <p16:designElem xmlns:p16="http://schemas.microsoft.com/office/powerpoint/2015/main" val="1"/>
+              </p:ext>
+            </p:extLst>
+          </p:nvPr>
+        </p:nvSpPr>
+        <p:spPr>
+          <a:xfrm rot="20635413">
+            <a:off x="-501737" y="969718"/>
+            <a:ext cx="3900357" cy="4178958"/>
+          </a:xfrm>
+          <a:custGeom>
+            <a:avLst/>
+            <a:gdLst>
+              <a:gd name="connsiteX0" fmla="*/ 2432225 w 3900357"/>
+              <a:gd name="connsiteY0" fmla="*/ 93939 h 4178958"/>
+              <a:gd name="connsiteX1" fmla="*/ 3900357 w 3900357"/>
+              <a:gd name="connsiteY1" fmla="*/ 2089479 h 4178958"/>
+              <a:gd name="connsiteX2" fmla="*/ 1810878 w 3900357"/>
+              <a:gd name="connsiteY2" fmla="*/ 4178958 h 4178958"/>
+              <a:gd name="connsiteX3" fmla="*/ 78249 w 3900357"/>
+              <a:gd name="connsiteY3" fmla="*/ 3257727 h 4178958"/>
+              <a:gd name="connsiteX4" fmla="*/ 0 w 3900357"/>
+              <a:gd name="connsiteY4" fmla="*/ 3128923 h 4178958"/>
+              <a:gd name="connsiteX5" fmla="*/ 831324 w 3900357"/>
+              <a:gd name="connsiteY5" fmla="*/ 244281 h 4178958"/>
+              <a:gd name="connsiteX6" fmla="*/ 997559 w 3900357"/>
+              <a:gd name="connsiteY6" fmla="*/ 164202 h 4178958"/>
+              <a:gd name="connsiteX7" fmla="*/ 1810878 w 3900357"/>
+              <a:gd name="connsiteY7" fmla="*/ 0 h 4178958"/>
+              <a:gd name="connsiteX8" fmla="*/ 2432225 w 3900357"/>
+              <a:gd name="connsiteY8" fmla="*/ 93939 h 4178958"/>
+            </a:gdLst>
+            <a:ahLst/>
+            <a:cxnLst>
+              <a:cxn ang="0">
+                <a:pos x="connsiteX0" y="connsiteY0"/>
+              </a:cxn>
+              <a:cxn ang="0">
+                <a:pos x="connsiteX1" y="connsiteY1"/>
+              </a:cxn>
+              <a:cxn ang="0">
+                <a:pos x="connsiteX2" y="connsiteY2"/>
+              </a:cxn>
+              <a:cxn ang="0">
+                <a:pos x="connsiteX3" y="connsiteY3"/>
+              </a:cxn>
+              <a:cxn ang="0">
+                <a:pos x="connsiteX4" y="connsiteY4"/>
+              </a:cxn>
+              <a:cxn ang="0">
+                <a:pos x="connsiteX5" y="connsiteY5"/>
+              </a:cxn>
+              <a:cxn ang="0">
+                <a:pos x="connsiteX6" y="connsiteY6"/>
+              </a:cxn>
+              <a:cxn ang="0">
+                <a:pos x="connsiteX7" y="connsiteY7"/>
+              </a:cxn>
+              <a:cxn ang="0">
+                <a:pos x="connsiteX8" y="connsiteY8"/>
+              </a:cxn>
+            </a:cxnLst>
+            <a:rect l="l" t="t" r="r" b="b"/>
+            <a:pathLst>
+              <a:path w="3900357" h="4178958">
+                <a:moveTo>
+                  <a:pt x="2432225" y="93939"/>
+                </a:moveTo>
+                <a:cubicBezTo>
+                  <a:pt x="3282786" y="358491"/>
+                  <a:pt x="3900357" y="1151865"/>
+                  <a:pt x="3900357" y="2089479"/>
+                </a:cubicBezTo>
+                <a:cubicBezTo>
+                  <a:pt x="3900357" y="3243466"/>
+                  <a:pt x="2964865" y="4178958"/>
+                  <a:pt x="1810878" y="4178958"/>
+                </a:cubicBezTo>
+                <a:cubicBezTo>
+                  <a:pt x="1089636" y="4178958"/>
+                  <a:pt x="453744" y="3813531"/>
+                  <a:pt x="78249" y="3257727"/>
+                </a:cubicBezTo>
+                <a:lnTo>
+                  <a:pt x="0" y="3128923"/>
+                </a:lnTo>
+                <a:lnTo>
+                  <a:pt x="831324" y="244281"/>
+                </a:lnTo>
+                <a:lnTo>
+                  <a:pt x="997559" y="164202"/>
+                </a:lnTo>
+                <a:cubicBezTo>
+                  <a:pt x="1247540" y="58468"/>
+                  <a:pt x="1522381" y="0"/>
+                  <a:pt x="1810878" y="0"/>
+                </a:cubicBezTo>
+                <a:cubicBezTo>
+                  <a:pt x="2027251" y="0"/>
+                  <a:pt x="2235942" y="32888"/>
+                  <a:pt x="2432225" y="93939"/>
+                </a:cubicBezTo>
+                <a:close/>
+              </a:path>
+            </a:pathLst>
+          </a:custGeom>
+          <a:gradFill>
+            <a:gsLst>
+              <a:gs pos="29000">
+                <a:srgbClr val="000000">
+                  <a:alpha val="0"/>
+                </a:srgbClr>
+              </a:gs>
+              <a:gs pos="100000">
+                <a:schemeClr val="accent1">
+                  <a:alpha val="43000"/>
+                </a:schemeClr>
+              </a:gs>
+            </a:gsLst>
+            <a:lin ang="1800000" scaled="0"/>
+          </a:gradFill>
+          <a:ln>
+            <a:noFill/>
+          </a:ln>
+        </p:spPr>
+        <p:style>
+          <a:lnRef idx="2">
+            <a:schemeClr val="accent1">
+              <a:shade val="50000"/>
+            </a:schemeClr>
+          </a:lnRef>
+          <a:fillRef idx="1">
+            <a:schemeClr val="accent1"/>
+          </a:fillRef>
+          <a:effectRef idx="0">
+            <a:schemeClr val="accent1"/>
+          </a:effectRef>
+          <a:fontRef idx="minor">
+            <a:schemeClr val="lt1"/>
+          </a:fontRef>
+        </p:style>
+        <p:txBody>
+          <a:bodyPr wrap="square" rtlCol="0" anchor="ctr">
+            <a:noAutofit/>
+          </a:bodyPr>
+          <a:lstStyle/>
+          <a:p>
+            <a:pPr algn="ctr"/>
+            <a:endParaRPr lang="en-US" dirty="0"/>
+          </a:p>
+        </p:txBody>
+      </p:sp>
+      <p:sp>
+        <p:nvSpPr>
+          <p:cNvPr id="33" name="Rectangle 32">
+            <a:extLst>
+              <a:ext uri="{FF2B5EF4-FFF2-40B4-BE49-F238E27FC236}">
+                <a16:creationId xmlns:a16="http://schemas.microsoft.com/office/drawing/2014/main" id="{8D71EDA1-87BF-4D5D-AB79-F346FD19278A}"/>
+              </a:ext>
+              <a:ext uri="{C183D7F6-B498-43B3-948B-1728B52AA6E4}">
+                <adec:decorative xmlns:adec="http://schemas.microsoft.com/office/drawing/2017/decorative" val="1"/>
+              </a:ext>
+            </a:extLst>
+          </p:cNvPr>
+          <p:cNvSpPr>
+            <a:spLocks noGrp="1" noRot="1" noChangeAspect="1" noMove="1" noResize="1" noEditPoints="1" noAdjustHandles="1" noChangeArrowheads="1" noChangeShapeType="1" noTextEdit="1"/>
+          </p:cNvSpPr>
+          <p:nvPr>
+            <p:extLst>
+              <p:ext uri="{386F3935-93C4-4BCD-93E2-E3B085C9AB24}">
+                <p16:designElem xmlns:p16="http://schemas.microsoft.com/office/powerpoint/2015/main" val="1"/>
+              </p:ext>
+            </p:extLst>
+          </p:nvPr>
+        </p:nvSpPr>
+        <p:spPr>
+          <a:xfrm rot="5400000" flipH="1">
+            <a:off x="-1410093" y="1399943"/>
+            <a:ext cx="6858003" cy="4037835"/>
+          </a:xfrm>
+          <a:prstGeom prst="rect">
+            <a:avLst/>
+          </a:prstGeom>
+          <a:gradFill>
+            <a:gsLst>
+              <a:gs pos="0">
+                <a:srgbClr val="000000">
+                  <a:alpha val="0"/>
+                </a:srgbClr>
+              </a:gs>
+              <a:gs pos="99000">
+                <a:schemeClr val="accent1">
+                  <a:lumMod val="60000"/>
+                  <a:lumOff val="40000"/>
+                  <a:alpha val="11000"/>
+                </a:schemeClr>
+              </a:gs>
+            </a:gsLst>
+            <a:lin ang="7200000" scaled="0"/>
+          </a:gradFill>
+          <a:ln>
+            <a:noFill/>
+          </a:ln>
+        </p:spPr>
+        <p:style>
+          <a:lnRef idx="2">
+            <a:schemeClr val="accent1">
+              <a:shade val="50000"/>
+            </a:schemeClr>
+          </a:lnRef>
+          <a:fillRef idx="1">
+            <a:schemeClr val="accent1"/>
+          </a:fillRef>
+          <a:effectRef idx="0">
+            <a:schemeClr val="accent1"/>
+          </a:effectRef>
+          <a:fontRef idx="minor">
+            <a:schemeClr val="lt1"/>
+          </a:fontRef>
+        </p:style>
+        <p:txBody>
+          <a:bodyPr rtlCol="0" anchor="ctr"/>
+          <a:lstStyle/>
+          <a:p>
+            <a:pPr algn="ctr"/>
+            <a:endParaRPr lang="en-US"/>
+          </a:p>
+        </p:txBody>
+      </p:sp>
+      <p:sp>
+        <p:nvSpPr>
+          <p:cNvPr id="3" name="内容占位符 2">
+            <a:extLst>
+              <a:ext uri="{FF2B5EF4-FFF2-40B4-BE49-F238E27FC236}">
+                <a16:creationId xmlns:a16="http://schemas.microsoft.com/office/drawing/2014/main" id="{B0AE7D5A-7B89-F153-97AF-B5CDAA27F5A1}"/>
+              </a:ext>
+            </a:extLst>
+          </p:cNvPr>
+          <p:cNvSpPr>
+            <a:spLocks noGrp="1"/>
+          </p:cNvSpPr>
+          <p:nvPr>
+            <p:ph idx="1"/>
+          </p:nvPr>
+        </p:nvSpPr>
+        <p:spPr>
+          <a:xfrm>
+            <a:off x="4539469" y="3713960"/>
+            <a:ext cx="7357177" cy="2502731"/>
+          </a:xfrm>
+        </p:spPr>
+        <p:txBody>
+          <a:bodyPr anchor="ctr" anchorCtr="1">
+            <a:noAutofit/>
+          </a:bodyPr>
+          <a:lstStyle/>
+          <a:p>
+            <a:r>
+              <a:rPr lang="en-US" altLang="zh-CN" sz="3600" dirty="0"/>
               <a:t>dot Cloud is a cloud-based application platform that allows developers to deploy and manage applications in the cloud.</a:t>
             </a:r>
           </a:p>
-          <a:p>
-            <a:br>
-              <a:rPr lang="en-US" altLang="zh-CN" sz="1400" dirty="0"/>
-            </a:br>
-            <a:endParaRPr lang="en-US" altLang="zh-CN" sz="1400" dirty="0"/>
-          </a:p>
-          <a:p>
-            <a:r>
-              <a:rPr lang="en-US" altLang="zh-CN" sz="1400" dirty="0"/>
-              <a:t>Hykes noticed that when running applications on </a:t>
-            </a:r>
-            <a:r>
-              <a:rPr lang="en-US" altLang="zh-CN" sz="1400" dirty="0" err="1"/>
-              <a:t>dotCloud</a:t>
-            </a:r>
-            <a:r>
-              <a:rPr lang="en-US" altLang="zh-CN" sz="1400" dirty="0"/>
-              <a:t>, different applications required different dependencies and runtime environments, which were often difficult to coexist in the same system.</a:t>
-            </a:r>
-          </a:p>
-          <a:p>
-            <a:br>
-              <a:rPr lang="en-US" altLang="zh-CN" sz="1400" dirty="0"/>
-            </a:br>
-            <a:endParaRPr lang="en-US" altLang="zh-CN" sz="1400" dirty="0"/>
-          </a:p>
-          <a:p>
-            <a:r>
-              <a:rPr lang="en-US" altLang="zh-CN" sz="1400" dirty="0"/>
-              <a:t>This led to environment configuration problems because different applications might require different environments.</a:t>
-            </a:r>
-          </a:p>
-          <a:p>
-            <a:br>
-              <a:rPr lang="en-US" altLang="zh-CN" sz="1400" dirty="0"/>
-            </a:br>
-            <a:endParaRPr lang="en-US" altLang="zh-CN" sz="1400" dirty="0"/>
-          </a:p>
-          <a:p>
-            <a:r>
-              <a:rPr lang="en-US" altLang="zh-CN" sz="1400" dirty="0"/>
-              <a:t>To solve this problem, Hykes began thinking about how to package applications and their environments together so they could run anywhere.</a:t>
-            </a:r>
-          </a:p>
-          <a:p>
-            <a:br>
-              <a:rPr lang="en-US" altLang="zh-CN" sz="1400" dirty="0"/>
-            </a:br>
-            <a:endParaRPr lang="en-US" altLang="zh-CN" sz="1400" dirty="0"/>
-          </a:p>
-          <a:p>
-            <a:r>
-              <a:rPr lang="en-US" altLang="zh-CN" sz="1400" dirty="0"/>
-              <a:t>Furthermore, Hykes decided to create a new tool for packaging applications and their environments.</a:t>
-            </a:r>
-          </a:p>
-          <a:p>
-            <a:br>
-              <a:rPr lang="en-US" altLang="zh-CN" sz="1400" dirty="0"/>
-            </a:br>
-            <a:endParaRPr lang="en-US" altLang="zh-CN" sz="1400" dirty="0"/>
-          </a:p>
-          <a:p>
-            <a:r>
-              <a:rPr lang="en-US" altLang="zh-CN" sz="1400" dirty="0"/>
-              <a:t>And the name of a dock worker is exactly Docker. Hykes thought this name was very appropriate for the tool's functionality, so he named the tool Docker.</a:t>
-            </a:r>
-          </a:p>
-          <a:p>
-            <a:br>
-              <a:rPr lang="en-US" altLang="zh-CN" sz="1400" dirty="0"/>
-            </a:br>
-            <a:endParaRPr lang="en-US" altLang="zh-CN" sz="1400" dirty="0"/>
-          </a:p>
-          <a:p>
-            <a:r>
-              <a:rPr lang="en-US" altLang="zh-CN" sz="1400" dirty="0"/>
-              <a:t>Thus, Docker was born.</a:t>
-            </a:r>
-          </a:p>
-          <a:p>
-            <a:endParaRPr lang="zh-CN" altLang="en-US" sz="1100" dirty="0"/>
-          </a:p>
         </p:txBody>
       </p:sp>
+      <p:pic>
+        <p:nvPicPr>
+          <p:cNvPr id="1030" name="Picture 6" descr="Open PaaS DotCloud Adds Support For WebSockets, Vertical Scaling And ...">
+            <a:extLst>
+              <a:ext uri="{FF2B5EF4-FFF2-40B4-BE49-F238E27FC236}">
+                <a16:creationId xmlns:a16="http://schemas.microsoft.com/office/drawing/2014/main" id="{CA5BBE6F-8DD0-066C-88A2-F0257582CB7D}"/>
+              </a:ext>
+            </a:extLst>
+          </p:cNvPr>
+          <p:cNvPicPr>
+            <a:picLocks noChangeAspect="1" noChangeArrowheads="1"/>
+          </p:cNvPicPr>
+          <p:nvPr/>
+        </p:nvPicPr>
+        <p:blipFill>
+          <a:blip r:embed="rId2">
+            <a:extLst>
+              <a:ext uri="{28A0092B-C50C-407E-A947-70E740481C1C}">
+                <a14:useLocalDpi xmlns:a14="http://schemas.microsoft.com/office/drawing/2010/main" val="0"/>
+              </a:ext>
+            </a:extLst>
+          </a:blip>
+          <a:srcRect/>
+          <a:stretch>
+            <a:fillRect/>
+          </a:stretch>
+        </p:blipFill>
+        <p:spPr bwMode="auto">
+          <a:xfrm>
+            <a:off x="4259331" y="830508"/>
+            <a:ext cx="7531034" cy="2391371"/>
+          </a:xfrm>
+          <a:prstGeom prst="rect">
+            <a:avLst/>
+          </a:prstGeom>
+          <a:noFill/>
+          <a:extLst>
+            <a:ext uri="{909E8E84-426E-40DD-AFC4-6F175D3DCCD1}">
+              <a14:hiddenFill xmlns:a14="http://schemas.microsoft.com/office/drawing/2010/main">
+                <a:solidFill>
+                  <a:srgbClr val="FFFFFF"/>
+                </a:solidFill>
+              </a14:hiddenFill>
+            </a:ext>
+          </a:extLst>
+        </p:spPr>
+      </p:pic>
     </p:spTree>
     <p:extLst>
       <p:ext uri="{BB962C8B-B14F-4D97-AF65-F5344CB8AC3E}">
@@ -17250,7 +18672,7 @@
         </p:blipFill>
         <p:spPr bwMode="auto">
           <a:xfrm>
-            <a:off x="2880197" y="599236"/>
+            <a:off x="4408288" y="181926"/>
             <a:ext cx="7573110" cy="5672938"/>
           </a:xfrm>
           <a:prstGeom prst="rect">
@@ -17268,6 +18690,70 @@
           </a:extLst>
         </p:spPr>
       </p:pic>
+      <p:sp>
+        <p:nvSpPr>
+          <p:cNvPr id="2" name="文本框 1">
+            <a:extLst>
+              <a:ext uri="{FF2B5EF4-FFF2-40B4-BE49-F238E27FC236}">
+                <a16:creationId xmlns:a16="http://schemas.microsoft.com/office/drawing/2014/main" id="{A84F7570-B282-82FD-6F1A-FFE05328070C}"/>
+              </a:ext>
+            </a:extLst>
+          </p:cNvPr>
+          <p:cNvSpPr txBox="1"/>
+          <p:nvPr/>
+        </p:nvSpPr>
+        <p:spPr>
+          <a:xfrm>
+            <a:off x="552322" y="932811"/>
+            <a:ext cx="3602368" cy="5170646"/>
+          </a:xfrm>
+          <a:prstGeom prst="rect">
+            <a:avLst/>
+          </a:prstGeom>
+          <a:noFill/>
+        </p:spPr>
+        <p:txBody>
+          <a:bodyPr wrap="square" rtlCol="0">
+            <a:spAutoFit/>
+          </a:bodyPr>
+          <a:lstStyle/>
+          <a:p>
+            <a:r>
+              <a:rPr lang="en-US" altLang="zh-CN" sz="2400" dirty="0"/>
+              <a:t>One person called Hykes noticed that </a:t>
+            </a:r>
+          </a:p>
+          <a:p>
+            <a:endParaRPr lang="en-US" altLang="zh-CN" sz="2400" dirty="0"/>
+          </a:p>
+          <a:p>
+            <a:r>
+              <a:rPr lang="en-US" altLang="zh-CN" sz="2400" dirty="0"/>
+              <a:t>when running applications on </a:t>
+            </a:r>
+            <a:r>
+              <a:rPr lang="en-US" altLang="zh-CN" sz="2400" dirty="0" err="1"/>
+              <a:t>dotCloud</a:t>
+            </a:r>
+            <a:r>
+              <a:rPr lang="en-US" altLang="zh-CN" sz="2400" dirty="0"/>
+              <a:t>, different applications required different dependencies and runtime environments, </a:t>
+            </a:r>
+          </a:p>
+          <a:p>
+            <a:endParaRPr lang="en-US" altLang="zh-CN" sz="2400" dirty="0"/>
+          </a:p>
+          <a:p>
+            <a:r>
+              <a:rPr lang="en-US" altLang="zh-CN" sz="2400" dirty="0"/>
+              <a:t>which were often difficult to coexist in the same system.</a:t>
+            </a:r>
+          </a:p>
+          <a:p>
+            <a:endParaRPr lang="zh-CN" altLang="en-US" dirty="0"/>
+          </a:p>
+        </p:txBody>
+      </p:sp>
     </p:spTree>
     <p:extLst>
       <p:ext uri="{BB962C8B-B14F-4D97-AF65-F5344CB8AC3E}">
@@ -17594,4 +19080,319 @@
     </a:ext>
   </a:extLst>
 </a:theme>
+</file>
+
+<file path=ppt/theme/theme2.xml><?xml version="1.0" encoding="utf-8"?>
+<a:theme xmlns:a="http://schemas.openxmlformats.org/drawingml/2006/main" name="Office 主题​​">
+  <a:themeElements>
+    <a:clrScheme name="Office">
+      <a:dk1>
+        <a:sysClr val="windowText" lastClr="000000"/>
+      </a:dk1>
+      <a:lt1>
+        <a:sysClr val="window" lastClr="FFFFFF"/>
+      </a:lt1>
+      <a:dk2>
+        <a:srgbClr val="0E2841"/>
+      </a:dk2>
+      <a:lt2>
+        <a:srgbClr val="E8E8E8"/>
+      </a:lt2>
+      <a:accent1>
+        <a:srgbClr val="156082"/>
+      </a:accent1>
+      <a:accent2>
+        <a:srgbClr val="E97132"/>
+      </a:accent2>
+      <a:accent3>
+        <a:srgbClr val="196B24"/>
+      </a:accent3>
+      <a:accent4>
+        <a:srgbClr val="0F9ED5"/>
+      </a:accent4>
+      <a:accent5>
+        <a:srgbClr val="A02B93"/>
+      </a:accent5>
+      <a:accent6>
+        <a:srgbClr val="4EA72E"/>
+      </a:accent6>
+      <a:hlink>
+        <a:srgbClr val="467886"/>
+      </a:hlink>
+      <a:folHlink>
+        <a:srgbClr val="96607D"/>
+      </a:folHlink>
+    </a:clrScheme>
+    <a:fontScheme name="Office">
+      <a:majorFont>
+        <a:latin typeface="等线 Light" panose="02110004020202020204"/>
+        <a:ea typeface=""/>
+        <a:cs typeface=""/>
+        <a:font script="Jpan" typeface="游ゴシック Light"/>
+        <a:font script="Hang" typeface="맑은 고딕"/>
+        <a:font script="Hans" typeface="等线 Light"/>
+        <a:font script="Hant" typeface="新細明體"/>
+        <a:font script="Arab" typeface="Times New Roman"/>
+        <a:font script="Hebr" typeface="Times New Roman"/>
+        <a:font script="Thai" typeface="Angsana New"/>
+        <a:font script="Ethi" typeface="Nyala"/>
+        <a:font script="Beng" typeface="Vrinda"/>
+        <a:font script="Gujr" typeface="Shruti"/>
+        <a:font script="Khmr" typeface="MoolBoran"/>
+        <a:font script="Knda" typeface="Tunga"/>
+        <a:font script="Guru" typeface="Raavi"/>
+        <a:font script="Cans" typeface="Euphemia"/>
+        <a:font script="Cher" typeface="Plantagenet Cherokee"/>
+        <a:font script="Yiii" typeface="Microsoft Yi Baiti"/>
+        <a:font script="Tibt" typeface="Microsoft Himalaya"/>
+        <a:font script="Thaa" typeface="MV Boli"/>
+        <a:font script="Deva" typeface="Mangal"/>
+        <a:font script="Telu" typeface="Gautami"/>
+        <a:font script="Taml" typeface="Latha"/>
+        <a:font script="Syrc" typeface="Estrangelo Edessa"/>
+        <a:font script="Orya" typeface="Kalinga"/>
+        <a:font script="Mlym" typeface="Kartika"/>
+        <a:font script="Laoo" typeface="DokChampa"/>
+        <a:font script="Sinh" typeface="Iskoola Pota"/>
+        <a:font script="Mong" typeface="Mongolian Baiti"/>
+        <a:font script="Viet" typeface="Times New Roman"/>
+        <a:font script="Uigh" typeface="Microsoft Uighur"/>
+        <a:font script="Geor" typeface="Sylfaen"/>
+        <a:font script="Armn" typeface="Arial"/>
+        <a:font script="Bugi" typeface="Leelawadee UI"/>
+        <a:font script="Bopo" typeface="Microsoft JhengHei"/>
+        <a:font script="Java" typeface="Javanese Text"/>
+        <a:font script="Lisu" typeface="Segoe UI"/>
+        <a:font script="Mymr" typeface="Myanmar Text"/>
+        <a:font script="Nkoo" typeface="Ebrima"/>
+        <a:font script="Olck" typeface="Nirmala UI"/>
+        <a:font script="Osma" typeface="Ebrima"/>
+        <a:font script="Phag" typeface="Phagspa"/>
+        <a:font script="Syrn" typeface="Estrangelo Edessa"/>
+        <a:font script="Syrj" typeface="Estrangelo Edessa"/>
+        <a:font script="Syre" typeface="Estrangelo Edessa"/>
+        <a:font script="Sora" typeface="Nirmala UI"/>
+        <a:font script="Tale" typeface="Microsoft Tai Le"/>
+        <a:font script="Talu" typeface="Microsoft New Tai Lue"/>
+        <a:font script="Tfng" typeface="Ebrima"/>
+      </a:majorFont>
+      <a:minorFont>
+        <a:latin typeface="等线" panose="02110004020202020204"/>
+        <a:ea typeface=""/>
+        <a:cs typeface=""/>
+        <a:font script="Jpan" typeface="游ゴシック"/>
+        <a:font script="Hang" typeface="맑은 고딕"/>
+        <a:font script="Hans" typeface="等线"/>
+        <a:font script="Hant" typeface="新細明體"/>
+        <a:font script="Arab" typeface="Arial"/>
+        <a:font script="Hebr" typeface="Arial"/>
+        <a:font script="Thai" typeface="Cordia New"/>
+        <a:font script="Ethi" typeface="Nyala"/>
+        <a:font script="Beng" typeface="Vrinda"/>
+        <a:font script="Gujr" typeface="Shruti"/>
+        <a:font script="Khmr" typeface="DaunPenh"/>
+        <a:font script="Knda" typeface="Tunga"/>
+        <a:font script="Guru" typeface="Raavi"/>
+        <a:font script="Cans" typeface="Euphemia"/>
+        <a:font script="Cher" typeface="Plantagenet Cherokee"/>
+        <a:font script="Yiii" typeface="Microsoft Yi Baiti"/>
+        <a:font script="Tibt" typeface="Microsoft Himalaya"/>
+        <a:font script="Thaa" typeface="MV Boli"/>
+        <a:font script="Deva" typeface="Mangal"/>
+        <a:font script="Telu" typeface="Gautami"/>
+        <a:font script="Taml" typeface="Latha"/>
+        <a:font script="Syrc" typeface="Estrangelo Edessa"/>
+        <a:font script="Orya" typeface="Kalinga"/>
+        <a:font script="Mlym" typeface="Kartika"/>
+        <a:font script="Laoo" typeface="DokChampa"/>
+        <a:font script="Sinh" typeface="Iskoola Pota"/>
+        <a:font script="Mong" typeface="Mongolian Baiti"/>
+        <a:font script="Viet" typeface="Arial"/>
+        <a:font script="Uigh" typeface="Microsoft Uighur"/>
+        <a:font script="Geor" typeface="Sylfaen"/>
+        <a:font script="Armn" typeface="Arial"/>
+        <a:font script="Bugi" typeface="Leelawadee UI"/>
+        <a:font script="Bopo" typeface="Microsoft JhengHei"/>
+        <a:font script="Java" typeface="Javanese Text"/>
+        <a:font script="Lisu" typeface="Segoe UI"/>
+        <a:font script="Mymr" typeface="Myanmar Text"/>
+        <a:font script="Nkoo" typeface="Ebrima"/>
+        <a:font script="Olck" typeface="Nirmala UI"/>
+        <a:font script="Osma" typeface="Ebrima"/>
+        <a:font script="Phag" typeface="Phagspa"/>
+        <a:font script="Syrn" typeface="Estrangelo Edessa"/>
+        <a:font script="Syrj" typeface="Estrangelo Edessa"/>
+        <a:font script="Syre" typeface="Estrangelo Edessa"/>
+        <a:font script="Sora" typeface="Nirmala UI"/>
+        <a:font script="Tale" typeface="Microsoft Tai Le"/>
+        <a:font script="Talu" typeface="Microsoft New Tai Lue"/>
+        <a:font script="Tfng" typeface="Ebrima"/>
+      </a:minorFont>
+    </a:fontScheme>
+    <a:fmtScheme name="Office">
+      <a:fillStyleLst>
+        <a:solidFill>
+          <a:schemeClr val="phClr"/>
+        </a:solidFill>
+        <a:gradFill rotWithShape="1">
+          <a:gsLst>
+            <a:gs pos="0">
+              <a:schemeClr val="phClr">
+                <a:lumMod val="110000"/>
+                <a:satMod val="105000"/>
+                <a:tint val="67000"/>
+              </a:schemeClr>
+            </a:gs>
+            <a:gs pos="50000">
+              <a:schemeClr val="phClr">
+                <a:lumMod val="105000"/>
+                <a:satMod val="103000"/>
+                <a:tint val="73000"/>
+              </a:schemeClr>
+            </a:gs>
+            <a:gs pos="100000">
+              <a:schemeClr val="phClr">
+                <a:lumMod val="105000"/>
+                <a:satMod val="109000"/>
+                <a:tint val="81000"/>
+              </a:schemeClr>
+            </a:gs>
+          </a:gsLst>
+          <a:lin ang="5400000" scaled="0"/>
+        </a:gradFill>
+        <a:gradFill rotWithShape="1">
+          <a:gsLst>
+            <a:gs pos="0">
+              <a:schemeClr val="phClr">
+                <a:satMod val="103000"/>
+                <a:lumMod val="102000"/>
+                <a:tint val="94000"/>
+              </a:schemeClr>
+            </a:gs>
+            <a:gs pos="50000">
+              <a:schemeClr val="phClr">
+                <a:satMod val="110000"/>
+                <a:lumMod val="100000"/>
+                <a:shade val="100000"/>
+              </a:schemeClr>
+            </a:gs>
+            <a:gs pos="100000">
+              <a:schemeClr val="phClr">
+                <a:lumMod val="99000"/>
+                <a:satMod val="120000"/>
+                <a:shade val="78000"/>
+              </a:schemeClr>
+            </a:gs>
+          </a:gsLst>
+          <a:lin ang="5400000" scaled="0"/>
+        </a:gradFill>
+      </a:fillStyleLst>
+      <a:lnStyleLst>
+        <a:ln w="12700" cap="flat" cmpd="sng" algn="ctr">
+          <a:solidFill>
+            <a:schemeClr val="phClr"/>
+          </a:solidFill>
+          <a:prstDash val="solid"/>
+          <a:miter lim="800000"/>
+        </a:ln>
+        <a:ln w="19050" cap="flat" cmpd="sng" algn="ctr">
+          <a:solidFill>
+            <a:schemeClr val="phClr"/>
+          </a:solidFill>
+          <a:prstDash val="solid"/>
+          <a:miter lim="800000"/>
+        </a:ln>
+        <a:ln w="25400" cap="flat" cmpd="sng" algn="ctr">
+          <a:solidFill>
+            <a:schemeClr val="phClr"/>
+          </a:solidFill>
+          <a:prstDash val="solid"/>
+          <a:miter lim="800000"/>
+        </a:ln>
+      </a:lnStyleLst>
+      <a:effectStyleLst>
+        <a:effectStyle>
+          <a:effectLst/>
+        </a:effectStyle>
+        <a:effectStyle>
+          <a:effectLst/>
+        </a:effectStyle>
+        <a:effectStyle>
+          <a:effectLst>
+            <a:outerShdw blurRad="57150" dist="19050" dir="5400000" algn="ctr" rotWithShape="0">
+              <a:srgbClr val="000000">
+                <a:alpha val="63000"/>
+              </a:srgbClr>
+            </a:outerShdw>
+          </a:effectLst>
+        </a:effectStyle>
+      </a:effectStyleLst>
+      <a:bgFillStyleLst>
+        <a:solidFill>
+          <a:schemeClr val="phClr"/>
+        </a:solidFill>
+        <a:solidFill>
+          <a:schemeClr val="phClr">
+            <a:tint val="95000"/>
+            <a:satMod val="170000"/>
+          </a:schemeClr>
+        </a:solidFill>
+        <a:gradFill rotWithShape="1">
+          <a:gsLst>
+            <a:gs pos="0">
+              <a:schemeClr val="phClr">
+                <a:tint val="93000"/>
+                <a:satMod val="150000"/>
+                <a:shade val="98000"/>
+                <a:lumMod val="102000"/>
+              </a:schemeClr>
+            </a:gs>
+            <a:gs pos="50000">
+              <a:schemeClr val="phClr">
+                <a:tint val="98000"/>
+                <a:satMod val="130000"/>
+                <a:shade val="90000"/>
+                <a:lumMod val="103000"/>
+              </a:schemeClr>
+            </a:gs>
+            <a:gs pos="100000">
+              <a:schemeClr val="phClr">
+                <a:shade val="63000"/>
+                <a:satMod val="120000"/>
+              </a:schemeClr>
+            </a:gs>
+          </a:gsLst>
+          <a:lin ang="5400000" scaled="0"/>
+        </a:gradFill>
+      </a:bgFillStyleLst>
+    </a:fmtScheme>
+  </a:themeElements>
+  <a:objectDefaults>
+    <a:lnDef>
+      <a:spPr/>
+      <a:bodyPr/>
+      <a:lstStyle/>
+      <a:style>
+        <a:lnRef idx="2">
+          <a:schemeClr val="accent1"/>
+        </a:lnRef>
+        <a:fillRef idx="0">
+          <a:schemeClr val="accent1"/>
+        </a:fillRef>
+        <a:effectRef idx="1">
+          <a:schemeClr val="accent1"/>
+        </a:effectRef>
+        <a:fontRef idx="minor">
+          <a:schemeClr val="tx1"/>
+        </a:fontRef>
+      </a:style>
+    </a:lnDef>
+  </a:objectDefaults>
+  <a:extraClrSchemeLst/>
+  <a:extLst>
+    <a:ext uri="{05A4C25C-085E-4340-85A3-A5531E510DB2}">
+      <thm15:themeFamily xmlns:thm15="http://schemas.microsoft.com/office/thememl/2012/main" name="Office Theme" id="{2E142A2C-CD16-42D6-873A-C26D2A0506FA}" vid="{1BDDFF52-6CD6-40A5-AB3C-68EB2F1E4D0A}"/>
+    </a:ext>
+  </a:extLst>
+</a:theme>
 </file>